--- a/docs/MAYA-Model-and-Feature-Engineering.pptx
+++ b/docs/MAYA-Model-and-Feature-Engineering.pptx
@@ -32,6 +32,11 @@
     <p:sldId id="280" r:id="rId31"/>
     <p:sldId id="281" r:id="rId32"/>
     <p:sldId id="282" r:id="rId33"/>
+    <p:sldId id="283" r:id="rId34"/>
+    <p:sldId id="284" r:id="rId35"/>
+    <p:sldId id="285" r:id="rId36"/>
+    <p:sldId id="286" r:id="rId37"/>
+    <p:sldId id="287" r:id="rId38"/>
   </p:sldIdLst>
   <p:sldSz cx="12191695" cy="6858000" type="screen4x3"/>
   <p:notesSz cx="6858000" cy="9144000"/>
@@ -3745,6 +3750,34 @@
                 <a:latin typeface="Calibri"/>
               </a:rPr>
               <a:t>What MAYA refuses, and why</a:t>
+            </a:r>
+          </a:p>
+          <a:p>
+            <a:pPr>
+              <a:spcBef>
+                <a:spcPts val="0"/>
+              </a:spcBef>
+              <a:spcAft>
+                <a:spcPts val="300"/>
+              </a:spcAft>
+            </a:pPr>
+            <a:r>
+              <a:rPr sz="1050" b="1" i="0">
+                <a:solidFill>
+                  <a:srgbClr val="A51C30"/>
+                </a:solidFill>
+                <a:latin typeface="Calibri"/>
+              </a:rPr>
+              <a:t>6   </a:t>
+            </a:r>
+            <a:r>
+              <a:rPr sz="1050" b="0" i="0">
+                <a:solidFill>
+                  <a:srgbClr val="4A4F57"/>
+                </a:solidFill>
+                <a:latin typeface="Calibri"/>
+              </a:rPr>
+              <a:t>A worked example, with the numbers</a:t>
             </a:r>
           </a:p>
         </p:txBody>
@@ -8257,7 +8290,7 @@
         <p:spPr>
           <a:xfrm>
             <a:off x="4521098" y="1353312"/>
-            <a:ext cx="3149498" cy="1659635"/>
+            <a:ext cx="3149498" cy="1879091"/>
           </a:xfrm>
           <a:prstGeom prst="rect">
             <a:avLst/>
@@ -8430,8 +8463,8 @@
         </p:nvSpPr>
         <p:spPr>
           <a:xfrm>
-            <a:off x="4649114" y="1956816"/>
-            <a:ext cx="2893466" cy="384048"/>
+            <a:off x="4649114" y="1975104"/>
+            <a:ext cx="2893466" cy="347472"/>
           </a:xfrm>
           <a:prstGeom prst="rect">
             <a:avLst/>
@@ -8487,7 +8520,7 @@
                 </a:solidFill>
                 <a:latin typeface="Calibri"/>
               </a:rPr>
-              <a:t>the curve now goes further out</a:t>
+              <a:t>the curve goes further out</a:t>
             </a:r>
           </a:p>
         </p:txBody>
@@ -8500,8 +8533,8 @@
         </p:nvSpPr>
         <p:spPr>
           <a:xfrm>
-            <a:off x="4649114" y="2359152"/>
-            <a:ext cx="2893466" cy="384048"/>
+            <a:off x="4649114" y="2340864"/>
+            <a:ext cx="2893466" cy="347472"/>
           </a:xfrm>
           <a:prstGeom prst="rect">
             <a:avLst/>
@@ -8570,8 +8603,8 @@
         </p:nvSpPr>
         <p:spPr>
           <a:xfrm>
-            <a:off x="4649114" y="2761488"/>
-            <a:ext cx="2893466" cy="384048"/>
+            <a:off x="4649114" y="2706624"/>
+            <a:ext cx="2893466" cy="347472"/>
           </a:xfrm>
           <a:prstGeom prst="rect">
             <a:avLst/>
@@ -22715,7 +22748,7 @@
         <p:spPr>
           <a:xfrm>
             <a:off x="0" y="0"/>
-            <a:ext cx="182880" cy="6858000"/>
+            <a:ext cx="164592" cy="6858000"/>
           </a:xfrm>
           <a:prstGeom prst="rect">
             <a:avLst/>
@@ -22752,14 +22785,98 @@
       </p:sp>
       <p:sp>
         <p:nvSpPr>
-          <p:cNvPr id="4" name="Rectangle 3"/>
+          <p:cNvPr id="4" name="TextBox 3"/>
+          <p:cNvSpPr txBox="1"/>
+          <p:nvPr/>
+        </p:nvSpPr>
+        <p:spPr>
+          <a:xfrm>
+            <a:off x="1005840" y="1874519"/>
+            <a:ext cx="10637215" cy="457200"/>
+          </a:xfrm>
+          <a:prstGeom prst="rect">
+            <a:avLst/>
+          </a:prstGeom>
+          <a:noFill/>
+        </p:spPr>
+        <p:txBody>
+          <a:bodyPr wrap="square" lIns="0" rIns="0" tIns="0" bIns="0" anchor="t">
+            <a:spAutoFit/>
+          </a:bodyPr>
+          <a:lstStyle/>
+          <a:p>
+            <a:pPr algn="l">
+              <a:spcBef>
+                <a:spcPts val="0"/>
+              </a:spcBef>
+              <a:spcAft>
+                <a:spcPts val="0"/>
+              </a:spcAft>
+            </a:pPr>
+            <a:r>
+              <a:rPr sz="1200" b="1" i="0">
+                <a:solidFill>
+                  <a:srgbClr val="E8B8C0"/>
+                </a:solidFill>
+                <a:latin typeface="Calibri"/>
+              </a:rPr>
+              <a:t>CHAPTER 6</a:t>
+            </a:r>
+          </a:p>
+        </p:txBody>
+      </p:sp>
+      <p:sp>
+        <p:nvSpPr>
+          <p:cNvPr id="5" name="TextBox 4"/>
+          <p:cNvSpPr txBox="1"/>
+          <p:nvPr/>
+        </p:nvSpPr>
+        <p:spPr>
+          <a:xfrm>
+            <a:off x="1005840" y="2331720"/>
+            <a:ext cx="6169584" cy="1188720"/>
+          </a:xfrm>
+          <a:prstGeom prst="rect">
+            <a:avLst/>
+          </a:prstGeom>
+          <a:noFill/>
+        </p:spPr>
+        <p:txBody>
+          <a:bodyPr wrap="square" lIns="0" rIns="0" tIns="0" bIns="0" anchor="t">
+            <a:spAutoFit/>
+          </a:bodyPr>
+          <a:lstStyle/>
+          <a:p>
+            <a:pPr algn="l">
+              <a:spcBef>
+                <a:spcPts val="0"/>
+              </a:spcBef>
+              <a:spcAft>
+                <a:spcPts val="0"/>
+              </a:spcAft>
+            </a:pPr>
+            <a:r>
+              <a:rPr sz="4600" b="0" i="0">
+                <a:solidFill>
+                  <a:srgbClr val="FFFFFF"/>
+                </a:solidFill>
+                <a:latin typeface="Georgia"/>
+              </a:rPr>
+              <a:t>A Worked Example</a:t>
+            </a:r>
+          </a:p>
+        </p:txBody>
+      </p:sp>
+      <p:sp>
+        <p:nvSpPr>
+          <p:cNvPr id="6" name="Rectangle 5"/>
           <p:cNvSpPr/>
           <p:nvPr/>
         </p:nvSpPr>
         <p:spPr>
           <a:xfrm>
-            <a:off x="1143000" y="1005840"/>
-            <a:ext cx="1554480" cy="32004"/>
+            <a:off x="1005840" y="3703320"/>
+            <a:ext cx="1371600" cy="32004"/>
           </a:xfrm>
           <a:prstGeom prst="rect">
             <a:avLst/>
@@ -22796,14 +22913,14 @@
       </p:sp>
       <p:sp>
         <p:nvSpPr>
-          <p:cNvPr id="5" name="TextBox 4"/>
+          <p:cNvPr id="7" name="TextBox 6"/>
           <p:cNvSpPr txBox="1"/>
           <p:nvPr/>
         </p:nvSpPr>
         <p:spPr>
           <a:xfrm>
-            <a:off x="1143000" y="1280160"/>
-            <a:ext cx="8509772" cy="2377440"/>
+            <a:off x="1005840" y="3977639"/>
+            <a:ext cx="6595073" cy="731520"/>
           </a:xfrm>
           <a:prstGeom prst="rect">
             <a:avLst/>
@@ -22817,27 +22934,8 @@
           <a:lstStyle/>
           <a:p>
             <a:pPr algn="l">
-              <a:spcBef>
-                <a:spcPts val="0"/>
-              </a:spcBef>
-              <a:spcAft>
-                <a:spcPts val="1400"/>
-              </a:spcAft>
-            </a:pPr>
-            <a:r>
-              <a:rPr sz="3400" b="0" i="0">
-                <a:solidFill>
-                  <a:srgbClr val="FFFFFF"/>
-                </a:solidFill>
-                <a:latin typeface="Georgia"/>
-              </a:rPr>
-              <a:t>One idea, applied everywhere</a:t>
-            </a:r>
-          </a:p>
-          <a:p>
-            <a:pPr>
               <a:lnSpc>
-                <a:spcPct val="132000"/>
+                <a:spcPct val="130000"/>
               </a:lnSpc>
               <a:spcBef>
                 <a:spcPts val="0"/>
@@ -22849,25 +22947,25 @@
             <a:r>
               <a:rPr sz="1500" b="0" i="1">
                 <a:solidFill>
-                  <a:srgbClr val="F4DFE3"/>
+                  <a:srgbClr val="F2D8DC"/>
                 </a:solidFill>
                 <a:latin typeface="Calibri"/>
               </a:rPr>
-              <a:t>A pin is to a version, never to a name. A clock records when something became knowable, not when it was written down. A refusal says what to do instead. And what the platform will not do is written down beside what it will.</a:t>
-            </a:r>
-          </a:p>
-        </p:txBody>
-      </p:sp>
-      <p:sp>
-        <p:nvSpPr>
-          <p:cNvPr id="6" name="TextBox 5"/>
+              <a:t>Two features, one featureset, three models — with the numbers.</a:t>
+            </a:r>
+          </a:p>
+        </p:txBody>
+      </p:sp>
+      <p:sp>
+        <p:nvSpPr>
+          <p:cNvPr id="8" name="TextBox 7"/>
           <p:cNvSpPr txBox="1"/>
           <p:nvPr/>
         </p:nvSpPr>
         <p:spPr>
           <a:xfrm>
-            <a:off x="1143000" y="3931920"/>
-            <a:ext cx="7871539" cy="1371600"/>
+            <a:off x="7797802" y="1874519"/>
+            <a:ext cx="3616653" cy="3108960"/>
           </a:xfrm>
           <a:prstGeom prst="rect">
             <a:avLst/>
@@ -22885,58 +22983,1307 @@
                 <a:spcPts val="0"/>
               </a:spcBef>
               <a:spcAft>
-                <a:spcPts val="400"/>
-              </a:spcAft>
-            </a:pPr>
-            <a:r>
-              <a:rPr sz="1800" b="1" i="0">
-                <a:solidFill>
-                  <a:srgbClr val="FFFFFF"/>
+                <a:spcPts val="1000"/>
+              </a:spcAft>
+            </a:pPr>
+            <a:r>
+              <a:rPr sz="950" b="1" i="0">
+                <a:solidFill>
+                  <a:srgbClr val="E0A8B2"/>
                 </a:solidFill>
                 <a:latin typeface="Calibri"/>
               </a:rPr>
-              <a:t>Ashutosh Sinha</a:t>
-            </a:r>
-          </a:p>
-          <a:p>
-            <a:pPr>
-              <a:spcBef>
-                <a:spcPts val="0"/>
-              </a:spcBef>
-              <a:spcAft>
-                <a:spcPts val="1400"/>
-              </a:spcAft>
-            </a:pPr>
-            <a:r>
-              <a:rPr sz="1200" b="0" i="0">
-                <a:solidFill>
-                  <a:srgbClr val="F2D8DC"/>
-                </a:solidFill>
-                <a:latin typeface="Calibri"/>
-              </a:rPr>
-              <a:t>Independent Researcher   ·   ajsinha@gmail.com</a:t>
+              <a:t>IN THIS CHAPTER</a:t>
             </a:r>
           </a:p>
           <a:p>
             <a:pPr>
               <a:lnSpc>
-                <a:spcPct val="130000"/>
+                <a:spcPct val="115000"/>
               </a:lnSpc>
               <a:spcBef>
                 <a:spcPts val="0"/>
               </a:spcBef>
               <a:spcAft>
-                <a:spcPts val="600"/>
-              </a:spcAft>
-            </a:pPr>
-            <a:r>
-              <a:rPr sz="1050" b="0" i="0">
-                <a:solidFill>
-                  <a:srgbClr val="E8C4CA"/>
+                <a:spcPts val="700"/>
+              </a:spcAft>
+            </a:pPr>
+            <a:r>
+              <a:rPr sz="1150" b="0" i="0">
+                <a:solidFill>
+                  <a:srgbClr val="F6E6E9"/>
                 </a:solidFill>
                 <a:latin typeface="Calibri"/>
               </a:rPr>
-              <a:t>Featuresets and parameters: docs/15-featuresets-and-parameters.md   ·   Composition and retrieval: docs/16-features-composed-and-shaped.md   ·   Feature platform: docs/07-feature-platform.md</a:t>
+              <a:t>The data, and its two clocks</a:t>
+            </a:r>
+          </a:p>
+          <a:p>
+            <a:pPr>
+              <a:lnSpc>
+                <a:spcPct val="115000"/>
+              </a:lnSpc>
+              <a:spcBef>
+                <a:spcPts val="0"/>
+              </a:spcBef>
+              <a:spcAft>
+                <a:spcPts val="700"/>
+              </a:spcAft>
+            </a:pPr>
+            <a:r>
+              <a:rPr sz="1150" b="0" i="0">
+                <a:solidFill>
+                  <a:srgbClr val="F6E6E9"/>
+                </a:solidFill>
+                <a:latin typeface="Calibri"/>
+              </a:rPr>
+              <a:t>The featureset, aligned</a:t>
+            </a:r>
+          </a:p>
+          <a:p>
+            <a:pPr>
+              <a:lnSpc>
+                <a:spcPct val="115000"/>
+              </a:lnSpc>
+              <a:spcBef>
+                <a:spcPts val="0"/>
+              </a:spcBef>
+              <a:spcAft>
+                <a:spcPts val="700"/>
+              </a:spcAft>
+            </a:pPr>
+            <a:r>
+              <a:rPr sz="1150" b="0" i="0">
+                <a:solidFill>
+                  <a:srgbClr val="F6E6E9"/>
+                </a:solidFill>
+                <a:latin typeface="Calibri"/>
+              </a:rPr>
+              <a:t>Two models over one X</a:t>
+            </a:r>
+          </a:p>
+          <a:p>
+            <a:pPr>
+              <a:lnSpc>
+                <a:spcPct val="115000"/>
+              </a:lnSpc>
+              <a:spcBef>
+                <a:spcPts val="0"/>
+              </a:spcBef>
+              <a:spcAft>
+                <a:spcPts val="700"/>
+              </a:spcAft>
+            </a:pPr>
+            <a:r>
+              <a:rPr sz="1150" b="0" i="0">
+                <a:solidFill>
+                  <a:srgbClr val="F6E6E9"/>
+                </a:solidFill>
+                <a:latin typeface="Calibri"/>
+              </a:rPr>
+              <a:t>Extending it, and what that forces</a:t>
+            </a:r>
+          </a:p>
+        </p:txBody>
+      </p:sp>
+    </p:spTree>
+  </p:cSld>
+  <p:clrMapOvr>
+    <a:masterClrMapping/>
+  </p:clrMapOvr>
+</p:sld>
+</file>
+
+<file path=ppt/slides/slide28.xml><?xml version="1.0" encoding="utf-8"?>
+<p:sld xmlns:a="http://schemas.openxmlformats.org/drawingml/2006/main" xmlns:p="http://schemas.openxmlformats.org/presentationml/2006/main" xmlns:r="http://schemas.openxmlformats.org/officeDocument/2006/relationships">
+  <p:cSld>
+    <p:spTree>
+      <p:nvGrpSpPr>
+        <p:cNvPr id="1" name=""/>
+        <p:cNvGrpSpPr/>
+        <p:nvPr/>
+      </p:nvGrpSpPr>
+      <p:grpSpPr/>
+      <p:sp>
+        <p:nvSpPr>
+          <p:cNvPr id="2" name="Rectangle 1"/>
+          <p:cNvSpPr/>
+          <p:nvPr/>
+        </p:nvSpPr>
+        <p:spPr>
+          <a:xfrm>
+            <a:off x="0" y="0"/>
+            <a:ext cx="12191695" cy="6858000"/>
+          </a:xfrm>
+          <a:prstGeom prst="rect">
+            <a:avLst/>
+          </a:prstGeom>
+          <a:solidFill>
+            <a:srgbClr val="FFFFFF"/>
+          </a:solidFill>
+          <a:ln>
+            <a:noFill/>
+          </a:ln>
+          <a:effectLst/>
+        </p:spPr>
+        <p:style>
+          <a:lnRef idx="1">
+            <a:schemeClr val="accent1"/>
+          </a:lnRef>
+          <a:fillRef idx="3">
+            <a:schemeClr val="accent1"/>
+          </a:fillRef>
+          <a:effectRef idx="2">
+            <a:schemeClr val="accent1"/>
+          </a:effectRef>
+          <a:fontRef idx="minor">
+            <a:schemeClr val="lt1"/>
+          </a:fontRef>
+        </p:style>
+        <p:txBody>
+          <a:bodyPr rtlCol="0" anchor="ctr" wrap="square" lIns="109728" rIns="109728" tIns="64008" bIns="64008"/>
+          <a:lstStyle/>
+          <a:p>
+            <a:pPr algn="ctr"/>
+          </a:p>
+        </p:txBody>
+      </p:sp>
+      <p:sp>
+        <p:nvSpPr>
+          <p:cNvPr id="3" name="Rectangle 2"/>
+          <p:cNvSpPr/>
+          <p:nvPr/>
+        </p:nvSpPr>
+        <p:spPr>
+          <a:xfrm>
+            <a:off x="0" y="566928"/>
+            <a:ext cx="274320" cy="50292"/>
+          </a:xfrm>
+          <a:prstGeom prst="rect">
+            <a:avLst/>
+          </a:prstGeom>
+          <a:solidFill>
+            <a:srgbClr val="A51C30"/>
+          </a:solidFill>
+          <a:ln>
+            <a:noFill/>
+          </a:ln>
+          <a:effectLst/>
+        </p:spPr>
+        <p:style>
+          <a:lnRef idx="1">
+            <a:schemeClr val="accent1"/>
+          </a:lnRef>
+          <a:fillRef idx="3">
+            <a:schemeClr val="accent1"/>
+          </a:fillRef>
+          <a:effectRef idx="2">
+            <a:schemeClr val="accent1"/>
+          </a:effectRef>
+          <a:fontRef idx="minor">
+            <a:schemeClr val="lt1"/>
+          </a:fontRef>
+        </p:style>
+        <p:txBody>
+          <a:bodyPr rtlCol="0" anchor="ctr" wrap="square" lIns="109728" rIns="109728" tIns="64008" bIns="64008"/>
+          <a:lstStyle/>
+          <a:p>
+            <a:pPr algn="ctr"/>
+          </a:p>
+        </p:txBody>
+      </p:sp>
+      <p:sp>
+        <p:nvSpPr>
+          <p:cNvPr id="4" name="TextBox 3"/>
+          <p:cNvSpPr txBox="1"/>
+          <p:nvPr/>
+        </p:nvSpPr>
+        <p:spPr>
+          <a:xfrm>
+            <a:off x="777240" y="475488"/>
+            <a:ext cx="10637215" cy="219456"/>
+          </a:xfrm>
+          <a:prstGeom prst="rect">
+            <a:avLst/>
+          </a:prstGeom>
+          <a:noFill/>
+        </p:spPr>
+        <p:txBody>
+          <a:bodyPr wrap="square" lIns="0" rIns="0" tIns="0" bIns="0" anchor="t">
+            <a:spAutoFit/>
+          </a:bodyPr>
+          <a:lstStyle/>
+          <a:p>
+            <a:pPr algn="l">
+              <a:spcBef>
+                <a:spcPts val="0"/>
+              </a:spcBef>
+              <a:spcAft>
+                <a:spcPts val="0"/>
+              </a:spcAft>
+            </a:pPr>
+            <a:r>
+              <a:rPr sz="1050" b="1" i="0">
+                <a:solidFill>
+                  <a:srgbClr val="A51C30"/>
+                </a:solidFill>
+                <a:latin typeface="Calibri"/>
+              </a:rPr>
+              <a:t>A WORKED EXAMPLE</a:t>
+            </a:r>
+          </a:p>
+        </p:txBody>
+      </p:sp>
+      <p:sp>
+        <p:nvSpPr>
+          <p:cNvPr id="5" name="TextBox 4"/>
+          <p:cNvSpPr txBox="1"/>
+          <p:nvPr/>
+        </p:nvSpPr>
+        <p:spPr>
+          <a:xfrm>
+            <a:off x="777240" y="749808"/>
+            <a:ext cx="10637215" cy="484631"/>
+          </a:xfrm>
+          <a:prstGeom prst="rect">
+            <a:avLst/>
+          </a:prstGeom>
+          <a:noFill/>
+        </p:spPr>
+        <p:txBody>
+          <a:bodyPr wrap="square" lIns="0" rIns="0" tIns="0" bIns="0" anchor="t">
+            <a:spAutoFit/>
+          </a:bodyPr>
+          <a:lstStyle/>
+          <a:p>
+            <a:pPr algn="l">
+              <a:lnSpc>
+                <a:spcPct val="120000"/>
+              </a:lnSpc>
+              <a:spcBef>
+                <a:spcPts val="0"/>
+              </a:spcBef>
+              <a:spcAft>
+                <a:spcPts val="0"/>
+              </a:spcAft>
+            </a:pPr>
+            <a:r>
+              <a:rPr sz="2700" b="0" i="0">
+                <a:solidFill>
+                  <a:srgbClr val="1C1C1E"/>
+                </a:solidFill>
+                <a:latin typeface="Georgia"/>
+              </a:rPr>
+              <a:t>Two features that arrive on different clocks</a:t>
+            </a:r>
+          </a:p>
+        </p:txBody>
+      </p:sp>
+      <p:sp>
+        <p:nvSpPr>
+          <p:cNvPr id="6" name="Rectangle 5"/>
+          <p:cNvSpPr/>
+          <p:nvPr/>
+        </p:nvSpPr>
+        <p:spPr>
+          <a:xfrm>
+            <a:off x="777240" y="1207008"/>
+            <a:ext cx="10637215" cy="10972"/>
+          </a:xfrm>
+          <a:prstGeom prst="rect">
+            <a:avLst/>
+          </a:prstGeom>
+          <a:solidFill>
+            <a:srgbClr val="D8D4CF"/>
+          </a:solidFill>
+          <a:ln>
+            <a:noFill/>
+          </a:ln>
+          <a:effectLst/>
+        </p:spPr>
+        <p:style>
+          <a:lnRef idx="1">
+            <a:schemeClr val="accent1"/>
+          </a:lnRef>
+          <a:fillRef idx="3">
+            <a:schemeClr val="accent1"/>
+          </a:fillRef>
+          <a:effectRef idx="2">
+            <a:schemeClr val="accent1"/>
+          </a:effectRef>
+          <a:fontRef idx="minor">
+            <a:schemeClr val="lt1"/>
+          </a:fontRef>
+        </p:style>
+        <p:txBody>
+          <a:bodyPr rtlCol="0" anchor="ctr" wrap="square" lIns="109728" rIns="109728" tIns="64008" bIns="64008"/>
+          <a:lstStyle/>
+          <a:p>
+            <a:pPr algn="ctr"/>
+          </a:p>
+        </p:txBody>
+      </p:sp>
+      <p:sp>
+        <p:nvSpPr>
+          <p:cNvPr id="7" name="Rectangle 6"/>
+          <p:cNvSpPr/>
+          <p:nvPr/>
+        </p:nvSpPr>
+        <p:spPr>
+          <a:xfrm>
+            <a:off x="777240" y="6355080"/>
+            <a:ext cx="10637215" cy="7315"/>
+          </a:xfrm>
+          <a:prstGeom prst="rect">
+            <a:avLst/>
+          </a:prstGeom>
+          <a:solidFill>
+            <a:srgbClr val="D8D4CF"/>
+          </a:solidFill>
+          <a:ln>
+            <a:noFill/>
+          </a:ln>
+          <a:effectLst/>
+        </p:spPr>
+        <p:style>
+          <a:lnRef idx="1">
+            <a:schemeClr val="accent1"/>
+          </a:lnRef>
+          <a:fillRef idx="3">
+            <a:schemeClr val="accent1"/>
+          </a:fillRef>
+          <a:effectRef idx="2">
+            <a:schemeClr val="accent1"/>
+          </a:effectRef>
+          <a:fontRef idx="minor">
+            <a:schemeClr val="lt1"/>
+          </a:fontRef>
+        </p:style>
+        <p:txBody>
+          <a:bodyPr rtlCol="0" anchor="ctr" wrap="square" lIns="109728" rIns="109728" tIns="64008" bIns="64008"/>
+          <a:lstStyle/>
+          <a:p>
+            <a:pPr algn="ctr"/>
+          </a:p>
+        </p:txBody>
+      </p:sp>
+      <p:sp>
+        <p:nvSpPr>
+          <p:cNvPr id="8" name="TextBox 7"/>
+          <p:cNvSpPr txBox="1"/>
+          <p:nvPr/>
+        </p:nvSpPr>
+        <p:spPr>
+          <a:xfrm>
+            <a:off x="777240" y="6437376"/>
+            <a:ext cx="7446050" cy="219456"/>
+          </a:xfrm>
+          <a:prstGeom prst="rect">
+            <a:avLst/>
+          </a:prstGeom>
+          <a:noFill/>
+        </p:spPr>
+        <p:txBody>
+          <a:bodyPr wrap="square" lIns="0" rIns="0" tIns="0" bIns="0" anchor="t">
+            <a:spAutoFit/>
+          </a:bodyPr>
+          <a:lstStyle/>
+          <a:p>
+            <a:pPr algn="l">
+              <a:spcBef>
+                <a:spcPts val="0"/>
+              </a:spcBef>
+              <a:spcAft>
+                <a:spcPts val="0"/>
+              </a:spcAft>
+            </a:pPr>
+            <a:r>
+              <a:rPr sz="850" b="0" i="0">
+                <a:solidFill>
+                  <a:srgbClr val="7A7F87"/>
+                </a:solidFill>
+                <a:latin typeface="Calibri"/>
+              </a:rPr>
+              <a:t>6 · A Worked Example</a:t>
+            </a:r>
+          </a:p>
+        </p:txBody>
+      </p:sp>
+      <p:sp>
+        <p:nvSpPr>
+          <p:cNvPr id="9" name="TextBox 8"/>
+          <p:cNvSpPr txBox="1"/>
+          <p:nvPr/>
+        </p:nvSpPr>
+        <p:spPr>
+          <a:xfrm>
+            <a:off x="8223290" y="6437376"/>
+            <a:ext cx="3191164" cy="219456"/>
+          </a:xfrm>
+          <a:prstGeom prst="rect">
+            <a:avLst/>
+          </a:prstGeom>
+          <a:noFill/>
+        </p:spPr>
+        <p:txBody>
+          <a:bodyPr wrap="square" lIns="0" rIns="0" tIns="0" bIns="0" anchor="t">
+            <a:spAutoFit/>
+          </a:bodyPr>
+          <a:lstStyle/>
+          <a:p>
+            <a:pPr algn="r">
+              <a:spcBef>
+                <a:spcPts val="0"/>
+              </a:spcBef>
+              <a:spcAft>
+                <a:spcPts val="0"/>
+              </a:spcAft>
+            </a:pPr>
+            <a:r>
+              <a:rPr sz="850" b="1" i="0">
+                <a:solidFill>
+                  <a:srgbClr val="7A7F87"/>
+                </a:solidFill>
+                <a:latin typeface="Calibri"/>
+              </a:rPr>
+              <a:t>27</a:t>
+            </a:r>
+          </a:p>
+        </p:txBody>
+      </p:sp>
+      <p:graphicFrame>
+        <p:nvGraphicFramePr>
+          <p:cNvPr id="10" name="Table 9"/>
+          <p:cNvGraphicFramePr>
+            <a:graphicFrameLocks noGrp="1"/>
+          </p:cNvGraphicFramePr>
+          <p:nvPr/>
+        </p:nvGraphicFramePr>
+        <p:xfrm>
+          <a:off x="777240" y="1353312"/>
+          <a:ext cx="4680374" cy="1562048"/>
+        </p:xfrm>
+        <a:graphic>
+          <a:graphicData uri="http://schemas.openxmlformats.org/drawingml/2006/table">
+            <a:tbl>
+              <a:tblPr firstRow="1">
+                <a:tableStyleId>{5C22544A-7EE6-4342-B048-85BDC9FD1C3A}</a:tableStyleId>
+              </a:tblPr>
+              <a:tblGrid>
+                <a:gridCol w="1743669"/>
+                <a:gridCol w="1743669"/>
+                <a:gridCol w="1193036"/>
+              </a:tblGrid>
+              <a:tr h="329184">
+                <a:tc>
+                  <a:txBody>
+                    <a:bodyPr wrap="square"/>
+                    <a:lstStyle/>
+                    <a:p>
+                      <a:pPr algn="l"/>
+                      <a:r>
+                        <a:rPr sz="950" b="1">
+                          <a:solidFill>
+                            <a:srgbClr val="FFFFFF"/>
+                          </a:solidFill>
+                          <a:latin typeface="Calibri"/>
+                        </a:rPr>
+                        <a:t>event_ts</a:t>
+                      </a:r>
+                    </a:p>
+                  </a:txBody>
+                  <a:tcPr marL="82296" marR="64008" marT="32004" marB="32004" anchor="ctr">
+                    <a:solidFill>
+                      <a:srgbClr val="A51C30"/>
+                    </a:solidFill>
+                  </a:tcPr>
+                </a:tc>
+                <a:tc>
+                  <a:txBody>
+                    <a:bodyPr wrap="square"/>
+                    <a:lstStyle/>
+                    <a:p>
+                      <a:pPr algn="l"/>
+                      <a:r>
+                        <a:rPr sz="950" b="1">
+                          <a:solidFill>
+                            <a:srgbClr val="FFFFFF"/>
+                          </a:solidFill>
+                          <a:latin typeface="Calibri"/>
+                        </a:rPr>
+                        <a:t>ingest_ts</a:t>
+                      </a:r>
+                    </a:p>
+                  </a:txBody>
+                  <a:tcPr marL="82296" marR="64008" marT="32004" marB="32004" anchor="ctr">
+                    <a:solidFill>
+                      <a:srgbClr val="A51C30"/>
+                    </a:solidFill>
+                  </a:tcPr>
+                </a:tc>
+                <a:tc>
+                  <a:txBody>
+                    <a:bodyPr wrap="square"/>
+                    <a:lstStyle/>
+                    <a:p>
+                      <a:pPr algn="l"/>
+                      <a:r>
+                        <a:rPr sz="950" b="1">
+                          <a:solidFill>
+                            <a:srgbClr val="FFFFFF"/>
+                          </a:solidFill>
+                          <a:latin typeface="Calibri"/>
+                        </a:rPr>
+                        <a:t>px_close</a:t>
+                      </a:r>
+                    </a:p>
+                  </a:txBody>
+                  <a:tcPr marL="82296" marR="64008" marT="32004" marB="32004" anchor="ctr">
+                    <a:solidFill>
+                      <a:srgbClr val="A51C30"/>
+                    </a:solidFill>
+                  </a:tcPr>
+                </a:tc>
+              </a:tr>
+              <a:tr h="308216">
+                <a:tc>
+                  <a:txBody>
+                    <a:bodyPr wrap="square"/>
+                    <a:lstStyle/>
+                    <a:p>
+                      <a:pPr algn="l"/>
+                      <a:r>
+                        <a:rPr sz="950" b="1">
+                          <a:solidFill>
+                            <a:srgbClr val="1C1C1E"/>
+                          </a:solidFill>
+                          <a:latin typeface="Calibri"/>
+                        </a:rPr>
+                        <a:t>2026-08-27</a:t>
+                      </a:r>
+                    </a:p>
+                  </a:txBody>
+                  <a:tcPr marL="82296" marR="64008" marT="32004" marB="32004" anchor="ctr">
+                    <a:solidFill>
+                      <a:srgbClr val="FFFFFF"/>
+                    </a:solidFill>
+                  </a:tcPr>
+                </a:tc>
+                <a:tc>
+                  <a:txBody>
+                    <a:bodyPr wrap="square"/>
+                    <a:lstStyle/>
+                    <a:p>
+                      <a:pPr algn="l"/>
+                      <a:r>
+                        <a:rPr sz="950" b="0">
+                          <a:solidFill>
+                            <a:srgbClr val="1C1C1E"/>
+                          </a:solidFill>
+                          <a:latin typeface="Calibri"/>
+                        </a:rPr>
+                        <a:t>2026-08-27</a:t>
+                      </a:r>
+                    </a:p>
+                  </a:txBody>
+                  <a:tcPr marL="82296" marR="64008" marT="32004" marB="32004" anchor="ctr">
+                    <a:solidFill>
+                      <a:srgbClr val="FFFFFF"/>
+                    </a:solidFill>
+                  </a:tcPr>
+                </a:tc>
+                <a:tc>
+                  <a:txBody>
+                    <a:bodyPr wrap="square"/>
+                    <a:lstStyle/>
+                    <a:p>
+                      <a:pPr algn="l"/>
+                      <a:r>
+                        <a:rPr sz="950" b="0">
+                          <a:solidFill>
+                            <a:srgbClr val="1C1C1E"/>
+                          </a:solidFill>
+                          <a:latin typeface="Calibri"/>
+                        </a:rPr>
+                        <a:t>97.05</a:t>
+                      </a:r>
+                    </a:p>
+                  </a:txBody>
+                  <a:tcPr marL="82296" marR="64008" marT="32004" marB="32004" anchor="ctr">
+                    <a:solidFill>
+                      <a:srgbClr val="FFFFFF"/>
+                    </a:solidFill>
+                  </a:tcPr>
+                </a:tc>
+              </a:tr>
+              <a:tr h="308216">
+                <a:tc>
+                  <a:txBody>
+                    <a:bodyPr wrap="square"/>
+                    <a:lstStyle/>
+                    <a:p>
+                      <a:pPr algn="l"/>
+                      <a:r>
+                        <a:rPr sz="950" b="1">
+                          <a:solidFill>
+                            <a:srgbClr val="1C1C1E"/>
+                          </a:solidFill>
+                          <a:latin typeface="Calibri"/>
+                        </a:rPr>
+                        <a:t>2026-08-28</a:t>
+                      </a:r>
+                    </a:p>
+                  </a:txBody>
+                  <a:tcPr marL="82296" marR="64008" marT="32004" marB="32004" anchor="ctr">
+                    <a:solidFill>
+                      <a:srgbClr val="F6F3EF"/>
+                    </a:solidFill>
+                  </a:tcPr>
+                </a:tc>
+                <a:tc>
+                  <a:txBody>
+                    <a:bodyPr wrap="square"/>
+                    <a:lstStyle/>
+                    <a:p>
+                      <a:pPr algn="l"/>
+                      <a:r>
+                        <a:rPr sz="950" b="0">
+                          <a:solidFill>
+                            <a:srgbClr val="1C1C1E"/>
+                          </a:solidFill>
+                          <a:latin typeface="Calibri"/>
+                        </a:rPr>
+                        <a:t>2026-08-28</a:t>
+                      </a:r>
+                    </a:p>
+                  </a:txBody>
+                  <a:tcPr marL="82296" marR="64008" marT="32004" marB="32004" anchor="ctr">
+                    <a:solidFill>
+                      <a:srgbClr val="F6F3EF"/>
+                    </a:solidFill>
+                  </a:tcPr>
+                </a:tc>
+                <a:tc>
+                  <a:txBody>
+                    <a:bodyPr wrap="square"/>
+                    <a:lstStyle/>
+                    <a:p>
+                      <a:pPr algn="l"/>
+                      <a:r>
+                        <a:rPr sz="950" b="0">
+                          <a:solidFill>
+                            <a:srgbClr val="1C1C1E"/>
+                          </a:solidFill>
+                          <a:latin typeface="Calibri"/>
+                        </a:rPr>
+                        <a:t>98.11</a:t>
+                      </a:r>
+                    </a:p>
+                  </a:txBody>
+                  <a:tcPr marL="82296" marR="64008" marT="32004" marB="32004" anchor="ctr">
+                    <a:solidFill>
+                      <a:srgbClr val="F6F3EF"/>
+                    </a:solidFill>
+                  </a:tcPr>
+                </a:tc>
+              </a:tr>
+              <a:tr h="308216">
+                <a:tc>
+                  <a:txBody>
+                    <a:bodyPr wrap="square"/>
+                    <a:lstStyle/>
+                    <a:p>
+                      <a:pPr algn="l"/>
+                      <a:r>
+                        <a:rPr sz="950" b="1">
+                          <a:solidFill>
+                            <a:srgbClr val="1C1C1E"/>
+                          </a:solidFill>
+                          <a:latin typeface="Calibri"/>
+                        </a:rPr>
+                        <a:t>2026-08-31</a:t>
+                      </a:r>
+                    </a:p>
+                  </a:txBody>
+                  <a:tcPr marL="82296" marR="64008" marT="32004" marB="32004" anchor="ctr">
+                    <a:solidFill>
+                      <a:srgbClr val="FFFFFF"/>
+                    </a:solidFill>
+                  </a:tcPr>
+                </a:tc>
+                <a:tc>
+                  <a:txBody>
+                    <a:bodyPr wrap="square"/>
+                    <a:lstStyle/>
+                    <a:p>
+                      <a:pPr algn="l"/>
+                      <a:r>
+                        <a:rPr sz="950" b="0">
+                          <a:solidFill>
+                            <a:srgbClr val="1C1C1E"/>
+                          </a:solidFill>
+                          <a:latin typeface="Calibri"/>
+                        </a:rPr>
+                        <a:t>2026-08-31</a:t>
+                      </a:r>
+                    </a:p>
+                  </a:txBody>
+                  <a:tcPr marL="82296" marR="64008" marT="32004" marB="32004" anchor="ctr">
+                    <a:solidFill>
+                      <a:srgbClr val="FFFFFF"/>
+                    </a:solidFill>
+                  </a:tcPr>
+                </a:tc>
+                <a:tc>
+                  <a:txBody>
+                    <a:bodyPr wrap="square"/>
+                    <a:lstStyle/>
+                    <a:p>
+                      <a:pPr algn="l"/>
+                      <a:r>
+                        <a:rPr sz="950" b="0">
+                          <a:solidFill>
+                            <a:srgbClr val="1C1C1E"/>
+                          </a:solidFill>
+                          <a:latin typeface="Calibri"/>
+                        </a:rPr>
+                        <a:t>98.74</a:t>
+                      </a:r>
+                    </a:p>
+                  </a:txBody>
+                  <a:tcPr marL="82296" marR="64008" marT="32004" marB="32004" anchor="ctr">
+                    <a:solidFill>
+                      <a:srgbClr val="FFFFFF"/>
+                    </a:solidFill>
+                  </a:tcPr>
+                </a:tc>
+              </a:tr>
+              <a:tr h="308216">
+                <a:tc>
+                  <a:txBody>
+                    <a:bodyPr wrap="square"/>
+                    <a:lstStyle/>
+                    <a:p>
+                      <a:pPr algn="l"/>
+                      <a:r>
+                        <a:rPr sz="950" b="1">
+                          <a:solidFill>
+                            <a:srgbClr val="1C1C1E"/>
+                          </a:solidFill>
+                          <a:latin typeface="Calibri"/>
+                        </a:rPr>
+                        <a:t>2026-09-01</a:t>
+                      </a:r>
+                    </a:p>
+                  </a:txBody>
+                  <a:tcPr marL="82296" marR="64008" marT="32004" marB="32004" anchor="ctr">
+                    <a:solidFill>
+                      <a:srgbClr val="F6F3EF"/>
+                    </a:solidFill>
+                  </a:tcPr>
+                </a:tc>
+                <a:tc>
+                  <a:txBody>
+                    <a:bodyPr wrap="square"/>
+                    <a:lstStyle/>
+                    <a:p>
+                      <a:pPr algn="l"/>
+                      <a:r>
+                        <a:rPr sz="950" b="0">
+                          <a:solidFill>
+                            <a:srgbClr val="1C1C1E"/>
+                          </a:solidFill>
+                          <a:latin typeface="Calibri"/>
+                        </a:rPr>
+                        <a:t>2026-09-01</a:t>
+                      </a:r>
+                    </a:p>
+                  </a:txBody>
+                  <a:tcPr marL="82296" marR="64008" marT="32004" marB="32004" anchor="ctr">
+                    <a:solidFill>
+                      <a:srgbClr val="F6F3EF"/>
+                    </a:solidFill>
+                  </a:tcPr>
+                </a:tc>
+                <a:tc>
+                  <a:txBody>
+                    <a:bodyPr wrap="square"/>
+                    <a:lstStyle/>
+                    <a:p>
+                      <a:pPr algn="l"/>
+                      <a:r>
+                        <a:rPr sz="950" b="0">
+                          <a:solidFill>
+                            <a:srgbClr val="1C1C1E"/>
+                          </a:solidFill>
+                          <a:latin typeface="Calibri"/>
+                        </a:rPr>
+                        <a:t>99.43</a:t>
+                      </a:r>
+                    </a:p>
+                  </a:txBody>
+                  <a:tcPr marL="82296" marR="64008" marT="32004" marB="32004" anchor="ctr">
+                    <a:solidFill>
+                      <a:srgbClr val="F6F3EF"/>
+                    </a:solidFill>
+                  </a:tcPr>
+                </a:tc>
+              </a:tr>
+            </a:tbl>
+          </a:graphicData>
+        </a:graphic>
+      </p:graphicFrame>
+      <p:sp>
+        <p:nvSpPr>
+          <p:cNvPr id="11" name="TextBox 10"/>
+          <p:cNvSpPr txBox="1"/>
+          <p:nvPr/>
+        </p:nvSpPr>
+        <p:spPr>
+          <a:xfrm>
+            <a:off x="777240" y="3061665"/>
+            <a:ext cx="4680374" cy="457200"/>
+          </a:xfrm>
+          <a:prstGeom prst="rect">
+            <a:avLst/>
+          </a:prstGeom>
+          <a:noFill/>
+        </p:spPr>
+        <p:txBody>
+          <a:bodyPr wrap="square" lIns="0" rIns="0" tIns="0" bIns="0" anchor="t">
+            <a:spAutoFit/>
+          </a:bodyPr>
+          <a:lstStyle/>
+          <a:p>
+            <a:pPr algn="l">
+              <a:spcBef>
+                <a:spcPts val="0"/>
+              </a:spcBef>
+              <a:spcAft>
+                <a:spcPts val="0"/>
+              </a:spcAft>
+            </a:pPr>
+            <a:r>
+              <a:rPr sz="950" b="1" i="0">
+                <a:solidFill>
+                  <a:srgbClr val="A51C30"/>
+                </a:solidFill>
+                <a:latin typeface="Calibri"/>
+              </a:rPr>
+              <a:t>us_equity_close</a:t>
+            </a:r>
+            <a:r>
+              <a:rPr sz="950" b="0" i="0">
+                <a:solidFill>
+                  <a:srgbClr val="4A4F57"/>
+                </a:solidFill>
+                <a:latin typeface="Calibri"/>
+              </a:rPr>
+              <a:t>   daily, scalar, published the same day</a:t>
+            </a:r>
+          </a:p>
+        </p:txBody>
+      </p:sp>
+      <p:graphicFrame>
+        <p:nvGraphicFramePr>
+          <p:cNvPr id="12" name="Table 11"/>
+          <p:cNvGraphicFramePr>
+            <a:graphicFrameLocks noGrp="1"/>
+          </p:cNvGraphicFramePr>
+          <p:nvPr/>
+        </p:nvGraphicFramePr>
+        <p:xfrm>
+          <a:off x="777240" y="3482289"/>
+          <a:ext cx="4680374" cy="1253832"/>
+        </p:xfrm>
+        <a:graphic>
+          <a:graphicData uri="http://schemas.openxmlformats.org/drawingml/2006/table">
+            <a:tbl>
+              <a:tblPr firstRow="1">
+                <a:tableStyleId>{5C22544A-7EE6-4342-B048-85BDC9FD1C3A}</a:tableStyleId>
+              </a:tblPr>
+              <a:tblGrid>
+                <a:gridCol w="1743669"/>
+                <a:gridCol w="1743669"/>
+                <a:gridCol w="1193036"/>
+              </a:tblGrid>
+              <a:tr h="329184">
+                <a:tc>
+                  <a:txBody>
+                    <a:bodyPr wrap="square"/>
+                    <a:lstStyle/>
+                    <a:p>
+                      <a:pPr algn="l"/>
+                      <a:r>
+                        <a:rPr sz="950" b="1">
+                          <a:solidFill>
+                            <a:srgbClr val="FFFFFF"/>
+                          </a:solidFill>
+                          <a:latin typeface="Calibri"/>
+                        </a:rPr>
+                        <a:t>event_ts</a:t>
+                      </a:r>
+                    </a:p>
+                  </a:txBody>
+                  <a:tcPr marL="82296" marR="64008" marT="32004" marB="32004" anchor="ctr">
+                    <a:solidFill>
+                      <a:srgbClr val="A51C30"/>
+                    </a:solidFill>
+                  </a:tcPr>
+                </a:tc>
+                <a:tc>
+                  <a:txBody>
+                    <a:bodyPr wrap="square"/>
+                    <a:lstStyle/>
+                    <a:p>
+                      <a:pPr algn="l"/>
+                      <a:r>
+                        <a:rPr sz="950" b="1">
+                          <a:solidFill>
+                            <a:srgbClr val="FFFFFF"/>
+                          </a:solidFill>
+                          <a:latin typeface="Calibri"/>
+                        </a:rPr>
+                        <a:t>ingest_ts</a:t>
+                      </a:r>
+                    </a:p>
+                  </a:txBody>
+                  <a:tcPr marL="82296" marR="64008" marT="32004" marB="32004" anchor="ctr">
+                    <a:solidFill>
+                      <a:srgbClr val="A51C30"/>
+                    </a:solidFill>
+                  </a:tcPr>
+                </a:tc>
+                <a:tc>
+                  <a:txBody>
+                    <a:bodyPr wrap="square"/>
+                    <a:lstStyle/>
+                    <a:p>
+                      <a:pPr algn="l"/>
+                      <a:r>
+                        <a:rPr sz="950" b="1">
+                          <a:solidFill>
+                            <a:srgbClr val="FFFFFF"/>
+                          </a:solidFill>
+                          <a:latin typeface="Calibri"/>
+                        </a:rPr>
+                        <a:t>u3_rate</a:t>
+                      </a:r>
+                    </a:p>
+                  </a:txBody>
+                  <a:tcPr marL="82296" marR="64008" marT="32004" marB="32004" anchor="ctr">
+                    <a:solidFill>
+                      <a:srgbClr val="A51C30"/>
+                    </a:solidFill>
+                  </a:tcPr>
+                </a:tc>
+              </a:tr>
+              <a:tr h="308216">
+                <a:tc>
+                  <a:txBody>
+                    <a:bodyPr wrap="square"/>
+                    <a:lstStyle/>
+                    <a:p>
+                      <a:pPr algn="l"/>
+                      <a:r>
+                        <a:rPr sz="950" b="1">
+                          <a:solidFill>
+                            <a:srgbClr val="1C1C1E"/>
+                          </a:solidFill>
+                          <a:latin typeface="Calibri"/>
+                        </a:rPr>
+                        <a:t>2026-06-30</a:t>
+                      </a:r>
+                    </a:p>
+                  </a:txBody>
+                  <a:tcPr marL="82296" marR="64008" marT="32004" marB="32004" anchor="ctr">
+                    <a:solidFill>
+                      <a:srgbClr val="FFFFFF"/>
+                    </a:solidFill>
+                  </a:tcPr>
+                </a:tc>
+                <a:tc>
+                  <a:txBody>
+                    <a:bodyPr wrap="square"/>
+                    <a:lstStyle/>
+                    <a:p>
+                      <a:pPr algn="l"/>
+                      <a:r>
+                        <a:rPr sz="950" b="0">
+                          <a:solidFill>
+                            <a:srgbClr val="1C1C1E"/>
+                          </a:solidFill>
+                          <a:latin typeface="Calibri"/>
+                        </a:rPr>
+                        <a:t>2026-07-02</a:t>
+                      </a:r>
+                    </a:p>
+                  </a:txBody>
+                  <a:tcPr marL="82296" marR="64008" marT="32004" marB="32004" anchor="ctr">
+                    <a:solidFill>
+                      <a:srgbClr val="FFFFFF"/>
+                    </a:solidFill>
+                  </a:tcPr>
+                </a:tc>
+                <a:tc>
+                  <a:txBody>
+                    <a:bodyPr wrap="square"/>
+                    <a:lstStyle/>
+                    <a:p>
+                      <a:pPr algn="l"/>
+                      <a:r>
+                        <a:rPr sz="950" b="0">
+                          <a:solidFill>
+                            <a:srgbClr val="1C1C1E"/>
+                          </a:solidFill>
+                          <a:latin typeface="Calibri"/>
+                        </a:rPr>
+                        <a:t>4.1</a:t>
+                      </a:r>
+                    </a:p>
+                  </a:txBody>
+                  <a:tcPr marL="82296" marR="64008" marT="32004" marB="32004" anchor="ctr">
+                    <a:solidFill>
+                      <a:srgbClr val="FFFFFF"/>
+                    </a:solidFill>
+                  </a:tcPr>
+                </a:tc>
+              </a:tr>
+              <a:tr h="308216">
+                <a:tc>
+                  <a:txBody>
+                    <a:bodyPr wrap="square"/>
+                    <a:lstStyle/>
+                    <a:p>
+                      <a:pPr algn="l"/>
+                      <a:r>
+                        <a:rPr sz="950" b="1">
+                          <a:solidFill>
+                            <a:srgbClr val="1C1C1E"/>
+                          </a:solidFill>
+                          <a:latin typeface="Calibri"/>
+                        </a:rPr>
+                        <a:t>2026-07-31</a:t>
+                      </a:r>
+                    </a:p>
+                  </a:txBody>
+                  <a:tcPr marL="82296" marR="64008" marT="32004" marB="32004" anchor="ctr">
+                    <a:solidFill>
+                      <a:srgbClr val="F6F3EF"/>
+                    </a:solidFill>
+                  </a:tcPr>
+                </a:tc>
+                <a:tc>
+                  <a:txBody>
+                    <a:bodyPr wrap="square"/>
+                    <a:lstStyle/>
+                    <a:p>
+                      <a:pPr algn="l"/>
+                      <a:r>
+                        <a:rPr sz="950" b="0">
+                          <a:solidFill>
+                            <a:srgbClr val="1C1C1E"/>
+                          </a:solidFill>
+                          <a:latin typeface="Calibri"/>
+                        </a:rPr>
+                        <a:t>2026-08-07</a:t>
+                      </a:r>
+                    </a:p>
+                  </a:txBody>
+                  <a:tcPr marL="82296" marR="64008" marT="32004" marB="32004" anchor="ctr">
+                    <a:solidFill>
+                      <a:srgbClr val="F6F3EF"/>
+                    </a:solidFill>
+                  </a:tcPr>
+                </a:tc>
+                <a:tc>
+                  <a:txBody>
+                    <a:bodyPr wrap="square"/>
+                    <a:lstStyle/>
+                    <a:p>
+                      <a:pPr algn="l"/>
+                      <a:r>
+                        <a:rPr sz="950" b="0">
+                          <a:solidFill>
+                            <a:srgbClr val="1C1C1E"/>
+                          </a:solidFill>
+                          <a:latin typeface="Calibri"/>
+                        </a:rPr>
+                        <a:t>4.1</a:t>
+                      </a:r>
+                    </a:p>
+                  </a:txBody>
+                  <a:tcPr marL="82296" marR="64008" marT="32004" marB="32004" anchor="ctr">
+                    <a:solidFill>
+                      <a:srgbClr val="F6F3EF"/>
+                    </a:solidFill>
+                  </a:tcPr>
+                </a:tc>
+              </a:tr>
+              <a:tr h="308216">
+                <a:tc>
+                  <a:txBody>
+                    <a:bodyPr wrap="square"/>
+                    <a:lstStyle/>
+                    <a:p>
+                      <a:pPr algn="l"/>
+                      <a:r>
+                        <a:rPr sz="950" b="1">
+                          <a:solidFill>
+                            <a:srgbClr val="1C1C1E"/>
+                          </a:solidFill>
+                          <a:latin typeface="Calibri"/>
+                        </a:rPr>
+                        <a:t>2026-08-31</a:t>
+                      </a:r>
+                    </a:p>
+                  </a:txBody>
+                  <a:tcPr marL="82296" marR="64008" marT="32004" marB="32004" anchor="ctr">
+                    <a:solidFill>
+                      <a:srgbClr val="FFFFFF"/>
+                    </a:solidFill>
+                  </a:tcPr>
+                </a:tc>
+                <a:tc>
+                  <a:txBody>
+                    <a:bodyPr wrap="square"/>
+                    <a:lstStyle/>
+                    <a:p>
+                      <a:pPr algn="l"/>
+                      <a:r>
+                        <a:rPr sz="950" b="0">
+                          <a:solidFill>
+                            <a:srgbClr val="1C1C1E"/>
+                          </a:solidFill>
+                          <a:latin typeface="Calibri"/>
+                        </a:rPr>
+                        <a:t>2026-09-04</a:t>
+                      </a:r>
+                    </a:p>
+                  </a:txBody>
+                  <a:tcPr marL="82296" marR="64008" marT="32004" marB="32004" anchor="ctr">
+                    <a:solidFill>
+                      <a:srgbClr val="FFFFFF"/>
+                    </a:solidFill>
+                  </a:tcPr>
+                </a:tc>
+                <a:tc>
+                  <a:txBody>
+                    <a:bodyPr wrap="square"/>
+                    <a:lstStyle/>
+                    <a:p>
+                      <a:pPr algn="l"/>
+                      <a:r>
+                        <a:rPr sz="950" b="0">
+                          <a:solidFill>
+                            <a:srgbClr val="1C1C1E"/>
+                          </a:solidFill>
+                          <a:latin typeface="Calibri"/>
+                        </a:rPr>
+                        <a:t>4.0</a:t>
+                      </a:r>
+                    </a:p>
+                  </a:txBody>
+                  <a:tcPr marL="82296" marR="64008" marT="32004" marB="32004" anchor="ctr">
+                    <a:solidFill>
+                      <a:srgbClr val="FFFFFF"/>
+                    </a:solidFill>
+                  </a:tcPr>
+                </a:tc>
+              </a:tr>
+            </a:tbl>
+          </a:graphicData>
+        </a:graphic>
+      </p:graphicFrame>
+      <p:sp>
+        <p:nvSpPr>
+          <p:cNvPr id="13" name="TextBox 12"/>
+          <p:cNvSpPr txBox="1"/>
+          <p:nvPr/>
+        </p:nvSpPr>
+        <p:spPr>
+          <a:xfrm>
+            <a:off x="777240" y="4882426"/>
+            <a:ext cx="4680374" cy="457200"/>
+          </a:xfrm>
+          <a:prstGeom prst="rect">
+            <a:avLst/>
+          </a:prstGeom>
+          <a:noFill/>
+        </p:spPr>
+        <p:txBody>
+          <a:bodyPr wrap="square" lIns="0" rIns="0" tIns="0" bIns="0" anchor="t">
+            <a:spAutoFit/>
+          </a:bodyPr>
+          <a:lstStyle/>
+          <a:p>
+            <a:pPr algn="l">
+              <a:spcBef>
+                <a:spcPts val="0"/>
+              </a:spcBef>
+              <a:spcAft>
+                <a:spcPts val="0"/>
+              </a:spcAft>
+            </a:pPr>
+            <a:r>
+              <a:rPr sz="950" b="1" i="0">
+                <a:solidFill>
+                  <a:srgbClr val="A51C30"/>
+                </a:solidFill>
+                <a:latin typeface="Calibri"/>
+              </a:rPr>
+              <a:t>us_unemployment</a:t>
+            </a:r>
+            <a:r>
+              <a:rPr sz="950" b="0" i="0">
+                <a:solidFill>
+                  <a:srgbClr val="4A4F57"/>
+                </a:solidFill>
+                <a:latin typeface="Calibri"/>
+              </a:rPr>
+              <a:t>   monthly, scalar, published days later</a:t>
+            </a:r>
+          </a:p>
+        </p:txBody>
+      </p:sp>
+      <p:sp>
+        <p:nvSpPr>
+          <p:cNvPr id="14" name="TextBox 13"/>
+          <p:cNvSpPr txBox="1"/>
+          <p:nvPr/>
+        </p:nvSpPr>
+        <p:spPr>
+          <a:xfrm>
+            <a:off x="5883103" y="1353312"/>
+            <a:ext cx="5531351" cy="310896"/>
+          </a:xfrm>
+          <a:prstGeom prst="rect">
+            <a:avLst/>
+          </a:prstGeom>
+          <a:noFill/>
+        </p:spPr>
+        <p:txBody>
+          <a:bodyPr wrap="square" lIns="0" rIns="0" tIns="0" bIns="0" anchor="t">
+            <a:spAutoFit/>
+          </a:bodyPr>
+          <a:lstStyle/>
+          <a:p>
+            <a:pPr algn="l">
+              <a:spcBef>
+                <a:spcPts val="0"/>
+              </a:spcBef>
+              <a:spcAft>
+                <a:spcPts val="800"/>
+              </a:spcAft>
+            </a:pPr>
+            <a:r>
+              <a:rPr sz="1300" b="1" i="0">
+                <a:solidFill>
+                  <a:srgbClr val="A51C30"/>
+                </a:solidFill>
+                <a:latin typeface="Georgia"/>
+              </a:rPr>
+              <a:t>Look at the second table’s two columns</a:t>
             </a:r>
           </a:p>
           <a:p>
@@ -22945,20 +24292,1834 @@
                 <a:spcPct val="125000"/>
               </a:lnSpc>
               <a:spcBef>
+                <a:spcPts val="0"/>
+              </a:spcBef>
+              <a:spcAft>
                 <a:spcPts val="1000"/>
-              </a:spcBef>
-              <a:spcAft>
-                <a:spcPts val="600"/>
+              </a:spcAft>
+            </a:pPr>
+            <a:r>
+              <a:rPr sz="1100" b="0" i="0">
+                <a:solidFill>
+                  <a:srgbClr val="1C1C1E"/>
+                </a:solidFill>
+                <a:latin typeface="Calibri"/>
+              </a:rPr>
+              <a:t>August’s unemployment rate was TRUE on the 31st of August and was not KNOWN until the 4th of September. The two clocks differ by four days, and they differ because that is what happened.</a:t>
+            </a:r>
+          </a:p>
+          <a:p>
+            <a:pPr>
+              <a:lnSpc>
+                <a:spcPct val="125000"/>
+              </a:lnSpc>
+              <a:spcBef>
+                <a:spcPts val="0"/>
+              </a:spcBef>
+              <a:spcAft>
+                <a:spcPts val="1000"/>
+              </a:spcAft>
+            </a:pPr>
+            <a:r>
+              <a:rPr sz="1100" b="0" i="0">
+                <a:solidFill>
+                  <a:srgbClr val="4A4F57"/>
+                </a:solidFill>
+                <a:latin typeface="Calibri"/>
+              </a:rPr>
+              <a:t>A model trained on the 1st of September using August’s figure would be using a number that did not exist yet. It would back-test beautifully and disappoint in production, and no metric would say why.</a:t>
+            </a:r>
+          </a:p>
+          <a:p>
+            <a:pPr>
+              <a:lnSpc>
+                <a:spcPct val="125000"/>
+              </a:lnSpc>
+              <a:spcBef>
+                <a:spcPts val="0"/>
+              </a:spcBef>
+              <a:spcAft>
+                <a:spcPts val="0"/>
+              </a:spcAft>
+            </a:pPr>
+            <a:r>
+              <a:rPr sz="1100" b="1" i="0">
+                <a:solidFill>
+                  <a:srgbClr val="A51C30"/>
+                </a:solidFill>
+                <a:latin typeface="Calibri"/>
+              </a:rPr>
+              <a:t>This is not a hypothetical about leakage. </a:t>
+            </a:r>
+            <a:r>
+              <a:rPr sz="1100" b="0" i="0">
+                <a:solidFill>
+                  <a:srgbClr val="4A4F57"/>
+                </a:solidFill>
+                <a:latin typeface="Calibri"/>
+              </a:rPr>
+              <a:t>It is the ordinary shape of every macroeconomic series a bank uses, and it is why every row here carries both stamps rather than one.</a:t>
+            </a:r>
+          </a:p>
+        </p:txBody>
+      </p:sp>
+      <p:sp>
+        <p:nvSpPr>
+          <p:cNvPr id="15" name="Rectangle 14"/>
+          <p:cNvSpPr/>
+          <p:nvPr/>
+        </p:nvSpPr>
+        <p:spPr>
+          <a:xfrm>
+            <a:off x="5883103" y="4114800"/>
+            <a:ext cx="5531351" cy="896112"/>
+          </a:xfrm>
+          <a:prstGeom prst="rect">
+            <a:avLst/>
+          </a:prstGeom>
+          <a:solidFill>
+            <a:srgbClr val="F6F3EF"/>
+          </a:solidFill>
+          <a:ln>
+            <a:noFill/>
+          </a:ln>
+          <a:effectLst/>
+        </p:spPr>
+        <p:style>
+          <a:lnRef idx="1">
+            <a:schemeClr val="accent1"/>
+          </a:lnRef>
+          <a:fillRef idx="3">
+            <a:schemeClr val="accent1"/>
+          </a:fillRef>
+          <a:effectRef idx="2">
+            <a:schemeClr val="accent1"/>
+          </a:effectRef>
+          <a:fontRef idx="minor">
+            <a:schemeClr val="lt1"/>
+          </a:fontRef>
+        </p:style>
+        <p:txBody>
+          <a:bodyPr rtlCol="0" anchor="ctr" wrap="square" lIns="109728" rIns="109728" tIns="64008" bIns="64008"/>
+          <a:lstStyle/>
+          <a:p>
+            <a:pPr algn="ctr"/>
+          </a:p>
+        </p:txBody>
+      </p:sp>
+      <p:sp>
+        <p:nvSpPr>
+          <p:cNvPr id="16" name="Rectangle 15"/>
+          <p:cNvSpPr/>
+          <p:nvPr/>
+        </p:nvSpPr>
+        <p:spPr>
+          <a:xfrm>
+            <a:off x="5883103" y="4114800"/>
+            <a:ext cx="41148" cy="896112"/>
+          </a:xfrm>
+          <a:prstGeom prst="rect">
+            <a:avLst/>
+          </a:prstGeom>
+          <a:solidFill>
+            <a:srgbClr val="A51C30"/>
+          </a:solidFill>
+          <a:ln>
+            <a:noFill/>
+          </a:ln>
+          <a:effectLst/>
+        </p:spPr>
+        <p:style>
+          <a:lnRef idx="1">
+            <a:schemeClr val="accent1"/>
+          </a:lnRef>
+          <a:fillRef idx="3">
+            <a:schemeClr val="accent1"/>
+          </a:fillRef>
+          <a:effectRef idx="2">
+            <a:schemeClr val="accent1"/>
+          </a:effectRef>
+          <a:fontRef idx="minor">
+            <a:schemeClr val="lt1"/>
+          </a:fontRef>
+        </p:style>
+        <p:txBody>
+          <a:bodyPr rtlCol="0" anchor="ctr" wrap="square" lIns="109728" rIns="109728" tIns="64008" bIns="64008"/>
+          <a:lstStyle/>
+          <a:p>
+            <a:pPr algn="ctr"/>
+          </a:p>
+        </p:txBody>
+      </p:sp>
+      <p:sp>
+        <p:nvSpPr>
+          <p:cNvPr id="17" name="TextBox 16"/>
+          <p:cNvSpPr txBox="1"/>
+          <p:nvPr/>
+        </p:nvSpPr>
+        <p:spPr>
+          <a:xfrm>
+            <a:off x="6120847" y="4233672"/>
+            <a:ext cx="5074151" cy="676656"/>
+          </a:xfrm>
+          <a:prstGeom prst="rect">
+            <a:avLst/>
+          </a:prstGeom>
+          <a:noFill/>
+        </p:spPr>
+        <p:txBody>
+          <a:bodyPr wrap="square" lIns="0" rIns="0" tIns="0" bIns="0" anchor="t">
+            <a:spAutoFit/>
+          </a:bodyPr>
+          <a:lstStyle/>
+          <a:p>
+            <a:pPr algn="l">
+              <a:lnSpc>
+                <a:spcPct val="124000"/>
+              </a:lnSpc>
+              <a:spcBef>
+                <a:spcPts val="0"/>
+              </a:spcBef>
+              <a:spcAft>
+                <a:spcPts val="0"/>
+              </a:spcAft>
+            </a:pPr>
+            <a:r>
+              <a:rPr sz="1050" b="1" i="0">
+                <a:solidFill>
+                  <a:srgbClr val="A51C30"/>
+                </a:solidFill>
+                <a:latin typeface="Calibri"/>
+              </a:rPr>
+              <a:t>Both are scalars — shape []. </a:t>
+            </a:r>
+            <a:r>
+              <a:rPr sz="1050" b="0" i="0">
+                <a:solidFill>
+                  <a:srgbClr val="1C1C1E"/>
+                </a:solidFill>
+                <a:latin typeface="Calibri"/>
+              </a:rPr>
+              <a:t>The curve on an earlier slide was a vector; these are not. The shape is declared either way, </a:t>
+            </a:r>
+            <a:r>
+              <a:rPr sz="1050" b="1" i="0">
+                <a:solidFill>
+                  <a:srgbClr val="1C1C1E"/>
+                </a:solidFill>
+                <a:latin typeface="Calibri"/>
+              </a:rPr>
+              <a:t>because a shape nobody states is a shape somebody assumes.</a:t>
+            </a:r>
+          </a:p>
+        </p:txBody>
+      </p:sp>
+    </p:spTree>
+  </p:cSld>
+  <p:clrMapOvr>
+    <a:masterClrMapping/>
+  </p:clrMapOvr>
+</p:sld>
+</file>
+
+<file path=ppt/slides/slide29.xml><?xml version="1.0" encoding="utf-8"?>
+<p:sld xmlns:a="http://schemas.openxmlformats.org/drawingml/2006/main" xmlns:p="http://schemas.openxmlformats.org/presentationml/2006/main" xmlns:r="http://schemas.openxmlformats.org/officeDocument/2006/relationships">
+  <p:cSld>
+    <p:spTree>
+      <p:nvGrpSpPr>
+        <p:cNvPr id="1" name=""/>
+        <p:cNvGrpSpPr/>
+        <p:nvPr/>
+      </p:nvGrpSpPr>
+      <p:grpSpPr/>
+      <p:sp>
+        <p:nvSpPr>
+          <p:cNvPr id="2" name="Rectangle 1"/>
+          <p:cNvSpPr/>
+          <p:nvPr/>
+        </p:nvSpPr>
+        <p:spPr>
+          <a:xfrm>
+            <a:off x="0" y="0"/>
+            <a:ext cx="12191695" cy="6858000"/>
+          </a:xfrm>
+          <a:prstGeom prst="rect">
+            <a:avLst/>
+          </a:prstGeom>
+          <a:solidFill>
+            <a:srgbClr val="FFFFFF"/>
+          </a:solidFill>
+          <a:ln>
+            <a:noFill/>
+          </a:ln>
+          <a:effectLst/>
+        </p:spPr>
+        <p:style>
+          <a:lnRef idx="1">
+            <a:schemeClr val="accent1"/>
+          </a:lnRef>
+          <a:fillRef idx="3">
+            <a:schemeClr val="accent1"/>
+          </a:fillRef>
+          <a:effectRef idx="2">
+            <a:schemeClr val="accent1"/>
+          </a:effectRef>
+          <a:fontRef idx="minor">
+            <a:schemeClr val="lt1"/>
+          </a:fontRef>
+        </p:style>
+        <p:txBody>
+          <a:bodyPr rtlCol="0" anchor="ctr" wrap="square" lIns="109728" rIns="109728" tIns="64008" bIns="64008"/>
+          <a:lstStyle/>
+          <a:p>
+            <a:pPr algn="ctr"/>
+          </a:p>
+        </p:txBody>
+      </p:sp>
+      <p:sp>
+        <p:nvSpPr>
+          <p:cNvPr id="3" name="Rectangle 2"/>
+          <p:cNvSpPr/>
+          <p:nvPr/>
+        </p:nvSpPr>
+        <p:spPr>
+          <a:xfrm>
+            <a:off x="0" y="566928"/>
+            <a:ext cx="274320" cy="50292"/>
+          </a:xfrm>
+          <a:prstGeom prst="rect">
+            <a:avLst/>
+          </a:prstGeom>
+          <a:solidFill>
+            <a:srgbClr val="A51C30"/>
+          </a:solidFill>
+          <a:ln>
+            <a:noFill/>
+          </a:ln>
+          <a:effectLst/>
+        </p:spPr>
+        <p:style>
+          <a:lnRef idx="1">
+            <a:schemeClr val="accent1"/>
+          </a:lnRef>
+          <a:fillRef idx="3">
+            <a:schemeClr val="accent1"/>
+          </a:fillRef>
+          <a:effectRef idx="2">
+            <a:schemeClr val="accent1"/>
+          </a:effectRef>
+          <a:fontRef idx="minor">
+            <a:schemeClr val="lt1"/>
+          </a:fontRef>
+        </p:style>
+        <p:txBody>
+          <a:bodyPr rtlCol="0" anchor="ctr" wrap="square" lIns="109728" rIns="109728" tIns="64008" bIns="64008"/>
+          <a:lstStyle/>
+          <a:p>
+            <a:pPr algn="ctr"/>
+          </a:p>
+        </p:txBody>
+      </p:sp>
+      <p:sp>
+        <p:nvSpPr>
+          <p:cNvPr id="4" name="TextBox 3"/>
+          <p:cNvSpPr txBox="1"/>
+          <p:nvPr/>
+        </p:nvSpPr>
+        <p:spPr>
+          <a:xfrm>
+            <a:off x="777240" y="475488"/>
+            <a:ext cx="10637215" cy="219456"/>
+          </a:xfrm>
+          <a:prstGeom prst="rect">
+            <a:avLst/>
+          </a:prstGeom>
+          <a:noFill/>
+        </p:spPr>
+        <p:txBody>
+          <a:bodyPr wrap="square" lIns="0" rIns="0" tIns="0" bIns="0" anchor="t">
+            <a:spAutoFit/>
+          </a:bodyPr>
+          <a:lstStyle/>
+          <a:p>
+            <a:pPr algn="l">
+              <a:spcBef>
+                <a:spcPts val="0"/>
+              </a:spcBef>
+              <a:spcAft>
+                <a:spcPts val="0"/>
+              </a:spcAft>
+            </a:pPr>
+            <a:r>
+              <a:rPr sz="1050" b="1" i="0">
+                <a:solidFill>
+                  <a:srgbClr val="A51C30"/>
+                </a:solidFill>
+                <a:latin typeface="Calibri"/>
+              </a:rPr>
+              <a:t>A WORKED EXAMPLE</a:t>
+            </a:r>
+          </a:p>
+        </p:txBody>
+      </p:sp>
+      <p:sp>
+        <p:nvSpPr>
+          <p:cNvPr id="5" name="TextBox 4"/>
+          <p:cNvSpPr txBox="1"/>
+          <p:nvPr/>
+        </p:nvSpPr>
+        <p:spPr>
+          <a:xfrm>
+            <a:off x="777240" y="749808"/>
+            <a:ext cx="10637215" cy="484631"/>
+          </a:xfrm>
+          <a:prstGeom prst="rect">
+            <a:avLst/>
+          </a:prstGeom>
+          <a:noFill/>
+        </p:spPr>
+        <p:txBody>
+          <a:bodyPr wrap="square" lIns="0" rIns="0" tIns="0" bIns="0" anchor="t">
+            <a:spAutoFit/>
+          </a:bodyPr>
+          <a:lstStyle/>
+          <a:p>
+            <a:pPr algn="l">
+              <a:lnSpc>
+                <a:spcPct val="120000"/>
+              </a:lnSpc>
+              <a:spcBef>
+                <a:spcPts val="0"/>
+              </a:spcBef>
+              <a:spcAft>
+                <a:spcPts val="0"/>
+              </a:spcAft>
+            </a:pPr>
+            <a:r>
+              <a:rPr sz="2700" b="0" i="0">
+                <a:solidFill>
+                  <a:srgbClr val="1C1C1E"/>
+                </a:solidFill>
+                <a:latin typeface="Georgia"/>
+              </a:rPr>
+              <a:t>One featureset, aligned onto a daily axis</a:t>
+            </a:r>
+          </a:p>
+        </p:txBody>
+      </p:sp>
+      <p:sp>
+        <p:nvSpPr>
+          <p:cNvPr id="6" name="Rectangle 5"/>
+          <p:cNvSpPr/>
+          <p:nvPr/>
+        </p:nvSpPr>
+        <p:spPr>
+          <a:xfrm>
+            <a:off x="777240" y="1207008"/>
+            <a:ext cx="10637215" cy="10972"/>
+          </a:xfrm>
+          <a:prstGeom prst="rect">
+            <a:avLst/>
+          </a:prstGeom>
+          <a:solidFill>
+            <a:srgbClr val="D8D4CF"/>
+          </a:solidFill>
+          <a:ln>
+            <a:noFill/>
+          </a:ln>
+          <a:effectLst/>
+        </p:spPr>
+        <p:style>
+          <a:lnRef idx="1">
+            <a:schemeClr val="accent1"/>
+          </a:lnRef>
+          <a:fillRef idx="3">
+            <a:schemeClr val="accent1"/>
+          </a:fillRef>
+          <a:effectRef idx="2">
+            <a:schemeClr val="accent1"/>
+          </a:effectRef>
+          <a:fontRef idx="minor">
+            <a:schemeClr val="lt1"/>
+          </a:fontRef>
+        </p:style>
+        <p:txBody>
+          <a:bodyPr rtlCol="0" anchor="ctr" wrap="square" lIns="109728" rIns="109728" tIns="64008" bIns="64008"/>
+          <a:lstStyle/>
+          <a:p>
+            <a:pPr algn="ctr"/>
+          </a:p>
+        </p:txBody>
+      </p:sp>
+      <p:sp>
+        <p:nvSpPr>
+          <p:cNvPr id="7" name="Rectangle 6"/>
+          <p:cNvSpPr/>
+          <p:nvPr/>
+        </p:nvSpPr>
+        <p:spPr>
+          <a:xfrm>
+            <a:off x="777240" y="6355080"/>
+            <a:ext cx="10637215" cy="7315"/>
+          </a:xfrm>
+          <a:prstGeom prst="rect">
+            <a:avLst/>
+          </a:prstGeom>
+          <a:solidFill>
+            <a:srgbClr val="D8D4CF"/>
+          </a:solidFill>
+          <a:ln>
+            <a:noFill/>
+          </a:ln>
+          <a:effectLst/>
+        </p:spPr>
+        <p:style>
+          <a:lnRef idx="1">
+            <a:schemeClr val="accent1"/>
+          </a:lnRef>
+          <a:fillRef idx="3">
+            <a:schemeClr val="accent1"/>
+          </a:fillRef>
+          <a:effectRef idx="2">
+            <a:schemeClr val="accent1"/>
+          </a:effectRef>
+          <a:fontRef idx="minor">
+            <a:schemeClr val="lt1"/>
+          </a:fontRef>
+        </p:style>
+        <p:txBody>
+          <a:bodyPr rtlCol="0" anchor="ctr" wrap="square" lIns="109728" rIns="109728" tIns="64008" bIns="64008"/>
+          <a:lstStyle/>
+          <a:p>
+            <a:pPr algn="ctr"/>
+          </a:p>
+        </p:txBody>
+      </p:sp>
+      <p:sp>
+        <p:nvSpPr>
+          <p:cNvPr id="8" name="TextBox 7"/>
+          <p:cNvSpPr txBox="1"/>
+          <p:nvPr/>
+        </p:nvSpPr>
+        <p:spPr>
+          <a:xfrm>
+            <a:off x="777240" y="6437376"/>
+            <a:ext cx="7446050" cy="219456"/>
+          </a:xfrm>
+          <a:prstGeom prst="rect">
+            <a:avLst/>
+          </a:prstGeom>
+          <a:noFill/>
+        </p:spPr>
+        <p:txBody>
+          <a:bodyPr wrap="square" lIns="0" rIns="0" tIns="0" bIns="0" anchor="t">
+            <a:spAutoFit/>
+          </a:bodyPr>
+          <a:lstStyle/>
+          <a:p>
+            <a:pPr algn="l">
+              <a:spcBef>
+                <a:spcPts val="0"/>
+              </a:spcBef>
+              <a:spcAft>
+                <a:spcPts val="0"/>
               </a:spcAft>
             </a:pPr>
             <a:r>
               <a:rPr sz="850" b="0" i="0">
                 <a:solidFill>
-                  <a:srgbClr val="D8A0AC"/>
+                  <a:srgbClr val="7A7F87"/>
                 </a:solidFill>
                 <a:latin typeface="Calibri"/>
               </a:rPr>
-              <a:t>© 2026 Ashutosh Sinha. All rights reserved. Proprietary and confidential — see LICENSE and NOTICE. Not legal, regulatory or financial advice.</a:t>
+              <a:t>6 · A Worked Example</a:t>
+            </a:r>
+          </a:p>
+        </p:txBody>
+      </p:sp>
+      <p:sp>
+        <p:nvSpPr>
+          <p:cNvPr id="9" name="TextBox 8"/>
+          <p:cNvSpPr txBox="1"/>
+          <p:nvPr/>
+        </p:nvSpPr>
+        <p:spPr>
+          <a:xfrm>
+            <a:off x="8223290" y="6437376"/>
+            <a:ext cx="3191164" cy="219456"/>
+          </a:xfrm>
+          <a:prstGeom prst="rect">
+            <a:avLst/>
+          </a:prstGeom>
+          <a:noFill/>
+        </p:spPr>
+        <p:txBody>
+          <a:bodyPr wrap="square" lIns="0" rIns="0" tIns="0" bIns="0" anchor="t">
+            <a:spAutoFit/>
+          </a:bodyPr>
+          <a:lstStyle/>
+          <a:p>
+            <a:pPr algn="r">
+              <a:spcBef>
+                <a:spcPts val="0"/>
+              </a:spcBef>
+              <a:spcAft>
+                <a:spcPts val="0"/>
+              </a:spcAft>
+            </a:pPr>
+            <a:r>
+              <a:rPr sz="850" b="1" i="0">
+                <a:solidFill>
+                  <a:srgbClr val="7A7F87"/>
+                </a:solidFill>
+                <a:latin typeface="Calibri"/>
+              </a:rPr>
+              <a:t>28</a:t>
+            </a:r>
+          </a:p>
+        </p:txBody>
+      </p:sp>
+      <p:sp>
+        <p:nvSpPr>
+          <p:cNvPr id="10" name="Rectangle 9"/>
+          <p:cNvSpPr/>
+          <p:nvPr/>
+        </p:nvSpPr>
+        <p:spPr>
+          <a:xfrm>
+            <a:off x="777240" y="1353312"/>
+            <a:ext cx="5318607" cy="2011177"/>
+          </a:xfrm>
+          <a:prstGeom prst="rect">
+            <a:avLst/>
+          </a:prstGeom>
+          <a:solidFill>
+            <a:srgbClr val="F4F2EF"/>
+          </a:solidFill>
+          <a:ln>
+            <a:noFill/>
+          </a:ln>
+          <a:effectLst/>
+        </p:spPr>
+        <p:style>
+          <a:lnRef idx="1">
+            <a:schemeClr val="accent1"/>
+          </a:lnRef>
+          <a:fillRef idx="3">
+            <a:schemeClr val="accent1"/>
+          </a:fillRef>
+          <a:effectRef idx="2">
+            <a:schemeClr val="accent1"/>
+          </a:effectRef>
+          <a:fontRef idx="minor">
+            <a:schemeClr val="lt1"/>
+          </a:fontRef>
+        </p:style>
+        <p:txBody>
+          <a:bodyPr rtlCol="0" anchor="ctr" wrap="square" lIns="109728" rIns="109728" tIns="64008" bIns="64008"/>
+          <a:lstStyle/>
+          <a:p>
+            <a:pPr algn="ctr"/>
+          </a:p>
+        </p:txBody>
+      </p:sp>
+      <p:sp>
+        <p:nvSpPr>
+          <p:cNvPr id="11" name="Rectangle 10"/>
+          <p:cNvSpPr/>
+          <p:nvPr/>
+        </p:nvSpPr>
+        <p:spPr>
+          <a:xfrm>
+            <a:off x="777240" y="1353312"/>
+            <a:ext cx="41148" cy="2011177"/>
+          </a:xfrm>
+          <a:prstGeom prst="rect">
+            <a:avLst/>
+          </a:prstGeom>
+          <a:solidFill>
+            <a:srgbClr val="4A4F57"/>
+          </a:solidFill>
+          <a:ln>
+            <a:noFill/>
+          </a:ln>
+          <a:effectLst/>
+        </p:spPr>
+        <p:style>
+          <a:lnRef idx="1">
+            <a:schemeClr val="accent1"/>
+          </a:lnRef>
+          <a:fillRef idx="3">
+            <a:schemeClr val="accent1"/>
+          </a:fillRef>
+          <a:effectRef idx="2">
+            <a:schemeClr val="accent1"/>
+          </a:effectRef>
+          <a:fontRef idx="minor">
+            <a:schemeClr val="lt1"/>
+          </a:fontRef>
+        </p:style>
+        <p:txBody>
+          <a:bodyPr rtlCol="0" anchor="ctr" wrap="square" lIns="109728" rIns="109728" tIns="64008" bIns="64008"/>
+          <a:lstStyle/>
+          <a:p>
+            <a:pPr algn="ctr"/>
+          </a:p>
+        </p:txBody>
+      </p:sp>
+      <p:sp>
+        <p:nvSpPr>
+          <p:cNvPr id="12" name="TextBox 11"/>
+          <p:cNvSpPr txBox="1"/>
+          <p:nvPr/>
+        </p:nvSpPr>
+        <p:spPr>
+          <a:xfrm>
+            <a:off x="978408" y="1453896"/>
+            <a:ext cx="4952847" cy="1828297"/>
+          </a:xfrm>
+          <a:prstGeom prst="rect">
+            <a:avLst/>
+          </a:prstGeom>
+          <a:noFill/>
+        </p:spPr>
+        <p:txBody>
+          <a:bodyPr wrap="square" lIns="0" rIns="0" tIns="0" bIns="0" anchor="t">
+            <a:spAutoFit/>
+          </a:bodyPr>
+          <a:lstStyle/>
+          <a:p>
+            <a:pPr algn="l">
+              <a:lnSpc>
+                <a:spcPct val="134000"/>
+              </a:lnSpc>
+              <a:spcBef>
+                <a:spcPts val="0"/>
+              </a:spcBef>
+              <a:spcAft>
+                <a:spcPts val="0"/>
+              </a:spcAft>
+            </a:pPr>
+            <a:r>
+              <a:rPr sz="900" b="0" i="0">
+                <a:solidFill>
+                  <a:srgbClr val="1C1C1E"/>
+                </a:solidFill>
+                <a:latin typeface="Consolas"/>
+              </a:rPr>
+              <a:t>featureset: macro_core</a:t>
+            </a:r>
+          </a:p>
+          <a:p>
+            <a:pPr>
+              <a:lnSpc>
+                <a:spcPct val="134000"/>
+              </a:lnSpc>
+              <a:spcBef>
+                <a:spcPts val="0"/>
+              </a:spcBef>
+              <a:spcAft>
+                <a:spcPts val="0"/>
+              </a:spcAft>
+            </a:pPr>
+            <a:r>
+              <a:rPr sz="900" b="0" i="0">
+                <a:solidFill>
+                  <a:srgbClr val="1C1C1E"/>
+                </a:solidFill>
+                <a:latin typeface="Consolas"/>
+              </a:rPr>
+              <a:t>entity:     us_equity_index      grain: one row per day</a:t>
+            </a:r>
+          </a:p>
+          <a:p>
+            <a:pPr>
+              <a:lnSpc>
+                <a:spcPct val="134000"/>
+              </a:lnSpc>
+              <a:spcBef>
+                <a:spcPts val="0"/>
+              </a:spcBef>
+              <a:spcAft>
+                <a:spcPts val="0"/>
+              </a:spcAft>
+            </a:pPr>
+            <a:r>
+              <a:rPr sz="900" b="0" i="0">
+                <a:solidFill>
+                  <a:srgbClr val="1C1C1E"/>
+                </a:solidFill>
+                <a:latin typeface="Consolas"/>
+              </a:rPr>
+              <a:t>slots:      px_close        numeric   []</a:t>
+            </a:r>
+          </a:p>
+          <a:p>
+            <a:pPr>
+              <a:lnSpc>
+                <a:spcPct val="134000"/>
+              </a:lnSpc>
+              <a:spcBef>
+                <a:spcPts val="0"/>
+              </a:spcBef>
+              <a:spcAft>
+                <a:spcPts val="0"/>
+              </a:spcAft>
+            </a:pPr>
+            <a:r>
+              <a:rPr sz="900" b="0" i="0">
+                <a:solidFill>
+                  <a:srgbClr val="1C1C1E"/>
+                </a:solidFill>
+                <a:latin typeface="Consolas"/>
+              </a:rPr>
+              <a:t>            u3_rate         numeric   []</a:t>
+            </a:r>
+          </a:p>
+          <a:p>
+            <a:pPr>
+              <a:lnSpc>
+                <a:spcPct val="134000"/>
+              </a:lnSpc>
+              <a:spcBef>
+                <a:spcPts val="0"/>
+              </a:spcBef>
+              <a:spcAft>
+                <a:spcPts val="0"/>
+              </a:spcAft>
+            </a:pPr>
+            <a:r>
+              <a:rPr sz="900" b="0" i="0">
+                <a:solidFill>
+                  <a:srgbClr val="1C1C1E"/>
+                </a:solidFill>
+                <a:latin typeface="Consolas"/>
+              </a:rPr>
+              <a:t>            prev_return     numeric   []   (derived)</a:t>
+            </a:r>
+          </a:p>
+          <a:p>
+            <a:pPr>
+              <a:lnSpc>
+                <a:spcPct val="134000"/>
+              </a:lnSpc>
+              <a:spcBef>
+                <a:spcPts val="0"/>
+              </a:spcBef>
+              <a:spcAft>
+                <a:spcPts val="0"/>
+              </a:spcAft>
+            </a:pPr>
+            <a:r>
+              <a:rPr sz="900" b="0" i="0">
+                <a:solidFill>
+                  <a:srgbClr val="1C1C1E"/>
+                </a:solidFill>
+                <a:latin typeface="Consolas"/>
+              </a:rPr>
+              <a:t>label:      next_return</a:t>
+            </a:r>
+          </a:p>
+          <a:p>
+            <a:pPr>
+              <a:lnSpc>
+                <a:spcPct val="134000"/>
+              </a:lnSpc>
+              <a:spcBef>
+                <a:spcPts val="0"/>
+              </a:spcBef>
+              <a:spcAft>
+                <a:spcPts val="0"/>
+              </a:spcAft>
+            </a:pPr>
+            <a:r>
+              <a:rPr sz="900" b="0" i="0">
+                <a:solidFill>
+                  <a:srgbClr val="1C1C1E"/>
+                </a:solidFill>
+                <a:latin typeface="Consolas"/>
+              </a:rPr>
+              <a:t>defaults:</a:t>
+            </a:r>
+          </a:p>
+          <a:p>
+            <a:pPr>
+              <a:lnSpc>
+                <a:spcPct val="134000"/>
+              </a:lnSpc>
+              <a:spcBef>
+                <a:spcPts val="0"/>
+              </a:spcBef>
+              <a:spcAft>
+                <a:spcPts val="0"/>
+              </a:spcAft>
+            </a:pPr>
+            <a:r>
+              <a:rPr sz="900" b="0" i="0">
+                <a:solidFill>
+                  <a:srgbClr val="1C1C1E"/>
+                </a:solidFill>
+                <a:latin typeface="Consolas"/>
+              </a:rPr>
+              <a:t>  align:     {axis: event_ts, rule: flat_forward}</a:t>
+            </a:r>
+          </a:p>
+          <a:p>
+            <a:pPr>
+              <a:lnSpc>
+                <a:spcPct val="134000"/>
+              </a:lnSpc>
+              <a:spcBef>
+                <a:spcPts val="0"/>
+              </a:spcBef>
+              <a:spcAft>
+                <a:spcPts val="0"/>
+              </a:spcAft>
+            </a:pPr>
+            <a:r>
+              <a:rPr sz="900" b="0" i="0">
+                <a:solidFill>
+                  <a:srgbClr val="1C1C1E"/>
+                </a:solidFill>
+                <a:latin typeface="Consolas"/>
+              </a:rPr>
+              <a:t>  normalise: {u3_rate: zscore}</a:t>
+            </a:r>
+          </a:p>
+        </p:txBody>
+      </p:sp>
+      <p:sp>
+        <p:nvSpPr>
+          <p:cNvPr id="13" name="TextBox 12"/>
+          <p:cNvSpPr txBox="1"/>
+          <p:nvPr/>
+        </p:nvSpPr>
+        <p:spPr>
+          <a:xfrm>
+            <a:off x="777240" y="3565657"/>
+            <a:ext cx="5318607" cy="914400"/>
+          </a:xfrm>
+          <a:prstGeom prst="rect">
+            <a:avLst/>
+          </a:prstGeom>
+          <a:noFill/>
+        </p:spPr>
+        <p:txBody>
+          <a:bodyPr wrap="square" lIns="0" rIns="0" tIns="0" bIns="0" anchor="t">
+            <a:spAutoFit/>
+          </a:bodyPr>
+          <a:lstStyle/>
+          <a:p>
+            <a:pPr algn="l">
+              <a:lnSpc>
+                <a:spcPct val="122000"/>
+              </a:lnSpc>
+              <a:spcBef>
+                <a:spcPts val="0"/>
+              </a:spcBef>
+              <a:spcAft>
+                <a:spcPts val="0"/>
+              </a:spcAft>
+            </a:pPr>
+            <a:r>
+              <a:rPr sz="1000" b="1" i="0">
+                <a:solidFill>
+                  <a:srgbClr val="A51C30"/>
+                </a:solidFill>
+                <a:latin typeface="Calibri"/>
+              </a:rPr>
+              <a:t>flat_forward, and only flat_forward. </a:t>
+            </a:r>
+            <a:r>
+              <a:rPr sz="1000" b="0" i="0">
+                <a:solidFill>
+                  <a:srgbClr val="4A4F57"/>
+                </a:solidFill>
+                <a:latin typeface="Calibri"/>
+              </a:rPr>
+              <a:t>Unemployment is monthly and the grid is daily, so the gaps are filled by carrying the last published figure. Interpolating between June and July would use July’s number on the 2nd of July, which nobody had.</a:t>
+            </a:r>
+          </a:p>
+        </p:txBody>
+      </p:sp>
+      <p:graphicFrame>
+        <p:nvGraphicFramePr>
+          <p:cNvPr id="14" name="Table 13"/>
+          <p:cNvGraphicFramePr>
+            <a:graphicFrameLocks noGrp="1"/>
+          </p:cNvGraphicFramePr>
+          <p:nvPr/>
+        </p:nvGraphicFramePr>
+        <p:xfrm>
+          <a:off x="6521336" y="1353312"/>
+          <a:ext cx="4893116" cy="1929913"/>
+        </p:xfrm>
+        <a:graphic>
+          <a:graphicData uri="http://schemas.openxmlformats.org/drawingml/2006/table">
+            <a:tbl>
+              <a:tblPr firstRow="1">
+                <a:tableStyleId>{5C22544A-7EE6-4342-B048-85BDC9FD1C3A}</a:tableStyleId>
+              </a:tblPr>
+              <a:tblGrid>
+                <a:gridCol w="1143252"/>
+                <a:gridCol w="960331"/>
+                <a:gridCol w="823141"/>
+                <a:gridCol w="1051791"/>
+                <a:gridCol w="914601"/>
+              </a:tblGrid>
+              <a:tr h="329184">
+                <a:tc>
+                  <a:txBody>
+                    <a:bodyPr wrap="square"/>
+                    <a:lstStyle/>
+                    <a:p>
+                      <a:pPr algn="l"/>
+                      <a:r>
+                        <a:rPr sz="850" b="1">
+                          <a:solidFill>
+                            <a:srgbClr val="FFFFFF"/>
+                          </a:solidFill>
+                          <a:latin typeface="Calibri"/>
+                        </a:rPr>
+                        <a:t>date</a:t>
+                      </a:r>
+                    </a:p>
+                  </a:txBody>
+                  <a:tcPr marL="82296" marR="64008" marT="32004" marB="32004" anchor="ctr">
+                    <a:solidFill>
+                      <a:srgbClr val="A51C30"/>
+                    </a:solidFill>
+                  </a:tcPr>
+                </a:tc>
+                <a:tc>
+                  <a:txBody>
+                    <a:bodyPr wrap="square"/>
+                    <a:lstStyle/>
+                    <a:p>
+                      <a:pPr algn="l"/>
+                      <a:r>
+                        <a:rPr sz="850" b="1">
+                          <a:solidFill>
+                            <a:srgbClr val="FFFFFF"/>
+                          </a:solidFill>
+                          <a:latin typeface="Calibri"/>
+                        </a:rPr>
+                        <a:t>px_close</a:t>
+                      </a:r>
+                    </a:p>
+                  </a:txBody>
+                  <a:tcPr marL="82296" marR="64008" marT="32004" marB="32004" anchor="ctr">
+                    <a:solidFill>
+                      <a:srgbClr val="A51C30"/>
+                    </a:solidFill>
+                  </a:tcPr>
+                </a:tc>
+                <a:tc>
+                  <a:txBody>
+                    <a:bodyPr wrap="square"/>
+                    <a:lstStyle/>
+                    <a:p>
+                      <a:pPr algn="l"/>
+                      <a:r>
+                        <a:rPr sz="850" b="1">
+                          <a:solidFill>
+                            <a:srgbClr val="FFFFFF"/>
+                          </a:solidFill>
+                          <a:latin typeface="Calibri"/>
+                        </a:rPr>
+                        <a:t>u3_rate</a:t>
+                      </a:r>
+                    </a:p>
+                  </a:txBody>
+                  <a:tcPr marL="82296" marR="64008" marT="32004" marB="32004" anchor="ctr">
+                    <a:solidFill>
+                      <a:srgbClr val="A51C30"/>
+                    </a:solidFill>
+                  </a:tcPr>
+                </a:tc>
+                <a:tc>
+                  <a:txBody>
+                    <a:bodyPr wrap="square"/>
+                    <a:lstStyle/>
+                    <a:p>
+                      <a:pPr algn="l"/>
+                      <a:r>
+                        <a:rPr sz="850" b="1">
+                          <a:solidFill>
+                            <a:srgbClr val="FFFFFF"/>
+                          </a:solidFill>
+                          <a:latin typeface="Calibri"/>
+                        </a:rPr>
+                        <a:t>u3 ingest</a:t>
+                      </a:r>
+                    </a:p>
+                  </a:txBody>
+                  <a:tcPr marL="82296" marR="64008" marT="32004" marB="32004" anchor="ctr">
+                    <a:solidFill>
+                      <a:srgbClr val="A51C30"/>
+                    </a:solidFill>
+                  </a:tcPr>
+                </a:tc>
+                <a:tc>
+                  <a:txBody>
+                    <a:bodyPr wrap="square"/>
+                    <a:lstStyle/>
+                    <a:p>
+                      <a:pPr algn="l"/>
+                      <a:r>
+                        <a:rPr sz="850" b="1">
+                          <a:solidFill>
+                            <a:srgbClr val="FFFFFF"/>
+                          </a:solidFill>
+                          <a:latin typeface="Calibri"/>
+                        </a:rPr>
+                        <a:t>usable at t?</a:t>
+                      </a:r>
+                    </a:p>
+                  </a:txBody>
+                  <a:tcPr marL="82296" marR="64008" marT="32004" marB="32004" anchor="ctr">
+                    <a:solidFill>
+                      <a:srgbClr val="A51C30"/>
+                    </a:solidFill>
+                  </a:tcPr>
+                </a:tc>
+              </a:tr>
+              <a:tr h="291172">
+                <a:tc>
+                  <a:txBody>
+                    <a:bodyPr wrap="square"/>
+                    <a:lstStyle/>
+                    <a:p>
+                      <a:pPr algn="l"/>
+                      <a:r>
+                        <a:rPr sz="850" b="1">
+                          <a:solidFill>
+                            <a:srgbClr val="A51C30"/>
+                          </a:solidFill>
+                          <a:latin typeface="Calibri"/>
+                        </a:rPr>
+                        <a:t>2026-09-01</a:t>
+                      </a:r>
+                    </a:p>
+                  </a:txBody>
+                  <a:tcPr marL="82296" marR="64008" marT="32004" marB="32004" anchor="ctr">
+                    <a:solidFill>
+                      <a:srgbClr val="FFFFFF"/>
+                    </a:solidFill>
+                  </a:tcPr>
+                </a:tc>
+                <a:tc>
+                  <a:txBody>
+                    <a:bodyPr wrap="square"/>
+                    <a:lstStyle/>
+                    <a:p>
+                      <a:pPr algn="l"/>
+                      <a:r>
+                        <a:rPr sz="850" b="0">
+                          <a:solidFill>
+                            <a:srgbClr val="1C1C1E"/>
+                          </a:solidFill>
+                          <a:latin typeface="Calibri"/>
+                        </a:rPr>
+                        <a:t>99.43</a:t>
+                      </a:r>
+                    </a:p>
+                  </a:txBody>
+                  <a:tcPr marL="82296" marR="64008" marT="32004" marB="32004" anchor="ctr">
+                    <a:solidFill>
+                      <a:srgbClr val="FFFFFF"/>
+                    </a:solidFill>
+                  </a:tcPr>
+                </a:tc>
+                <a:tc>
+                  <a:txBody>
+                    <a:bodyPr wrap="square"/>
+                    <a:lstStyle/>
+                    <a:p>
+                      <a:pPr algn="l"/>
+                      <a:r>
+                        <a:rPr sz="850" b="0">
+                          <a:solidFill>
+                            <a:srgbClr val="1C1C1E"/>
+                          </a:solidFill>
+                          <a:latin typeface="Calibri"/>
+                        </a:rPr>
+                        <a:t>4.1</a:t>
+                      </a:r>
+                    </a:p>
+                  </a:txBody>
+                  <a:tcPr marL="82296" marR="64008" marT="32004" marB="32004" anchor="ctr">
+                    <a:solidFill>
+                      <a:srgbClr val="FFFFFF"/>
+                    </a:solidFill>
+                  </a:tcPr>
+                </a:tc>
+                <a:tc>
+                  <a:txBody>
+                    <a:bodyPr wrap="square"/>
+                    <a:lstStyle/>
+                    <a:p>
+                      <a:pPr algn="l"/>
+                      <a:r>
+                        <a:rPr sz="850" b="0">
+                          <a:solidFill>
+                            <a:srgbClr val="1C1C1E"/>
+                          </a:solidFill>
+                          <a:latin typeface="Calibri"/>
+                        </a:rPr>
+                        <a:t>2026-08-07</a:t>
+                      </a:r>
+                    </a:p>
+                  </a:txBody>
+                  <a:tcPr marL="82296" marR="64008" marT="32004" marB="32004" anchor="ctr">
+                    <a:solidFill>
+                      <a:srgbClr val="FFFFFF"/>
+                    </a:solidFill>
+                  </a:tcPr>
+                </a:tc>
+                <a:tc>
+                  <a:txBody>
+                    <a:bodyPr wrap="square"/>
+                    <a:lstStyle/>
+                    <a:p>
+                      <a:pPr algn="l"/>
+                      <a:r>
+                        <a:rPr sz="850" b="0">
+                          <a:solidFill>
+                            <a:srgbClr val="1C1C1E"/>
+                          </a:solidFill>
+                          <a:latin typeface="Calibri"/>
+                        </a:rPr>
+                        <a:t>yes — July’s</a:t>
+                      </a:r>
+                    </a:p>
+                  </a:txBody>
+                  <a:tcPr marL="82296" marR="64008" marT="32004" marB="32004" anchor="ctr">
+                    <a:solidFill>
+                      <a:srgbClr val="FFFFFF"/>
+                    </a:solidFill>
+                  </a:tcPr>
+                </a:tc>
+              </a:tr>
+              <a:tr h="291172">
+                <a:tc>
+                  <a:txBody>
+                    <a:bodyPr wrap="square"/>
+                    <a:lstStyle/>
+                    <a:p>
+                      <a:pPr algn="l"/>
+                      <a:r>
+                        <a:rPr sz="850" b="1">
+                          <a:solidFill>
+                            <a:srgbClr val="A51C30"/>
+                          </a:solidFill>
+                          <a:latin typeface="Calibri"/>
+                        </a:rPr>
+                        <a:t>2026-09-02</a:t>
+                      </a:r>
+                    </a:p>
+                  </a:txBody>
+                  <a:tcPr marL="82296" marR="64008" marT="32004" marB="32004" anchor="ctr">
+                    <a:solidFill>
+                      <a:srgbClr val="F6F3EF"/>
+                    </a:solidFill>
+                  </a:tcPr>
+                </a:tc>
+                <a:tc>
+                  <a:txBody>
+                    <a:bodyPr wrap="square"/>
+                    <a:lstStyle/>
+                    <a:p>
+                      <a:pPr algn="l"/>
+                      <a:r>
+                        <a:rPr sz="850" b="0">
+                          <a:solidFill>
+                            <a:srgbClr val="1C1C1E"/>
+                          </a:solidFill>
+                          <a:latin typeface="Calibri"/>
+                        </a:rPr>
+                        <a:t>99.10</a:t>
+                      </a:r>
+                    </a:p>
+                  </a:txBody>
+                  <a:tcPr marL="82296" marR="64008" marT="32004" marB="32004" anchor="ctr">
+                    <a:solidFill>
+                      <a:srgbClr val="F6F3EF"/>
+                    </a:solidFill>
+                  </a:tcPr>
+                </a:tc>
+                <a:tc>
+                  <a:txBody>
+                    <a:bodyPr wrap="square"/>
+                    <a:lstStyle/>
+                    <a:p>
+                      <a:pPr algn="l"/>
+                      <a:r>
+                        <a:rPr sz="850" b="0">
+                          <a:solidFill>
+                            <a:srgbClr val="1C1C1E"/>
+                          </a:solidFill>
+                          <a:latin typeface="Calibri"/>
+                        </a:rPr>
+                        <a:t>4.1</a:t>
+                      </a:r>
+                    </a:p>
+                  </a:txBody>
+                  <a:tcPr marL="82296" marR="64008" marT="32004" marB="32004" anchor="ctr">
+                    <a:solidFill>
+                      <a:srgbClr val="F6F3EF"/>
+                    </a:solidFill>
+                  </a:tcPr>
+                </a:tc>
+                <a:tc>
+                  <a:txBody>
+                    <a:bodyPr wrap="square"/>
+                    <a:lstStyle/>
+                    <a:p>
+                      <a:pPr algn="l"/>
+                      <a:r>
+                        <a:rPr sz="850" b="0">
+                          <a:solidFill>
+                            <a:srgbClr val="1C1C1E"/>
+                          </a:solidFill>
+                          <a:latin typeface="Calibri"/>
+                        </a:rPr>
+                        <a:t>2026-08-07</a:t>
+                      </a:r>
+                    </a:p>
+                  </a:txBody>
+                  <a:tcPr marL="82296" marR="64008" marT="32004" marB="32004" anchor="ctr">
+                    <a:solidFill>
+                      <a:srgbClr val="F6F3EF"/>
+                    </a:solidFill>
+                  </a:tcPr>
+                </a:tc>
+                <a:tc>
+                  <a:txBody>
+                    <a:bodyPr wrap="square"/>
+                    <a:lstStyle/>
+                    <a:p>
+                      <a:pPr algn="l"/>
+                      <a:r>
+                        <a:rPr sz="850" b="0">
+                          <a:solidFill>
+                            <a:srgbClr val="1C1C1E"/>
+                          </a:solidFill>
+                          <a:latin typeface="Calibri"/>
+                        </a:rPr>
+                        <a:t>yes</a:t>
+                      </a:r>
+                    </a:p>
+                  </a:txBody>
+                  <a:tcPr marL="82296" marR="64008" marT="32004" marB="32004" anchor="ctr">
+                    <a:solidFill>
+                      <a:srgbClr val="F6F3EF"/>
+                    </a:solidFill>
+                  </a:tcPr>
+                </a:tc>
+              </a:tr>
+              <a:tr h="291172">
+                <a:tc>
+                  <a:txBody>
+                    <a:bodyPr wrap="square"/>
+                    <a:lstStyle/>
+                    <a:p>
+                      <a:pPr algn="l"/>
+                      <a:r>
+                        <a:rPr sz="850" b="1">
+                          <a:solidFill>
+                            <a:srgbClr val="A51C30"/>
+                          </a:solidFill>
+                          <a:latin typeface="Calibri"/>
+                        </a:rPr>
+                        <a:t>2026-09-03</a:t>
+                      </a:r>
+                    </a:p>
+                  </a:txBody>
+                  <a:tcPr marL="82296" marR="64008" marT="32004" marB="32004" anchor="ctr">
+                    <a:solidFill>
+                      <a:srgbClr val="FFFFFF"/>
+                    </a:solidFill>
+                  </a:tcPr>
+                </a:tc>
+                <a:tc>
+                  <a:txBody>
+                    <a:bodyPr wrap="square"/>
+                    <a:lstStyle/>
+                    <a:p>
+                      <a:pPr algn="l"/>
+                      <a:r>
+                        <a:rPr sz="850" b="0">
+                          <a:solidFill>
+                            <a:srgbClr val="1C1C1E"/>
+                          </a:solidFill>
+                          <a:latin typeface="Calibri"/>
+                        </a:rPr>
+                        <a:t>98.72</a:t>
+                      </a:r>
+                    </a:p>
+                  </a:txBody>
+                  <a:tcPr marL="82296" marR="64008" marT="32004" marB="32004" anchor="ctr">
+                    <a:solidFill>
+                      <a:srgbClr val="FFFFFF"/>
+                    </a:solidFill>
+                  </a:tcPr>
+                </a:tc>
+                <a:tc>
+                  <a:txBody>
+                    <a:bodyPr wrap="square"/>
+                    <a:lstStyle/>
+                    <a:p>
+                      <a:pPr algn="l"/>
+                      <a:r>
+                        <a:rPr sz="850" b="0">
+                          <a:solidFill>
+                            <a:srgbClr val="1C1C1E"/>
+                          </a:solidFill>
+                          <a:latin typeface="Calibri"/>
+                        </a:rPr>
+                        <a:t>4.1</a:t>
+                      </a:r>
+                    </a:p>
+                  </a:txBody>
+                  <a:tcPr marL="82296" marR="64008" marT="32004" marB="32004" anchor="ctr">
+                    <a:solidFill>
+                      <a:srgbClr val="FFFFFF"/>
+                    </a:solidFill>
+                  </a:tcPr>
+                </a:tc>
+                <a:tc>
+                  <a:txBody>
+                    <a:bodyPr wrap="square"/>
+                    <a:lstStyle/>
+                    <a:p>
+                      <a:pPr algn="l"/>
+                      <a:r>
+                        <a:rPr sz="850" b="0">
+                          <a:solidFill>
+                            <a:srgbClr val="1C1C1E"/>
+                          </a:solidFill>
+                          <a:latin typeface="Calibri"/>
+                        </a:rPr>
+                        <a:t>2026-08-07</a:t>
+                      </a:r>
+                    </a:p>
+                  </a:txBody>
+                  <a:tcPr marL="82296" marR="64008" marT="32004" marB="32004" anchor="ctr">
+                    <a:solidFill>
+                      <a:srgbClr val="FFFFFF"/>
+                    </a:solidFill>
+                  </a:tcPr>
+                </a:tc>
+                <a:tc>
+                  <a:txBody>
+                    <a:bodyPr wrap="square"/>
+                    <a:lstStyle/>
+                    <a:p>
+                      <a:pPr algn="l"/>
+                      <a:r>
+                        <a:rPr sz="850" b="0">
+                          <a:solidFill>
+                            <a:srgbClr val="1C1C1E"/>
+                          </a:solidFill>
+                          <a:latin typeface="Calibri"/>
+                        </a:rPr>
+                        <a:t>yes</a:t>
+                      </a:r>
+                    </a:p>
+                  </a:txBody>
+                  <a:tcPr marL="82296" marR="64008" marT="32004" marB="32004" anchor="ctr">
+                    <a:solidFill>
+                      <a:srgbClr val="FFFFFF"/>
+                    </a:solidFill>
+                  </a:tcPr>
+                </a:tc>
+              </a:tr>
+              <a:tr h="436041">
+                <a:tc>
+                  <a:txBody>
+                    <a:bodyPr wrap="square"/>
+                    <a:lstStyle/>
+                    <a:p>
+                      <a:pPr algn="l"/>
+                      <a:r>
+                        <a:rPr sz="850" b="1">
+                          <a:solidFill>
+                            <a:srgbClr val="A51C30"/>
+                          </a:solidFill>
+                          <a:latin typeface="Calibri"/>
+                        </a:rPr>
+                        <a:t>2026-09-04</a:t>
+                      </a:r>
+                    </a:p>
+                  </a:txBody>
+                  <a:tcPr marL="82296" marR="64008" marT="32004" marB="32004" anchor="ctr">
+                    <a:solidFill>
+                      <a:srgbClr val="F6F3EF"/>
+                    </a:solidFill>
+                  </a:tcPr>
+                </a:tc>
+                <a:tc>
+                  <a:txBody>
+                    <a:bodyPr wrap="square"/>
+                    <a:lstStyle/>
+                    <a:p>
+                      <a:pPr algn="l"/>
+                      <a:r>
+                        <a:rPr sz="850" b="0">
+                          <a:solidFill>
+                            <a:srgbClr val="1C1C1E"/>
+                          </a:solidFill>
+                          <a:latin typeface="Calibri"/>
+                        </a:rPr>
+                        <a:t>98.95</a:t>
+                      </a:r>
+                    </a:p>
+                  </a:txBody>
+                  <a:tcPr marL="82296" marR="64008" marT="32004" marB="32004" anchor="ctr">
+                    <a:solidFill>
+                      <a:srgbClr val="F6F3EF"/>
+                    </a:solidFill>
+                  </a:tcPr>
+                </a:tc>
+                <a:tc>
+                  <a:txBody>
+                    <a:bodyPr wrap="square"/>
+                    <a:lstStyle/>
+                    <a:p>
+                      <a:pPr algn="l"/>
+                      <a:r>
+                        <a:rPr sz="850" b="0">
+                          <a:solidFill>
+                            <a:srgbClr val="1C1C1E"/>
+                          </a:solidFill>
+                          <a:latin typeface="Calibri"/>
+                        </a:rPr>
+                        <a:t>4.0</a:t>
+                      </a:r>
+                    </a:p>
+                  </a:txBody>
+                  <a:tcPr marL="82296" marR="64008" marT="32004" marB="32004" anchor="ctr">
+                    <a:solidFill>
+                      <a:srgbClr val="F6F3EF"/>
+                    </a:solidFill>
+                  </a:tcPr>
+                </a:tc>
+                <a:tc>
+                  <a:txBody>
+                    <a:bodyPr wrap="square"/>
+                    <a:lstStyle/>
+                    <a:p>
+                      <a:pPr algn="l"/>
+                      <a:r>
+                        <a:rPr sz="850" b="0">
+                          <a:solidFill>
+                            <a:srgbClr val="1C1C1E"/>
+                          </a:solidFill>
+                          <a:latin typeface="Calibri"/>
+                        </a:rPr>
+                        <a:t>2026-09-04</a:t>
+                      </a:r>
+                    </a:p>
+                  </a:txBody>
+                  <a:tcPr marL="82296" marR="64008" marT="32004" marB="32004" anchor="ctr">
+                    <a:solidFill>
+                      <a:srgbClr val="F6F3EF"/>
+                    </a:solidFill>
+                  </a:tcPr>
+                </a:tc>
+                <a:tc>
+                  <a:txBody>
+                    <a:bodyPr wrap="square"/>
+                    <a:lstStyle/>
+                    <a:p>
+                      <a:pPr algn="l"/>
+                      <a:r>
+                        <a:rPr sz="850" b="0">
+                          <a:solidFill>
+                            <a:srgbClr val="1C1C1E"/>
+                          </a:solidFill>
+                          <a:latin typeface="Calibri"/>
+                        </a:rPr>
+                        <a:t>yes — August lands</a:t>
+                      </a:r>
+                    </a:p>
+                  </a:txBody>
+                  <a:tcPr marL="82296" marR="64008" marT="32004" marB="32004" anchor="ctr">
+                    <a:solidFill>
+                      <a:srgbClr val="F6F3EF"/>
+                    </a:solidFill>
+                  </a:tcPr>
+                </a:tc>
+              </a:tr>
+              <a:tr h="291172">
+                <a:tc>
+                  <a:txBody>
+                    <a:bodyPr wrap="square"/>
+                    <a:lstStyle/>
+                    <a:p>
+                      <a:pPr algn="l"/>
+                      <a:r>
+                        <a:rPr sz="850" b="1">
+                          <a:solidFill>
+                            <a:srgbClr val="A51C30"/>
+                          </a:solidFill>
+                          <a:latin typeface="Calibri"/>
+                        </a:rPr>
+                        <a:t>2026-09-05</a:t>
+                      </a:r>
+                    </a:p>
+                  </a:txBody>
+                  <a:tcPr marL="82296" marR="64008" marT="32004" marB="32004" anchor="ctr">
+                    <a:solidFill>
+                      <a:srgbClr val="FFFFFF"/>
+                    </a:solidFill>
+                  </a:tcPr>
+                </a:tc>
+                <a:tc>
+                  <a:txBody>
+                    <a:bodyPr wrap="square"/>
+                    <a:lstStyle/>
+                    <a:p>
+                      <a:pPr algn="l"/>
+                      <a:r>
+                        <a:rPr sz="850" b="0">
+                          <a:solidFill>
+                            <a:srgbClr val="1C1C1E"/>
+                          </a:solidFill>
+                          <a:latin typeface="Calibri"/>
+                        </a:rPr>
+                        <a:t>99.31</a:t>
+                      </a:r>
+                    </a:p>
+                  </a:txBody>
+                  <a:tcPr marL="82296" marR="64008" marT="32004" marB="32004" anchor="ctr">
+                    <a:solidFill>
+                      <a:srgbClr val="FFFFFF"/>
+                    </a:solidFill>
+                  </a:tcPr>
+                </a:tc>
+                <a:tc>
+                  <a:txBody>
+                    <a:bodyPr wrap="square"/>
+                    <a:lstStyle/>
+                    <a:p>
+                      <a:pPr algn="l"/>
+                      <a:r>
+                        <a:rPr sz="850" b="0">
+                          <a:solidFill>
+                            <a:srgbClr val="1C1C1E"/>
+                          </a:solidFill>
+                          <a:latin typeface="Calibri"/>
+                        </a:rPr>
+                        <a:t>4.0</a:t>
+                      </a:r>
+                    </a:p>
+                  </a:txBody>
+                  <a:tcPr marL="82296" marR="64008" marT="32004" marB="32004" anchor="ctr">
+                    <a:solidFill>
+                      <a:srgbClr val="FFFFFF"/>
+                    </a:solidFill>
+                  </a:tcPr>
+                </a:tc>
+                <a:tc>
+                  <a:txBody>
+                    <a:bodyPr wrap="square"/>
+                    <a:lstStyle/>
+                    <a:p>
+                      <a:pPr algn="l"/>
+                      <a:r>
+                        <a:rPr sz="850" b="0">
+                          <a:solidFill>
+                            <a:srgbClr val="1C1C1E"/>
+                          </a:solidFill>
+                          <a:latin typeface="Calibri"/>
+                        </a:rPr>
+                        <a:t>2026-09-04</a:t>
+                      </a:r>
+                    </a:p>
+                  </a:txBody>
+                  <a:tcPr marL="82296" marR="64008" marT="32004" marB="32004" anchor="ctr">
+                    <a:solidFill>
+                      <a:srgbClr val="FFFFFF"/>
+                    </a:solidFill>
+                  </a:tcPr>
+                </a:tc>
+                <a:tc>
+                  <a:txBody>
+                    <a:bodyPr wrap="square"/>
+                    <a:lstStyle/>
+                    <a:p>
+                      <a:pPr algn="l"/>
+                      <a:r>
+                        <a:rPr sz="850" b="0">
+                          <a:solidFill>
+                            <a:srgbClr val="1C1C1E"/>
+                          </a:solidFill>
+                          <a:latin typeface="Calibri"/>
+                        </a:rPr>
+                        <a:t>yes</a:t>
+                      </a:r>
+                    </a:p>
+                  </a:txBody>
+                  <a:tcPr marL="82296" marR="64008" marT="32004" marB="32004" anchor="ctr">
+                    <a:solidFill>
+                      <a:srgbClr val="FFFFFF"/>
+                    </a:solidFill>
+                  </a:tcPr>
+                </a:tc>
+              </a:tr>
+            </a:tbl>
+          </a:graphicData>
+        </a:graphic>
+      </p:graphicFrame>
+      <p:sp>
+        <p:nvSpPr>
+          <p:cNvPr id="15" name="Rectangle 14"/>
+          <p:cNvSpPr/>
+          <p:nvPr/>
+        </p:nvSpPr>
+        <p:spPr>
+          <a:xfrm>
+            <a:off x="6521336" y="3466109"/>
+            <a:ext cx="4893118" cy="1133856"/>
+          </a:xfrm>
+          <a:prstGeom prst="rect">
+            <a:avLst/>
+          </a:prstGeom>
+          <a:solidFill>
+            <a:srgbClr val="F6F3EF"/>
+          </a:solidFill>
+          <a:ln>
+            <a:noFill/>
+          </a:ln>
+          <a:effectLst/>
+        </p:spPr>
+        <p:style>
+          <a:lnRef idx="1">
+            <a:schemeClr val="accent1"/>
+          </a:lnRef>
+          <a:fillRef idx="3">
+            <a:schemeClr val="accent1"/>
+          </a:fillRef>
+          <a:effectRef idx="2">
+            <a:schemeClr val="accent1"/>
+          </a:effectRef>
+          <a:fontRef idx="minor">
+            <a:schemeClr val="lt1"/>
+          </a:fontRef>
+        </p:style>
+        <p:txBody>
+          <a:bodyPr rtlCol="0" anchor="ctr" wrap="square" lIns="109728" rIns="109728" tIns="64008" bIns="64008"/>
+          <a:lstStyle/>
+          <a:p>
+            <a:pPr algn="ctr"/>
+          </a:p>
+        </p:txBody>
+      </p:sp>
+      <p:sp>
+        <p:nvSpPr>
+          <p:cNvPr id="16" name="Rectangle 15"/>
+          <p:cNvSpPr/>
+          <p:nvPr/>
+        </p:nvSpPr>
+        <p:spPr>
+          <a:xfrm>
+            <a:off x="6521336" y="3466109"/>
+            <a:ext cx="41148" cy="1133856"/>
+          </a:xfrm>
+          <a:prstGeom prst="rect">
+            <a:avLst/>
+          </a:prstGeom>
+          <a:solidFill>
+            <a:srgbClr val="A51C30"/>
+          </a:solidFill>
+          <a:ln>
+            <a:noFill/>
+          </a:ln>
+          <a:effectLst/>
+        </p:spPr>
+        <p:style>
+          <a:lnRef idx="1">
+            <a:schemeClr val="accent1"/>
+          </a:lnRef>
+          <a:fillRef idx="3">
+            <a:schemeClr val="accent1"/>
+          </a:fillRef>
+          <a:effectRef idx="2">
+            <a:schemeClr val="accent1"/>
+          </a:effectRef>
+          <a:fontRef idx="minor">
+            <a:schemeClr val="lt1"/>
+          </a:fontRef>
+        </p:style>
+        <p:txBody>
+          <a:bodyPr rtlCol="0" anchor="ctr" wrap="square" lIns="109728" rIns="109728" tIns="64008" bIns="64008"/>
+          <a:lstStyle/>
+          <a:p>
+            <a:pPr algn="ctr"/>
+          </a:p>
+        </p:txBody>
+      </p:sp>
+      <p:sp>
+        <p:nvSpPr>
+          <p:cNvPr id="17" name="TextBox 16"/>
+          <p:cNvSpPr txBox="1"/>
+          <p:nvPr/>
+        </p:nvSpPr>
+        <p:spPr>
+          <a:xfrm>
+            <a:off x="6759080" y="3584981"/>
+            <a:ext cx="4435918" cy="914400"/>
+          </a:xfrm>
+          <a:prstGeom prst="rect">
+            <a:avLst/>
+          </a:prstGeom>
+          <a:noFill/>
+        </p:spPr>
+        <p:txBody>
+          <a:bodyPr wrap="square" lIns="0" rIns="0" tIns="0" bIns="0" anchor="t">
+            <a:spAutoFit/>
+          </a:bodyPr>
+          <a:lstStyle/>
+          <a:p>
+            <a:pPr algn="l">
+              <a:lnSpc>
+                <a:spcPct val="124000"/>
+              </a:lnSpc>
+              <a:spcBef>
+                <a:spcPts val="0"/>
+              </a:spcBef>
+              <a:spcAft>
+                <a:spcPts val="0"/>
+              </a:spcAft>
+            </a:pPr>
+            <a:r>
+              <a:rPr sz="1050" b="1" i="0">
+                <a:solidFill>
+                  <a:srgbClr val="A51C30"/>
+                </a:solidFill>
+                <a:latin typeface="Calibri"/>
+              </a:rPr>
+              <a:t>The carried value keeps the clock it was published on. </a:t>
+            </a:r>
+            <a:r>
+              <a:rPr sz="1050" b="0" i="0">
+                <a:solidFill>
+                  <a:srgbClr val="1C1C1E"/>
+                </a:solidFill>
+                <a:latin typeface="Calibri"/>
+              </a:rPr>
+              <a:t>Rows on the 1st to the 3rd hold July’s 4.1, stamped 7 August. On the 4th, August’s 4.0 arrives and is stamped that day — </a:t>
+            </a:r>
+            <a:r>
+              <a:rPr sz="1050" b="1" i="0">
+                <a:solidFill>
+                  <a:srgbClr val="1C1C1E"/>
+                </a:solidFill>
+                <a:latin typeface="Calibri"/>
+              </a:rPr>
+              <a:t>so a point-in-time read as of the 2nd cannot see it, by the ordinary rule and without anybody remembering a flag.</a:t>
             </a:r>
           </a:p>
         </p:txBody>
@@ -23337,7 +26498,7 @@
         <p:spPr>
           <a:xfrm>
             <a:off x="777240" y="1353312"/>
-            <a:ext cx="10637215" cy="1060704"/>
+            <a:ext cx="10637215" cy="1152144"/>
           </a:xfrm>
           <a:prstGeom prst="rect">
             <a:avLst/>
@@ -23381,7 +26542,7 @@
         <p:spPr>
           <a:xfrm>
             <a:off x="777240" y="1353312"/>
-            <a:ext cx="45720" cy="1060704"/>
+            <a:ext cx="45720" cy="1152144"/>
           </a:xfrm>
           <a:prstGeom prst="rect">
             <a:avLst/>
@@ -23424,8 +26585,8 @@
         </p:nvSpPr>
         <p:spPr>
           <a:xfrm>
-            <a:off x="777240" y="1499616"/>
-            <a:ext cx="10637215" cy="475488"/>
+            <a:off x="777240" y="1481328"/>
+            <a:ext cx="10637215" cy="566928"/>
           </a:xfrm>
           <a:prstGeom prst="rect">
             <a:avLst/>
@@ -23520,8 +26681,8 @@
         </p:nvSpPr>
         <p:spPr>
           <a:xfrm>
-            <a:off x="1005840" y="2029967"/>
-            <a:ext cx="2453563" cy="329184"/>
+            <a:off x="1005840" y="2103120"/>
+            <a:ext cx="2453563" cy="365760"/>
           </a:xfrm>
           <a:prstGeom prst="rect">
             <a:avLst/>
@@ -23590,8 +26751,8 @@
         </p:nvSpPr>
         <p:spPr>
           <a:xfrm>
-            <a:off x="3550843" y="2029967"/>
-            <a:ext cx="2453563" cy="329184"/>
+            <a:off x="3550843" y="2103120"/>
+            <a:ext cx="2453563" cy="365760"/>
           </a:xfrm>
           <a:prstGeom prst="rect">
             <a:avLst/>
@@ -23660,8 +26821,8 @@
         </p:nvSpPr>
         <p:spPr>
           <a:xfrm>
-            <a:off x="6095847" y="2029967"/>
-            <a:ext cx="2453563" cy="329184"/>
+            <a:off x="6095847" y="2103120"/>
+            <a:ext cx="2453563" cy="365760"/>
           </a:xfrm>
           <a:prstGeom prst="rect">
             <a:avLst/>
@@ -23730,8 +26891,8 @@
         </p:nvSpPr>
         <p:spPr>
           <a:xfrm>
-            <a:off x="8640851" y="2029967"/>
-            <a:ext cx="2453563" cy="329184"/>
+            <a:off x="8640851" y="2103120"/>
+            <a:ext cx="2453563" cy="365760"/>
           </a:xfrm>
           <a:prstGeom prst="rect">
             <a:avLst/>
@@ -23800,8 +26961,8 @@
         </p:nvSpPr>
         <p:spPr>
           <a:xfrm>
-            <a:off x="777240" y="2651760"/>
-            <a:ext cx="2010399" cy="2395728"/>
+            <a:off x="777240" y="2724912"/>
+            <a:ext cx="2010399" cy="2340864"/>
           </a:xfrm>
           <a:prstGeom prst="rect">
             <a:avLst/>
@@ -23846,7 +27007,7 @@
         </p:nvSpPr>
         <p:spPr>
           <a:xfrm>
-            <a:off x="777240" y="2651760"/>
+            <a:off x="777240" y="2724912"/>
             <a:ext cx="2010399" cy="45720"/>
           </a:xfrm>
           <a:prstGeom prst="rect">
@@ -23890,8 +27051,8 @@
         </p:nvSpPr>
         <p:spPr>
           <a:xfrm>
-            <a:off x="905256" y="2798064"/>
-            <a:ext cx="1754367" cy="2103120"/>
+            <a:off x="905256" y="2871216"/>
+            <a:ext cx="1754367" cy="2048256"/>
           </a:xfrm>
           <a:prstGeom prst="rect">
             <a:avLst/>
@@ -23985,8 +27146,8 @@
         </p:nvSpPr>
         <p:spPr>
           <a:xfrm>
-            <a:off x="2933943" y="2651760"/>
-            <a:ext cx="2010399" cy="2395728"/>
+            <a:off x="2933943" y="2724912"/>
+            <a:ext cx="2010399" cy="2340864"/>
           </a:xfrm>
           <a:prstGeom prst="rect">
             <a:avLst/>
@@ -24031,7 +27192,7 @@
         </p:nvSpPr>
         <p:spPr>
           <a:xfrm>
-            <a:off x="2933943" y="2651760"/>
+            <a:off x="2933943" y="2724912"/>
             <a:ext cx="2010399" cy="45720"/>
           </a:xfrm>
           <a:prstGeom prst="rect">
@@ -24075,8 +27236,8 @@
         </p:nvSpPr>
         <p:spPr>
           <a:xfrm>
-            <a:off x="3061959" y="2798064"/>
-            <a:ext cx="1754367" cy="2103120"/>
+            <a:off x="3061959" y="2871216"/>
+            <a:ext cx="1754367" cy="2048256"/>
           </a:xfrm>
           <a:prstGeom prst="rect">
             <a:avLst/>
@@ -24170,8 +27331,8 @@
         </p:nvSpPr>
         <p:spPr>
           <a:xfrm>
-            <a:off x="5090647" y="2651760"/>
-            <a:ext cx="2010399" cy="2395728"/>
+            <a:off x="5090647" y="2724912"/>
+            <a:ext cx="2010399" cy="2340864"/>
           </a:xfrm>
           <a:prstGeom prst="rect">
             <a:avLst/>
@@ -24216,7 +27377,7 @@
         </p:nvSpPr>
         <p:spPr>
           <a:xfrm>
-            <a:off x="5090647" y="2651760"/>
+            <a:off x="5090647" y="2724912"/>
             <a:ext cx="2010399" cy="45720"/>
           </a:xfrm>
           <a:prstGeom prst="rect">
@@ -24260,8 +27421,8 @@
         </p:nvSpPr>
         <p:spPr>
           <a:xfrm>
-            <a:off x="5218663" y="2798064"/>
-            <a:ext cx="1754367" cy="2103120"/>
+            <a:off x="5218663" y="2871216"/>
+            <a:ext cx="1754367" cy="2048256"/>
           </a:xfrm>
           <a:prstGeom prst="rect">
             <a:avLst/>
@@ -24355,8 +27516,8 @@
         </p:nvSpPr>
         <p:spPr>
           <a:xfrm>
-            <a:off x="7247351" y="2651760"/>
-            <a:ext cx="2010399" cy="2395728"/>
+            <a:off x="7247351" y="2724912"/>
+            <a:ext cx="2010399" cy="2340864"/>
           </a:xfrm>
           <a:prstGeom prst="rect">
             <a:avLst/>
@@ -24401,7 +27562,7 @@
         </p:nvSpPr>
         <p:spPr>
           <a:xfrm>
-            <a:off x="7247351" y="2651760"/>
+            <a:off x="7247351" y="2724912"/>
             <a:ext cx="2010399" cy="45720"/>
           </a:xfrm>
           <a:prstGeom prst="rect">
@@ -24445,8 +27606,8 @@
         </p:nvSpPr>
         <p:spPr>
           <a:xfrm>
-            <a:off x="7375367" y="2798064"/>
-            <a:ext cx="1754367" cy="2103120"/>
+            <a:off x="7375367" y="2871216"/>
+            <a:ext cx="1754367" cy="2048256"/>
           </a:xfrm>
           <a:prstGeom prst="rect">
             <a:avLst/>
@@ -24540,8 +27701,8 @@
         </p:nvSpPr>
         <p:spPr>
           <a:xfrm>
-            <a:off x="9404055" y="2651760"/>
-            <a:ext cx="2010399" cy="2395728"/>
+            <a:off x="9404055" y="2724912"/>
+            <a:ext cx="2010399" cy="2340864"/>
           </a:xfrm>
           <a:prstGeom prst="rect">
             <a:avLst/>
@@ -24586,7 +27747,7 @@
         </p:nvSpPr>
         <p:spPr>
           <a:xfrm>
-            <a:off x="9404055" y="2651760"/>
+            <a:off x="9404055" y="2724912"/>
             <a:ext cx="2010399" cy="45720"/>
           </a:xfrm>
           <a:prstGeom prst="rect">
@@ -24630,8 +27791,8 @@
         </p:nvSpPr>
         <p:spPr>
           <a:xfrm>
-            <a:off x="9532071" y="2798064"/>
-            <a:ext cx="1754367" cy="2103120"/>
+            <a:off x="9532071" y="2871216"/>
+            <a:ext cx="1754367" cy="2048256"/>
           </a:xfrm>
           <a:prstGeom prst="rect">
             <a:avLst/>
@@ -24725,7 +27886,7 @@
         </p:nvSpPr>
         <p:spPr>
           <a:xfrm>
-            <a:off x="777240" y="5230368"/>
+            <a:off x="777240" y="5248656"/>
             <a:ext cx="10637215" cy="731520"/>
           </a:xfrm>
           <a:prstGeom prst="rect">
@@ -24769,7 +27930,7 @@
         </p:nvSpPr>
         <p:spPr>
           <a:xfrm>
-            <a:off x="777240" y="5230368"/>
+            <a:off x="777240" y="5248656"/>
             <a:ext cx="41148" cy="731520"/>
           </a:xfrm>
           <a:prstGeom prst="rect">
@@ -24813,7 +27974,7 @@
         </p:nvSpPr>
         <p:spPr>
           <a:xfrm>
-            <a:off x="1014983" y="5349240"/>
+            <a:off x="1014983" y="5367528"/>
             <a:ext cx="10180015" cy="512064"/>
           </a:xfrm>
           <a:prstGeom prst="rect">
@@ -24864,6 +28025,3064 @@
                 <a:latin typeface="Calibri"/>
               </a:rPr>
               <a:t>which is why it is the only one of the five that can be acted on.</a:t>
+            </a:r>
+          </a:p>
+        </p:txBody>
+      </p:sp>
+    </p:spTree>
+  </p:cSld>
+  <p:clrMapOvr>
+    <a:masterClrMapping/>
+  </p:clrMapOvr>
+</p:sld>
+</file>
+
+<file path=ppt/slides/slide30.xml><?xml version="1.0" encoding="utf-8"?>
+<p:sld xmlns:a="http://schemas.openxmlformats.org/drawingml/2006/main" xmlns:p="http://schemas.openxmlformats.org/presentationml/2006/main" xmlns:r="http://schemas.openxmlformats.org/officeDocument/2006/relationships">
+  <p:cSld>
+    <p:spTree>
+      <p:nvGrpSpPr>
+        <p:cNvPr id="1" name=""/>
+        <p:cNvGrpSpPr/>
+        <p:nvPr/>
+      </p:nvGrpSpPr>
+      <p:grpSpPr/>
+      <p:sp>
+        <p:nvSpPr>
+          <p:cNvPr id="2" name="Rectangle 1"/>
+          <p:cNvSpPr/>
+          <p:nvPr/>
+        </p:nvSpPr>
+        <p:spPr>
+          <a:xfrm>
+            <a:off x="0" y="0"/>
+            <a:ext cx="12191695" cy="6858000"/>
+          </a:xfrm>
+          <a:prstGeom prst="rect">
+            <a:avLst/>
+          </a:prstGeom>
+          <a:solidFill>
+            <a:srgbClr val="FFFFFF"/>
+          </a:solidFill>
+          <a:ln>
+            <a:noFill/>
+          </a:ln>
+          <a:effectLst/>
+        </p:spPr>
+        <p:style>
+          <a:lnRef idx="1">
+            <a:schemeClr val="accent1"/>
+          </a:lnRef>
+          <a:fillRef idx="3">
+            <a:schemeClr val="accent1"/>
+          </a:fillRef>
+          <a:effectRef idx="2">
+            <a:schemeClr val="accent1"/>
+          </a:effectRef>
+          <a:fontRef idx="minor">
+            <a:schemeClr val="lt1"/>
+          </a:fontRef>
+        </p:style>
+        <p:txBody>
+          <a:bodyPr rtlCol="0" anchor="ctr" wrap="square" lIns="109728" rIns="109728" tIns="64008" bIns="64008"/>
+          <a:lstStyle/>
+          <a:p>
+            <a:pPr algn="ctr"/>
+          </a:p>
+        </p:txBody>
+      </p:sp>
+      <p:sp>
+        <p:nvSpPr>
+          <p:cNvPr id="3" name="Rectangle 2"/>
+          <p:cNvSpPr/>
+          <p:nvPr/>
+        </p:nvSpPr>
+        <p:spPr>
+          <a:xfrm>
+            <a:off x="0" y="566928"/>
+            <a:ext cx="274320" cy="50292"/>
+          </a:xfrm>
+          <a:prstGeom prst="rect">
+            <a:avLst/>
+          </a:prstGeom>
+          <a:solidFill>
+            <a:srgbClr val="A51C30"/>
+          </a:solidFill>
+          <a:ln>
+            <a:noFill/>
+          </a:ln>
+          <a:effectLst/>
+        </p:spPr>
+        <p:style>
+          <a:lnRef idx="1">
+            <a:schemeClr val="accent1"/>
+          </a:lnRef>
+          <a:fillRef idx="3">
+            <a:schemeClr val="accent1"/>
+          </a:fillRef>
+          <a:effectRef idx="2">
+            <a:schemeClr val="accent1"/>
+          </a:effectRef>
+          <a:fontRef idx="minor">
+            <a:schemeClr val="lt1"/>
+          </a:fontRef>
+        </p:style>
+        <p:txBody>
+          <a:bodyPr rtlCol="0" anchor="ctr" wrap="square" lIns="109728" rIns="109728" tIns="64008" bIns="64008"/>
+          <a:lstStyle/>
+          <a:p>
+            <a:pPr algn="ctr"/>
+          </a:p>
+        </p:txBody>
+      </p:sp>
+      <p:sp>
+        <p:nvSpPr>
+          <p:cNvPr id="4" name="TextBox 3"/>
+          <p:cNvSpPr txBox="1"/>
+          <p:nvPr/>
+        </p:nvSpPr>
+        <p:spPr>
+          <a:xfrm>
+            <a:off x="777240" y="475488"/>
+            <a:ext cx="10637215" cy="219456"/>
+          </a:xfrm>
+          <a:prstGeom prst="rect">
+            <a:avLst/>
+          </a:prstGeom>
+          <a:noFill/>
+        </p:spPr>
+        <p:txBody>
+          <a:bodyPr wrap="square" lIns="0" rIns="0" tIns="0" bIns="0" anchor="t">
+            <a:spAutoFit/>
+          </a:bodyPr>
+          <a:lstStyle/>
+          <a:p>
+            <a:pPr algn="l">
+              <a:spcBef>
+                <a:spcPts val="0"/>
+              </a:spcBef>
+              <a:spcAft>
+                <a:spcPts val="0"/>
+              </a:spcAft>
+            </a:pPr>
+            <a:r>
+              <a:rPr sz="1050" b="1" i="0">
+                <a:solidFill>
+                  <a:srgbClr val="A51C30"/>
+                </a:solidFill>
+                <a:latin typeface="Calibri"/>
+              </a:rPr>
+              <a:t>A WORKED EXAMPLE</a:t>
+            </a:r>
+          </a:p>
+        </p:txBody>
+      </p:sp>
+      <p:sp>
+        <p:nvSpPr>
+          <p:cNvPr id="5" name="TextBox 4"/>
+          <p:cNvSpPr txBox="1"/>
+          <p:nvPr/>
+        </p:nvSpPr>
+        <p:spPr>
+          <a:xfrm>
+            <a:off x="777240" y="749808"/>
+            <a:ext cx="10637215" cy="484631"/>
+          </a:xfrm>
+          <a:prstGeom prst="rect">
+            <a:avLst/>
+          </a:prstGeom>
+          <a:noFill/>
+        </p:spPr>
+        <p:txBody>
+          <a:bodyPr wrap="square" lIns="0" rIns="0" tIns="0" bIns="0" anchor="t">
+            <a:spAutoFit/>
+          </a:bodyPr>
+          <a:lstStyle/>
+          <a:p>
+            <a:pPr algn="l">
+              <a:lnSpc>
+                <a:spcPct val="120000"/>
+              </a:lnSpc>
+              <a:spcBef>
+                <a:spcPts val="0"/>
+              </a:spcBef>
+              <a:spcAft>
+                <a:spcPts val="0"/>
+              </a:spcAft>
+            </a:pPr>
+            <a:r>
+              <a:rPr sz="2700" b="0" i="0">
+                <a:solidFill>
+                  <a:srgbClr val="1C1C1E"/>
+                </a:solidFill>
+                <a:latin typeface="Georgia"/>
+              </a:rPr>
+              <a:t>Two models, one featureset</a:t>
+            </a:r>
+          </a:p>
+        </p:txBody>
+      </p:sp>
+      <p:sp>
+        <p:nvSpPr>
+          <p:cNvPr id="6" name="Rectangle 5"/>
+          <p:cNvSpPr/>
+          <p:nvPr/>
+        </p:nvSpPr>
+        <p:spPr>
+          <a:xfrm>
+            <a:off x="777240" y="1207008"/>
+            <a:ext cx="10637215" cy="10972"/>
+          </a:xfrm>
+          <a:prstGeom prst="rect">
+            <a:avLst/>
+          </a:prstGeom>
+          <a:solidFill>
+            <a:srgbClr val="D8D4CF"/>
+          </a:solidFill>
+          <a:ln>
+            <a:noFill/>
+          </a:ln>
+          <a:effectLst/>
+        </p:spPr>
+        <p:style>
+          <a:lnRef idx="1">
+            <a:schemeClr val="accent1"/>
+          </a:lnRef>
+          <a:fillRef idx="3">
+            <a:schemeClr val="accent1"/>
+          </a:fillRef>
+          <a:effectRef idx="2">
+            <a:schemeClr val="accent1"/>
+          </a:effectRef>
+          <a:fontRef idx="minor">
+            <a:schemeClr val="lt1"/>
+          </a:fontRef>
+        </p:style>
+        <p:txBody>
+          <a:bodyPr rtlCol="0" anchor="ctr" wrap="square" lIns="109728" rIns="109728" tIns="64008" bIns="64008"/>
+          <a:lstStyle/>
+          <a:p>
+            <a:pPr algn="ctr"/>
+          </a:p>
+        </p:txBody>
+      </p:sp>
+      <p:sp>
+        <p:nvSpPr>
+          <p:cNvPr id="7" name="Rectangle 6"/>
+          <p:cNvSpPr/>
+          <p:nvPr/>
+        </p:nvSpPr>
+        <p:spPr>
+          <a:xfrm>
+            <a:off x="777240" y="6355080"/>
+            <a:ext cx="10637215" cy="7315"/>
+          </a:xfrm>
+          <a:prstGeom prst="rect">
+            <a:avLst/>
+          </a:prstGeom>
+          <a:solidFill>
+            <a:srgbClr val="D8D4CF"/>
+          </a:solidFill>
+          <a:ln>
+            <a:noFill/>
+          </a:ln>
+          <a:effectLst/>
+        </p:spPr>
+        <p:style>
+          <a:lnRef idx="1">
+            <a:schemeClr val="accent1"/>
+          </a:lnRef>
+          <a:fillRef idx="3">
+            <a:schemeClr val="accent1"/>
+          </a:fillRef>
+          <a:effectRef idx="2">
+            <a:schemeClr val="accent1"/>
+          </a:effectRef>
+          <a:fontRef idx="minor">
+            <a:schemeClr val="lt1"/>
+          </a:fontRef>
+        </p:style>
+        <p:txBody>
+          <a:bodyPr rtlCol="0" anchor="ctr" wrap="square" lIns="109728" rIns="109728" tIns="64008" bIns="64008"/>
+          <a:lstStyle/>
+          <a:p>
+            <a:pPr algn="ctr"/>
+          </a:p>
+        </p:txBody>
+      </p:sp>
+      <p:sp>
+        <p:nvSpPr>
+          <p:cNvPr id="8" name="TextBox 7"/>
+          <p:cNvSpPr txBox="1"/>
+          <p:nvPr/>
+        </p:nvSpPr>
+        <p:spPr>
+          <a:xfrm>
+            <a:off x="777240" y="6437376"/>
+            <a:ext cx="7446050" cy="219456"/>
+          </a:xfrm>
+          <a:prstGeom prst="rect">
+            <a:avLst/>
+          </a:prstGeom>
+          <a:noFill/>
+        </p:spPr>
+        <p:txBody>
+          <a:bodyPr wrap="square" lIns="0" rIns="0" tIns="0" bIns="0" anchor="t">
+            <a:spAutoFit/>
+          </a:bodyPr>
+          <a:lstStyle/>
+          <a:p>
+            <a:pPr algn="l">
+              <a:spcBef>
+                <a:spcPts val="0"/>
+              </a:spcBef>
+              <a:spcAft>
+                <a:spcPts val="0"/>
+              </a:spcAft>
+            </a:pPr>
+            <a:r>
+              <a:rPr sz="850" b="0" i="0">
+                <a:solidFill>
+                  <a:srgbClr val="7A7F87"/>
+                </a:solidFill>
+                <a:latin typeface="Calibri"/>
+              </a:rPr>
+              <a:t>6 · A Worked Example</a:t>
+            </a:r>
+          </a:p>
+        </p:txBody>
+      </p:sp>
+      <p:sp>
+        <p:nvSpPr>
+          <p:cNvPr id="9" name="TextBox 8"/>
+          <p:cNvSpPr txBox="1"/>
+          <p:nvPr/>
+        </p:nvSpPr>
+        <p:spPr>
+          <a:xfrm>
+            <a:off x="8223290" y="6437376"/>
+            <a:ext cx="3191164" cy="219456"/>
+          </a:xfrm>
+          <a:prstGeom prst="rect">
+            <a:avLst/>
+          </a:prstGeom>
+          <a:noFill/>
+        </p:spPr>
+        <p:txBody>
+          <a:bodyPr wrap="square" lIns="0" rIns="0" tIns="0" bIns="0" anchor="t">
+            <a:spAutoFit/>
+          </a:bodyPr>
+          <a:lstStyle/>
+          <a:p>
+            <a:pPr algn="r">
+              <a:spcBef>
+                <a:spcPts val="0"/>
+              </a:spcBef>
+              <a:spcAft>
+                <a:spcPts val="0"/>
+              </a:spcAft>
+            </a:pPr>
+            <a:r>
+              <a:rPr sz="850" b="1" i="0">
+                <a:solidFill>
+                  <a:srgbClr val="7A7F87"/>
+                </a:solidFill>
+                <a:latin typeface="Calibri"/>
+              </a:rPr>
+              <a:t>29</a:t>
+            </a:r>
+          </a:p>
+        </p:txBody>
+      </p:sp>
+      <p:sp>
+        <p:nvSpPr>
+          <p:cNvPr id="10" name="Rectangle 9"/>
+          <p:cNvSpPr/>
+          <p:nvPr/>
+        </p:nvSpPr>
+        <p:spPr>
+          <a:xfrm>
+            <a:off x="777240" y="1353312"/>
+            <a:ext cx="5135727" cy="2204161"/>
+          </a:xfrm>
+          <a:prstGeom prst="rect">
+            <a:avLst/>
+          </a:prstGeom>
+          <a:solidFill>
+            <a:srgbClr val="F4F2EF"/>
+          </a:solidFill>
+          <a:ln>
+            <a:noFill/>
+          </a:ln>
+          <a:effectLst/>
+        </p:spPr>
+        <p:style>
+          <a:lnRef idx="1">
+            <a:schemeClr val="accent1"/>
+          </a:lnRef>
+          <a:fillRef idx="3">
+            <a:schemeClr val="accent1"/>
+          </a:fillRef>
+          <a:effectRef idx="2">
+            <a:schemeClr val="accent1"/>
+          </a:effectRef>
+          <a:fontRef idx="minor">
+            <a:schemeClr val="lt1"/>
+          </a:fontRef>
+        </p:style>
+        <p:txBody>
+          <a:bodyPr rtlCol="0" anchor="ctr" wrap="square" lIns="109728" rIns="109728" tIns="64008" bIns="64008"/>
+          <a:lstStyle/>
+          <a:p>
+            <a:pPr algn="ctr"/>
+          </a:p>
+        </p:txBody>
+      </p:sp>
+      <p:sp>
+        <p:nvSpPr>
+          <p:cNvPr id="11" name="Rectangle 10"/>
+          <p:cNvSpPr/>
+          <p:nvPr/>
+        </p:nvSpPr>
+        <p:spPr>
+          <a:xfrm>
+            <a:off x="777240" y="1353312"/>
+            <a:ext cx="41148" cy="2204161"/>
+          </a:xfrm>
+          <a:prstGeom prst="rect">
+            <a:avLst/>
+          </a:prstGeom>
+          <a:solidFill>
+            <a:srgbClr val="4A4F57"/>
+          </a:solidFill>
+          <a:ln>
+            <a:noFill/>
+          </a:ln>
+          <a:effectLst/>
+        </p:spPr>
+        <p:style>
+          <a:lnRef idx="1">
+            <a:schemeClr val="accent1"/>
+          </a:lnRef>
+          <a:fillRef idx="3">
+            <a:schemeClr val="accent1"/>
+          </a:fillRef>
+          <a:effectRef idx="2">
+            <a:schemeClr val="accent1"/>
+          </a:effectRef>
+          <a:fontRef idx="minor">
+            <a:schemeClr val="lt1"/>
+          </a:fontRef>
+        </p:style>
+        <p:txBody>
+          <a:bodyPr rtlCol="0" anchor="ctr" wrap="square" lIns="109728" rIns="109728" tIns="64008" bIns="64008"/>
+          <a:lstStyle/>
+          <a:p>
+            <a:pPr algn="ctr"/>
+          </a:p>
+        </p:txBody>
+      </p:sp>
+      <p:sp>
+        <p:nvSpPr>
+          <p:cNvPr id="12" name="TextBox 11"/>
+          <p:cNvSpPr txBox="1"/>
+          <p:nvPr/>
+        </p:nvSpPr>
+        <p:spPr>
+          <a:xfrm>
+            <a:off x="978408" y="1453896"/>
+            <a:ext cx="4769967" cy="2021281"/>
+          </a:xfrm>
+          <a:prstGeom prst="rect">
+            <a:avLst/>
+          </a:prstGeom>
+          <a:noFill/>
+        </p:spPr>
+        <p:txBody>
+          <a:bodyPr wrap="square" lIns="0" rIns="0" tIns="0" bIns="0" anchor="t">
+            <a:spAutoFit/>
+          </a:bodyPr>
+          <a:lstStyle/>
+          <a:p>
+            <a:pPr algn="l">
+              <a:lnSpc>
+                <a:spcPct val="134000"/>
+              </a:lnSpc>
+              <a:spcBef>
+                <a:spcPts val="0"/>
+              </a:spcBef>
+              <a:spcAft>
+                <a:spcPts val="0"/>
+              </a:spcAft>
+            </a:pPr>
+            <a:r>
+              <a:rPr sz="900" b="0" i="0">
+                <a:solidFill>
+                  <a:srgbClr val="1C1C1E"/>
+                </a:solidFill>
+                <a:latin typeface="Consolas"/>
+              </a:rPr>
+              <a:t>multiple linear regression</a:t>
+            </a:r>
+          </a:p>
+          <a:p>
+            <a:pPr>
+              <a:lnSpc>
+                <a:spcPct val="134000"/>
+              </a:lnSpc>
+              <a:spcBef>
+                <a:spcPts val="0"/>
+              </a:spcBef>
+              <a:spcAft>
+                <a:spcPts val="0"/>
+              </a:spcAft>
+            </a:pPr>
+            <a:r>
+              <a:rPr sz="900" b="0" i="0">
+                <a:solidFill>
+                  <a:srgbClr val="1C1C1E"/>
+                </a:solidFill>
+                <a:latin typeface="Consolas"/>
+              </a:rPr>
+              <a:t> </a:t>
+            </a:r>
+          </a:p>
+          <a:p>
+            <a:pPr>
+              <a:lnSpc>
+                <a:spcPct val="134000"/>
+              </a:lnSpc>
+              <a:spcBef>
+                <a:spcPts val="0"/>
+              </a:spcBef>
+              <a:spcAft>
+                <a:spcPts val="0"/>
+              </a:spcAft>
+            </a:pPr>
+            <a:r>
+              <a:rPr sz="900" b="0" i="0">
+                <a:solidFill>
+                  <a:srgbClr val="1C1C1E"/>
+                </a:solidFill>
+                <a:latin typeface="Consolas"/>
+              </a:rPr>
+              <a:t>next_return  =  18.080</a:t>
+            </a:r>
+          </a:p>
+          <a:p>
+            <a:pPr>
+              <a:lnSpc>
+                <a:spcPct val="134000"/>
+              </a:lnSpc>
+              <a:spcBef>
+                <a:spcPts val="0"/>
+              </a:spcBef>
+              <a:spcAft>
+                <a:spcPts val="0"/>
+              </a:spcAft>
+            </a:pPr>
+            <a:r>
+              <a:rPr sz="900" b="0" i="0">
+                <a:solidFill>
+                  <a:srgbClr val="1C1C1E"/>
+                </a:solidFill>
+                <a:latin typeface="Consolas"/>
+              </a:rPr>
+              <a:t>             − 4.247 × u3_rate</a:t>
+            </a:r>
+          </a:p>
+          <a:p>
+            <a:pPr>
+              <a:lnSpc>
+                <a:spcPct val="134000"/>
+              </a:lnSpc>
+              <a:spcBef>
+                <a:spcPts val="0"/>
+              </a:spcBef>
+              <a:spcAft>
+                <a:spcPts val="0"/>
+              </a:spcAft>
+            </a:pPr>
+            <a:r>
+              <a:rPr sz="900" b="0" i="0">
+                <a:solidFill>
+                  <a:srgbClr val="1C1C1E"/>
+                </a:solidFill>
+                <a:latin typeface="Consolas"/>
+              </a:rPr>
+              <a:t>             − 0.096 × prev_return</a:t>
+            </a:r>
+          </a:p>
+          <a:p>
+            <a:pPr>
+              <a:lnSpc>
+                <a:spcPct val="134000"/>
+              </a:lnSpc>
+              <a:spcBef>
+                <a:spcPts val="0"/>
+              </a:spcBef>
+              <a:spcAft>
+                <a:spcPts val="0"/>
+              </a:spcAft>
+            </a:pPr>
+            <a:r>
+              <a:rPr sz="900" b="0" i="0">
+                <a:solidFill>
+                  <a:srgbClr val="1C1C1E"/>
+                </a:solidFill>
+                <a:latin typeface="Consolas"/>
+              </a:rPr>
+              <a:t> </a:t>
+            </a:r>
+          </a:p>
+          <a:p>
+            <a:pPr>
+              <a:lnSpc>
+                <a:spcPct val="134000"/>
+              </a:lnSpc>
+              <a:spcBef>
+                <a:spcPts val="0"/>
+              </a:spcBef>
+              <a:spcAft>
+                <a:spcPts val="0"/>
+              </a:spcAft>
+            </a:pPr>
+            <a:r>
+              <a:rPr sz="900" b="0" i="0">
+                <a:solidFill>
+                  <a:srgbClr val="1C1C1E"/>
+                </a:solidFill>
+                <a:latin typeface="Consolas"/>
+              </a:rPr>
+              <a:t>kind   estimated_coefficients   → T2</a:t>
+            </a:r>
+          </a:p>
+          <a:p>
+            <a:pPr>
+              <a:lnSpc>
+                <a:spcPct val="134000"/>
+              </a:lnSpc>
+              <a:spcBef>
+                <a:spcPts val="0"/>
+              </a:spcBef>
+              <a:spcAft>
+                <a:spcPts val="0"/>
+              </a:spcAft>
+            </a:pPr>
+            <a:r>
+              <a:rPr sz="900" b="0" i="0">
+                <a:solidFill>
+                  <a:srgbClr val="1C1C1E"/>
+                </a:solidFill>
+                <a:latin typeface="Consolas"/>
+              </a:rPr>
+              <a:t>P      3 numbers</a:t>
+            </a:r>
+          </a:p>
+          <a:p>
+            <a:pPr>
+              <a:lnSpc>
+                <a:spcPct val="134000"/>
+              </a:lnSpc>
+              <a:spcBef>
+                <a:spcPts val="0"/>
+              </a:spcBef>
+              <a:spcAft>
+                <a:spcPts val="0"/>
+              </a:spcAft>
+            </a:pPr>
+            <a:r>
+              <a:rPr sz="900" b="0" i="0">
+                <a:solidFill>
+                  <a:srgbClr val="1C1C1E"/>
+                </a:solidFill>
+                <a:latin typeface="Consolas"/>
+              </a:rPr>
+              <a:t>D(Y)   point_estimate</a:t>
+            </a:r>
+          </a:p>
+          <a:p>
+            <a:pPr>
+              <a:lnSpc>
+                <a:spcPct val="134000"/>
+              </a:lnSpc>
+              <a:spcBef>
+                <a:spcPts val="0"/>
+              </a:spcBef>
+              <a:spcAft>
+                <a:spcPts val="0"/>
+              </a:spcAft>
+            </a:pPr>
+            <a:r>
+              <a:rPr sz="900" b="0" i="0">
+                <a:solidFill>
+                  <a:srgbClr val="1C1C1E"/>
+                </a:solidFill>
+                <a:latin typeface="Consolas"/>
+              </a:rPr>
+              <a:t>fit    n = 10   R² = 0.179   resid sd = 1.114</a:t>
+            </a:r>
+          </a:p>
+        </p:txBody>
+      </p:sp>
+      <p:sp>
+        <p:nvSpPr>
+          <p:cNvPr id="13" name="TextBox 12"/>
+          <p:cNvSpPr txBox="1"/>
+          <p:nvPr/>
+        </p:nvSpPr>
+        <p:spPr>
+          <a:xfrm>
+            <a:off x="777240" y="3758641"/>
+            <a:ext cx="5135727" cy="822960"/>
+          </a:xfrm>
+          <a:prstGeom prst="rect">
+            <a:avLst/>
+          </a:prstGeom>
+          <a:noFill/>
+        </p:spPr>
+        <p:txBody>
+          <a:bodyPr wrap="square" lIns="0" rIns="0" tIns="0" bIns="0" anchor="t">
+            <a:spAutoFit/>
+          </a:bodyPr>
+          <a:lstStyle/>
+          <a:p>
+            <a:pPr algn="l">
+              <a:lnSpc>
+                <a:spcPct val="122000"/>
+              </a:lnSpc>
+              <a:spcBef>
+                <a:spcPts val="0"/>
+              </a:spcBef>
+              <a:spcAft>
+                <a:spcPts val="0"/>
+              </a:spcAft>
+            </a:pPr>
+            <a:r>
+              <a:rPr sz="1000" b="1" i="0">
+                <a:solidFill>
+                  <a:srgbClr val="A51C30"/>
+                </a:solidFill>
+                <a:latin typeface="Calibri"/>
+              </a:rPr>
+              <a:t>It predicts the level. </a:t>
+            </a:r>
+            <a:r>
+              <a:rPr sz="1000" b="0" i="0">
+                <a:solidFill>
+                  <a:srgbClr val="4A4F57"/>
+                </a:solidFill>
+                <a:latin typeface="Calibri"/>
+              </a:rPr>
+              <a:t>An R² of 0.18 on ten points is not a good model; it is an honest one, and the register stores the diagnostics beside the coefficients so a reviewer sees both.</a:t>
+            </a:r>
+          </a:p>
+        </p:txBody>
+      </p:sp>
+      <p:sp>
+        <p:nvSpPr>
+          <p:cNvPr id="14" name="Rectangle 13"/>
+          <p:cNvSpPr/>
+          <p:nvPr/>
+        </p:nvSpPr>
+        <p:spPr>
+          <a:xfrm>
+            <a:off x="6278727" y="1353312"/>
+            <a:ext cx="5135727" cy="2204161"/>
+          </a:xfrm>
+          <a:prstGeom prst="rect">
+            <a:avLst/>
+          </a:prstGeom>
+          <a:solidFill>
+            <a:srgbClr val="F4F2EF"/>
+          </a:solidFill>
+          <a:ln>
+            <a:noFill/>
+          </a:ln>
+          <a:effectLst/>
+        </p:spPr>
+        <p:style>
+          <a:lnRef idx="1">
+            <a:schemeClr val="accent1"/>
+          </a:lnRef>
+          <a:fillRef idx="3">
+            <a:schemeClr val="accent1"/>
+          </a:fillRef>
+          <a:effectRef idx="2">
+            <a:schemeClr val="accent1"/>
+          </a:effectRef>
+          <a:fontRef idx="minor">
+            <a:schemeClr val="lt1"/>
+          </a:fontRef>
+        </p:style>
+        <p:txBody>
+          <a:bodyPr rtlCol="0" anchor="ctr" wrap="square" lIns="109728" rIns="109728" tIns="64008" bIns="64008"/>
+          <a:lstStyle/>
+          <a:p>
+            <a:pPr algn="ctr"/>
+          </a:p>
+        </p:txBody>
+      </p:sp>
+      <p:sp>
+        <p:nvSpPr>
+          <p:cNvPr id="15" name="Rectangle 14"/>
+          <p:cNvSpPr/>
+          <p:nvPr/>
+        </p:nvSpPr>
+        <p:spPr>
+          <a:xfrm>
+            <a:off x="6278727" y="1353312"/>
+            <a:ext cx="41148" cy="2204161"/>
+          </a:xfrm>
+          <a:prstGeom prst="rect">
+            <a:avLst/>
+          </a:prstGeom>
+          <a:solidFill>
+            <a:srgbClr val="4A4F57"/>
+          </a:solidFill>
+          <a:ln>
+            <a:noFill/>
+          </a:ln>
+          <a:effectLst/>
+        </p:spPr>
+        <p:style>
+          <a:lnRef idx="1">
+            <a:schemeClr val="accent1"/>
+          </a:lnRef>
+          <a:fillRef idx="3">
+            <a:schemeClr val="accent1"/>
+          </a:fillRef>
+          <a:effectRef idx="2">
+            <a:schemeClr val="accent1"/>
+          </a:effectRef>
+          <a:fontRef idx="minor">
+            <a:schemeClr val="lt1"/>
+          </a:fontRef>
+        </p:style>
+        <p:txBody>
+          <a:bodyPr rtlCol="0" anchor="ctr" wrap="square" lIns="109728" rIns="109728" tIns="64008" bIns="64008"/>
+          <a:lstStyle/>
+          <a:p>
+            <a:pPr algn="ctr"/>
+          </a:p>
+        </p:txBody>
+      </p:sp>
+      <p:sp>
+        <p:nvSpPr>
+          <p:cNvPr id="16" name="TextBox 15"/>
+          <p:cNvSpPr txBox="1"/>
+          <p:nvPr/>
+        </p:nvSpPr>
+        <p:spPr>
+          <a:xfrm>
+            <a:off x="6479895" y="1453896"/>
+            <a:ext cx="4769967" cy="2021281"/>
+          </a:xfrm>
+          <a:prstGeom prst="rect">
+            <a:avLst/>
+          </a:prstGeom>
+          <a:noFill/>
+        </p:spPr>
+        <p:txBody>
+          <a:bodyPr wrap="square" lIns="0" rIns="0" tIns="0" bIns="0" anchor="t">
+            <a:spAutoFit/>
+          </a:bodyPr>
+          <a:lstStyle/>
+          <a:p>
+            <a:pPr algn="l">
+              <a:lnSpc>
+                <a:spcPct val="134000"/>
+              </a:lnSpc>
+              <a:spcBef>
+                <a:spcPts val="0"/>
+              </a:spcBef>
+              <a:spcAft>
+                <a:spcPts val="0"/>
+              </a:spcAft>
+            </a:pPr>
+            <a:r>
+              <a:rPr sz="900" b="0" i="0">
+                <a:solidFill>
+                  <a:srgbClr val="1C1C1E"/>
+                </a:solidFill>
+                <a:latin typeface="Consolas"/>
+              </a:rPr>
+              <a:t>GARCH(1,1) on the same returns</a:t>
+            </a:r>
+          </a:p>
+          <a:p>
+            <a:pPr>
+              <a:lnSpc>
+                <a:spcPct val="134000"/>
+              </a:lnSpc>
+              <a:spcBef>
+                <a:spcPts val="0"/>
+              </a:spcBef>
+              <a:spcAft>
+                <a:spcPts val="0"/>
+              </a:spcAft>
+            </a:pPr>
+            <a:r>
+              <a:rPr sz="900" b="0" i="0">
+                <a:solidFill>
+                  <a:srgbClr val="1C1C1E"/>
+                </a:solidFill>
+                <a:latin typeface="Consolas"/>
+              </a:rPr>
+              <a:t> </a:t>
+            </a:r>
+          </a:p>
+          <a:p>
+            <a:pPr>
+              <a:lnSpc>
+                <a:spcPct val="134000"/>
+              </a:lnSpc>
+              <a:spcBef>
+                <a:spcPts val="0"/>
+              </a:spcBef>
+              <a:spcAft>
+                <a:spcPts val="0"/>
+              </a:spcAft>
+            </a:pPr>
+            <a:r>
+              <a:rPr sz="900" b="0" i="0">
+                <a:solidFill>
+                  <a:srgbClr val="1C1C1E"/>
+                </a:solidFill>
+                <a:latin typeface="Consolas"/>
+              </a:rPr>
+              <a:t>σ²ₜ  =  0.1050</a:t>
+            </a:r>
+          </a:p>
+          <a:p>
+            <a:pPr>
+              <a:lnSpc>
+                <a:spcPct val="134000"/>
+              </a:lnSpc>
+              <a:spcBef>
+                <a:spcPts val="0"/>
+              </a:spcBef>
+              <a:spcAft>
+                <a:spcPts val="0"/>
+              </a:spcAft>
+            </a:pPr>
+            <a:r>
+              <a:rPr sz="900" b="0" i="0">
+                <a:solidFill>
+                  <a:srgbClr val="1C1C1E"/>
+                </a:solidFill>
+                <a:latin typeface="Consolas"/>
+              </a:rPr>
+              <a:t>      + 0.110 × ε²ₜ₋₁</a:t>
+            </a:r>
+          </a:p>
+          <a:p>
+            <a:pPr>
+              <a:lnSpc>
+                <a:spcPct val="134000"/>
+              </a:lnSpc>
+              <a:spcBef>
+                <a:spcPts val="0"/>
+              </a:spcBef>
+              <a:spcAft>
+                <a:spcPts val="0"/>
+              </a:spcAft>
+            </a:pPr>
+            <a:r>
+              <a:rPr sz="900" b="0" i="0">
+                <a:solidFill>
+                  <a:srgbClr val="1C1C1E"/>
+                </a:solidFill>
+                <a:latin typeface="Consolas"/>
+              </a:rPr>
+              <a:t>      + 0.790 × σ²ₜ₋₁</a:t>
+            </a:r>
+          </a:p>
+          <a:p>
+            <a:pPr>
+              <a:lnSpc>
+                <a:spcPct val="134000"/>
+              </a:lnSpc>
+              <a:spcBef>
+                <a:spcPts val="0"/>
+              </a:spcBef>
+              <a:spcAft>
+                <a:spcPts val="0"/>
+              </a:spcAft>
+            </a:pPr>
+            <a:r>
+              <a:rPr sz="900" b="0" i="0">
+                <a:solidFill>
+                  <a:srgbClr val="1C1C1E"/>
+                </a:solidFill>
+                <a:latin typeface="Consolas"/>
+              </a:rPr>
+              <a:t> </a:t>
+            </a:r>
+          </a:p>
+          <a:p>
+            <a:pPr>
+              <a:lnSpc>
+                <a:spcPct val="134000"/>
+              </a:lnSpc>
+              <a:spcBef>
+                <a:spcPts val="0"/>
+              </a:spcBef>
+              <a:spcAft>
+                <a:spcPts val="0"/>
+              </a:spcAft>
+            </a:pPr>
+            <a:r>
+              <a:rPr sz="900" b="0" i="0">
+                <a:solidFill>
+                  <a:srgbClr val="1C1C1E"/>
+                </a:solidFill>
+                <a:latin typeface="Consolas"/>
+              </a:rPr>
+              <a:t>kind   estimated_coefficients   → T2</a:t>
+            </a:r>
+          </a:p>
+          <a:p>
+            <a:pPr>
+              <a:lnSpc>
+                <a:spcPct val="134000"/>
+              </a:lnSpc>
+              <a:spcBef>
+                <a:spcPts val="0"/>
+              </a:spcBef>
+              <a:spcAft>
+                <a:spcPts val="0"/>
+              </a:spcAft>
+            </a:pPr>
+            <a:r>
+              <a:rPr sz="900" b="0" i="0">
+                <a:solidFill>
+                  <a:srgbClr val="1C1C1E"/>
+                </a:solidFill>
+                <a:latin typeface="Consolas"/>
+              </a:rPr>
+              <a:t>P      3 numbers  (ω, α, β)</a:t>
+            </a:r>
+          </a:p>
+          <a:p>
+            <a:pPr>
+              <a:lnSpc>
+                <a:spcPct val="134000"/>
+              </a:lnSpc>
+              <a:spcBef>
+                <a:spcPts val="0"/>
+              </a:spcBef>
+              <a:spcAft>
+                <a:spcPts val="0"/>
+              </a:spcAft>
+            </a:pPr>
+            <a:r>
+              <a:rPr sz="900" b="0" i="0">
+                <a:solidFill>
+                  <a:srgbClr val="1C1C1E"/>
+                </a:solidFill>
+                <a:latin typeface="Consolas"/>
+              </a:rPr>
+              <a:t>D(Y)   predictive_distribution</a:t>
+            </a:r>
+          </a:p>
+          <a:p>
+            <a:pPr>
+              <a:lnSpc>
+                <a:spcPct val="134000"/>
+              </a:lnSpc>
+              <a:spcBef>
+                <a:spcPts val="0"/>
+              </a:spcBef>
+              <a:spcAft>
+                <a:spcPts val="0"/>
+              </a:spcAft>
+            </a:pPr>
+            <a:r>
+              <a:rPr sz="900" b="0" i="0">
+                <a:solidFill>
+                  <a:srgbClr val="1C1C1E"/>
+                </a:solidFill>
+                <a:latin typeface="Consolas"/>
+              </a:rPr>
+              <a:t>fit    long-run sd 1.025, matching the sample</a:t>
+            </a:r>
+          </a:p>
+        </p:txBody>
+      </p:sp>
+      <p:sp>
+        <p:nvSpPr>
+          <p:cNvPr id="17" name="TextBox 16"/>
+          <p:cNvSpPr txBox="1"/>
+          <p:nvPr/>
+        </p:nvSpPr>
+        <p:spPr>
+          <a:xfrm>
+            <a:off x="6278727" y="3758641"/>
+            <a:ext cx="5135727" cy="822960"/>
+          </a:xfrm>
+          <a:prstGeom prst="rect">
+            <a:avLst/>
+          </a:prstGeom>
+          <a:noFill/>
+        </p:spPr>
+        <p:txBody>
+          <a:bodyPr wrap="square" lIns="0" rIns="0" tIns="0" bIns="0" anchor="t">
+            <a:spAutoFit/>
+          </a:bodyPr>
+          <a:lstStyle/>
+          <a:p>
+            <a:pPr algn="l">
+              <a:lnSpc>
+                <a:spcPct val="122000"/>
+              </a:lnSpc>
+              <a:spcBef>
+                <a:spcPts val="0"/>
+              </a:spcBef>
+              <a:spcAft>
+                <a:spcPts val="0"/>
+              </a:spcAft>
+            </a:pPr>
+            <a:r>
+              <a:rPr sz="1000" b="1" i="0">
+                <a:solidFill>
+                  <a:srgbClr val="A51C30"/>
+                </a:solidFill>
+                <a:latin typeface="Calibri"/>
+              </a:rPr>
+              <a:t>It predicts the spread. </a:t>
+            </a:r>
+            <a:r>
+              <a:rPr sz="1000" b="0" i="0">
+                <a:solidFill>
+                  <a:srgbClr val="4A4F57"/>
+                </a:solidFill>
+                <a:latin typeface="Calibri"/>
+              </a:rPr>
+              <a:t>Same features, same entity, same grain — a different kernel, a different P, and an output that is a distribution rather than a number.</a:t>
+            </a:r>
+          </a:p>
+        </p:txBody>
+      </p:sp>
+      <p:sp>
+        <p:nvSpPr>
+          <p:cNvPr id="18" name="Rectangle 17"/>
+          <p:cNvSpPr/>
+          <p:nvPr/>
+        </p:nvSpPr>
+        <p:spPr>
+          <a:xfrm>
+            <a:off x="777240" y="4673041"/>
+            <a:ext cx="10637215" cy="1060704"/>
+          </a:xfrm>
+          <a:prstGeom prst="rect">
+            <a:avLst/>
+          </a:prstGeom>
+          <a:solidFill>
+            <a:srgbClr val="F6F3EF"/>
+          </a:solidFill>
+          <a:ln>
+            <a:noFill/>
+          </a:ln>
+          <a:effectLst/>
+        </p:spPr>
+        <p:style>
+          <a:lnRef idx="1">
+            <a:schemeClr val="accent1"/>
+          </a:lnRef>
+          <a:fillRef idx="3">
+            <a:schemeClr val="accent1"/>
+          </a:fillRef>
+          <a:effectRef idx="2">
+            <a:schemeClr val="accent1"/>
+          </a:effectRef>
+          <a:fontRef idx="minor">
+            <a:schemeClr val="lt1"/>
+          </a:fontRef>
+        </p:style>
+        <p:txBody>
+          <a:bodyPr rtlCol="0" anchor="ctr" wrap="square" lIns="109728" rIns="109728" tIns="64008" bIns="64008"/>
+          <a:lstStyle/>
+          <a:p>
+            <a:pPr algn="ctr"/>
+          </a:p>
+        </p:txBody>
+      </p:sp>
+      <p:sp>
+        <p:nvSpPr>
+          <p:cNvPr id="19" name="Rectangle 18"/>
+          <p:cNvSpPr/>
+          <p:nvPr/>
+        </p:nvSpPr>
+        <p:spPr>
+          <a:xfrm>
+            <a:off x="777240" y="4673041"/>
+            <a:ext cx="41148" cy="1060704"/>
+          </a:xfrm>
+          <a:prstGeom prst="rect">
+            <a:avLst/>
+          </a:prstGeom>
+          <a:solidFill>
+            <a:srgbClr val="A51C30"/>
+          </a:solidFill>
+          <a:ln>
+            <a:noFill/>
+          </a:ln>
+          <a:effectLst/>
+        </p:spPr>
+        <p:style>
+          <a:lnRef idx="1">
+            <a:schemeClr val="accent1"/>
+          </a:lnRef>
+          <a:fillRef idx="3">
+            <a:schemeClr val="accent1"/>
+          </a:fillRef>
+          <a:effectRef idx="2">
+            <a:schemeClr val="accent1"/>
+          </a:effectRef>
+          <a:fontRef idx="minor">
+            <a:schemeClr val="lt1"/>
+          </a:fontRef>
+        </p:style>
+        <p:txBody>
+          <a:bodyPr rtlCol="0" anchor="ctr" wrap="square" lIns="109728" rIns="109728" tIns="64008" bIns="64008"/>
+          <a:lstStyle/>
+          <a:p>
+            <a:pPr algn="ctr"/>
+          </a:p>
+        </p:txBody>
+      </p:sp>
+      <p:sp>
+        <p:nvSpPr>
+          <p:cNvPr id="20" name="TextBox 19"/>
+          <p:cNvSpPr txBox="1"/>
+          <p:nvPr/>
+        </p:nvSpPr>
+        <p:spPr>
+          <a:xfrm>
+            <a:off x="1014983" y="4791913"/>
+            <a:ext cx="10180015" cy="841247"/>
+          </a:xfrm>
+          <a:prstGeom prst="rect">
+            <a:avLst/>
+          </a:prstGeom>
+          <a:noFill/>
+        </p:spPr>
+        <p:txBody>
+          <a:bodyPr wrap="square" lIns="0" rIns="0" tIns="0" bIns="0" anchor="t">
+            <a:spAutoFit/>
+          </a:bodyPr>
+          <a:lstStyle/>
+          <a:p>
+            <a:pPr algn="l">
+              <a:lnSpc>
+                <a:spcPct val="124000"/>
+              </a:lnSpc>
+              <a:spcBef>
+                <a:spcPts val="0"/>
+              </a:spcBef>
+              <a:spcAft>
+                <a:spcPts val="0"/>
+              </a:spcAft>
+            </a:pPr>
+            <a:r>
+              <a:rPr sz="1050" b="1" i="0">
+                <a:solidFill>
+                  <a:srgbClr val="A51C30"/>
+                </a:solidFill>
+                <a:latin typeface="Calibri"/>
+              </a:rPr>
+              <a:t>Two warrants, two parameter sets, one featureset version. </a:t>
+            </a:r>
+            <a:r>
+              <a:rPr sz="1050" b="0" i="0">
+                <a:solidFill>
+                  <a:srgbClr val="1C1C1E"/>
+                </a:solidFill>
+                <a:latin typeface="Calibri"/>
+              </a:rPr>
+              <a:t>Each fit warrant names macro_core@v1 and its own model version; each returns a parameter set that records which featureset version produced it. Nothing about the data was duplicated to serve two models, and nothing about either model had to know the other existed — </a:t>
+            </a:r>
+            <a:r>
+              <a:rPr sz="1050" b="1" i="0">
+                <a:solidFill>
+                  <a:srgbClr val="1C1C1E"/>
+                </a:solidFill>
+                <a:latin typeface="Calibri"/>
+              </a:rPr>
+              <a:t>which is what a named presentation of X buys.</a:t>
+            </a:r>
+          </a:p>
+        </p:txBody>
+      </p:sp>
+    </p:spTree>
+  </p:cSld>
+  <p:clrMapOvr>
+    <a:masterClrMapping/>
+  </p:clrMapOvr>
+</p:sld>
+</file>
+
+<file path=ppt/slides/slide31.xml><?xml version="1.0" encoding="utf-8"?>
+<p:sld xmlns:a="http://schemas.openxmlformats.org/drawingml/2006/main" xmlns:p="http://schemas.openxmlformats.org/presentationml/2006/main" xmlns:r="http://schemas.openxmlformats.org/officeDocument/2006/relationships">
+  <p:cSld>
+    <p:spTree>
+      <p:nvGrpSpPr>
+        <p:cNvPr id="1" name=""/>
+        <p:cNvGrpSpPr/>
+        <p:nvPr/>
+      </p:nvGrpSpPr>
+      <p:grpSpPr/>
+      <p:sp>
+        <p:nvSpPr>
+          <p:cNvPr id="2" name="Rectangle 1"/>
+          <p:cNvSpPr/>
+          <p:nvPr/>
+        </p:nvSpPr>
+        <p:spPr>
+          <a:xfrm>
+            <a:off x="0" y="0"/>
+            <a:ext cx="12191695" cy="6858000"/>
+          </a:xfrm>
+          <a:prstGeom prst="rect">
+            <a:avLst/>
+          </a:prstGeom>
+          <a:solidFill>
+            <a:srgbClr val="FFFFFF"/>
+          </a:solidFill>
+          <a:ln>
+            <a:noFill/>
+          </a:ln>
+          <a:effectLst/>
+        </p:spPr>
+        <p:style>
+          <a:lnRef idx="1">
+            <a:schemeClr val="accent1"/>
+          </a:lnRef>
+          <a:fillRef idx="3">
+            <a:schemeClr val="accent1"/>
+          </a:fillRef>
+          <a:effectRef idx="2">
+            <a:schemeClr val="accent1"/>
+          </a:effectRef>
+          <a:fontRef idx="minor">
+            <a:schemeClr val="lt1"/>
+          </a:fontRef>
+        </p:style>
+        <p:txBody>
+          <a:bodyPr rtlCol="0" anchor="ctr" wrap="square" lIns="109728" rIns="109728" tIns="64008" bIns="64008"/>
+          <a:lstStyle/>
+          <a:p>
+            <a:pPr algn="ctr"/>
+          </a:p>
+        </p:txBody>
+      </p:sp>
+      <p:sp>
+        <p:nvSpPr>
+          <p:cNvPr id="3" name="Rectangle 2"/>
+          <p:cNvSpPr/>
+          <p:nvPr/>
+        </p:nvSpPr>
+        <p:spPr>
+          <a:xfrm>
+            <a:off x="0" y="566928"/>
+            <a:ext cx="274320" cy="50292"/>
+          </a:xfrm>
+          <a:prstGeom prst="rect">
+            <a:avLst/>
+          </a:prstGeom>
+          <a:solidFill>
+            <a:srgbClr val="A51C30"/>
+          </a:solidFill>
+          <a:ln>
+            <a:noFill/>
+          </a:ln>
+          <a:effectLst/>
+        </p:spPr>
+        <p:style>
+          <a:lnRef idx="1">
+            <a:schemeClr val="accent1"/>
+          </a:lnRef>
+          <a:fillRef idx="3">
+            <a:schemeClr val="accent1"/>
+          </a:fillRef>
+          <a:effectRef idx="2">
+            <a:schemeClr val="accent1"/>
+          </a:effectRef>
+          <a:fontRef idx="minor">
+            <a:schemeClr val="lt1"/>
+          </a:fontRef>
+        </p:style>
+        <p:txBody>
+          <a:bodyPr rtlCol="0" anchor="ctr" wrap="square" lIns="109728" rIns="109728" tIns="64008" bIns="64008"/>
+          <a:lstStyle/>
+          <a:p>
+            <a:pPr algn="ctr"/>
+          </a:p>
+        </p:txBody>
+      </p:sp>
+      <p:sp>
+        <p:nvSpPr>
+          <p:cNvPr id="4" name="TextBox 3"/>
+          <p:cNvSpPr txBox="1"/>
+          <p:nvPr/>
+        </p:nvSpPr>
+        <p:spPr>
+          <a:xfrm>
+            <a:off x="777240" y="475488"/>
+            <a:ext cx="10637215" cy="219456"/>
+          </a:xfrm>
+          <a:prstGeom prst="rect">
+            <a:avLst/>
+          </a:prstGeom>
+          <a:noFill/>
+        </p:spPr>
+        <p:txBody>
+          <a:bodyPr wrap="square" lIns="0" rIns="0" tIns="0" bIns="0" anchor="t">
+            <a:spAutoFit/>
+          </a:bodyPr>
+          <a:lstStyle/>
+          <a:p>
+            <a:pPr algn="l">
+              <a:spcBef>
+                <a:spcPts val="0"/>
+              </a:spcBef>
+              <a:spcAft>
+                <a:spcPts val="0"/>
+              </a:spcAft>
+            </a:pPr>
+            <a:r>
+              <a:rPr sz="1050" b="1" i="0">
+                <a:solidFill>
+                  <a:srgbClr val="A51C30"/>
+                </a:solidFill>
+                <a:latin typeface="Calibri"/>
+              </a:rPr>
+              <a:t>A WORKED EXAMPLE</a:t>
+            </a:r>
+          </a:p>
+        </p:txBody>
+      </p:sp>
+      <p:sp>
+        <p:nvSpPr>
+          <p:cNvPr id="5" name="TextBox 4"/>
+          <p:cNvSpPr txBox="1"/>
+          <p:nvPr/>
+        </p:nvSpPr>
+        <p:spPr>
+          <a:xfrm>
+            <a:off x="777240" y="749808"/>
+            <a:ext cx="10637215" cy="484631"/>
+          </a:xfrm>
+          <a:prstGeom prst="rect">
+            <a:avLst/>
+          </a:prstGeom>
+          <a:noFill/>
+        </p:spPr>
+        <p:txBody>
+          <a:bodyPr wrap="square" lIns="0" rIns="0" tIns="0" bIns="0" anchor="t">
+            <a:spAutoFit/>
+          </a:bodyPr>
+          <a:lstStyle/>
+          <a:p>
+            <a:pPr algn="l">
+              <a:lnSpc>
+                <a:spcPct val="120000"/>
+              </a:lnSpc>
+              <a:spcBef>
+                <a:spcPts val="0"/>
+              </a:spcBef>
+              <a:spcAft>
+                <a:spcPts val="0"/>
+              </a:spcAft>
+            </a:pPr>
+            <a:r>
+              <a:rPr sz="2700" b="0" i="0">
+                <a:solidFill>
+                  <a:srgbClr val="1C1C1E"/>
+                </a:solidFill>
+                <a:latin typeface="Georgia"/>
+              </a:rPr>
+              <a:t>Extending the featureset, and what that forces</a:t>
+            </a:r>
+          </a:p>
+        </p:txBody>
+      </p:sp>
+      <p:sp>
+        <p:nvSpPr>
+          <p:cNvPr id="6" name="Rectangle 5"/>
+          <p:cNvSpPr/>
+          <p:nvPr/>
+        </p:nvSpPr>
+        <p:spPr>
+          <a:xfrm>
+            <a:off x="777240" y="1207008"/>
+            <a:ext cx="10637215" cy="10972"/>
+          </a:xfrm>
+          <a:prstGeom prst="rect">
+            <a:avLst/>
+          </a:prstGeom>
+          <a:solidFill>
+            <a:srgbClr val="D8D4CF"/>
+          </a:solidFill>
+          <a:ln>
+            <a:noFill/>
+          </a:ln>
+          <a:effectLst/>
+        </p:spPr>
+        <p:style>
+          <a:lnRef idx="1">
+            <a:schemeClr val="accent1"/>
+          </a:lnRef>
+          <a:fillRef idx="3">
+            <a:schemeClr val="accent1"/>
+          </a:fillRef>
+          <a:effectRef idx="2">
+            <a:schemeClr val="accent1"/>
+          </a:effectRef>
+          <a:fontRef idx="minor">
+            <a:schemeClr val="lt1"/>
+          </a:fontRef>
+        </p:style>
+        <p:txBody>
+          <a:bodyPr rtlCol="0" anchor="ctr" wrap="square" lIns="109728" rIns="109728" tIns="64008" bIns="64008"/>
+          <a:lstStyle/>
+          <a:p>
+            <a:pPr algn="ctr"/>
+          </a:p>
+        </p:txBody>
+      </p:sp>
+      <p:sp>
+        <p:nvSpPr>
+          <p:cNvPr id="7" name="Rectangle 6"/>
+          <p:cNvSpPr/>
+          <p:nvPr/>
+        </p:nvSpPr>
+        <p:spPr>
+          <a:xfrm>
+            <a:off x="777240" y="6355080"/>
+            <a:ext cx="10637215" cy="7315"/>
+          </a:xfrm>
+          <a:prstGeom prst="rect">
+            <a:avLst/>
+          </a:prstGeom>
+          <a:solidFill>
+            <a:srgbClr val="D8D4CF"/>
+          </a:solidFill>
+          <a:ln>
+            <a:noFill/>
+          </a:ln>
+          <a:effectLst/>
+        </p:spPr>
+        <p:style>
+          <a:lnRef idx="1">
+            <a:schemeClr val="accent1"/>
+          </a:lnRef>
+          <a:fillRef idx="3">
+            <a:schemeClr val="accent1"/>
+          </a:fillRef>
+          <a:effectRef idx="2">
+            <a:schemeClr val="accent1"/>
+          </a:effectRef>
+          <a:fontRef idx="minor">
+            <a:schemeClr val="lt1"/>
+          </a:fontRef>
+        </p:style>
+        <p:txBody>
+          <a:bodyPr rtlCol="0" anchor="ctr" wrap="square" lIns="109728" rIns="109728" tIns="64008" bIns="64008"/>
+          <a:lstStyle/>
+          <a:p>
+            <a:pPr algn="ctr"/>
+          </a:p>
+        </p:txBody>
+      </p:sp>
+      <p:sp>
+        <p:nvSpPr>
+          <p:cNvPr id="8" name="TextBox 7"/>
+          <p:cNvSpPr txBox="1"/>
+          <p:nvPr/>
+        </p:nvSpPr>
+        <p:spPr>
+          <a:xfrm>
+            <a:off x="777240" y="6437376"/>
+            <a:ext cx="7446050" cy="219456"/>
+          </a:xfrm>
+          <a:prstGeom prst="rect">
+            <a:avLst/>
+          </a:prstGeom>
+          <a:noFill/>
+        </p:spPr>
+        <p:txBody>
+          <a:bodyPr wrap="square" lIns="0" rIns="0" tIns="0" bIns="0" anchor="t">
+            <a:spAutoFit/>
+          </a:bodyPr>
+          <a:lstStyle/>
+          <a:p>
+            <a:pPr algn="l">
+              <a:spcBef>
+                <a:spcPts val="0"/>
+              </a:spcBef>
+              <a:spcAft>
+                <a:spcPts val="0"/>
+              </a:spcAft>
+            </a:pPr>
+            <a:r>
+              <a:rPr sz="850" b="0" i="0">
+                <a:solidFill>
+                  <a:srgbClr val="7A7F87"/>
+                </a:solidFill>
+                <a:latin typeface="Calibri"/>
+              </a:rPr>
+              <a:t>6 · A Worked Example</a:t>
+            </a:r>
+          </a:p>
+        </p:txBody>
+      </p:sp>
+      <p:sp>
+        <p:nvSpPr>
+          <p:cNvPr id="9" name="TextBox 8"/>
+          <p:cNvSpPr txBox="1"/>
+          <p:nvPr/>
+        </p:nvSpPr>
+        <p:spPr>
+          <a:xfrm>
+            <a:off x="8223290" y="6437376"/>
+            <a:ext cx="3191164" cy="219456"/>
+          </a:xfrm>
+          <a:prstGeom prst="rect">
+            <a:avLst/>
+          </a:prstGeom>
+          <a:noFill/>
+        </p:spPr>
+        <p:txBody>
+          <a:bodyPr wrap="square" lIns="0" rIns="0" tIns="0" bIns="0" anchor="t">
+            <a:spAutoFit/>
+          </a:bodyPr>
+          <a:lstStyle/>
+          <a:p>
+            <a:pPr algn="r">
+              <a:spcBef>
+                <a:spcPts val="0"/>
+              </a:spcBef>
+              <a:spcAft>
+                <a:spcPts val="0"/>
+              </a:spcAft>
+            </a:pPr>
+            <a:r>
+              <a:rPr sz="850" b="1" i="0">
+                <a:solidFill>
+                  <a:srgbClr val="7A7F87"/>
+                </a:solidFill>
+                <a:latin typeface="Calibri"/>
+              </a:rPr>
+              <a:t>30</a:t>
+            </a:r>
+          </a:p>
+        </p:txBody>
+      </p:sp>
+      <p:sp>
+        <p:nvSpPr>
+          <p:cNvPr id="10" name="Rectangle 9"/>
+          <p:cNvSpPr/>
+          <p:nvPr/>
+        </p:nvSpPr>
+        <p:spPr>
+          <a:xfrm>
+            <a:off x="777240" y="1353312"/>
+            <a:ext cx="5105863" cy="1432224"/>
+          </a:xfrm>
+          <a:prstGeom prst="rect">
+            <a:avLst/>
+          </a:prstGeom>
+          <a:solidFill>
+            <a:srgbClr val="F4F2EF"/>
+          </a:solidFill>
+          <a:ln>
+            <a:noFill/>
+          </a:ln>
+          <a:effectLst/>
+        </p:spPr>
+        <p:style>
+          <a:lnRef idx="1">
+            <a:schemeClr val="accent1"/>
+          </a:lnRef>
+          <a:fillRef idx="3">
+            <a:schemeClr val="accent1"/>
+          </a:fillRef>
+          <a:effectRef idx="2">
+            <a:schemeClr val="accent1"/>
+          </a:effectRef>
+          <a:fontRef idx="minor">
+            <a:schemeClr val="lt1"/>
+          </a:fontRef>
+        </p:style>
+        <p:txBody>
+          <a:bodyPr rtlCol="0" anchor="ctr" wrap="square" lIns="109728" rIns="109728" tIns="64008" bIns="64008"/>
+          <a:lstStyle/>
+          <a:p>
+            <a:pPr algn="ctr"/>
+          </a:p>
+        </p:txBody>
+      </p:sp>
+      <p:sp>
+        <p:nvSpPr>
+          <p:cNvPr id="11" name="Rectangle 10"/>
+          <p:cNvSpPr/>
+          <p:nvPr/>
+        </p:nvSpPr>
+        <p:spPr>
+          <a:xfrm>
+            <a:off x="777240" y="1353312"/>
+            <a:ext cx="41148" cy="1432224"/>
+          </a:xfrm>
+          <a:prstGeom prst="rect">
+            <a:avLst/>
+          </a:prstGeom>
+          <a:solidFill>
+            <a:srgbClr val="4A4F57"/>
+          </a:solidFill>
+          <a:ln>
+            <a:noFill/>
+          </a:ln>
+          <a:effectLst/>
+        </p:spPr>
+        <p:style>
+          <a:lnRef idx="1">
+            <a:schemeClr val="accent1"/>
+          </a:lnRef>
+          <a:fillRef idx="3">
+            <a:schemeClr val="accent1"/>
+          </a:fillRef>
+          <a:effectRef idx="2">
+            <a:schemeClr val="accent1"/>
+          </a:effectRef>
+          <a:fontRef idx="minor">
+            <a:schemeClr val="lt1"/>
+          </a:fontRef>
+        </p:style>
+        <p:txBody>
+          <a:bodyPr rtlCol="0" anchor="ctr" wrap="square" lIns="109728" rIns="109728" tIns="64008" bIns="64008"/>
+          <a:lstStyle/>
+          <a:p>
+            <a:pPr algn="ctr"/>
+          </a:p>
+        </p:txBody>
+      </p:sp>
+      <p:sp>
+        <p:nvSpPr>
+          <p:cNvPr id="12" name="TextBox 11"/>
+          <p:cNvSpPr txBox="1"/>
+          <p:nvPr/>
+        </p:nvSpPr>
+        <p:spPr>
+          <a:xfrm>
+            <a:off x="978408" y="1453896"/>
+            <a:ext cx="4740103" cy="1249344"/>
+          </a:xfrm>
+          <a:prstGeom prst="rect">
+            <a:avLst/>
+          </a:prstGeom>
+          <a:noFill/>
+        </p:spPr>
+        <p:txBody>
+          <a:bodyPr wrap="square" lIns="0" rIns="0" tIns="0" bIns="0" anchor="t">
+            <a:spAutoFit/>
+          </a:bodyPr>
+          <a:lstStyle/>
+          <a:p>
+            <a:pPr algn="l">
+              <a:lnSpc>
+                <a:spcPct val="134000"/>
+              </a:lnSpc>
+              <a:spcBef>
+                <a:spcPts val="0"/>
+              </a:spcBef>
+              <a:spcAft>
+                <a:spcPts val="0"/>
+              </a:spcAft>
+            </a:pPr>
+            <a:r>
+              <a:rPr sz="900" b="0" i="0">
+                <a:solidFill>
+                  <a:srgbClr val="1C1C1E"/>
+                </a:solidFill>
+                <a:latin typeface="Consolas"/>
+              </a:rPr>
+              <a:t>featureset: macro_plus</a:t>
+            </a:r>
+          </a:p>
+          <a:p>
+            <a:pPr>
+              <a:lnSpc>
+                <a:spcPct val="134000"/>
+              </a:lnSpc>
+              <a:spcBef>
+                <a:spcPts val="0"/>
+              </a:spcBef>
+              <a:spcAft>
+                <a:spcPts val="0"/>
+              </a:spcAft>
+            </a:pPr>
+            <a:r>
+              <a:rPr sz="900" b="0" i="0">
+                <a:solidFill>
+                  <a:srgbClr val="1C1C1E"/>
+                </a:solidFill>
+                <a:latin typeface="Consolas"/>
+              </a:rPr>
+              <a:t>composes:   [macro_core]</a:t>
+            </a:r>
+          </a:p>
+          <a:p>
+            <a:pPr>
+              <a:lnSpc>
+                <a:spcPct val="134000"/>
+              </a:lnSpc>
+              <a:spcBef>
+                <a:spcPts val="0"/>
+              </a:spcBef>
+              <a:spcAft>
+                <a:spcPts val="0"/>
+              </a:spcAft>
+            </a:pPr>
+            <a:r>
+              <a:rPr sz="900" b="0" i="0">
+                <a:solidFill>
+                  <a:srgbClr val="1C1C1E"/>
+                </a:solidFill>
+                <a:latin typeface="Consolas"/>
+              </a:rPr>
+              <a:t>operations: [{op: add, name: term_spread}]</a:t>
+            </a:r>
+          </a:p>
+          <a:p>
+            <a:pPr>
+              <a:lnSpc>
+                <a:spcPct val="134000"/>
+              </a:lnSpc>
+              <a:spcBef>
+                <a:spcPts val="0"/>
+              </a:spcBef>
+              <a:spcAft>
+                <a:spcPts val="0"/>
+              </a:spcAft>
+            </a:pPr>
+            <a:r>
+              <a:rPr sz="900" b="0" i="0">
+                <a:solidFill>
+                  <a:srgbClr val="1C1C1E"/>
+                </a:solidFill>
+                <a:latin typeface="Consolas"/>
+              </a:rPr>
+              <a:t> </a:t>
+            </a:r>
+          </a:p>
+          <a:p>
+            <a:pPr>
+              <a:lnSpc>
+                <a:spcPct val="134000"/>
+              </a:lnSpc>
+              <a:spcBef>
+                <a:spcPts val="0"/>
+              </a:spcBef>
+              <a:spcAft>
+                <a:spcPts val="0"/>
+              </a:spcAft>
+            </a:pPr>
+            <a:r>
+              <a:rPr sz="900" b="0" i="0">
+                <a:solidFill>
+                  <a:srgbClr val="1C1C1E"/>
+                </a:solidFill>
+                <a:latin typeface="Consolas"/>
+              </a:rPr>
+              <a:t>→ macro_plus resolves to FOUR slots</a:t>
+            </a:r>
+          </a:p>
+          <a:p>
+            <a:pPr>
+              <a:lnSpc>
+                <a:spcPct val="134000"/>
+              </a:lnSpc>
+              <a:spcBef>
+                <a:spcPts val="0"/>
+              </a:spcBef>
+              <a:spcAft>
+                <a:spcPts val="0"/>
+              </a:spcAft>
+            </a:pPr>
+            <a:r>
+              <a:rPr sz="900" b="0" i="0">
+                <a:solidFill>
+                  <a:srgbClr val="1C1C1E"/>
+                </a:solidFill>
+                <a:latin typeface="Consolas"/>
+              </a:rPr>
+              <a:t>  px_close  u3_rate  prev_return  term_spread</a:t>
+            </a:r>
+          </a:p>
+        </p:txBody>
+      </p:sp>
+      <p:sp>
+        <p:nvSpPr>
+          <p:cNvPr id="13" name="TextBox 12"/>
+          <p:cNvSpPr txBox="1"/>
+          <p:nvPr/>
+        </p:nvSpPr>
+        <p:spPr>
+          <a:xfrm>
+            <a:off x="777240" y="2986704"/>
+            <a:ext cx="5105863" cy="1371600"/>
+          </a:xfrm>
+          <a:prstGeom prst="rect">
+            <a:avLst/>
+          </a:prstGeom>
+          <a:noFill/>
+        </p:spPr>
+        <p:txBody>
+          <a:bodyPr wrap="square" lIns="0" rIns="0" tIns="0" bIns="0" anchor="t">
+            <a:spAutoFit/>
+          </a:bodyPr>
+          <a:lstStyle/>
+          <a:p>
+            <a:pPr algn="l">
+              <a:lnSpc>
+                <a:spcPct val="124000"/>
+              </a:lnSpc>
+              <a:spcBef>
+                <a:spcPts val="0"/>
+              </a:spcBef>
+              <a:spcAft>
+                <a:spcPts val="0"/>
+              </a:spcAft>
+            </a:pPr>
+            <a:r>
+              <a:rPr sz="1050" b="1" i="0">
+                <a:solidFill>
+                  <a:srgbClr val="A51C30"/>
+                </a:solidFill>
+                <a:latin typeface="Calibri"/>
+              </a:rPr>
+              <a:t>Not a new version of macro_core. </a:t>
+            </a:r>
+            <a:r>
+              <a:rPr sz="1050" b="0" i="0">
+                <a:solidFill>
+                  <a:srgbClr val="4A4F57"/>
+                </a:solidFill>
+                <a:latin typeface="Calibri"/>
+              </a:rPr>
+              <a:t>Adding a slot changes the schema, and the schema is what a kernel is defined over — so it is a new featureset composed from the old one, and macro_core@v1 is untouched for whoever is already using it.</a:t>
+            </a:r>
+          </a:p>
+        </p:txBody>
+      </p:sp>
+      <p:sp>
+        <p:nvSpPr>
+          <p:cNvPr id="14" name="TextBox 13"/>
+          <p:cNvSpPr txBox="1"/>
+          <p:nvPr/>
+        </p:nvSpPr>
+        <p:spPr>
+          <a:xfrm>
+            <a:off x="6308591" y="1353312"/>
+            <a:ext cx="5105863" cy="274320"/>
+          </a:xfrm>
+          <a:prstGeom prst="rect">
+            <a:avLst/>
+          </a:prstGeom>
+          <a:noFill/>
+        </p:spPr>
+        <p:txBody>
+          <a:bodyPr wrap="square" lIns="0" rIns="0" tIns="0" bIns="0" anchor="t">
+            <a:spAutoFit/>
+          </a:bodyPr>
+          <a:lstStyle/>
+          <a:p>
+            <a:pPr algn="l">
+              <a:spcBef>
+                <a:spcPts val="0"/>
+              </a:spcBef>
+              <a:spcAft>
+                <a:spcPts val="0"/>
+              </a:spcAft>
+            </a:pPr>
+            <a:r>
+              <a:rPr sz="1250" b="1" i="0">
+                <a:solidFill>
+                  <a:srgbClr val="A51C30"/>
+                </a:solidFill>
+                <a:latin typeface="Georgia"/>
+              </a:rPr>
+              <a:t>And the old model cannot simply read it</a:t>
+            </a:r>
+          </a:p>
+        </p:txBody>
+      </p:sp>
+      <p:sp>
+        <p:nvSpPr>
+          <p:cNvPr id="15" name="Rectangle 14"/>
+          <p:cNvSpPr/>
+          <p:nvPr/>
+        </p:nvSpPr>
+        <p:spPr>
+          <a:xfrm>
+            <a:off x="6308591" y="1700784"/>
+            <a:ext cx="5105863" cy="1732422"/>
+          </a:xfrm>
+          <a:prstGeom prst="rect">
+            <a:avLst/>
+          </a:prstGeom>
+          <a:solidFill>
+            <a:srgbClr val="F4F2EF"/>
+          </a:solidFill>
+          <a:ln>
+            <a:noFill/>
+          </a:ln>
+          <a:effectLst/>
+        </p:spPr>
+        <p:style>
+          <a:lnRef idx="1">
+            <a:schemeClr val="accent1"/>
+          </a:lnRef>
+          <a:fillRef idx="3">
+            <a:schemeClr val="accent1"/>
+          </a:fillRef>
+          <a:effectRef idx="2">
+            <a:schemeClr val="accent1"/>
+          </a:effectRef>
+          <a:fontRef idx="minor">
+            <a:schemeClr val="lt1"/>
+          </a:fontRef>
+        </p:style>
+        <p:txBody>
+          <a:bodyPr rtlCol="0" anchor="ctr" wrap="square" lIns="109728" rIns="109728" tIns="64008" bIns="64008"/>
+          <a:lstStyle/>
+          <a:p>
+            <a:pPr algn="ctr"/>
+          </a:p>
+        </p:txBody>
+      </p:sp>
+      <p:sp>
+        <p:nvSpPr>
+          <p:cNvPr id="16" name="Rectangle 15"/>
+          <p:cNvSpPr/>
+          <p:nvPr/>
+        </p:nvSpPr>
+        <p:spPr>
+          <a:xfrm>
+            <a:off x="6308591" y="1700784"/>
+            <a:ext cx="41148" cy="1732422"/>
+          </a:xfrm>
+          <a:prstGeom prst="rect">
+            <a:avLst/>
+          </a:prstGeom>
+          <a:solidFill>
+            <a:srgbClr val="4A4F57"/>
+          </a:solidFill>
+          <a:ln>
+            <a:noFill/>
+          </a:ln>
+          <a:effectLst/>
+        </p:spPr>
+        <p:style>
+          <a:lnRef idx="1">
+            <a:schemeClr val="accent1"/>
+          </a:lnRef>
+          <a:fillRef idx="3">
+            <a:schemeClr val="accent1"/>
+          </a:fillRef>
+          <a:effectRef idx="2">
+            <a:schemeClr val="accent1"/>
+          </a:effectRef>
+          <a:fontRef idx="minor">
+            <a:schemeClr val="lt1"/>
+          </a:fontRef>
+        </p:style>
+        <p:txBody>
+          <a:bodyPr rtlCol="0" anchor="ctr" wrap="square" lIns="109728" rIns="109728" tIns="64008" bIns="64008"/>
+          <a:lstStyle/>
+          <a:p>
+            <a:pPr algn="ctr"/>
+          </a:p>
+        </p:txBody>
+      </p:sp>
+      <p:sp>
+        <p:nvSpPr>
+          <p:cNvPr id="17" name="TextBox 16"/>
+          <p:cNvSpPr txBox="1"/>
+          <p:nvPr/>
+        </p:nvSpPr>
+        <p:spPr>
+          <a:xfrm>
+            <a:off x="6509759" y="1801368"/>
+            <a:ext cx="4740103" cy="1549542"/>
+          </a:xfrm>
+          <a:prstGeom prst="rect">
+            <a:avLst/>
+          </a:prstGeom>
+          <a:noFill/>
+        </p:spPr>
+        <p:txBody>
+          <a:bodyPr wrap="square" lIns="0" rIns="0" tIns="0" bIns="0" anchor="t">
+            <a:spAutoFit/>
+          </a:bodyPr>
+          <a:lstStyle/>
+          <a:p>
+            <a:pPr algn="l">
+              <a:lnSpc>
+                <a:spcPct val="134000"/>
+              </a:lnSpc>
+              <a:spcBef>
+                <a:spcPts val="0"/>
+              </a:spcBef>
+              <a:spcAft>
+                <a:spcPts val="0"/>
+              </a:spcAft>
+            </a:pPr>
+            <a:r>
+              <a:rPr sz="850" b="0" i="0">
+                <a:solidFill>
+                  <a:srgbClr val="1C1C1E"/>
+                </a:solidFill>
+                <a:latin typeface="Consolas"/>
+              </a:rPr>
+              <a:t>POST /api/v1/fit-warrants</a:t>
+            </a:r>
+          </a:p>
+          <a:p>
+            <a:pPr>
+              <a:lnSpc>
+                <a:spcPct val="134000"/>
+              </a:lnSpc>
+              <a:spcBef>
+                <a:spcPts val="0"/>
+              </a:spcBef>
+              <a:spcAft>
+                <a:spcPts val="0"/>
+              </a:spcAft>
+            </a:pPr>
+            <a:r>
+              <a:rPr sz="850" b="0" i="0">
+                <a:solidFill>
+                  <a:srgbClr val="1C1C1E"/>
+                </a:solidFill>
+                <a:latin typeface="Consolas"/>
+              </a:rPr>
+              <a:t>  { model: mlr@1.0.0, featureset: macro_plus }</a:t>
+            </a:r>
+          </a:p>
+          <a:p>
+            <a:pPr>
+              <a:lnSpc>
+                <a:spcPct val="134000"/>
+              </a:lnSpc>
+              <a:spcBef>
+                <a:spcPts val="0"/>
+              </a:spcBef>
+              <a:spcAft>
+                <a:spcPts val="0"/>
+              </a:spcAft>
+            </a:pPr>
+            <a:r>
+              <a:rPr sz="850" b="0" i="0">
+                <a:solidFill>
+                  <a:srgbClr val="1C1C1E"/>
+                </a:solidFill>
+                <a:latin typeface="Consolas"/>
+              </a:rPr>
+              <a:t> </a:t>
+            </a:r>
+          </a:p>
+          <a:p>
+            <a:pPr>
+              <a:lnSpc>
+                <a:spcPct val="134000"/>
+              </a:lnSpc>
+              <a:spcBef>
+                <a:spcPts val="0"/>
+              </a:spcBef>
+              <a:spcAft>
+                <a:spcPts val="0"/>
+              </a:spcAft>
+            </a:pPr>
+            <a:r>
+              <a:rPr sz="850" b="0" i="0">
+                <a:solidFill>
+                  <a:srgbClr val="1C1C1E"/>
+                </a:solidFill>
+                <a:latin typeface="Consolas"/>
+              </a:rPr>
+              <a:t>409 schema_not_satisfied</a:t>
+            </a:r>
+          </a:p>
+          <a:p>
+            <a:pPr>
+              <a:lnSpc>
+                <a:spcPct val="134000"/>
+              </a:lnSpc>
+              <a:spcBef>
+                <a:spcPts val="0"/>
+              </a:spcBef>
+              <a:spcAft>
+                <a:spcPts val="0"/>
+              </a:spcAft>
+            </a:pPr>
+            <a:r>
+              <a:rPr sz="850" b="0" i="0">
+                <a:solidFill>
+                  <a:srgbClr val="1C1C1E"/>
+                </a:solidFill>
+                <a:latin typeface="Consolas"/>
+              </a:rPr>
+              <a:t>    'macro_plus' provides term_spread, which this</a:t>
+            </a:r>
+          </a:p>
+          <a:p>
+            <a:pPr>
+              <a:lnSpc>
+                <a:spcPct val="134000"/>
+              </a:lnSpc>
+              <a:spcBef>
+                <a:spcPts val="0"/>
+              </a:spcBef>
+              <a:spcAft>
+                <a:spcPts val="0"/>
+              </a:spcAft>
+            </a:pPr>
+            <a:r>
+              <a:rPr sz="850" b="0" i="0">
+                <a:solidFill>
+                  <a:srgbClr val="1C1C1E"/>
+                </a:solidFill>
+                <a:latin typeface="Consolas"/>
+              </a:rPr>
+              <a:t>    version does not declare in its input schema.</a:t>
+            </a:r>
+          </a:p>
+          <a:p>
+            <a:pPr>
+              <a:lnSpc>
+                <a:spcPct val="134000"/>
+              </a:lnSpc>
+              <a:spcBef>
+                <a:spcPts val="0"/>
+              </a:spcBef>
+              <a:spcAft>
+                <a:spcPts val="0"/>
+              </a:spcAft>
+            </a:pPr>
+            <a:r>
+              <a:rPr sz="850" b="0" i="0">
+                <a:solidFill>
+                  <a:srgbClr val="1C1C1E"/>
+                </a:solidFill>
+                <a:latin typeface="Consolas"/>
+              </a:rPr>
+              <a:t>    Adding a regressor is a MODEL change, not a</a:t>
+            </a:r>
+          </a:p>
+          <a:p>
+            <a:pPr>
+              <a:lnSpc>
+                <a:spcPct val="134000"/>
+              </a:lnSpc>
+              <a:spcBef>
+                <a:spcPts val="0"/>
+              </a:spcBef>
+              <a:spcAft>
+                <a:spcPts val="0"/>
+              </a:spcAft>
+            </a:pPr>
+            <a:r>
+              <a:rPr sz="850" b="0" i="0">
+                <a:solidFill>
+                  <a:srgbClr val="1C1C1E"/>
+                </a:solidFill>
+                <a:latin typeface="Consolas"/>
+              </a:rPr>
+              <a:t>    data change.</a:t>
+            </a:r>
+          </a:p>
+        </p:txBody>
+      </p:sp>
+      <p:sp>
+        <p:nvSpPr>
+          <p:cNvPr id="18" name="TextBox 17"/>
+          <p:cNvSpPr txBox="1"/>
+          <p:nvPr/>
+        </p:nvSpPr>
+        <p:spPr>
+          <a:xfrm>
+            <a:off x="6308591" y="3616086"/>
+            <a:ext cx="5105863" cy="914400"/>
+          </a:xfrm>
+          <a:prstGeom prst="rect">
+            <a:avLst/>
+          </a:prstGeom>
+          <a:noFill/>
+        </p:spPr>
+        <p:txBody>
+          <a:bodyPr wrap="square" lIns="0" rIns="0" tIns="0" bIns="0" anchor="t">
+            <a:spAutoFit/>
+          </a:bodyPr>
+          <a:lstStyle/>
+          <a:p>
+            <a:pPr algn="l">
+              <a:lnSpc>
+                <a:spcPct val="124000"/>
+              </a:lnSpc>
+              <a:spcBef>
+                <a:spcPts val="0"/>
+              </a:spcBef>
+              <a:spcAft>
+                <a:spcPts val="600"/>
+              </a:spcAft>
+            </a:pPr>
+            <a:r>
+              <a:rPr sz="1050" b="0" i="0">
+                <a:solidFill>
+                  <a:srgbClr val="1C1C1E"/>
+                </a:solidFill>
+                <a:latin typeface="Calibri"/>
+              </a:rPr>
+              <a:t>So a third model is registered over the wider X — a gradient-boosted classifier for ‘drawdown next month’:</a:t>
+            </a:r>
+          </a:p>
+        </p:txBody>
+      </p:sp>
+      <p:graphicFrame>
+        <p:nvGraphicFramePr>
+          <p:cNvPr id="19" name="Table 18"/>
+          <p:cNvGraphicFramePr>
+            <a:graphicFrameLocks noGrp="1"/>
+          </p:cNvGraphicFramePr>
+          <p:nvPr/>
+        </p:nvGraphicFramePr>
+        <p:xfrm>
+          <a:off x="6308591" y="4530486"/>
+          <a:ext cx="5105862" cy="1498470"/>
+        </p:xfrm>
+        <a:graphic>
+          <a:graphicData uri="http://schemas.openxmlformats.org/drawingml/2006/table">
+            <a:tbl>
+              <a:tblPr>
+                <a:tableStyleId>{5C22544A-7EE6-4342-B048-85BDC9FD1C3A}</a:tableStyleId>
+              </a:tblPr>
+              <a:tblGrid>
+                <a:gridCol w="919975"/>
+                <a:gridCol w="4185887"/>
+              </a:tblGrid>
+              <a:tr h="299694">
+                <a:tc>
+                  <a:txBody>
+                    <a:bodyPr wrap="square"/>
+                    <a:lstStyle/>
+                    <a:p>
+                      <a:pPr algn="l"/>
+                      <a:r>
+                        <a:rPr sz="900" b="1">
+                          <a:solidFill>
+                            <a:srgbClr val="A51C30"/>
+                          </a:solidFill>
+                          <a:latin typeface="Calibri"/>
+                        </a:rPr>
+                        <a:t/>
+                      </a:r>
+                    </a:p>
+                  </a:txBody>
+                  <a:tcPr marL="82296" marR="64008" marT="32004" marB="32004" anchor="ctr">
+                    <a:solidFill>
+                      <a:srgbClr val="F6F3EF"/>
+                    </a:solidFill>
+                  </a:tcPr>
+                </a:tc>
+                <a:tc>
+                  <a:txBody>
+                    <a:bodyPr wrap="square"/>
+                    <a:lstStyle/>
+                    <a:p>
+                      <a:pPr algn="l"/>
+                      <a:r>
+                        <a:rPr sz="900" b="0">
+                          <a:solidFill>
+                            <a:srgbClr val="1C1C1E"/>
+                          </a:solidFill>
+                          <a:latin typeface="Calibri"/>
+                        </a:rPr>
+                        <a:t/>
+                      </a:r>
+                    </a:p>
+                  </a:txBody>
+                  <a:tcPr marL="82296" marR="64008" marT="32004" marB="32004" anchor="ctr">
+                    <a:solidFill>
+                      <a:srgbClr val="F6F3EF"/>
+                    </a:solidFill>
+                  </a:tcPr>
+                </a:tc>
+              </a:tr>
+              <a:tr h="299694">
+                <a:tc>
+                  <a:txBody>
+                    <a:bodyPr wrap="square"/>
+                    <a:lstStyle/>
+                    <a:p>
+                      <a:pPr algn="l"/>
+                      <a:r>
+                        <a:rPr sz="900" b="1">
+                          <a:solidFill>
+                            <a:srgbClr val="A51C30"/>
+                          </a:solidFill>
+                          <a:latin typeface="Calibri"/>
+                        </a:rPr>
+                        <a:t>kind</a:t>
+                      </a:r>
+                    </a:p>
+                  </a:txBody>
+                  <a:tcPr marL="82296" marR="64008" marT="32004" marB="32004" anchor="ctr">
+                    <a:solidFill>
+                      <a:srgbClr val="FFFFFF"/>
+                    </a:solidFill>
+                  </a:tcPr>
+                </a:tc>
+                <a:tc>
+                  <a:txBody>
+                    <a:bodyPr wrap="square"/>
+                    <a:lstStyle/>
+                    <a:p>
+                      <a:pPr algn="l"/>
+                      <a:r>
+                        <a:rPr sz="900" b="0">
+                          <a:solidFill>
+                            <a:srgbClr val="1C1C1E"/>
+                          </a:solidFill>
+                          <a:latin typeface="Calibri"/>
+                        </a:rPr>
+                        <a:t>learned_weights  → T3, not T2</a:t>
+                      </a:r>
+                    </a:p>
+                  </a:txBody>
+                  <a:tcPr marL="82296" marR="64008" marT="32004" marB="32004" anchor="ctr">
+                    <a:solidFill>
+                      <a:srgbClr val="FFFFFF"/>
+                    </a:solidFill>
+                  </a:tcPr>
+                </a:tc>
+              </a:tr>
+              <a:tr h="299694">
+                <a:tc>
+                  <a:txBody>
+                    <a:bodyPr wrap="square"/>
+                    <a:lstStyle/>
+                    <a:p>
+                      <a:pPr algn="l"/>
+                      <a:r>
+                        <a:rPr sz="900" b="1">
+                          <a:solidFill>
+                            <a:srgbClr val="A51C30"/>
+                          </a:solidFill>
+                          <a:latin typeface="Calibri"/>
+                        </a:rPr>
+                        <a:t>fit</a:t>
+                      </a:r>
+                    </a:p>
+                  </a:txBody>
+                  <a:tcPr marL="82296" marR="64008" marT="32004" marB="32004" anchor="ctr">
+                    <a:solidFill>
+                      <a:srgbClr val="F6F3EF"/>
+                    </a:solidFill>
+                  </a:tcPr>
+                </a:tc>
+                <a:tc>
+                  <a:txBody>
+                    <a:bodyPr wrap="square"/>
+                    <a:lstStyle/>
+                    <a:p>
+                      <a:pPr algn="l"/>
+                      <a:r>
+                        <a:rPr sz="900" b="0">
+                          <a:solidFill>
+                            <a:srgbClr val="1C1C1E"/>
+                          </a:solidFill>
+                          <a:latin typeface="Calibri"/>
+                        </a:rPr>
+                        <a:t>train, not estimate</a:t>
+                      </a:r>
+                    </a:p>
+                  </a:txBody>
+                  <a:tcPr marL="82296" marR="64008" marT="32004" marB="32004" anchor="ctr">
+                    <a:solidFill>
+                      <a:srgbClr val="F6F3EF"/>
+                    </a:solidFill>
+                  </a:tcPr>
+                </a:tc>
+              </a:tr>
+              <a:tr h="299694">
+                <a:tc>
+                  <a:txBody>
+                    <a:bodyPr wrap="square"/>
+                    <a:lstStyle/>
+                    <a:p>
+                      <a:pPr algn="l"/>
+                      <a:r>
+                        <a:rPr sz="900" b="1">
+                          <a:solidFill>
+                            <a:srgbClr val="A51C30"/>
+                          </a:solidFill>
+                          <a:latin typeface="Calibri"/>
+                        </a:rPr>
+                        <a:t>D(Y)</a:t>
+                      </a:r>
+                    </a:p>
+                  </a:txBody>
+                  <a:tcPr marL="82296" marR="64008" marT="32004" marB="32004" anchor="ctr">
+                    <a:solidFill>
+                      <a:srgbClr val="FFFFFF"/>
+                    </a:solidFill>
+                  </a:tcPr>
+                </a:tc>
+                <a:tc>
+                  <a:txBody>
+                    <a:bodyPr wrap="square"/>
+                    <a:lstStyle/>
+                    <a:p>
+                      <a:pPr algn="l"/>
+                      <a:r>
+                        <a:rPr sz="900" b="0">
+                          <a:solidFill>
+                            <a:srgbClr val="1C1C1E"/>
+                          </a:solidFill>
+                          <a:latin typeface="Calibri"/>
+                        </a:rPr>
+                        <a:t>class_probabilities</a:t>
+                      </a:r>
+                    </a:p>
+                  </a:txBody>
+                  <a:tcPr marL="82296" marR="64008" marT="32004" marB="32004" anchor="ctr">
+                    <a:solidFill>
+                      <a:srgbClr val="FFFFFF"/>
+                    </a:solidFill>
+                  </a:tcPr>
+                </a:tc>
+              </a:tr>
+              <a:tr h="299694">
+                <a:tc>
+                  <a:txBody>
+                    <a:bodyPr wrap="square"/>
+                    <a:lstStyle/>
+                    <a:p>
+                      <a:pPr algn="l"/>
+                      <a:r>
+                        <a:rPr sz="900" b="1">
+                          <a:solidFill>
+                            <a:srgbClr val="A51C30"/>
+                          </a:solidFill>
+                          <a:latin typeface="Calibri"/>
+                        </a:rPr>
+                        <a:t>reads</a:t>
+                      </a:r>
+                    </a:p>
+                  </a:txBody>
+                  <a:tcPr marL="82296" marR="64008" marT="32004" marB="32004" anchor="ctr">
+                    <a:solidFill>
+                      <a:srgbClr val="F6F3EF"/>
+                    </a:solidFill>
+                  </a:tcPr>
+                </a:tc>
+                <a:tc>
+                  <a:txBody>
+                    <a:bodyPr wrap="square"/>
+                    <a:lstStyle/>
+                    <a:p>
+                      <a:pPr algn="l"/>
+                      <a:r>
+                        <a:rPr sz="900" b="0">
+                          <a:solidFill>
+                            <a:srgbClr val="1C1C1E"/>
+                          </a:solidFill>
+                          <a:latin typeface="Calibri"/>
+                        </a:rPr>
+                        <a:t>macro_plus@v1, all four slots</a:t>
+                      </a:r>
+                    </a:p>
+                  </a:txBody>
+                  <a:tcPr marL="82296" marR="64008" marT="32004" marB="32004" anchor="ctr">
+                    <a:solidFill>
+                      <a:srgbClr val="F6F3EF"/>
+                    </a:solidFill>
+                  </a:tcPr>
+                </a:tc>
+              </a:tr>
+            </a:tbl>
+          </a:graphicData>
+        </a:graphic>
+      </p:graphicFrame>
+      <p:sp>
+        <p:nvSpPr>
+          <p:cNvPr id="20" name="Rectangle 19"/>
+          <p:cNvSpPr/>
+          <p:nvPr/>
+        </p:nvSpPr>
+        <p:spPr>
+          <a:xfrm>
+            <a:off x="777240" y="4486320"/>
+            <a:ext cx="5105863" cy="1207008"/>
+          </a:xfrm>
+          <a:prstGeom prst="rect">
+            <a:avLst/>
+          </a:prstGeom>
+          <a:solidFill>
+            <a:srgbClr val="F6F3EF"/>
+          </a:solidFill>
+          <a:ln>
+            <a:noFill/>
+          </a:ln>
+          <a:effectLst/>
+        </p:spPr>
+        <p:style>
+          <a:lnRef idx="1">
+            <a:schemeClr val="accent1"/>
+          </a:lnRef>
+          <a:fillRef idx="3">
+            <a:schemeClr val="accent1"/>
+          </a:fillRef>
+          <a:effectRef idx="2">
+            <a:schemeClr val="accent1"/>
+          </a:effectRef>
+          <a:fontRef idx="minor">
+            <a:schemeClr val="lt1"/>
+          </a:fontRef>
+        </p:style>
+        <p:txBody>
+          <a:bodyPr rtlCol="0" anchor="ctr" wrap="square" lIns="109728" rIns="109728" tIns="64008" bIns="64008"/>
+          <a:lstStyle/>
+          <a:p>
+            <a:pPr algn="ctr"/>
+          </a:p>
+        </p:txBody>
+      </p:sp>
+      <p:sp>
+        <p:nvSpPr>
+          <p:cNvPr id="21" name="Rectangle 20"/>
+          <p:cNvSpPr/>
+          <p:nvPr/>
+        </p:nvSpPr>
+        <p:spPr>
+          <a:xfrm>
+            <a:off x="777240" y="4486320"/>
+            <a:ext cx="41148" cy="1207008"/>
+          </a:xfrm>
+          <a:prstGeom prst="rect">
+            <a:avLst/>
+          </a:prstGeom>
+          <a:solidFill>
+            <a:srgbClr val="A51C30"/>
+          </a:solidFill>
+          <a:ln>
+            <a:noFill/>
+          </a:ln>
+          <a:effectLst/>
+        </p:spPr>
+        <p:style>
+          <a:lnRef idx="1">
+            <a:schemeClr val="accent1"/>
+          </a:lnRef>
+          <a:fillRef idx="3">
+            <a:schemeClr val="accent1"/>
+          </a:fillRef>
+          <a:effectRef idx="2">
+            <a:schemeClr val="accent1"/>
+          </a:effectRef>
+          <a:fontRef idx="minor">
+            <a:schemeClr val="lt1"/>
+          </a:fontRef>
+        </p:style>
+        <p:txBody>
+          <a:bodyPr rtlCol="0" anchor="ctr" wrap="square" lIns="109728" rIns="109728" tIns="64008" bIns="64008"/>
+          <a:lstStyle/>
+          <a:p>
+            <a:pPr algn="ctr"/>
+          </a:p>
+        </p:txBody>
+      </p:sp>
+      <p:sp>
+        <p:nvSpPr>
+          <p:cNvPr id="22" name="TextBox 21"/>
+          <p:cNvSpPr txBox="1"/>
+          <p:nvPr/>
+        </p:nvSpPr>
+        <p:spPr>
+          <a:xfrm>
+            <a:off x="1014983" y="4605192"/>
+            <a:ext cx="4648663" cy="987552"/>
+          </a:xfrm>
+          <a:prstGeom prst="rect">
+            <a:avLst/>
+          </a:prstGeom>
+          <a:noFill/>
+        </p:spPr>
+        <p:txBody>
+          <a:bodyPr wrap="square" lIns="0" rIns="0" tIns="0" bIns="0" anchor="t">
+            <a:spAutoFit/>
+          </a:bodyPr>
+          <a:lstStyle/>
+          <a:p>
+            <a:pPr algn="l">
+              <a:lnSpc>
+                <a:spcPct val="124000"/>
+              </a:lnSpc>
+              <a:spcBef>
+                <a:spcPts val="0"/>
+              </a:spcBef>
+              <a:spcAft>
+                <a:spcPts val="0"/>
+              </a:spcAft>
+            </a:pPr>
+            <a:r>
+              <a:rPr sz="1050" b="1" i="0">
+                <a:solidFill>
+                  <a:srgbClr val="A51C30"/>
+                </a:solidFill>
+                <a:latin typeface="Calibri"/>
+              </a:rPr>
+              <a:t>The refusal is the feature. </a:t>
+            </a:r>
+            <a:r>
+              <a:rPr sz="1050" b="0" i="0">
+                <a:solidFill>
+                  <a:srgbClr val="1C1C1E"/>
+                </a:solidFill>
+                <a:latin typeface="Calibri"/>
+              </a:rPr>
+              <a:t>Widening a featureset under a model that was never defined over it is the failure all of this exists to make visible — and it is caught at the warrant, </a:t>
+            </a:r>
+            <a:r>
+              <a:rPr sz="1050" b="1" i="0">
+                <a:solidFill>
+                  <a:srgbClr val="1C1C1E"/>
+                </a:solidFill>
+                <a:latin typeface="Calibri"/>
+              </a:rPr>
+              <a:t>before anything is fitted, rather than by somebody noticing later that a coefficient vector had four entries.</a:t>
+            </a:r>
+          </a:p>
+        </p:txBody>
+      </p:sp>
+    </p:spTree>
+  </p:cSld>
+  <p:clrMapOvr>
+    <a:masterClrMapping/>
+  </p:clrMapOvr>
+</p:sld>
+</file>
+
+<file path=ppt/slides/slide32.xml><?xml version="1.0" encoding="utf-8"?>
+<p:sld xmlns:a="http://schemas.openxmlformats.org/drawingml/2006/main" xmlns:p="http://schemas.openxmlformats.org/presentationml/2006/main" xmlns:r="http://schemas.openxmlformats.org/officeDocument/2006/relationships">
+  <p:cSld>
+    <p:spTree>
+      <p:nvGrpSpPr>
+        <p:cNvPr id="1" name=""/>
+        <p:cNvGrpSpPr/>
+        <p:nvPr/>
+      </p:nvGrpSpPr>
+      <p:grpSpPr/>
+      <p:sp>
+        <p:nvSpPr>
+          <p:cNvPr id="2" name="Rectangle 1"/>
+          <p:cNvSpPr/>
+          <p:nvPr/>
+        </p:nvSpPr>
+        <p:spPr>
+          <a:xfrm>
+            <a:off x="0" y="0"/>
+            <a:ext cx="12191695" cy="6858000"/>
+          </a:xfrm>
+          <a:prstGeom prst="rect">
+            <a:avLst/>
+          </a:prstGeom>
+          <a:solidFill>
+            <a:srgbClr val="A51C30"/>
+          </a:solidFill>
+          <a:ln>
+            <a:noFill/>
+          </a:ln>
+          <a:effectLst/>
+        </p:spPr>
+        <p:style>
+          <a:lnRef idx="1">
+            <a:schemeClr val="accent1"/>
+          </a:lnRef>
+          <a:fillRef idx="3">
+            <a:schemeClr val="accent1"/>
+          </a:fillRef>
+          <a:effectRef idx="2">
+            <a:schemeClr val="accent1"/>
+          </a:effectRef>
+          <a:fontRef idx="minor">
+            <a:schemeClr val="lt1"/>
+          </a:fontRef>
+        </p:style>
+        <p:txBody>
+          <a:bodyPr rtlCol="0" anchor="ctr" wrap="square" lIns="109728" rIns="109728" tIns="64008" bIns="64008"/>
+          <a:lstStyle/>
+          <a:p>
+            <a:pPr algn="ctr"/>
+          </a:p>
+        </p:txBody>
+      </p:sp>
+      <p:sp>
+        <p:nvSpPr>
+          <p:cNvPr id="3" name="Rectangle 2"/>
+          <p:cNvSpPr/>
+          <p:nvPr/>
+        </p:nvSpPr>
+        <p:spPr>
+          <a:xfrm>
+            <a:off x="0" y="0"/>
+            <a:ext cx="182880" cy="6858000"/>
+          </a:xfrm>
+          <a:prstGeom prst="rect">
+            <a:avLst/>
+          </a:prstGeom>
+          <a:solidFill>
+            <a:srgbClr val="761422"/>
+          </a:solidFill>
+          <a:ln>
+            <a:noFill/>
+          </a:ln>
+          <a:effectLst/>
+        </p:spPr>
+        <p:style>
+          <a:lnRef idx="1">
+            <a:schemeClr val="accent1"/>
+          </a:lnRef>
+          <a:fillRef idx="3">
+            <a:schemeClr val="accent1"/>
+          </a:fillRef>
+          <a:effectRef idx="2">
+            <a:schemeClr val="accent1"/>
+          </a:effectRef>
+          <a:fontRef idx="minor">
+            <a:schemeClr val="lt1"/>
+          </a:fontRef>
+        </p:style>
+        <p:txBody>
+          <a:bodyPr rtlCol="0" anchor="ctr" wrap="square" lIns="109728" rIns="109728" tIns="64008" bIns="64008"/>
+          <a:lstStyle/>
+          <a:p>
+            <a:pPr algn="ctr"/>
+          </a:p>
+        </p:txBody>
+      </p:sp>
+      <p:sp>
+        <p:nvSpPr>
+          <p:cNvPr id="4" name="Rectangle 3"/>
+          <p:cNvSpPr/>
+          <p:nvPr/>
+        </p:nvSpPr>
+        <p:spPr>
+          <a:xfrm>
+            <a:off x="1143000" y="1005840"/>
+            <a:ext cx="1554480" cy="32004"/>
+          </a:xfrm>
+          <a:prstGeom prst="rect">
+            <a:avLst/>
+          </a:prstGeom>
+          <a:solidFill>
+            <a:srgbClr val="E8B8C0"/>
+          </a:solidFill>
+          <a:ln>
+            <a:noFill/>
+          </a:ln>
+          <a:effectLst/>
+        </p:spPr>
+        <p:style>
+          <a:lnRef idx="1">
+            <a:schemeClr val="accent1"/>
+          </a:lnRef>
+          <a:fillRef idx="3">
+            <a:schemeClr val="accent1"/>
+          </a:fillRef>
+          <a:effectRef idx="2">
+            <a:schemeClr val="accent1"/>
+          </a:effectRef>
+          <a:fontRef idx="minor">
+            <a:schemeClr val="lt1"/>
+          </a:fontRef>
+        </p:style>
+        <p:txBody>
+          <a:bodyPr rtlCol="0" anchor="ctr" wrap="square" lIns="109728" rIns="109728" tIns="64008" bIns="64008"/>
+          <a:lstStyle/>
+          <a:p>
+            <a:pPr algn="ctr"/>
+          </a:p>
+        </p:txBody>
+      </p:sp>
+      <p:sp>
+        <p:nvSpPr>
+          <p:cNvPr id="5" name="TextBox 4"/>
+          <p:cNvSpPr txBox="1"/>
+          <p:nvPr/>
+        </p:nvSpPr>
+        <p:spPr>
+          <a:xfrm>
+            <a:off x="1143000" y="1280160"/>
+            <a:ext cx="8509772" cy="2377440"/>
+          </a:xfrm>
+          <a:prstGeom prst="rect">
+            <a:avLst/>
+          </a:prstGeom>
+          <a:noFill/>
+        </p:spPr>
+        <p:txBody>
+          <a:bodyPr wrap="square" lIns="0" rIns="0" tIns="0" bIns="0" anchor="t">
+            <a:spAutoFit/>
+          </a:bodyPr>
+          <a:lstStyle/>
+          <a:p>
+            <a:pPr algn="l">
+              <a:spcBef>
+                <a:spcPts val="0"/>
+              </a:spcBef>
+              <a:spcAft>
+                <a:spcPts val="1400"/>
+              </a:spcAft>
+            </a:pPr>
+            <a:r>
+              <a:rPr sz="3400" b="0" i="0">
+                <a:solidFill>
+                  <a:srgbClr val="FFFFFF"/>
+                </a:solidFill>
+                <a:latin typeface="Georgia"/>
+              </a:rPr>
+              <a:t>One idea, applied everywhere</a:t>
+            </a:r>
+          </a:p>
+          <a:p>
+            <a:pPr>
+              <a:lnSpc>
+                <a:spcPct val="132000"/>
+              </a:lnSpc>
+              <a:spcBef>
+                <a:spcPts val="0"/>
+              </a:spcBef>
+              <a:spcAft>
+                <a:spcPts val="0"/>
+              </a:spcAft>
+            </a:pPr>
+            <a:r>
+              <a:rPr sz="1500" b="0" i="1">
+                <a:solidFill>
+                  <a:srgbClr val="F4DFE3"/>
+                </a:solidFill>
+                <a:latin typeface="Calibri"/>
+              </a:rPr>
+              <a:t>A pin is to a version, never to a name. A clock records when something became knowable, not when it was written down. A refusal says what to do instead. And what the platform will not do is written down beside what it will.</a:t>
+            </a:r>
+          </a:p>
+        </p:txBody>
+      </p:sp>
+      <p:sp>
+        <p:nvSpPr>
+          <p:cNvPr id="6" name="TextBox 5"/>
+          <p:cNvSpPr txBox="1"/>
+          <p:nvPr/>
+        </p:nvSpPr>
+        <p:spPr>
+          <a:xfrm>
+            <a:off x="1143000" y="3858768"/>
+            <a:ext cx="7871539" cy="1920240"/>
+          </a:xfrm>
+          <a:prstGeom prst="rect">
+            <a:avLst/>
+          </a:prstGeom>
+          <a:noFill/>
+        </p:spPr>
+        <p:txBody>
+          <a:bodyPr wrap="square" lIns="0" rIns="0" tIns="0" bIns="0" anchor="t">
+            <a:spAutoFit/>
+          </a:bodyPr>
+          <a:lstStyle/>
+          <a:p>
+            <a:pPr algn="l">
+              <a:spcBef>
+                <a:spcPts val="0"/>
+              </a:spcBef>
+              <a:spcAft>
+                <a:spcPts val="400"/>
+              </a:spcAft>
+            </a:pPr>
+            <a:r>
+              <a:rPr sz="1800" b="1" i="0">
+                <a:solidFill>
+                  <a:srgbClr val="FFFFFF"/>
+                </a:solidFill>
+                <a:latin typeface="Calibri"/>
+              </a:rPr>
+              <a:t>Ashutosh Sinha</a:t>
+            </a:r>
+          </a:p>
+          <a:p>
+            <a:pPr>
+              <a:spcBef>
+                <a:spcPts val="0"/>
+              </a:spcBef>
+              <a:spcAft>
+                <a:spcPts val="1400"/>
+              </a:spcAft>
+            </a:pPr>
+            <a:r>
+              <a:rPr sz="1200" b="0" i="0">
+                <a:solidFill>
+                  <a:srgbClr val="F2D8DC"/>
+                </a:solidFill>
+                <a:latin typeface="Calibri"/>
+              </a:rPr>
+              <a:t>Independent Researcher   ·   ajsinha@gmail.com</a:t>
+            </a:r>
+          </a:p>
+          <a:p>
+            <a:pPr>
+              <a:lnSpc>
+                <a:spcPct val="130000"/>
+              </a:lnSpc>
+              <a:spcBef>
+                <a:spcPts val="0"/>
+              </a:spcBef>
+              <a:spcAft>
+                <a:spcPts val="600"/>
+              </a:spcAft>
+            </a:pPr>
+            <a:r>
+              <a:rPr sz="1050" b="0" i="0">
+                <a:solidFill>
+                  <a:srgbClr val="E8C4CA"/>
+                </a:solidFill>
+                <a:latin typeface="Calibri"/>
+              </a:rPr>
+              <a:t>Featuresets and parameters: docs/15-featuresets-and-parameters.md   ·   Composition and retrieval: docs/16-features-composed-and-shaped.md   ·   Feature platform: docs/07-feature-platform.md</a:t>
+            </a:r>
+          </a:p>
+          <a:p>
+            <a:pPr>
+              <a:lnSpc>
+                <a:spcPct val="125000"/>
+              </a:lnSpc>
+              <a:spcBef>
+                <a:spcPts val="1000"/>
+              </a:spcBef>
+              <a:spcAft>
+                <a:spcPts val="600"/>
+              </a:spcAft>
+            </a:pPr>
+            <a:r>
+              <a:rPr sz="850" b="0" i="0">
+                <a:solidFill>
+                  <a:srgbClr val="D8A0AC"/>
+                </a:solidFill>
+                <a:latin typeface="Calibri"/>
+              </a:rPr>
+              <a:t>© 2026 Ashutosh Sinha. All rights reserved. Proprietary and confidential — see LICENSE and NOTICE. Not legal, regulatory or financial advice.</a:t>
             </a:r>
           </a:p>
         </p:txBody>

--- a/docs/MAYA-Model-and-Feature-Engineering.pptx
+++ b/docs/MAYA-Model-and-Feature-Engineering.pptx
@@ -37,6 +37,7 @@
     <p:sldId id="285" r:id="rId36"/>
     <p:sldId id="286" r:id="rId37"/>
     <p:sldId id="287" r:id="rId38"/>
+    <p:sldId id="288" r:id="rId39"/>
   </p:sldIdLst>
   <p:sldSz cx="12191695" cy="6858000" type="screen4x3"/>
   <p:notesSz cx="6858000" cy="9144000"/>
@@ -22951,7 +22952,7 @@
                 </a:solidFill>
                 <a:latin typeface="Calibri"/>
               </a:rPr>
-              <a:t>Two features, one featureset, three models — with the numbers.</a:t>
+              <a:t>Real data, real fits: the S&amp;P 500 and the US unemployment rate.</a:t>
             </a:r>
           </a:p>
         </p:txBody>
@@ -23037,7 +23038,7 @@
                 </a:solidFill>
                 <a:latin typeface="Calibri"/>
               </a:rPr>
-              <a:t>The featureset, aligned</a:t>
+              <a:t>The gap that is really there</a:t>
             </a:r>
           </a:p>
           <a:p>
@@ -23274,7 +23275,7 @@
                 </a:solidFill>
                 <a:latin typeface="Georgia"/>
               </a:rPr>
-              <a:t>Two features that arrive on different clocks</a:t>
+              <a:t>Two real series, on two different clocks</a:t>
             </a:r>
           </a:p>
         </p:txBody>
@@ -23461,7 +23462,7 @@
         </p:nvGraphicFramePr>
         <p:xfrm>
           <a:off x="777240" y="1353312"/>
-          <a:ext cx="4680374" cy="1562048"/>
+          <a:ext cx="4893117" cy="1785044"/>
         </p:xfrm>
         <a:graphic>
           <a:graphicData uri="http://schemas.openxmlformats.org/drawingml/2006/table">
@@ -23470,9 +23471,10 @@
                 <a:tableStyleId>{5C22544A-7EE6-4342-B048-85BDC9FD1C3A}</a:tableStyleId>
               </a:tblPr>
               <a:tblGrid>
-                <a:gridCol w="1743669"/>
-                <a:gridCol w="1743669"/>
-                <a:gridCol w="1193036"/>
+                <a:gridCol w="1574307"/>
+                <a:gridCol w="1148819"/>
+                <a:gridCol w="1148819"/>
+                <a:gridCol w="1021172"/>
               </a:tblGrid>
               <a:tr h="329184">
                 <a:tc>
@@ -23482,7 +23484,30 @@
                     <a:p>
                       <a:pPr algn="l"/>
                       <a:r>
-                        <a:rPr sz="950" b="1">
+                        <a:rPr sz="850" b="1">
+                          <a:solidFill>
+                            <a:srgbClr val="FFFFFF"/>
+                          </a:solidFill>
+                          <a:latin typeface="Calibri"/>
+                        </a:rPr>
+                        <a:t>entity_id</a:t>
+                      </a:r>
+                    </a:p>
+                  </a:txBody>
+                  <a:tcPr marL="82296" marR="64008" marT="32004" marB="32004" anchor="ctr">
+                    <a:solidFill>
+                      <a:srgbClr val="A51C30"/>
+                    </a:solidFill>
+                  </a:tcPr>
+                </a:tc>
+                <a:tc>
+                  <a:txBody>
+                    <a:bodyPr wrap="square"/>
+                    <a:lstStyle/>
+                    <a:p>
+                      <a:pPr algn="l"/>
+                      <a:r>
+                        <a:rPr sz="850" b="1">
                           <a:solidFill>
                             <a:srgbClr val="FFFFFF"/>
                           </a:solidFill>
@@ -23505,1783 +23530,13 @@
                     <a:p>
                       <a:pPr algn="l"/>
                       <a:r>
-                        <a:rPr sz="950" b="1">
+                        <a:rPr sz="850" b="1">
                           <a:solidFill>
                             <a:srgbClr val="FFFFFF"/>
                           </a:solidFill>
                           <a:latin typeface="Calibri"/>
                         </a:rPr>
                         <a:t>ingest_ts</a:t>
-                      </a:r>
-                    </a:p>
-                  </a:txBody>
-                  <a:tcPr marL="82296" marR="64008" marT="32004" marB="32004" anchor="ctr">
-                    <a:solidFill>
-                      <a:srgbClr val="A51C30"/>
-                    </a:solidFill>
-                  </a:tcPr>
-                </a:tc>
-                <a:tc>
-                  <a:txBody>
-                    <a:bodyPr wrap="square"/>
-                    <a:lstStyle/>
-                    <a:p>
-                      <a:pPr algn="l"/>
-                      <a:r>
-                        <a:rPr sz="950" b="1">
-                          <a:solidFill>
-                            <a:srgbClr val="FFFFFF"/>
-                          </a:solidFill>
-                          <a:latin typeface="Calibri"/>
-                        </a:rPr>
-                        <a:t>px_close</a:t>
-                      </a:r>
-                    </a:p>
-                  </a:txBody>
-                  <a:tcPr marL="82296" marR="64008" marT="32004" marB="32004" anchor="ctr">
-                    <a:solidFill>
-                      <a:srgbClr val="A51C30"/>
-                    </a:solidFill>
-                  </a:tcPr>
-                </a:tc>
-              </a:tr>
-              <a:tr h="308216">
-                <a:tc>
-                  <a:txBody>
-                    <a:bodyPr wrap="square"/>
-                    <a:lstStyle/>
-                    <a:p>
-                      <a:pPr algn="l"/>
-                      <a:r>
-                        <a:rPr sz="950" b="1">
-                          <a:solidFill>
-                            <a:srgbClr val="1C1C1E"/>
-                          </a:solidFill>
-                          <a:latin typeface="Calibri"/>
-                        </a:rPr>
-                        <a:t>2026-08-27</a:t>
-                      </a:r>
-                    </a:p>
-                  </a:txBody>
-                  <a:tcPr marL="82296" marR="64008" marT="32004" marB="32004" anchor="ctr">
-                    <a:solidFill>
-                      <a:srgbClr val="FFFFFF"/>
-                    </a:solidFill>
-                  </a:tcPr>
-                </a:tc>
-                <a:tc>
-                  <a:txBody>
-                    <a:bodyPr wrap="square"/>
-                    <a:lstStyle/>
-                    <a:p>
-                      <a:pPr algn="l"/>
-                      <a:r>
-                        <a:rPr sz="950" b="0">
-                          <a:solidFill>
-                            <a:srgbClr val="1C1C1E"/>
-                          </a:solidFill>
-                          <a:latin typeface="Calibri"/>
-                        </a:rPr>
-                        <a:t>2026-08-27</a:t>
-                      </a:r>
-                    </a:p>
-                  </a:txBody>
-                  <a:tcPr marL="82296" marR="64008" marT="32004" marB="32004" anchor="ctr">
-                    <a:solidFill>
-                      <a:srgbClr val="FFFFFF"/>
-                    </a:solidFill>
-                  </a:tcPr>
-                </a:tc>
-                <a:tc>
-                  <a:txBody>
-                    <a:bodyPr wrap="square"/>
-                    <a:lstStyle/>
-                    <a:p>
-                      <a:pPr algn="l"/>
-                      <a:r>
-                        <a:rPr sz="950" b="0">
-                          <a:solidFill>
-                            <a:srgbClr val="1C1C1E"/>
-                          </a:solidFill>
-                          <a:latin typeface="Calibri"/>
-                        </a:rPr>
-                        <a:t>97.05</a:t>
-                      </a:r>
-                    </a:p>
-                  </a:txBody>
-                  <a:tcPr marL="82296" marR="64008" marT="32004" marB="32004" anchor="ctr">
-                    <a:solidFill>
-                      <a:srgbClr val="FFFFFF"/>
-                    </a:solidFill>
-                  </a:tcPr>
-                </a:tc>
-              </a:tr>
-              <a:tr h="308216">
-                <a:tc>
-                  <a:txBody>
-                    <a:bodyPr wrap="square"/>
-                    <a:lstStyle/>
-                    <a:p>
-                      <a:pPr algn="l"/>
-                      <a:r>
-                        <a:rPr sz="950" b="1">
-                          <a:solidFill>
-                            <a:srgbClr val="1C1C1E"/>
-                          </a:solidFill>
-                          <a:latin typeface="Calibri"/>
-                        </a:rPr>
-                        <a:t>2026-08-28</a:t>
-                      </a:r>
-                    </a:p>
-                  </a:txBody>
-                  <a:tcPr marL="82296" marR="64008" marT="32004" marB="32004" anchor="ctr">
-                    <a:solidFill>
-                      <a:srgbClr val="F6F3EF"/>
-                    </a:solidFill>
-                  </a:tcPr>
-                </a:tc>
-                <a:tc>
-                  <a:txBody>
-                    <a:bodyPr wrap="square"/>
-                    <a:lstStyle/>
-                    <a:p>
-                      <a:pPr algn="l"/>
-                      <a:r>
-                        <a:rPr sz="950" b="0">
-                          <a:solidFill>
-                            <a:srgbClr val="1C1C1E"/>
-                          </a:solidFill>
-                          <a:latin typeface="Calibri"/>
-                        </a:rPr>
-                        <a:t>2026-08-28</a:t>
-                      </a:r>
-                    </a:p>
-                  </a:txBody>
-                  <a:tcPr marL="82296" marR="64008" marT="32004" marB="32004" anchor="ctr">
-                    <a:solidFill>
-                      <a:srgbClr val="F6F3EF"/>
-                    </a:solidFill>
-                  </a:tcPr>
-                </a:tc>
-                <a:tc>
-                  <a:txBody>
-                    <a:bodyPr wrap="square"/>
-                    <a:lstStyle/>
-                    <a:p>
-                      <a:pPr algn="l"/>
-                      <a:r>
-                        <a:rPr sz="950" b="0">
-                          <a:solidFill>
-                            <a:srgbClr val="1C1C1E"/>
-                          </a:solidFill>
-                          <a:latin typeface="Calibri"/>
-                        </a:rPr>
-                        <a:t>98.11</a:t>
-                      </a:r>
-                    </a:p>
-                  </a:txBody>
-                  <a:tcPr marL="82296" marR="64008" marT="32004" marB="32004" anchor="ctr">
-                    <a:solidFill>
-                      <a:srgbClr val="F6F3EF"/>
-                    </a:solidFill>
-                  </a:tcPr>
-                </a:tc>
-              </a:tr>
-              <a:tr h="308216">
-                <a:tc>
-                  <a:txBody>
-                    <a:bodyPr wrap="square"/>
-                    <a:lstStyle/>
-                    <a:p>
-                      <a:pPr algn="l"/>
-                      <a:r>
-                        <a:rPr sz="950" b="1">
-                          <a:solidFill>
-                            <a:srgbClr val="1C1C1E"/>
-                          </a:solidFill>
-                          <a:latin typeface="Calibri"/>
-                        </a:rPr>
-                        <a:t>2026-08-31</a:t>
-                      </a:r>
-                    </a:p>
-                  </a:txBody>
-                  <a:tcPr marL="82296" marR="64008" marT="32004" marB="32004" anchor="ctr">
-                    <a:solidFill>
-                      <a:srgbClr val="FFFFFF"/>
-                    </a:solidFill>
-                  </a:tcPr>
-                </a:tc>
-                <a:tc>
-                  <a:txBody>
-                    <a:bodyPr wrap="square"/>
-                    <a:lstStyle/>
-                    <a:p>
-                      <a:pPr algn="l"/>
-                      <a:r>
-                        <a:rPr sz="950" b="0">
-                          <a:solidFill>
-                            <a:srgbClr val="1C1C1E"/>
-                          </a:solidFill>
-                          <a:latin typeface="Calibri"/>
-                        </a:rPr>
-                        <a:t>2026-08-31</a:t>
-                      </a:r>
-                    </a:p>
-                  </a:txBody>
-                  <a:tcPr marL="82296" marR="64008" marT="32004" marB="32004" anchor="ctr">
-                    <a:solidFill>
-                      <a:srgbClr val="FFFFFF"/>
-                    </a:solidFill>
-                  </a:tcPr>
-                </a:tc>
-                <a:tc>
-                  <a:txBody>
-                    <a:bodyPr wrap="square"/>
-                    <a:lstStyle/>
-                    <a:p>
-                      <a:pPr algn="l"/>
-                      <a:r>
-                        <a:rPr sz="950" b="0">
-                          <a:solidFill>
-                            <a:srgbClr val="1C1C1E"/>
-                          </a:solidFill>
-                          <a:latin typeface="Calibri"/>
-                        </a:rPr>
-                        <a:t>98.74</a:t>
-                      </a:r>
-                    </a:p>
-                  </a:txBody>
-                  <a:tcPr marL="82296" marR="64008" marT="32004" marB="32004" anchor="ctr">
-                    <a:solidFill>
-                      <a:srgbClr val="FFFFFF"/>
-                    </a:solidFill>
-                  </a:tcPr>
-                </a:tc>
-              </a:tr>
-              <a:tr h="308216">
-                <a:tc>
-                  <a:txBody>
-                    <a:bodyPr wrap="square"/>
-                    <a:lstStyle/>
-                    <a:p>
-                      <a:pPr algn="l"/>
-                      <a:r>
-                        <a:rPr sz="950" b="1">
-                          <a:solidFill>
-                            <a:srgbClr val="1C1C1E"/>
-                          </a:solidFill>
-                          <a:latin typeface="Calibri"/>
-                        </a:rPr>
-                        <a:t>2026-09-01</a:t>
-                      </a:r>
-                    </a:p>
-                  </a:txBody>
-                  <a:tcPr marL="82296" marR="64008" marT="32004" marB="32004" anchor="ctr">
-                    <a:solidFill>
-                      <a:srgbClr val="F6F3EF"/>
-                    </a:solidFill>
-                  </a:tcPr>
-                </a:tc>
-                <a:tc>
-                  <a:txBody>
-                    <a:bodyPr wrap="square"/>
-                    <a:lstStyle/>
-                    <a:p>
-                      <a:pPr algn="l"/>
-                      <a:r>
-                        <a:rPr sz="950" b="0">
-                          <a:solidFill>
-                            <a:srgbClr val="1C1C1E"/>
-                          </a:solidFill>
-                          <a:latin typeface="Calibri"/>
-                        </a:rPr>
-                        <a:t>2026-09-01</a:t>
-                      </a:r>
-                    </a:p>
-                  </a:txBody>
-                  <a:tcPr marL="82296" marR="64008" marT="32004" marB="32004" anchor="ctr">
-                    <a:solidFill>
-                      <a:srgbClr val="F6F3EF"/>
-                    </a:solidFill>
-                  </a:tcPr>
-                </a:tc>
-                <a:tc>
-                  <a:txBody>
-                    <a:bodyPr wrap="square"/>
-                    <a:lstStyle/>
-                    <a:p>
-                      <a:pPr algn="l"/>
-                      <a:r>
-                        <a:rPr sz="950" b="0">
-                          <a:solidFill>
-                            <a:srgbClr val="1C1C1E"/>
-                          </a:solidFill>
-                          <a:latin typeface="Calibri"/>
-                        </a:rPr>
-                        <a:t>99.43</a:t>
-                      </a:r>
-                    </a:p>
-                  </a:txBody>
-                  <a:tcPr marL="82296" marR="64008" marT="32004" marB="32004" anchor="ctr">
-                    <a:solidFill>
-                      <a:srgbClr val="F6F3EF"/>
-                    </a:solidFill>
-                  </a:tcPr>
-                </a:tc>
-              </a:tr>
-            </a:tbl>
-          </a:graphicData>
-        </a:graphic>
-      </p:graphicFrame>
-      <p:sp>
-        <p:nvSpPr>
-          <p:cNvPr id="11" name="TextBox 10"/>
-          <p:cNvSpPr txBox="1"/>
-          <p:nvPr/>
-        </p:nvSpPr>
-        <p:spPr>
-          <a:xfrm>
-            <a:off x="777240" y="3061665"/>
-            <a:ext cx="4680374" cy="457200"/>
-          </a:xfrm>
-          <a:prstGeom prst="rect">
-            <a:avLst/>
-          </a:prstGeom>
-          <a:noFill/>
-        </p:spPr>
-        <p:txBody>
-          <a:bodyPr wrap="square" lIns="0" rIns="0" tIns="0" bIns="0" anchor="t">
-            <a:spAutoFit/>
-          </a:bodyPr>
-          <a:lstStyle/>
-          <a:p>
-            <a:pPr algn="l">
-              <a:spcBef>
-                <a:spcPts val="0"/>
-              </a:spcBef>
-              <a:spcAft>
-                <a:spcPts val="0"/>
-              </a:spcAft>
-            </a:pPr>
-            <a:r>
-              <a:rPr sz="950" b="1" i="0">
-                <a:solidFill>
-                  <a:srgbClr val="A51C30"/>
-                </a:solidFill>
-                <a:latin typeface="Calibri"/>
-              </a:rPr>
-              <a:t>us_equity_close</a:t>
-            </a:r>
-            <a:r>
-              <a:rPr sz="950" b="0" i="0">
-                <a:solidFill>
-                  <a:srgbClr val="4A4F57"/>
-                </a:solidFill>
-                <a:latin typeface="Calibri"/>
-              </a:rPr>
-              <a:t>   daily, scalar, published the same day</a:t>
-            </a:r>
-          </a:p>
-        </p:txBody>
-      </p:sp>
-      <p:graphicFrame>
-        <p:nvGraphicFramePr>
-          <p:cNvPr id="12" name="Table 11"/>
-          <p:cNvGraphicFramePr>
-            <a:graphicFrameLocks noGrp="1"/>
-          </p:cNvGraphicFramePr>
-          <p:nvPr/>
-        </p:nvGraphicFramePr>
-        <p:xfrm>
-          <a:off x="777240" y="3482289"/>
-          <a:ext cx="4680374" cy="1253832"/>
-        </p:xfrm>
-        <a:graphic>
-          <a:graphicData uri="http://schemas.openxmlformats.org/drawingml/2006/table">
-            <a:tbl>
-              <a:tblPr firstRow="1">
-                <a:tableStyleId>{5C22544A-7EE6-4342-B048-85BDC9FD1C3A}</a:tableStyleId>
-              </a:tblPr>
-              <a:tblGrid>
-                <a:gridCol w="1743669"/>
-                <a:gridCol w="1743669"/>
-                <a:gridCol w="1193036"/>
-              </a:tblGrid>
-              <a:tr h="329184">
-                <a:tc>
-                  <a:txBody>
-                    <a:bodyPr wrap="square"/>
-                    <a:lstStyle/>
-                    <a:p>
-                      <a:pPr algn="l"/>
-                      <a:r>
-                        <a:rPr sz="950" b="1">
-                          <a:solidFill>
-                            <a:srgbClr val="FFFFFF"/>
-                          </a:solidFill>
-                          <a:latin typeface="Calibri"/>
-                        </a:rPr>
-                        <a:t>event_ts</a:t>
-                      </a:r>
-                    </a:p>
-                  </a:txBody>
-                  <a:tcPr marL="82296" marR="64008" marT="32004" marB="32004" anchor="ctr">
-                    <a:solidFill>
-                      <a:srgbClr val="A51C30"/>
-                    </a:solidFill>
-                  </a:tcPr>
-                </a:tc>
-                <a:tc>
-                  <a:txBody>
-                    <a:bodyPr wrap="square"/>
-                    <a:lstStyle/>
-                    <a:p>
-                      <a:pPr algn="l"/>
-                      <a:r>
-                        <a:rPr sz="950" b="1">
-                          <a:solidFill>
-                            <a:srgbClr val="FFFFFF"/>
-                          </a:solidFill>
-                          <a:latin typeface="Calibri"/>
-                        </a:rPr>
-                        <a:t>ingest_ts</a:t>
-                      </a:r>
-                    </a:p>
-                  </a:txBody>
-                  <a:tcPr marL="82296" marR="64008" marT="32004" marB="32004" anchor="ctr">
-                    <a:solidFill>
-                      <a:srgbClr val="A51C30"/>
-                    </a:solidFill>
-                  </a:tcPr>
-                </a:tc>
-                <a:tc>
-                  <a:txBody>
-                    <a:bodyPr wrap="square"/>
-                    <a:lstStyle/>
-                    <a:p>
-                      <a:pPr algn="l"/>
-                      <a:r>
-                        <a:rPr sz="950" b="1">
-                          <a:solidFill>
-                            <a:srgbClr val="FFFFFF"/>
-                          </a:solidFill>
-                          <a:latin typeface="Calibri"/>
-                        </a:rPr>
-                        <a:t>u3_rate</a:t>
-                      </a:r>
-                    </a:p>
-                  </a:txBody>
-                  <a:tcPr marL="82296" marR="64008" marT="32004" marB="32004" anchor="ctr">
-                    <a:solidFill>
-                      <a:srgbClr val="A51C30"/>
-                    </a:solidFill>
-                  </a:tcPr>
-                </a:tc>
-              </a:tr>
-              <a:tr h="308216">
-                <a:tc>
-                  <a:txBody>
-                    <a:bodyPr wrap="square"/>
-                    <a:lstStyle/>
-                    <a:p>
-                      <a:pPr algn="l"/>
-                      <a:r>
-                        <a:rPr sz="950" b="1">
-                          <a:solidFill>
-                            <a:srgbClr val="1C1C1E"/>
-                          </a:solidFill>
-                          <a:latin typeface="Calibri"/>
-                        </a:rPr>
-                        <a:t>2026-06-30</a:t>
-                      </a:r>
-                    </a:p>
-                  </a:txBody>
-                  <a:tcPr marL="82296" marR="64008" marT="32004" marB="32004" anchor="ctr">
-                    <a:solidFill>
-                      <a:srgbClr val="FFFFFF"/>
-                    </a:solidFill>
-                  </a:tcPr>
-                </a:tc>
-                <a:tc>
-                  <a:txBody>
-                    <a:bodyPr wrap="square"/>
-                    <a:lstStyle/>
-                    <a:p>
-                      <a:pPr algn="l"/>
-                      <a:r>
-                        <a:rPr sz="950" b="0">
-                          <a:solidFill>
-                            <a:srgbClr val="1C1C1E"/>
-                          </a:solidFill>
-                          <a:latin typeface="Calibri"/>
-                        </a:rPr>
-                        <a:t>2026-07-02</a:t>
-                      </a:r>
-                    </a:p>
-                  </a:txBody>
-                  <a:tcPr marL="82296" marR="64008" marT="32004" marB="32004" anchor="ctr">
-                    <a:solidFill>
-                      <a:srgbClr val="FFFFFF"/>
-                    </a:solidFill>
-                  </a:tcPr>
-                </a:tc>
-                <a:tc>
-                  <a:txBody>
-                    <a:bodyPr wrap="square"/>
-                    <a:lstStyle/>
-                    <a:p>
-                      <a:pPr algn="l"/>
-                      <a:r>
-                        <a:rPr sz="950" b="0">
-                          <a:solidFill>
-                            <a:srgbClr val="1C1C1E"/>
-                          </a:solidFill>
-                          <a:latin typeface="Calibri"/>
-                        </a:rPr>
-                        <a:t>4.1</a:t>
-                      </a:r>
-                    </a:p>
-                  </a:txBody>
-                  <a:tcPr marL="82296" marR="64008" marT="32004" marB="32004" anchor="ctr">
-                    <a:solidFill>
-                      <a:srgbClr val="FFFFFF"/>
-                    </a:solidFill>
-                  </a:tcPr>
-                </a:tc>
-              </a:tr>
-              <a:tr h="308216">
-                <a:tc>
-                  <a:txBody>
-                    <a:bodyPr wrap="square"/>
-                    <a:lstStyle/>
-                    <a:p>
-                      <a:pPr algn="l"/>
-                      <a:r>
-                        <a:rPr sz="950" b="1">
-                          <a:solidFill>
-                            <a:srgbClr val="1C1C1E"/>
-                          </a:solidFill>
-                          <a:latin typeface="Calibri"/>
-                        </a:rPr>
-                        <a:t>2026-07-31</a:t>
-                      </a:r>
-                    </a:p>
-                  </a:txBody>
-                  <a:tcPr marL="82296" marR="64008" marT="32004" marB="32004" anchor="ctr">
-                    <a:solidFill>
-                      <a:srgbClr val="F6F3EF"/>
-                    </a:solidFill>
-                  </a:tcPr>
-                </a:tc>
-                <a:tc>
-                  <a:txBody>
-                    <a:bodyPr wrap="square"/>
-                    <a:lstStyle/>
-                    <a:p>
-                      <a:pPr algn="l"/>
-                      <a:r>
-                        <a:rPr sz="950" b="0">
-                          <a:solidFill>
-                            <a:srgbClr val="1C1C1E"/>
-                          </a:solidFill>
-                          <a:latin typeface="Calibri"/>
-                        </a:rPr>
-                        <a:t>2026-08-07</a:t>
-                      </a:r>
-                    </a:p>
-                  </a:txBody>
-                  <a:tcPr marL="82296" marR="64008" marT="32004" marB="32004" anchor="ctr">
-                    <a:solidFill>
-                      <a:srgbClr val="F6F3EF"/>
-                    </a:solidFill>
-                  </a:tcPr>
-                </a:tc>
-                <a:tc>
-                  <a:txBody>
-                    <a:bodyPr wrap="square"/>
-                    <a:lstStyle/>
-                    <a:p>
-                      <a:pPr algn="l"/>
-                      <a:r>
-                        <a:rPr sz="950" b="0">
-                          <a:solidFill>
-                            <a:srgbClr val="1C1C1E"/>
-                          </a:solidFill>
-                          <a:latin typeface="Calibri"/>
-                        </a:rPr>
-                        <a:t>4.1</a:t>
-                      </a:r>
-                    </a:p>
-                  </a:txBody>
-                  <a:tcPr marL="82296" marR="64008" marT="32004" marB="32004" anchor="ctr">
-                    <a:solidFill>
-                      <a:srgbClr val="F6F3EF"/>
-                    </a:solidFill>
-                  </a:tcPr>
-                </a:tc>
-              </a:tr>
-              <a:tr h="308216">
-                <a:tc>
-                  <a:txBody>
-                    <a:bodyPr wrap="square"/>
-                    <a:lstStyle/>
-                    <a:p>
-                      <a:pPr algn="l"/>
-                      <a:r>
-                        <a:rPr sz="950" b="1">
-                          <a:solidFill>
-                            <a:srgbClr val="1C1C1E"/>
-                          </a:solidFill>
-                          <a:latin typeface="Calibri"/>
-                        </a:rPr>
-                        <a:t>2026-08-31</a:t>
-                      </a:r>
-                    </a:p>
-                  </a:txBody>
-                  <a:tcPr marL="82296" marR="64008" marT="32004" marB="32004" anchor="ctr">
-                    <a:solidFill>
-                      <a:srgbClr val="FFFFFF"/>
-                    </a:solidFill>
-                  </a:tcPr>
-                </a:tc>
-                <a:tc>
-                  <a:txBody>
-                    <a:bodyPr wrap="square"/>
-                    <a:lstStyle/>
-                    <a:p>
-                      <a:pPr algn="l"/>
-                      <a:r>
-                        <a:rPr sz="950" b="0">
-                          <a:solidFill>
-                            <a:srgbClr val="1C1C1E"/>
-                          </a:solidFill>
-                          <a:latin typeface="Calibri"/>
-                        </a:rPr>
-                        <a:t>2026-09-04</a:t>
-                      </a:r>
-                    </a:p>
-                  </a:txBody>
-                  <a:tcPr marL="82296" marR="64008" marT="32004" marB="32004" anchor="ctr">
-                    <a:solidFill>
-                      <a:srgbClr val="FFFFFF"/>
-                    </a:solidFill>
-                  </a:tcPr>
-                </a:tc>
-                <a:tc>
-                  <a:txBody>
-                    <a:bodyPr wrap="square"/>
-                    <a:lstStyle/>
-                    <a:p>
-                      <a:pPr algn="l"/>
-                      <a:r>
-                        <a:rPr sz="950" b="0">
-                          <a:solidFill>
-                            <a:srgbClr val="1C1C1E"/>
-                          </a:solidFill>
-                          <a:latin typeface="Calibri"/>
-                        </a:rPr>
-                        <a:t>4.0</a:t>
-                      </a:r>
-                    </a:p>
-                  </a:txBody>
-                  <a:tcPr marL="82296" marR="64008" marT="32004" marB="32004" anchor="ctr">
-                    <a:solidFill>
-                      <a:srgbClr val="FFFFFF"/>
-                    </a:solidFill>
-                  </a:tcPr>
-                </a:tc>
-              </a:tr>
-            </a:tbl>
-          </a:graphicData>
-        </a:graphic>
-      </p:graphicFrame>
-      <p:sp>
-        <p:nvSpPr>
-          <p:cNvPr id="13" name="TextBox 12"/>
-          <p:cNvSpPr txBox="1"/>
-          <p:nvPr/>
-        </p:nvSpPr>
-        <p:spPr>
-          <a:xfrm>
-            <a:off x="777240" y="4882426"/>
-            <a:ext cx="4680374" cy="457200"/>
-          </a:xfrm>
-          <a:prstGeom prst="rect">
-            <a:avLst/>
-          </a:prstGeom>
-          <a:noFill/>
-        </p:spPr>
-        <p:txBody>
-          <a:bodyPr wrap="square" lIns="0" rIns="0" tIns="0" bIns="0" anchor="t">
-            <a:spAutoFit/>
-          </a:bodyPr>
-          <a:lstStyle/>
-          <a:p>
-            <a:pPr algn="l">
-              <a:spcBef>
-                <a:spcPts val="0"/>
-              </a:spcBef>
-              <a:spcAft>
-                <a:spcPts val="0"/>
-              </a:spcAft>
-            </a:pPr>
-            <a:r>
-              <a:rPr sz="950" b="1" i="0">
-                <a:solidFill>
-                  <a:srgbClr val="A51C30"/>
-                </a:solidFill>
-                <a:latin typeface="Calibri"/>
-              </a:rPr>
-              <a:t>us_unemployment</a:t>
-            </a:r>
-            <a:r>
-              <a:rPr sz="950" b="0" i="0">
-                <a:solidFill>
-                  <a:srgbClr val="4A4F57"/>
-                </a:solidFill>
-                <a:latin typeface="Calibri"/>
-              </a:rPr>
-              <a:t>   monthly, scalar, published days later</a:t>
-            </a:r>
-          </a:p>
-        </p:txBody>
-      </p:sp>
-      <p:sp>
-        <p:nvSpPr>
-          <p:cNvPr id="14" name="TextBox 13"/>
-          <p:cNvSpPr txBox="1"/>
-          <p:nvPr/>
-        </p:nvSpPr>
-        <p:spPr>
-          <a:xfrm>
-            <a:off x="5883103" y="1353312"/>
-            <a:ext cx="5531351" cy="310896"/>
-          </a:xfrm>
-          <a:prstGeom prst="rect">
-            <a:avLst/>
-          </a:prstGeom>
-          <a:noFill/>
-        </p:spPr>
-        <p:txBody>
-          <a:bodyPr wrap="square" lIns="0" rIns="0" tIns="0" bIns="0" anchor="t">
-            <a:spAutoFit/>
-          </a:bodyPr>
-          <a:lstStyle/>
-          <a:p>
-            <a:pPr algn="l">
-              <a:spcBef>
-                <a:spcPts val="0"/>
-              </a:spcBef>
-              <a:spcAft>
-                <a:spcPts val="800"/>
-              </a:spcAft>
-            </a:pPr>
-            <a:r>
-              <a:rPr sz="1300" b="1" i="0">
-                <a:solidFill>
-                  <a:srgbClr val="A51C30"/>
-                </a:solidFill>
-                <a:latin typeface="Georgia"/>
-              </a:rPr>
-              <a:t>Look at the second table’s two columns</a:t>
-            </a:r>
-          </a:p>
-          <a:p>
-            <a:pPr>
-              <a:lnSpc>
-                <a:spcPct val="125000"/>
-              </a:lnSpc>
-              <a:spcBef>
-                <a:spcPts val="0"/>
-              </a:spcBef>
-              <a:spcAft>
-                <a:spcPts val="1000"/>
-              </a:spcAft>
-            </a:pPr>
-            <a:r>
-              <a:rPr sz="1100" b="0" i="0">
-                <a:solidFill>
-                  <a:srgbClr val="1C1C1E"/>
-                </a:solidFill>
-                <a:latin typeface="Calibri"/>
-              </a:rPr>
-              <a:t>August’s unemployment rate was TRUE on the 31st of August and was not KNOWN until the 4th of September. The two clocks differ by four days, and they differ because that is what happened.</a:t>
-            </a:r>
-          </a:p>
-          <a:p>
-            <a:pPr>
-              <a:lnSpc>
-                <a:spcPct val="125000"/>
-              </a:lnSpc>
-              <a:spcBef>
-                <a:spcPts val="0"/>
-              </a:spcBef>
-              <a:spcAft>
-                <a:spcPts val="1000"/>
-              </a:spcAft>
-            </a:pPr>
-            <a:r>
-              <a:rPr sz="1100" b="0" i="0">
-                <a:solidFill>
-                  <a:srgbClr val="4A4F57"/>
-                </a:solidFill>
-                <a:latin typeface="Calibri"/>
-              </a:rPr>
-              <a:t>A model trained on the 1st of September using August’s figure would be using a number that did not exist yet. It would back-test beautifully and disappoint in production, and no metric would say why.</a:t>
-            </a:r>
-          </a:p>
-          <a:p>
-            <a:pPr>
-              <a:lnSpc>
-                <a:spcPct val="125000"/>
-              </a:lnSpc>
-              <a:spcBef>
-                <a:spcPts val="0"/>
-              </a:spcBef>
-              <a:spcAft>
-                <a:spcPts val="0"/>
-              </a:spcAft>
-            </a:pPr>
-            <a:r>
-              <a:rPr sz="1100" b="1" i="0">
-                <a:solidFill>
-                  <a:srgbClr val="A51C30"/>
-                </a:solidFill>
-                <a:latin typeface="Calibri"/>
-              </a:rPr>
-              <a:t>This is not a hypothetical about leakage. </a:t>
-            </a:r>
-            <a:r>
-              <a:rPr sz="1100" b="0" i="0">
-                <a:solidFill>
-                  <a:srgbClr val="4A4F57"/>
-                </a:solidFill>
-                <a:latin typeface="Calibri"/>
-              </a:rPr>
-              <a:t>It is the ordinary shape of every macroeconomic series a bank uses, and it is why every row here carries both stamps rather than one.</a:t>
-            </a:r>
-          </a:p>
-        </p:txBody>
-      </p:sp>
-      <p:sp>
-        <p:nvSpPr>
-          <p:cNvPr id="15" name="Rectangle 14"/>
-          <p:cNvSpPr/>
-          <p:nvPr/>
-        </p:nvSpPr>
-        <p:spPr>
-          <a:xfrm>
-            <a:off x="5883103" y="4114800"/>
-            <a:ext cx="5531351" cy="896112"/>
-          </a:xfrm>
-          <a:prstGeom prst="rect">
-            <a:avLst/>
-          </a:prstGeom>
-          <a:solidFill>
-            <a:srgbClr val="F6F3EF"/>
-          </a:solidFill>
-          <a:ln>
-            <a:noFill/>
-          </a:ln>
-          <a:effectLst/>
-        </p:spPr>
-        <p:style>
-          <a:lnRef idx="1">
-            <a:schemeClr val="accent1"/>
-          </a:lnRef>
-          <a:fillRef idx="3">
-            <a:schemeClr val="accent1"/>
-          </a:fillRef>
-          <a:effectRef idx="2">
-            <a:schemeClr val="accent1"/>
-          </a:effectRef>
-          <a:fontRef idx="minor">
-            <a:schemeClr val="lt1"/>
-          </a:fontRef>
-        </p:style>
-        <p:txBody>
-          <a:bodyPr rtlCol="0" anchor="ctr" wrap="square" lIns="109728" rIns="109728" tIns="64008" bIns="64008"/>
-          <a:lstStyle/>
-          <a:p>
-            <a:pPr algn="ctr"/>
-          </a:p>
-        </p:txBody>
-      </p:sp>
-      <p:sp>
-        <p:nvSpPr>
-          <p:cNvPr id="16" name="Rectangle 15"/>
-          <p:cNvSpPr/>
-          <p:nvPr/>
-        </p:nvSpPr>
-        <p:spPr>
-          <a:xfrm>
-            <a:off x="5883103" y="4114800"/>
-            <a:ext cx="41148" cy="896112"/>
-          </a:xfrm>
-          <a:prstGeom prst="rect">
-            <a:avLst/>
-          </a:prstGeom>
-          <a:solidFill>
-            <a:srgbClr val="A51C30"/>
-          </a:solidFill>
-          <a:ln>
-            <a:noFill/>
-          </a:ln>
-          <a:effectLst/>
-        </p:spPr>
-        <p:style>
-          <a:lnRef idx="1">
-            <a:schemeClr val="accent1"/>
-          </a:lnRef>
-          <a:fillRef idx="3">
-            <a:schemeClr val="accent1"/>
-          </a:fillRef>
-          <a:effectRef idx="2">
-            <a:schemeClr val="accent1"/>
-          </a:effectRef>
-          <a:fontRef idx="minor">
-            <a:schemeClr val="lt1"/>
-          </a:fontRef>
-        </p:style>
-        <p:txBody>
-          <a:bodyPr rtlCol="0" anchor="ctr" wrap="square" lIns="109728" rIns="109728" tIns="64008" bIns="64008"/>
-          <a:lstStyle/>
-          <a:p>
-            <a:pPr algn="ctr"/>
-          </a:p>
-        </p:txBody>
-      </p:sp>
-      <p:sp>
-        <p:nvSpPr>
-          <p:cNvPr id="17" name="TextBox 16"/>
-          <p:cNvSpPr txBox="1"/>
-          <p:nvPr/>
-        </p:nvSpPr>
-        <p:spPr>
-          <a:xfrm>
-            <a:off x="6120847" y="4233672"/>
-            <a:ext cx="5074151" cy="676656"/>
-          </a:xfrm>
-          <a:prstGeom prst="rect">
-            <a:avLst/>
-          </a:prstGeom>
-          <a:noFill/>
-        </p:spPr>
-        <p:txBody>
-          <a:bodyPr wrap="square" lIns="0" rIns="0" tIns="0" bIns="0" anchor="t">
-            <a:spAutoFit/>
-          </a:bodyPr>
-          <a:lstStyle/>
-          <a:p>
-            <a:pPr algn="l">
-              <a:lnSpc>
-                <a:spcPct val="124000"/>
-              </a:lnSpc>
-              <a:spcBef>
-                <a:spcPts val="0"/>
-              </a:spcBef>
-              <a:spcAft>
-                <a:spcPts val="0"/>
-              </a:spcAft>
-            </a:pPr>
-            <a:r>
-              <a:rPr sz="1050" b="1" i="0">
-                <a:solidFill>
-                  <a:srgbClr val="A51C30"/>
-                </a:solidFill>
-                <a:latin typeface="Calibri"/>
-              </a:rPr>
-              <a:t>Both are scalars — shape []. </a:t>
-            </a:r>
-            <a:r>
-              <a:rPr sz="1050" b="0" i="0">
-                <a:solidFill>
-                  <a:srgbClr val="1C1C1E"/>
-                </a:solidFill>
-                <a:latin typeface="Calibri"/>
-              </a:rPr>
-              <a:t>The curve on an earlier slide was a vector; these are not. The shape is declared either way, </a:t>
-            </a:r>
-            <a:r>
-              <a:rPr sz="1050" b="1" i="0">
-                <a:solidFill>
-                  <a:srgbClr val="1C1C1E"/>
-                </a:solidFill>
-                <a:latin typeface="Calibri"/>
-              </a:rPr>
-              <a:t>because a shape nobody states is a shape somebody assumes.</a:t>
-            </a:r>
-          </a:p>
-        </p:txBody>
-      </p:sp>
-    </p:spTree>
-  </p:cSld>
-  <p:clrMapOvr>
-    <a:masterClrMapping/>
-  </p:clrMapOvr>
-</p:sld>
-</file>
-
-<file path=ppt/slides/slide29.xml><?xml version="1.0" encoding="utf-8"?>
-<p:sld xmlns:a="http://schemas.openxmlformats.org/drawingml/2006/main" xmlns:p="http://schemas.openxmlformats.org/presentationml/2006/main" xmlns:r="http://schemas.openxmlformats.org/officeDocument/2006/relationships">
-  <p:cSld>
-    <p:spTree>
-      <p:nvGrpSpPr>
-        <p:cNvPr id="1" name=""/>
-        <p:cNvGrpSpPr/>
-        <p:nvPr/>
-      </p:nvGrpSpPr>
-      <p:grpSpPr/>
-      <p:sp>
-        <p:nvSpPr>
-          <p:cNvPr id="2" name="Rectangle 1"/>
-          <p:cNvSpPr/>
-          <p:nvPr/>
-        </p:nvSpPr>
-        <p:spPr>
-          <a:xfrm>
-            <a:off x="0" y="0"/>
-            <a:ext cx="12191695" cy="6858000"/>
-          </a:xfrm>
-          <a:prstGeom prst="rect">
-            <a:avLst/>
-          </a:prstGeom>
-          <a:solidFill>
-            <a:srgbClr val="FFFFFF"/>
-          </a:solidFill>
-          <a:ln>
-            <a:noFill/>
-          </a:ln>
-          <a:effectLst/>
-        </p:spPr>
-        <p:style>
-          <a:lnRef idx="1">
-            <a:schemeClr val="accent1"/>
-          </a:lnRef>
-          <a:fillRef idx="3">
-            <a:schemeClr val="accent1"/>
-          </a:fillRef>
-          <a:effectRef idx="2">
-            <a:schemeClr val="accent1"/>
-          </a:effectRef>
-          <a:fontRef idx="minor">
-            <a:schemeClr val="lt1"/>
-          </a:fontRef>
-        </p:style>
-        <p:txBody>
-          <a:bodyPr rtlCol="0" anchor="ctr" wrap="square" lIns="109728" rIns="109728" tIns="64008" bIns="64008"/>
-          <a:lstStyle/>
-          <a:p>
-            <a:pPr algn="ctr"/>
-          </a:p>
-        </p:txBody>
-      </p:sp>
-      <p:sp>
-        <p:nvSpPr>
-          <p:cNvPr id="3" name="Rectangle 2"/>
-          <p:cNvSpPr/>
-          <p:nvPr/>
-        </p:nvSpPr>
-        <p:spPr>
-          <a:xfrm>
-            <a:off x="0" y="566928"/>
-            <a:ext cx="274320" cy="50292"/>
-          </a:xfrm>
-          <a:prstGeom prst="rect">
-            <a:avLst/>
-          </a:prstGeom>
-          <a:solidFill>
-            <a:srgbClr val="A51C30"/>
-          </a:solidFill>
-          <a:ln>
-            <a:noFill/>
-          </a:ln>
-          <a:effectLst/>
-        </p:spPr>
-        <p:style>
-          <a:lnRef idx="1">
-            <a:schemeClr val="accent1"/>
-          </a:lnRef>
-          <a:fillRef idx="3">
-            <a:schemeClr val="accent1"/>
-          </a:fillRef>
-          <a:effectRef idx="2">
-            <a:schemeClr val="accent1"/>
-          </a:effectRef>
-          <a:fontRef idx="minor">
-            <a:schemeClr val="lt1"/>
-          </a:fontRef>
-        </p:style>
-        <p:txBody>
-          <a:bodyPr rtlCol="0" anchor="ctr" wrap="square" lIns="109728" rIns="109728" tIns="64008" bIns="64008"/>
-          <a:lstStyle/>
-          <a:p>
-            <a:pPr algn="ctr"/>
-          </a:p>
-        </p:txBody>
-      </p:sp>
-      <p:sp>
-        <p:nvSpPr>
-          <p:cNvPr id="4" name="TextBox 3"/>
-          <p:cNvSpPr txBox="1"/>
-          <p:nvPr/>
-        </p:nvSpPr>
-        <p:spPr>
-          <a:xfrm>
-            <a:off x="777240" y="475488"/>
-            <a:ext cx="10637215" cy="219456"/>
-          </a:xfrm>
-          <a:prstGeom prst="rect">
-            <a:avLst/>
-          </a:prstGeom>
-          <a:noFill/>
-        </p:spPr>
-        <p:txBody>
-          <a:bodyPr wrap="square" lIns="0" rIns="0" tIns="0" bIns="0" anchor="t">
-            <a:spAutoFit/>
-          </a:bodyPr>
-          <a:lstStyle/>
-          <a:p>
-            <a:pPr algn="l">
-              <a:spcBef>
-                <a:spcPts val="0"/>
-              </a:spcBef>
-              <a:spcAft>
-                <a:spcPts val="0"/>
-              </a:spcAft>
-            </a:pPr>
-            <a:r>
-              <a:rPr sz="1050" b="1" i="0">
-                <a:solidFill>
-                  <a:srgbClr val="A51C30"/>
-                </a:solidFill>
-                <a:latin typeface="Calibri"/>
-              </a:rPr>
-              <a:t>A WORKED EXAMPLE</a:t>
-            </a:r>
-          </a:p>
-        </p:txBody>
-      </p:sp>
-      <p:sp>
-        <p:nvSpPr>
-          <p:cNvPr id="5" name="TextBox 4"/>
-          <p:cNvSpPr txBox="1"/>
-          <p:nvPr/>
-        </p:nvSpPr>
-        <p:spPr>
-          <a:xfrm>
-            <a:off x="777240" y="749808"/>
-            <a:ext cx="10637215" cy="484631"/>
-          </a:xfrm>
-          <a:prstGeom prst="rect">
-            <a:avLst/>
-          </a:prstGeom>
-          <a:noFill/>
-        </p:spPr>
-        <p:txBody>
-          <a:bodyPr wrap="square" lIns="0" rIns="0" tIns="0" bIns="0" anchor="t">
-            <a:spAutoFit/>
-          </a:bodyPr>
-          <a:lstStyle/>
-          <a:p>
-            <a:pPr algn="l">
-              <a:lnSpc>
-                <a:spcPct val="120000"/>
-              </a:lnSpc>
-              <a:spcBef>
-                <a:spcPts val="0"/>
-              </a:spcBef>
-              <a:spcAft>
-                <a:spcPts val="0"/>
-              </a:spcAft>
-            </a:pPr>
-            <a:r>
-              <a:rPr sz="2700" b="0" i="0">
-                <a:solidFill>
-                  <a:srgbClr val="1C1C1E"/>
-                </a:solidFill>
-                <a:latin typeface="Georgia"/>
-              </a:rPr>
-              <a:t>One featureset, aligned onto a daily axis</a:t>
-            </a:r>
-          </a:p>
-        </p:txBody>
-      </p:sp>
-      <p:sp>
-        <p:nvSpPr>
-          <p:cNvPr id="6" name="Rectangle 5"/>
-          <p:cNvSpPr/>
-          <p:nvPr/>
-        </p:nvSpPr>
-        <p:spPr>
-          <a:xfrm>
-            <a:off x="777240" y="1207008"/>
-            <a:ext cx="10637215" cy="10972"/>
-          </a:xfrm>
-          <a:prstGeom prst="rect">
-            <a:avLst/>
-          </a:prstGeom>
-          <a:solidFill>
-            <a:srgbClr val="D8D4CF"/>
-          </a:solidFill>
-          <a:ln>
-            <a:noFill/>
-          </a:ln>
-          <a:effectLst/>
-        </p:spPr>
-        <p:style>
-          <a:lnRef idx="1">
-            <a:schemeClr val="accent1"/>
-          </a:lnRef>
-          <a:fillRef idx="3">
-            <a:schemeClr val="accent1"/>
-          </a:fillRef>
-          <a:effectRef idx="2">
-            <a:schemeClr val="accent1"/>
-          </a:effectRef>
-          <a:fontRef idx="minor">
-            <a:schemeClr val="lt1"/>
-          </a:fontRef>
-        </p:style>
-        <p:txBody>
-          <a:bodyPr rtlCol="0" anchor="ctr" wrap="square" lIns="109728" rIns="109728" tIns="64008" bIns="64008"/>
-          <a:lstStyle/>
-          <a:p>
-            <a:pPr algn="ctr"/>
-          </a:p>
-        </p:txBody>
-      </p:sp>
-      <p:sp>
-        <p:nvSpPr>
-          <p:cNvPr id="7" name="Rectangle 6"/>
-          <p:cNvSpPr/>
-          <p:nvPr/>
-        </p:nvSpPr>
-        <p:spPr>
-          <a:xfrm>
-            <a:off x="777240" y="6355080"/>
-            <a:ext cx="10637215" cy="7315"/>
-          </a:xfrm>
-          <a:prstGeom prst="rect">
-            <a:avLst/>
-          </a:prstGeom>
-          <a:solidFill>
-            <a:srgbClr val="D8D4CF"/>
-          </a:solidFill>
-          <a:ln>
-            <a:noFill/>
-          </a:ln>
-          <a:effectLst/>
-        </p:spPr>
-        <p:style>
-          <a:lnRef idx="1">
-            <a:schemeClr val="accent1"/>
-          </a:lnRef>
-          <a:fillRef idx="3">
-            <a:schemeClr val="accent1"/>
-          </a:fillRef>
-          <a:effectRef idx="2">
-            <a:schemeClr val="accent1"/>
-          </a:effectRef>
-          <a:fontRef idx="minor">
-            <a:schemeClr val="lt1"/>
-          </a:fontRef>
-        </p:style>
-        <p:txBody>
-          <a:bodyPr rtlCol="0" anchor="ctr" wrap="square" lIns="109728" rIns="109728" tIns="64008" bIns="64008"/>
-          <a:lstStyle/>
-          <a:p>
-            <a:pPr algn="ctr"/>
-          </a:p>
-        </p:txBody>
-      </p:sp>
-      <p:sp>
-        <p:nvSpPr>
-          <p:cNvPr id="8" name="TextBox 7"/>
-          <p:cNvSpPr txBox="1"/>
-          <p:nvPr/>
-        </p:nvSpPr>
-        <p:spPr>
-          <a:xfrm>
-            <a:off x="777240" y="6437376"/>
-            <a:ext cx="7446050" cy="219456"/>
-          </a:xfrm>
-          <a:prstGeom prst="rect">
-            <a:avLst/>
-          </a:prstGeom>
-          <a:noFill/>
-        </p:spPr>
-        <p:txBody>
-          <a:bodyPr wrap="square" lIns="0" rIns="0" tIns="0" bIns="0" anchor="t">
-            <a:spAutoFit/>
-          </a:bodyPr>
-          <a:lstStyle/>
-          <a:p>
-            <a:pPr algn="l">
-              <a:spcBef>
-                <a:spcPts val="0"/>
-              </a:spcBef>
-              <a:spcAft>
-                <a:spcPts val="0"/>
-              </a:spcAft>
-            </a:pPr>
-            <a:r>
-              <a:rPr sz="850" b="0" i="0">
-                <a:solidFill>
-                  <a:srgbClr val="7A7F87"/>
-                </a:solidFill>
-                <a:latin typeface="Calibri"/>
-              </a:rPr>
-              <a:t>6 · A Worked Example</a:t>
-            </a:r>
-          </a:p>
-        </p:txBody>
-      </p:sp>
-      <p:sp>
-        <p:nvSpPr>
-          <p:cNvPr id="9" name="TextBox 8"/>
-          <p:cNvSpPr txBox="1"/>
-          <p:nvPr/>
-        </p:nvSpPr>
-        <p:spPr>
-          <a:xfrm>
-            <a:off x="8223290" y="6437376"/>
-            <a:ext cx="3191164" cy="219456"/>
-          </a:xfrm>
-          <a:prstGeom prst="rect">
-            <a:avLst/>
-          </a:prstGeom>
-          <a:noFill/>
-        </p:spPr>
-        <p:txBody>
-          <a:bodyPr wrap="square" lIns="0" rIns="0" tIns="0" bIns="0" anchor="t">
-            <a:spAutoFit/>
-          </a:bodyPr>
-          <a:lstStyle/>
-          <a:p>
-            <a:pPr algn="r">
-              <a:spcBef>
-                <a:spcPts val="0"/>
-              </a:spcBef>
-              <a:spcAft>
-                <a:spcPts val="0"/>
-              </a:spcAft>
-            </a:pPr>
-            <a:r>
-              <a:rPr sz="850" b="1" i="0">
-                <a:solidFill>
-                  <a:srgbClr val="7A7F87"/>
-                </a:solidFill>
-                <a:latin typeface="Calibri"/>
-              </a:rPr>
-              <a:t>28</a:t>
-            </a:r>
-          </a:p>
-        </p:txBody>
-      </p:sp>
-      <p:sp>
-        <p:nvSpPr>
-          <p:cNvPr id="10" name="Rectangle 9"/>
-          <p:cNvSpPr/>
-          <p:nvPr/>
-        </p:nvSpPr>
-        <p:spPr>
-          <a:xfrm>
-            <a:off x="777240" y="1353312"/>
-            <a:ext cx="5318607" cy="2011177"/>
-          </a:xfrm>
-          <a:prstGeom prst="rect">
-            <a:avLst/>
-          </a:prstGeom>
-          <a:solidFill>
-            <a:srgbClr val="F4F2EF"/>
-          </a:solidFill>
-          <a:ln>
-            <a:noFill/>
-          </a:ln>
-          <a:effectLst/>
-        </p:spPr>
-        <p:style>
-          <a:lnRef idx="1">
-            <a:schemeClr val="accent1"/>
-          </a:lnRef>
-          <a:fillRef idx="3">
-            <a:schemeClr val="accent1"/>
-          </a:fillRef>
-          <a:effectRef idx="2">
-            <a:schemeClr val="accent1"/>
-          </a:effectRef>
-          <a:fontRef idx="minor">
-            <a:schemeClr val="lt1"/>
-          </a:fontRef>
-        </p:style>
-        <p:txBody>
-          <a:bodyPr rtlCol="0" anchor="ctr" wrap="square" lIns="109728" rIns="109728" tIns="64008" bIns="64008"/>
-          <a:lstStyle/>
-          <a:p>
-            <a:pPr algn="ctr"/>
-          </a:p>
-        </p:txBody>
-      </p:sp>
-      <p:sp>
-        <p:nvSpPr>
-          <p:cNvPr id="11" name="Rectangle 10"/>
-          <p:cNvSpPr/>
-          <p:nvPr/>
-        </p:nvSpPr>
-        <p:spPr>
-          <a:xfrm>
-            <a:off x="777240" y="1353312"/>
-            <a:ext cx="41148" cy="2011177"/>
-          </a:xfrm>
-          <a:prstGeom prst="rect">
-            <a:avLst/>
-          </a:prstGeom>
-          <a:solidFill>
-            <a:srgbClr val="4A4F57"/>
-          </a:solidFill>
-          <a:ln>
-            <a:noFill/>
-          </a:ln>
-          <a:effectLst/>
-        </p:spPr>
-        <p:style>
-          <a:lnRef idx="1">
-            <a:schemeClr val="accent1"/>
-          </a:lnRef>
-          <a:fillRef idx="3">
-            <a:schemeClr val="accent1"/>
-          </a:fillRef>
-          <a:effectRef idx="2">
-            <a:schemeClr val="accent1"/>
-          </a:effectRef>
-          <a:fontRef idx="minor">
-            <a:schemeClr val="lt1"/>
-          </a:fontRef>
-        </p:style>
-        <p:txBody>
-          <a:bodyPr rtlCol="0" anchor="ctr" wrap="square" lIns="109728" rIns="109728" tIns="64008" bIns="64008"/>
-          <a:lstStyle/>
-          <a:p>
-            <a:pPr algn="ctr"/>
-          </a:p>
-        </p:txBody>
-      </p:sp>
-      <p:sp>
-        <p:nvSpPr>
-          <p:cNvPr id="12" name="TextBox 11"/>
-          <p:cNvSpPr txBox="1"/>
-          <p:nvPr/>
-        </p:nvSpPr>
-        <p:spPr>
-          <a:xfrm>
-            <a:off x="978408" y="1453896"/>
-            <a:ext cx="4952847" cy="1828297"/>
-          </a:xfrm>
-          <a:prstGeom prst="rect">
-            <a:avLst/>
-          </a:prstGeom>
-          <a:noFill/>
-        </p:spPr>
-        <p:txBody>
-          <a:bodyPr wrap="square" lIns="0" rIns="0" tIns="0" bIns="0" anchor="t">
-            <a:spAutoFit/>
-          </a:bodyPr>
-          <a:lstStyle/>
-          <a:p>
-            <a:pPr algn="l">
-              <a:lnSpc>
-                <a:spcPct val="134000"/>
-              </a:lnSpc>
-              <a:spcBef>
-                <a:spcPts val="0"/>
-              </a:spcBef>
-              <a:spcAft>
-                <a:spcPts val="0"/>
-              </a:spcAft>
-            </a:pPr>
-            <a:r>
-              <a:rPr sz="900" b="0" i="0">
-                <a:solidFill>
-                  <a:srgbClr val="1C1C1E"/>
-                </a:solidFill>
-                <a:latin typeface="Consolas"/>
-              </a:rPr>
-              <a:t>featureset: macro_core</a:t>
-            </a:r>
-          </a:p>
-          <a:p>
-            <a:pPr>
-              <a:lnSpc>
-                <a:spcPct val="134000"/>
-              </a:lnSpc>
-              <a:spcBef>
-                <a:spcPts val="0"/>
-              </a:spcBef>
-              <a:spcAft>
-                <a:spcPts val="0"/>
-              </a:spcAft>
-            </a:pPr>
-            <a:r>
-              <a:rPr sz="900" b="0" i="0">
-                <a:solidFill>
-                  <a:srgbClr val="1C1C1E"/>
-                </a:solidFill>
-                <a:latin typeface="Consolas"/>
-              </a:rPr>
-              <a:t>entity:     us_equity_index      grain: one row per day</a:t>
-            </a:r>
-          </a:p>
-          <a:p>
-            <a:pPr>
-              <a:lnSpc>
-                <a:spcPct val="134000"/>
-              </a:lnSpc>
-              <a:spcBef>
-                <a:spcPts val="0"/>
-              </a:spcBef>
-              <a:spcAft>
-                <a:spcPts val="0"/>
-              </a:spcAft>
-            </a:pPr>
-            <a:r>
-              <a:rPr sz="900" b="0" i="0">
-                <a:solidFill>
-                  <a:srgbClr val="1C1C1E"/>
-                </a:solidFill>
-                <a:latin typeface="Consolas"/>
-              </a:rPr>
-              <a:t>slots:      px_close        numeric   []</a:t>
-            </a:r>
-          </a:p>
-          <a:p>
-            <a:pPr>
-              <a:lnSpc>
-                <a:spcPct val="134000"/>
-              </a:lnSpc>
-              <a:spcBef>
-                <a:spcPts val="0"/>
-              </a:spcBef>
-              <a:spcAft>
-                <a:spcPts val="0"/>
-              </a:spcAft>
-            </a:pPr>
-            <a:r>
-              <a:rPr sz="900" b="0" i="0">
-                <a:solidFill>
-                  <a:srgbClr val="1C1C1E"/>
-                </a:solidFill>
-                <a:latin typeface="Consolas"/>
-              </a:rPr>
-              <a:t>            u3_rate         numeric   []</a:t>
-            </a:r>
-          </a:p>
-          <a:p>
-            <a:pPr>
-              <a:lnSpc>
-                <a:spcPct val="134000"/>
-              </a:lnSpc>
-              <a:spcBef>
-                <a:spcPts val="0"/>
-              </a:spcBef>
-              <a:spcAft>
-                <a:spcPts val="0"/>
-              </a:spcAft>
-            </a:pPr>
-            <a:r>
-              <a:rPr sz="900" b="0" i="0">
-                <a:solidFill>
-                  <a:srgbClr val="1C1C1E"/>
-                </a:solidFill>
-                <a:latin typeface="Consolas"/>
-              </a:rPr>
-              <a:t>            prev_return     numeric   []   (derived)</a:t>
-            </a:r>
-          </a:p>
-          <a:p>
-            <a:pPr>
-              <a:lnSpc>
-                <a:spcPct val="134000"/>
-              </a:lnSpc>
-              <a:spcBef>
-                <a:spcPts val="0"/>
-              </a:spcBef>
-              <a:spcAft>
-                <a:spcPts val="0"/>
-              </a:spcAft>
-            </a:pPr>
-            <a:r>
-              <a:rPr sz="900" b="0" i="0">
-                <a:solidFill>
-                  <a:srgbClr val="1C1C1E"/>
-                </a:solidFill>
-                <a:latin typeface="Consolas"/>
-              </a:rPr>
-              <a:t>label:      next_return</a:t>
-            </a:r>
-          </a:p>
-          <a:p>
-            <a:pPr>
-              <a:lnSpc>
-                <a:spcPct val="134000"/>
-              </a:lnSpc>
-              <a:spcBef>
-                <a:spcPts val="0"/>
-              </a:spcBef>
-              <a:spcAft>
-                <a:spcPts val="0"/>
-              </a:spcAft>
-            </a:pPr>
-            <a:r>
-              <a:rPr sz="900" b="0" i="0">
-                <a:solidFill>
-                  <a:srgbClr val="1C1C1E"/>
-                </a:solidFill>
-                <a:latin typeface="Consolas"/>
-              </a:rPr>
-              <a:t>defaults:</a:t>
-            </a:r>
-          </a:p>
-          <a:p>
-            <a:pPr>
-              <a:lnSpc>
-                <a:spcPct val="134000"/>
-              </a:lnSpc>
-              <a:spcBef>
-                <a:spcPts val="0"/>
-              </a:spcBef>
-              <a:spcAft>
-                <a:spcPts val="0"/>
-              </a:spcAft>
-            </a:pPr>
-            <a:r>
-              <a:rPr sz="900" b="0" i="0">
-                <a:solidFill>
-                  <a:srgbClr val="1C1C1E"/>
-                </a:solidFill>
-                <a:latin typeface="Consolas"/>
-              </a:rPr>
-              <a:t>  align:     {axis: event_ts, rule: flat_forward}</a:t>
-            </a:r>
-          </a:p>
-          <a:p>
-            <a:pPr>
-              <a:lnSpc>
-                <a:spcPct val="134000"/>
-              </a:lnSpc>
-              <a:spcBef>
-                <a:spcPts val="0"/>
-              </a:spcBef>
-              <a:spcAft>
-                <a:spcPts val="0"/>
-              </a:spcAft>
-            </a:pPr>
-            <a:r>
-              <a:rPr sz="900" b="0" i="0">
-                <a:solidFill>
-                  <a:srgbClr val="1C1C1E"/>
-                </a:solidFill>
-                <a:latin typeface="Consolas"/>
-              </a:rPr>
-              <a:t>  normalise: {u3_rate: zscore}</a:t>
-            </a:r>
-          </a:p>
-        </p:txBody>
-      </p:sp>
-      <p:sp>
-        <p:nvSpPr>
-          <p:cNvPr id="13" name="TextBox 12"/>
-          <p:cNvSpPr txBox="1"/>
-          <p:nvPr/>
-        </p:nvSpPr>
-        <p:spPr>
-          <a:xfrm>
-            <a:off x="777240" y="3565657"/>
-            <a:ext cx="5318607" cy="914400"/>
-          </a:xfrm>
-          <a:prstGeom prst="rect">
-            <a:avLst/>
-          </a:prstGeom>
-          <a:noFill/>
-        </p:spPr>
-        <p:txBody>
-          <a:bodyPr wrap="square" lIns="0" rIns="0" tIns="0" bIns="0" anchor="t">
-            <a:spAutoFit/>
-          </a:bodyPr>
-          <a:lstStyle/>
-          <a:p>
-            <a:pPr algn="l">
-              <a:lnSpc>
-                <a:spcPct val="122000"/>
-              </a:lnSpc>
-              <a:spcBef>
-                <a:spcPts val="0"/>
-              </a:spcBef>
-              <a:spcAft>
-                <a:spcPts val="0"/>
-              </a:spcAft>
-            </a:pPr>
-            <a:r>
-              <a:rPr sz="1000" b="1" i="0">
-                <a:solidFill>
-                  <a:srgbClr val="A51C30"/>
-                </a:solidFill>
-                <a:latin typeface="Calibri"/>
-              </a:rPr>
-              <a:t>flat_forward, and only flat_forward. </a:t>
-            </a:r>
-            <a:r>
-              <a:rPr sz="1000" b="0" i="0">
-                <a:solidFill>
-                  <a:srgbClr val="4A4F57"/>
-                </a:solidFill>
-                <a:latin typeface="Calibri"/>
-              </a:rPr>
-              <a:t>Unemployment is monthly and the grid is daily, so the gaps are filled by carrying the last published figure. Interpolating between June and July would use July’s number on the 2nd of July, which nobody had.</a:t>
-            </a:r>
-          </a:p>
-        </p:txBody>
-      </p:sp>
-      <p:graphicFrame>
-        <p:nvGraphicFramePr>
-          <p:cNvPr id="14" name="Table 13"/>
-          <p:cNvGraphicFramePr>
-            <a:graphicFrameLocks noGrp="1"/>
-          </p:cNvGraphicFramePr>
-          <p:nvPr/>
-        </p:nvGraphicFramePr>
-        <p:xfrm>
-          <a:off x="6521336" y="1353312"/>
-          <a:ext cx="4893116" cy="1929913"/>
-        </p:xfrm>
-        <a:graphic>
-          <a:graphicData uri="http://schemas.openxmlformats.org/drawingml/2006/table">
-            <a:tbl>
-              <a:tblPr firstRow="1">
-                <a:tableStyleId>{5C22544A-7EE6-4342-B048-85BDC9FD1C3A}</a:tableStyleId>
-              </a:tblPr>
-              <a:tblGrid>
-                <a:gridCol w="1143252"/>
-                <a:gridCol w="960331"/>
-                <a:gridCol w="823141"/>
-                <a:gridCol w="1051791"/>
-                <a:gridCol w="914601"/>
-              </a:tblGrid>
-              <a:tr h="329184">
-                <a:tc>
-                  <a:txBody>
-                    <a:bodyPr wrap="square"/>
-                    <a:lstStyle/>
-                    <a:p>
-                      <a:pPr algn="l"/>
-                      <a:r>
-                        <a:rPr sz="850" b="1">
-                          <a:solidFill>
-                            <a:srgbClr val="FFFFFF"/>
-                          </a:solidFill>
-                          <a:latin typeface="Calibri"/>
-                        </a:rPr>
-                        <a:t>date</a:t>
                       </a:r>
                     </a:p>
                   </a:txBody>
@@ -25314,6 +23569,629 @@
                     </a:solidFill>
                   </a:tcPr>
                 </a:tc>
+              </a:tr>
+              <a:tr h="291172">
+                <a:tc>
+                  <a:txBody>
+                    <a:bodyPr wrap="square"/>
+                    <a:lstStyle/>
+                    <a:p>
+                      <a:pPr algn="l"/>
+                      <a:r>
+                        <a:rPr sz="850" b="1">
+                          <a:solidFill>
+                            <a:srgbClr val="1C1C1E"/>
+                          </a:solidFill>
+                          <a:latin typeface="Calibri"/>
+                        </a:rPr>
+                        <a:t>us_equity_index</a:t>
+                      </a:r>
+                    </a:p>
+                  </a:txBody>
+                  <a:tcPr marL="82296" marR="64008" marT="32004" marB="32004" anchor="ctr">
+                    <a:solidFill>
+                      <a:srgbClr val="FFFFFF"/>
+                    </a:solidFill>
+                  </a:tcPr>
+                </a:tc>
+                <a:tc>
+                  <a:txBody>
+                    <a:bodyPr wrap="square"/>
+                    <a:lstStyle/>
+                    <a:p>
+                      <a:pPr algn="l"/>
+                      <a:r>
+                        <a:rPr sz="850" b="0">
+                          <a:solidFill>
+                            <a:srgbClr val="1C1C1E"/>
+                          </a:solidFill>
+                          <a:latin typeface="Calibri"/>
+                        </a:rPr>
+                        <a:t>2026-08-27</a:t>
+                      </a:r>
+                    </a:p>
+                  </a:txBody>
+                  <a:tcPr marL="82296" marR="64008" marT="32004" marB="32004" anchor="ctr">
+                    <a:solidFill>
+                      <a:srgbClr val="FFFFFF"/>
+                    </a:solidFill>
+                  </a:tcPr>
+                </a:tc>
+                <a:tc>
+                  <a:txBody>
+                    <a:bodyPr wrap="square"/>
+                    <a:lstStyle/>
+                    <a:p>
+                      <a:pPr algn="l"/>
+                      <a:r>
+                        <a:rPr sz="850" b="0">
+                          <a:solidFill>
+                            <a:srgbClr val="1C1C1E"/>
+                          </a:solidFill>
+                          <a:latin typeface="Calibri"/>
+                        </a:rPr>
+                        <a:t>2026-08-27</a:t>
+                      </a:r>
+                    </a:p>
+                  </a:txBody>
+                  <a:tcPr marL="82296" marR="64008" marT="32004" marB="32004" anchor="ctr">
+                    <a:solidFill>
+                      <a:srgbClr val="FFFFFF"/>
+                    </a:solidFill>
+                  </a:tcPr>
+                </a:tc>
+                <a:tc>
+                  <a:txBody>
+                    <a:bodyPr wrap="square"/>
+                    <a:lstStyle/>
+                    <a:p>
+                      <a:pPr algn="l"/>
+                      <a:r>
+                        <a:rPr sz="850" b="0">
+                          <a:solidFill>
+                            <a:srgbClr val="1C1C1E"/>
+                          </a:solidFill>
+                          <a:latin typeface="Calibri"/>
+                        </a:rPr>
+                        <a:t>7730.99</a:t>
+                      </a:r>
+                    </a:p>
+                  </a:txBody>
+                  <a:tcPr marL="82296" marR="64008" marT="32004" marB="32004" anchor="ctr">
+                    <a:solidFill>
+                      <a:srgbClr val="FFFFFF"/>
+                    </a:solidFill>
+                  </a:tcPr>
+                </a:tc>
+              </a:tr>
+              <a:tr h="291172">
+                <a:tc>
+                  <a:txBody>
+                    <a:bodyPr wrap="square"/>
+                    <a:lstStyle/>
+                    <a:p>
+                      <a:pPr algn="l"/>
+                      <a:r>
+                        <a:rPr sz="850" b="1">
+                          <a:solidFill>
+                            <a:srgbClr val="1C1C1E"/>
+                          </a:solidFill>
+                          <a:latin typeface="Calibri"/>
+                        </a:rPr>
+                        <a:t>us_equity_index</a:t>
+                      </a:r>
+                    </a:p>
+                  </a:txBody>
+                  <a:tcPr marL="82296" marR="64008" marT="32004" marB="32004" anchor="ctr">
+                    <a:solidFill>
+                      <a:srgbClr val="F6F3EF"/>
+                    </a:solidFill>
+                  </a:tcPr>
+                </a:tc>
+                <a:tc>
+                  <a:txBody>
+                    <a:bodyPr wrap="square"/>
+                    <a:lstStyle/>
+                    <a:p>
+                      <a:pPr algn="l"/>
+                      <a:r>
+                        <a:rPr sz="850" b="0">
+                          <a:solidFill>
+                            <a:srgbClr val="1C1C1E"/>
+                          </a:solidFill>
+                          <a:latin typeface="Calibri"/>
+                        </a:rPr>
+                        <a:t>2026-08-28</a:t>
+                      </a:r>
+                    </a:p>
+                  </a:txBody>
+                  <a:tcPr marL="82296" marR="64008" marT="32004" marB="32004" anchor="ctr">
+                    <a:solidFill>
+                      <a:srgbClr val="F6F3EF"/>
+                    </a:solidFill>
+                  </a:tcPr>
+                </a:tc>
+                <a:tc>
+                  <a:txBody>
+                    <a:bodyPr wrap="square"/>
+                    <a:lstStyle/>
+                    <a:p>
+                      <a:pPr algn="l"/>
+                      <a:r>
+                        <a:rPr sz="850" b="0">
+                          <a:solidFill>
+                            <a:srgbClr val="1C1C1E"/>
+                          </a:solidFill>
+                          <a:latin typeface="Calibri"/>
+                        </a:rPr>
+                        <a:t>2026-08-28</a:t>
+                      </a:r>
+                    </a:p>
+                  </a:txBody>
+                  <a:tcPr marL="82296" marR="64008" marT="32004" marB="32004" anchor="ctr">
+                    <a:solidFill>
+                      <a:srgbClr val="F6F3EF"/>
+                    </a:solidFill>
+                  </a:tcPr>
+                </a:tc>
+                <a:tc>
+                  <a:txBody>
+                    <a:bodyPr wrap="square"/>
+                    <a:lstStyle/>
+                    <a:p>
+                      <a:pPr algn="l"/>
+                      <a:r>
+                        <a:rPr sz="850" b="0">
+                          <a:solidFill>
+                            <a:srgbClr val="1C1C1E"/>
+                          </a:solidFill>
+                          <a:latin typeface="Calibri"/>
+                        </a:rPr>
+                        <a:t>7711.76</a:t>
+                      </a:r>
+                    </a:p>
+                  </a:txBody>
+                  <a:tcPr marL="82296" marR="64008" marT="32004" marB="32004" anchor="ctr">
+                    <a:solidFill>
+                      <a:srgbClr val="F6F3EF"/>
+                    </a:solidFill>
+                  </a:tcPr>
+                </a:tc>
+              </a:tr>
+              <a:tr h="291172">
+                <a:tc>
+                  <a:txBody>
+                    <a:bodyPr wrap="square"/>
+                    <a:lstStyle/>
+                    <a:p>
+                      <a:pPr algn="l"/>
+                      <a:r>
+                        <a:rPr sz="850" b="1">
+                          <a:solidFill>
+                            <a:srgbClr val="1C1C1E"/>
+                          </a:solidFill>
+                          <a:latin typeface="Calibri"/>
+                        </a:rPr>
+                        <a:t>us_equity_index</a:t>
+                      </a:r>
+                    </a:p>
+                  </a:txBody>
+                  <a:tcPr marL="82296" marR="64008" marT="32004" marB="32004" anchor="ctr">
+                    <a:solidFill>
+                      <a:srgbClr val="FFFFFF"/>
+                    </a:solidFill>
+                  </a:tcPr>
+                </a:tc>
+                <a:tc>
+                  <a:txBody>
+                    <a:bodyPr wrap="square"/>
+                    <a:lstStyle/>
+                    <a:p>
+                      <a:pPr algn="l"/>
+                      <a:r>
+                        <a:rPr sz="850" b="0">
+                          <a:solidFill>
+                            <a:srgbClr val="1C1C1E"/>
+                          </a:solidFill>
+                          <a:latin typeface="Calibri"/>
+                        </a:rPr>
+                        <a:t>2026-08-31</a:t>
+                      </a:r>
+                    </a:p>
+                  </a:txBody>
+                  <a:tcPr marL="82296" marR="64008" marT="32004" marB="32004" anchor="ctr">
+                    <a:solidFill>
+                      <a:srgbClr val="FFFFFF"/>
+                    </a:solidFill>
+                  </a:tcPr>
+                </a:tc>
+                <a:tc>
+                  <a:txBody>
+                    <a:bodyPr wrap="square"/>
+                    <a:lstStyle/>
+                    <a:p>
+                      <a:pPr algn="l"/>
+                      <a:r>
+                        <a:rPr sz="850" b="0">
+                          <a:solidFill>
+                            <a:srgbClr val="1C1C1E"/>
+                          </a:solidFill>
+                          <a:latin typeface="Calibri"/>
+                        </a:rPr>
+                        <a:t>2026-08-31</a:t>
+                      </a:r>
+                    </a:p>
+                  </a:txBody>
+                  <a:tcPr marL="82296" marR="64008" marT="32004" marB="32004" anchor="ctr">
+                    <a:solidFill>
+                      <a:srgbClr val="FFFFFF"/>
+                    </a:solidFill>
+                  </a:tcPr>
+                </a:tc>
+                <a:tc>
+                  <a:txBody>
+                    <a:bodyPr wrap="square"/>
+                    <a:lstStyle/>
+                    <a:p>
+                      <a:pPr algn="l"/>
+                      <a:r>
+                        <a:rPr sz="850" b="0">
+                          <a:solidFill>
+                            <a:srgbClr val="1C1C1E"/>
+                          </a:solidFill>
+                          <a:latin typeface="Calibri"/>
+                        </a:rPr>
+                        <a:t>7686.14</a:t>
+                      </a:r>
+                    </a:p>
+                  </a:txBody>
+                  <a:tcPr marL="82296" marR="64008" marT="32004" marB="32004" anchor="ctr">
+                    <a:solidFill>
+                      <a:srgbClr val="FFFFFF"/>
+                    </a:solidFill>
+                  </a:tcPr>
+                </a:tc>
+              </a:tr>
+              <a:tr h="291172">
+                <a:tc>
+                  <a:txBody>
+                    <a:bodyPr wrap="square"/>
+                    <a:lstStyle/>
+                    <a:p>
+                      <a:pPr algn="l"/>
+                      <a:r>
+                        <a:rPr sz="850" b="1">
+                          <a:solidFill>
+                            <a:srgbClr val="1C1C1E"/>
+                          </a:solidFill>
+                          <a:latin typeface="Calibri"/>
+                        </a:rPr>
+                        <a:t>us_equity_index</a:t>
+                      </a:r>
+                    </a:p>
+                  </a:txBody>
+                  <a:tcPr marL="82296" marR="64008" marT="32004" marB="32004" anchor="ctr">
+                    <a:solidFill>
+                      <a:srgbClr val="F6F3EF"/>
+                    </a:solidFill>
+                  </a:tcPr>
+                </a:tc>
+                <a:tc>
+                  <a:txBody>
+                    <a:bodyPr wrap="square"/>
+                    <a:lstStyle/>
+                    <a:p>
+                      <a:pPr algn="l"/>
+                      <a:r>
+                        <a:rPr sz="850" b="0">
+                          <a:solidFill>
+                            <a:srgbClr val="1C1C1E"/>
+                          </a:solidFill>
+                          <a:latin typeface="Calibri"/>
+                        </a:rPr>
+                        <a:t>2026-09-01</a:t>
+                      </a:r>
+                    </a:p>
+                  </a:txBody>
+                  <a:tcPr marL="82296" marR="64008" marT="32004" marB="32004" anchor="ctr">
+                    <a:solidFill>
+                      <a:srgbClr val="F6F3EF"/>
+                    </a:solidFill>
+                  </a:tcPr>
+                </a:tc>
+                <a:tc>
+                  <a:txBody>
+                    <a:bodyPr wrap="square"/>
+                    <a:lstStyle/>
+                    <a:p>
+                      <a:pPr algn="l"/>
+                      <a:r>
+                        <a:rPr sz="850" b="0">
+                          <a:solidFill>
+                            <a:srgbClr val="1C1C1E"/>
+                          </a:solidFill>
+                          <a:latin typeface="Calibri"/>
+                        </a:rPr>
+                        <a:t>2026-09-01</a:t>
+                      </a:r>
+                    </a:p>
+                  </a:txBody>
+                  <a:tcPr marL="82296" marR="64008" marT="32004" marB="32004" anchor="ctr">
+                    <a:solidFill>
+                      <a:srgbClr val="F6F3EF"/>
+                    </a:solidFill>
+                  </a:tcPr>
+                </a:tc>
+                <a:tc>
+                  <a:txBody>
+                    <a:bodyPr wrap="square"/>
+                    <a:lstStyle/>
+                    <a:p>
+                      <a:pPr algn="l"/>
+                      <a:r>
+                        <a:rPr sz="850" b="0">
+                          <a:solidFill>
+                            <a:srgbClr val="1C1C1E"/>
+                          </a:solidFill>
+                          <a:latin typeface="Calibri"/>
+                        </a:rPr>
+                        <a:t>7631.47</a:t>
+                      </a:r>
+                    </a:p>
+                  </a:txBody>
+                  <a:tcPr marL="82296" marR="64008" marT="32004" marB="32004" anchor="ctr">
+                    <a:solidFill>
+                      <a:srgbClr val="F6F3EF"/>
+                    </a:solidFill>
+                  </a:tcPr>
+                </a:tc>
+              </a:tr>
+              <a:tr h="291172">
+                <a:tc>
+                  <a:txBody>
+                    <a:bodyPr wrap="square"/>
+                    <a:lstStyle/>
+                    <a:p>
+                      <a:pPr algn="l"/>
+                      <a:r>
+                        <a:rPr sz="850" b="1">
+                          <a:solidFill>
+                            <a:srgbClr val="1C1C1E"/>
+                          </a:solidFill>
+                          <a:latin typeface="Calibri"/>
+                        </a:rPr>
+                        <a:t>us_equity_index</a:t>
+                      </a:r>
+                    </a:p>
+                  </a:txBody>
+                  <a:tcPr marL="82296" marR="64008" marT="32004" marB="32004" anchor="ctr">
+                    <a:solidFill>
+                      <a:srgbClr val="FFFFFF"/>
+                    </a:solidFill>
+                  </a:tcPr>
+                </a:tc>
+                <a:tc>
+                  <a:txBody>
+                    <a:bodyPr wrap="square"/>
+                    <a:lstStyle/>
+                    <a:p>
+                      <a:pPr algn="l"/>
+                      <a:r>
+                        <a:rPr sz="850" b="0">
+                          <a:solidFill>
+                            <a:srgbClr val="1C1C1E"/>
+                          </a:solidFill>
+                          <a:latin typeface="Calibri"/>
+                        </a:rPr>
+                        <a:t>2026-09-02</a:t>
+                      </a:r>
+                    </a:p>
+                  </a:txBody>
+                  <a:tcPr marL="82296" marR="64008" marT="32004" marB="32004" anchor="ctr">
+                    <a:solidFill>
+                      <a:srgbClr val="FFFFFF"/>
+                    </a:solidFill>
+                  </a:tcPr>
+                </a:tc>
+                <a:tc>
+                  <a:txBody>
+                    <a:bodyPr wrap="square"/>
+                    <a:lstStyle/>
+                    <a:p>
+                      <a:pPr algn="l"/>
+                      <a:r>
+                        <a:rPr sz="850" b="0">
+                          <a:solidFill>
+                            <a:srgbClr val="1C1C1E"/>
+                          </a:solidFill>
+                          <a:latin typeface="Calibri"/>
+                        </a:rPr>
+                        <a:t>2026-09-02</a:t>
+                      </a:r>
+                    </a:p>
+                  </a:txBody>
+                  <a:tcPr marL="82296" marR="64008" marT="32004" marB="32004" anchor="ctr">
+                    <a:solidFill>
+                      <a:srgbClr val="FFFFFF"/>
+                    </a:solidFill>
+                  </a:tcPr>
+                </a:tc>
+                <a:tc>
+                  <a:txBody>
+                    <a:bodyPr wrap="square"/>
+                    <a:lstStyle/>
+                    <a:p>
+                      <a:pPr algn="l"/>
+                      <a:r>
+                        <a:rPr sz="850" b="0">
+                          <a:solidFill>
+                            <a:srgbClr val="1C1C1E"/>
+                          </a:solidFill>
+                          <a:latin typeface="Calibri"/>
+                        </a:rPr>
+                        <a:t>7666.60</a:t>
+                      </a:r>
+                    </a:p>
+                  </a:txBody>
+                  <a:tcPr marL="82296" marR="64008" marT="32004" marB="32004" anchor="ctr">
+                    <a:solidFill>
+                      <a:srgbClr val="FFFFFF"/>
+                    </a:solidFill>
+                  </a:tcPr>
+                </a:tc>
+              </a:tr>
+            </a:tbl>
+          </a:graphicData>
+        </a:graphic>
+      </p:graphicFrame>
+      <p:sp>
+        <p:nvSpPr>
+          <p:cNvPr id="11" name="TextBox 10"/>
+          <p:cNvSpPr txBox="1"/>
+          <p:nvPr/>
+        </p:nvSpPr>
+        <p:spPr>
+          <a:xfrm>
+            <a:off x="777240" y="3266376"/>
+            <a:ext cx="4893118" cy="402336"/>
+          </a:xfrm>
+          <a:prstGeom prst="rect">
+            <a:avLst/>
+          </a:prstGeom>
+          <a:noFill/>
+        </p:spPr>
+        <p:txBody>
+          <a:bodyPr wrap="square" lIns="0" rIns="0" tIns="0" bIns="0" anchor="t">
+            <a:spAutoFit/>
+          </a:bodyPr>
+          <a:lstStyle/>
+          <a:p>
+            <a:pPr algn="l">
+              <a:lnSpc>
+                <a:spcPct val="118000"/>
+              </a:lnSpc>
+              <a:spcBef>
+                <a:spcPts val="0"/>
+              </a:spcBef>
+              <a:spcAft>
+                <a:spcPts val="0"/>
+              </a:spcAft>
+            </a:pPr>
+            <a:r>
+              <a:rPr sz="880" b="1" i="0">
+                <a:solidFill>
+                  <a:srgbClr val="A51C30"/>
+                </a:solidFill>
+                <a:latin typeface="Calibri"/>
+              </a:rPr>
+              <a:t>sp500_daily.csv</a:t>
+            </a:r>
+            <a:r>
+              <a:rPr sz="880" b="0" i="0">
+                <a:solidFill>
+                  <a:srgbClr val="4A4F57"/>
+                </a:solidFill>
+                <a:latin typeface="Calibri"/>
+              </a:rPr>
+              <a:t>   FRED series SP500, 258 rows. The two clocks are equal: an index close is known the day it happens.</a:t>
+            </a:r>
+          </a:p>
+        </p:txBody>
+      </p:sp>
+      <p:graphicFrame>
+        <p:nvGraphicFramePr>
+          <p:cNvPr id="12" name="Table 11"/>
+          <p:cNvGraphicFramePr>
+            <a:graphicFrameLocks noGrp="1"/>
+          </p:cNvGraphicFramePr>
+          <p:nvPr/>
+        </p:nvGraphicFramePr>
+        <p:xfrm>
+          <a:off x="777240" y="3705288"/>
+          <a:ext cx="4893117" cy="1202700"/>
+        </p:xfrm>
+        <a:graphic>
+          <a:graphicData uri="http://schemas.openxmlformats.org/drawingml/2006/table">
+            <a:tbl>
+              <a:tblPr firstRow="1">
+                <a:tableStyleId>{5C22544A-7EE6-4342-B048-85BDC9FD1C3A}</a:tableStyleId>
+              </a:tblPr>
+              <a:tblGrid>
+                <a:gridCol w="1574307"/>
+                <a:gridCol w="1148819"/>
+                <a:gridCol w="1148819"/>
+                <a:gridCol w="1021172"/>
+              </a:tblGrid>
+              <a:tr h="329184">
+                <a:tc>
+                  <a:txBody>
+                    <a:bodyPr wrap="square"/>
+                    <a:lstStyle/>
+                    <a:p>
+                      <a:pPr algn="l"/>
+                      <a:r>
+                        <a:rPr sz="850" b="1">
+                          <a:solidFill>
+                            <a:srgbClr val="FFFFFF"/>
+                          </a:solidFill>
+                          <a:latin typeface="Calibri"/>
+                        </a:rPr>
+                        <a:t>entity_id</a:t>
+                      </a:r>
+                    </a:p>
+                  </a:txBody>
+                  <a:tcPr marL="82296" marR="64008" marT="32004" marB="32004" anchor="ctr">
+                    <a:solidFill>
+                      <a:srgbClr val="A51C30"/>
+                    </a:solidFill>
+                  </a:tcPr>
+                </a:tc>
+                <a:tc>
+                  <a:txBody>
+                    <a:bodyPr wrap="square"/>
+                    <a:lstStyle/>
+                    <a:p>
+                      <a:pPr algn="l"/>
+                      <a:r>
+                        <a:rPr sz="850" b="1">
+                          <a:solidFill>
+                            <a:srgbClr val="FFFFFF"/>
+                          </a:solidFill>
+                          <a:latin typeface="Calibri"/>
+                        </a:rPr>
+                        <a:t>event_ts</a:t>
+                      </a:r>
+                    </a:p>
+                  </a:txBody>
+                  <a:tcPr marL="82296" marR="64008" marT="32004" marB="32004" anchor="ctr">
+                    <a:solidFill>
+                      <a:srgbClr val="A51C30"/>
+                    </a:solidFill>
+                  </a:tcPr>
+                </a:tc>
+                <a:tc>
+                  <a:txBody>
+                    <a:bodyPr wrap="square"/>
+                    <a:lstStyle/>
+                    <a:p>
+                      <a:pPr algn="l"/>
+                      <a:r>
+                        <a:rPr sz="850" b="1">
+                          <a:solidFill>
+                            <a:srgbClr val="FFFFFF"/>
+                          </a:solidFill>
+                          <a:latin typeface="Calibri"/>
+                        </a:rPr>
+                        <a:t>ingest_ts</a:t>
+                      </a:r>
+                    </a:p>
+                  </a:txBody>
+                  <a:tcPr marL="82296" marR="64008" marT="32004" marB="32004" anchor="ctr">
+                    <a:solidFill>
+                      <a:srgbClr val="A51C30"/>
+                    </a:solidFill>
+                  </a:tcPr>
+                </a:tc>
                 <a:tc>
                   <a:txBody>
                     <a:bodyPr wrap="square"/>
@@ -25337,52 +24215,6 @@
                     </a:solidFill>
                   </a:tcPr>
                 </a:tc>
-                <a:tc>
-                  <a:txBody>
-                    <a:bodyPr wrap="square"/>
-                    <a:lstStyle/>
-                    <a:p>
-                      <a:pPr algn="l"/>
-                      <a:r>
-                        <a:rPr sz="850" b="1">
-                          <a:solidFill>
-                            <a:srgbClr val="FFFFFF"/>
-                          </a:solidFill>
-                          <a:latin typeface="Calibri"/>
-                        </a:rPr>
-                        <a:t>u3 ingest</a:t>
-                      </a:r>
-                    </a:p>
-                  </a:txBody>
-                  <a:tcPr marL="82296" marR="64008" marT="32004" marB="32004" anchor="ctr">
-                    <a:solidFill>
-                      <a:srgbClr val="A51C30"/>
-                    </a:solidFill>
-                  </a:tcPr>
-                </a:tc>
-                <a:tc>
-                  <a:txBody>
-                    <a:bodyPr wrap="square"/>
-                    <a:lstStyle/>
-                    <a:p>
-                      <a:pPr algn="l"/>
-                      <a:r>
-                        <a:rPr sz="850" b="1">
-                          <a:solidFill>
-                            <a:srgbClr val="FFFFFF"/>
-                          </a:solidFill>
-                          <a:latin typeface="Calibri"/>
-                        </a:rPr>
-                        <a:t>usable at t?</a:t>
-                      </a:r>
-                    </a:p>
-                  </a:txBody>
-                  <a:tcPr marL="82296" marR="64008" marT="32004" marB="32004" anchor="ctr">
-                    <a:solidFill>
-                      <a:srgbClr val="A51C30"/>
-                    </a:solidFill>
-                  </a:tcPr>
-                </a:tc>
               </a:tr>
               <a:tr h="291172">
                 <a:tc>
@@ -25394,11 +24226,11 @@
                       <a:r>
                         <a:rPr sz="850" b="1">
                           <a:solidFill>
-                            <a:srgbClr val="A51C30"/>
+                            <a:srgbClr val="1C1C1E"/>
                           </a:solidFill>
                           <a:latin typeface="Calibri"/>
                         </a:rPr>
-                        <a:t>2026-09-01</a:t>
+                        <a:t>us_equity_index</a:t>
                       </a:r>
                     </a:p>
                   </a:txBody>
@@ -25421,7 +24253,7 @@
                           </a:solidFill>
                           <a:latin typeface="Calibri"/>
                         </a:rPr>
-                        <a:t>99.43</a:t>
+                        <a:t>2026-06-30</a:t>
                       </a:r>
                     </a:p>
                   </a:txBody>
@@ -25444,7 +24276,7 @@
                           </a:solidFill>
                           <a:latin typeface="Calibri"/>
                         </a:rPr>
-                        <a:t>4.1</a:t>
+                        <a:t>2026-07-03</a:t>
                       </a:r>
                     </a:p>
                   </a:txBody>
@@ -25467,30 +24299,7 @@
                           </a:solidFill>
                           <a:latin typeface="Calibri"/>
                         </a:rPr>
-                        <a:t>2026-08-07</a:t>
-                      </a:r>
-                    </a:p>
-                  </a:txBody>
-                  <a:tcPr marL="82296" marR="64008" marT="32004" marB="32004" anchor="ctr">
-                    <a:solidFill>
-                      <a:srgbClr val="FFFFFF"/>
-                    </a:solidFill>
-                  </a:tcPr>
-                </a:tc>
-                <a:tc>
-                  <a:txBody>
-                    <a:bodyPr wrap="square"/>
-                    <a:lstStyle/>
-                    <a:p>
-                      <a:pPr algn="l"/>
-                      <a:r>
-                        <a:rPr sz="850" b="0">
-                          <a:solidFill>
-                            <a:srgbClr val="1C1C1E"/>
-                          </a:solidFill>
-                          <a:latin typeface="Calibri"/>
-                        </a:rPr>
-                        <a:t>yes — July’s</a:t>
+                        <a:t>4.2</a:t>
                       </a:r>
                     </a:p>
                   </a:txBody>
@@ -25511,11 +24320,11 @@
                       <a:r>
                         <a:rPr sz="850" b="1">
                           <a:solidFill>
-                            <a:srgbClr val="A51C30"/>
+                            <a:srgbClr val="1C1C1E"/>
                           </a:solidFill>
                           <a:latin typeface="Calibri"/>
                         </a:rPr>
-                        <a:t>2026-09-02</a:t>
+                        <a:t>us_equity_index</a:t>
                       </a:r>
                     </a:p>
                   </a:txBody>
@@ -25538,30 +24347,7 @@
                           </a:solidFill>
                           <a:latin typeface="Calibri"/>
                         </a:rPr>
-                        <a:t>99.10</a:t>
-                      </a:r>
-                    </a:p>
-                  </a:txBody>
-                  <a:tcPr marL="82296" marR="64008" marT="32004" marB="32004" anchor="ctr">
-                    <a:solidFill>
-                      <a:srgbClr val="F6F3EF"/>
-                    </a:solidFill>
-                  </a:tcPr>
-                </a:tc>
-                <a:tc>
-                  <a:txBody>
-                    <a:bodyPr wrap="square"/>
-                    <a:lstStyle/>
-                    <a:p>
-                      <a:pPr algn="l"/>
-                      <a:r>
-                        <a:rPr sz="850" b="0">
-                          <a:solidFill>
-                            <a:srgbClr val="1C1C1E"/>
-                          </a:solidFill>
-                          <a:latin typeface="Calibri"/>
-                        </a:rPr>
-                        <a:t>4.1</a:t>
+                        <a:t>2026-07-31</a:t>
                       </a:r>
                     </a:p>
                   </a:txBody>
@@ -25607,7 +24393,7 @@
                           </a:solidFill>
                           <a:latin typeface="Calibri"/>
                         </a:rPr>
-                        <a:t>yes</a:t>
+                        <a:t>4.1</a:t>
                       </a:r>
                     </a:p>
                   </a:txBody>
@@ -25628,11 +24414,11 @@
                       <a:r>
                         <a:rPr sz="850" b="1">
                           <a:solidFill>
-                            <a:srgbClr val="A51C30"/>
+                            <a:srgbClr val="1C1C1E"/>
                           </a:solidFill>
                           <a:latin typeface="Calibri"/>
                         </a:rPr>
-                        <a:t>2026-09-03</a:t>
+                        <a:t>us_equity_index</a:t>
                       </a:r>
                     </a:p>
                   </a:txBody>
@@ -25655,264 +24441,7 @@
                           </a:solidFill>
                           <a:latin typeface="Calibri"/>
                         </a:rPr>
-                        <a:t>98.72</a:t>
-                      </a:r>
-                    </a:p>
-                  </a:txBody>
-                  <a:tcPr marL="82296" marR="64008" marT="32004" marB="32004" anchor="ctr">
-                    <a:solidFill>
-                      <a:srgbClr val="FFFFFF"/>
-                    </a:solidFill>
-                  </a:tcPr>
-                </a:tc>
-                <a:tc>
-                  <a:txBody>
-                    <a:bodyPr wrap="square"/>
-                    <a:lstStyle/>
-                    <a:p>
-                      <a:pPr algn="l"/>
-                      <a:r>
-                        <a:rPr sz="850" b="0">
-                          <a:solidFill>
-                            <a:srgbClr val="1C1C1E"/>
-                          </a:solidFill>
-                          <a:latin typeface="Calibri"/>
-                        </a:rPr>
-                        <a:t>4.1</a:t>
-                      </a:r>
-                    </a:p>
-                  </a:txBody>
-                  <a:tcPr marL="82296" marR="64008" marT="32004" marB="32004" anchor="ctr">
-                    <a:solidFill>
-                      <a:srgbClr val="FFFFFF"/>
-                    </a:solidFill>
-                  </a:tcPr>
-                </a:tc>
-                <a:tc>
-                  <a:txBody>
-                    <a:bodyPr wrap="square"/>
-                    <a:lstStyle/>
-                    <a:p>
-                      <a:pPr algn="l"/>
-                      <a:r>
-                        <a:rPr sz="850" b="0">
-                          <a:solidFill>
-                            <a:srgbClr val="1C1C1E"/>
-                          </a:solidFill>
-                          <a:latin typeface="Calibri"/>
-                        </a:rPr>
-                        <a:t>2026-08-07</a:t>
-                      </a:r>
-                    </a:p>
-                  </a:txBody>
-                  <a:tcPr marL="82296" marR="64008" marT="32004" marB="32004" anchor="ctr">
-                    <a:solidFill>
-                      <a:srgbClr val="FFFFFF"/>
-                    </a:solidFill>
-                  </a:tcPr>
-                </a:tc>
-                <a:tc>
-                  <a:txBody>
-                    <a:bodyPr wrap="square"/>
-                    <a:lstStyle/>
-                    <a:p>
-                      <a:pPr algn="l"/>
-                      <a:r>
-                        <a:rPr sz="850" b="0">
-                          <a:solidFill>
-                            <a:srgbClr val="1C1C1E"/>
-                          </a:solidFill>
-                          <a:latin typeface="Calibri"/>
-                        </a:rPr>
-                        <a:t>yes</a:t>
-                      </a:r>
-                    </a:p>
-                  </a:txBody>
-                  <a:tcPr marL="82296" marR="64008" marT="32004" marB="32004" anchor="ctr">
-                    <a:solidFill>
-                      <a:srgbClr val="FFFFFF"/>
-                    </a:solidFill>
-                  </a:tcPr>
-                </a:tc>
-              </a:tr>
-              <a:tr h="436041">
-                <a:tc>
-                  <a:txBody>
-                    <a:bodyPr wrap="square"/>
-                    <a:lstStyle/>
-                    <a:p>
-                      <a:pPr algn="l"/>
-                      <a:r>
-                        <a:rPr sz="850" b="1">
-                          <a:solidFill>
-                            <a:srgbClr val="A51C30"/>
-                          </a:solidFill>
-                          <a:latin typeface="Calibri"/>
-                        </a:rPr>
-                        <a:t>2026-09-04</a:t>
-                      </a:r>
-                    </a:p>
-                  </a:txBody>
-                  <a:tcPr marL="82296" marR="64008" marT="32004" marB="32004" anchor="ctr">
-                    <a:solidFill>
-                      <a:srgbClr val="F6F3EF"/>
-                    </a:solidFill>
-                  </a:tcPr>
-                </a:tc>
-                <a:tc>
-                  <a:txBody>
-                    <a:bodyPr wrap="square"/>
-                    <a:lstStyle/>
-                    <a:p>
-                      <a:pPr algn="l"/>
-                      <a:r>
-                        <a:rPr sz="850" b="0">
-                          <a:solidFill>
-                            <a:srgbClr val="1C1C1E"/>
-                          </a:solidFill>
-                          <a:latin typeface="Calibri"/>
-                        </a:rPr>
-                        <a:t>98.95</a:t>
-                      </a:r>
-                    </a:p>
-                  </a:txBody>
-                  <a:tcPr marL="82296" marR="64008" marT="32004" marB="32004" anchor="ctr">
-                    <a:solidFill>
-                      <a:srgbClr val="F6F3EF"/>
-                    </a:solidFill>
-                  </a:tcPr>
-                </a:tc>
-                <a:tc>
-                  <a:txBody>
-                    <a:bodyPr wrap="square"/>
-                    <a:lstStyle/>
-                    <a:p>
-                      <a:pPr algn="l"/>
-                      <a:r>
-                        <a:rPr sz="850" b="0">
-                          <a:solidFill>
-                            <a:srgbClr val="1C1C1E"/>
-                          </a:solidFill>
-                          <a:latin typeface="Calibri"/>
-                        </a:rPr>
-                        <a:t>4.0</a:t>
-                      </a:r>
-                    </a:p>
-                  </a:txBody>
-                  <a:tcPr marL="82296" marR="64008" marT="32004" marB="32004" anchor="ctr">
-                    <a:solidFill>
-                      <a:srgbClr val="F6F3EF"/>
-                    </a:solidFill>
-                  </a:tcPr>
-                </a:tc>
-                <a:tc>
-                  <a:txBody>
-                    <a:bodyPr wrap="square"/>
-                    <a:lstStyle/>
-                    <a:p>
-                      <a:pPr algn="l"/>
-                      <a:r>
-                        <a:rPr sz="850" b="0">
-                          <a:solidFill>
-                            <a:srgbClr val="1C1C1E"/>
-                          </a:solidFill>
-                          <a:latin typeface="Calibri"/>
-                        </a:rPr>
-                        <a:t>2026-09-04</a:t>
-                      </a:r>
-                    </a:p>
-                  </a:txBody>
-                  <a:tcPr marL="82296" marR="64008" marT="32004" marB="32004" anchor="ctr">
-                    <a:solidFill>
-                      <a:srgbClr val="F6F3EF"/>
-                    </a:solidFill>
-                  </a:tcPr>
-                </a:tc>
-                <a:tc>
-                  <a:txBody>
-                    <a:bodyPr wrap="square"/>
-                    <a:lstStyle/>
-                    <a:p>
-                      <a:pPr algn="l"/>
-                      <a:r>
-                        <a:rPr sz="850" b="0">
-                          <a:solidFill>
-                            <a:srgbClr val="1C1C1E"/>
-                          </a:solidFill>
-                          <a:latin typeface="Calibri"/>
-                        </a:rPr>
-                        <a:t>yes — August lands</a:t>
-                      </a:r>
-                    </a:p>
-                  </a:txBody>
-                  <a:tcPr marL="82296" marR="64008" marT="32004" marB="32004" anchor="ctr">
-                    <a:solidFill>
-                      <a:srgbClr val="F6F3EF"/>
-                    </a:solidFill>
-                  </a:tcPr>
-                </a:tc>
-              </a:tr>
-              <a:tr h="291172">
-                <a:tc>
-                  <a:txBody>
-                    <a:bodyPr wrap="square"/>
-                    <a:lstStyle/>
-                    <a:p>
-                      <a:pPr algn="l"/>
-                      <a:r>
-                        <a:rPr sz="850" b="1">
-                          <a:solidFill>
-                            <a:srgbClr val="A51C30"/>
-                          </a:solidFill>
-                          <a:latin typeface="Calibri"/>
-                        </a:rPr>
-                        <a:t>2026-09-05</a:t>
-                      </a:r>
-                    </a:p>
-                  </a:txBody>
-                  <a:tcPr marL="82296" marR="64008" marT="32004" marB="32004" anchor="ctr">
-                    <a:solidFill>
-                      <a:srgbClr val="FFFFFF"/>
-                    </a:solidFill>
-                  </a:tcPr>
-                </a:tc>
-                <a:tc>
-                  <a:txBody>
-                    <a:bodyPr wrap="square"/>
-                    <a:lstStyle/>
-                    <a:p>
-                      <a:pPr algn="l"/>
-                      <a:r>
-                        <a:rPr sz="850" b="0">
-                          <a:solidFill>
-                            <a:srgbClr val="1C1C1E"/>
-                          </a:solidFill>
-                          <a:latin typeface="Calibri"/>
-                        </a:rPr>
-                        <a:t>99.31</a:t>
-                      </a:r>
-                    </a:p>
-                  </a:txBody>
-                  <a:tcPr marL="82296" marR="64008" marT="32004" marB="32004" anchor="ctr">
-                    <a:solidFill>
-                      <a:srgbClr val="FFFFFF"/>
-                    </a:solidFill>
-                  </a:tcPr>
-                </a:tc>
-                <a:tc>
-                  <a:txBody>
-                    <a:bodyPr wrap="square"/>
-                    <a:lstStyle/>
-                    <a:p>
-                      <a:pPr algn="l"/>
-                      <a:r>
-                        <a:rPr sz="850" b="0">
-                          <a:solidFill>
-                            <a:srgbClr val="1C1C1E"/>
-                          </a:solidFill>
-                          <a:latin typeface="Calibri"/>
-                        </a:rPr>
-                        <a:t>4.0</a:t>
+                        <a:t>2026-08-31</a:t>
                       </a:r>
                     </a:p>
                   </a:txBody>
@@ -25958,7 +24487,7 @@
                           </a:solidFill>
                           <a:latin typeface="Calibri"/>
                         </a:rPr>
-                        <a:t>yes</a:t>
+                        <a:t>4.1</a:t>
                       </a:r>
                     </a:p>
                   </a:txBody>
@@ -25975,14 +24504,185 @@
       </p:graphicFrame>
       <p:sp>
         <p:nvSpPr>
+          <p:cNvPr id="13" name="TextBox 12"/>
+          <p:cNvSpPr txBox="1"/>
+          <p:nvPr/>
+        </p:nvSpPr>
+        <p:spPr>
+          <a:xfrm>
+            <a:off x="777240" y="5036007"/>
+            <a:ext cx="4893118" cy="548640"/>
+          </a:xfrm>
+          <a:prstGeom prst="rect">
+            <a:avLst/>
+          </a:prstGeom>
+          <a:noFill/>
+        </p:spPr>
+        <p:txBody>
+          <a:bodyPr wrap="square" lIns="0" rIns="0" tIns="0" bIns="0" anchor="t">
+            <a:spAutoFit/>
+          </a:bodyPr>
+          <a:lstStyle/>
+          <a:p>
+            <a:pPr algn="l">
+              <a:lnSpc>
+                <a:spcPct val="118000"/>
+              </a:lnSpc>
+              <a:spcBef>
+                <a:spcPts val="0"/>
+              </a:spcBef>
+              <a:spcAft>
+                <a:spcPts val="0"/>
+              </a:spcAft>
+            </a:pPr>
+            <a:r>
+              <a:rPr sz="880" b="1" i="0">
+                <a:solidFill>
+                  <a:srgbClr val="A51C30"/>
+                </a:solidFill>
+                <a:latin typeface="Calibri"/>
+              </a:rPr>
+              <a:t>us_unemployment_monthly.csv</a:t>
+            </a:r>
+            <a:r>
+              <a:rPr sz="880" b="0" i="0">
+                <a:solidFill>
+                  <a:srgbClr val="4A4F57"/>
+                </a:solidFill>
+                <a:latin typeface="Calibri"/>
+              </a:rPr>
+              <a:t>   FRED series UNRATE. ingest_ts is the first Friday of the following month — the BLS release convention, computed and labelled as such rather than passed off as a fetched vintage date.</a:t>
+            </a:r>
+          </a:p>
+        </p:txBody>
+      </p:sp>
+      <p:sp>
+        <p:nvSpPr>
+          <p:cNvPr id="14" name="TextBox 13"/>
+          <p:cNvSpPr txBox="1"/>
+          <p:nvPr/>
+        </p:nvSpPr>
+        <p:spPr>
+          <a:xfrm>
+            <a:off x="6095847" y="1353312"/>
+            <a:ext cx="5318607" cy="310896"/>
+          </a:xfrm>
+          <a:prstGeom prst="rect">
+            <a:avLst/>
+          </a:prstGeom>
+          <a:noFill/>
+        </p:spPr>
+        <p:txBody>
+          <a:bodyPr wrap="square" lIns="0" rIns="0" tIns="0" bIns="0" anchor="t">
+            <a:spAutoFit/>
+          </a:bodyPr>
+          <a:lstStyle/>
+          <a:p>
+            <a:pPr algn="l">
+              <a:spcBef>
+                <a:spcPts val="0"/>
+              </a:spcBef>
+              <a:spcAft>
+                <a:spcPts val="800"/>
+              </a:spcAft>
+            </a:pPr>
+            <a:r>
+              <a:rPr sz="1300" b="1" i="0">
+                <a:solidFill>
+                  <a:srgbClr val="A51C30"/>
+                </a:solidFill>
+                <a:latin typeface="Georgia"/>
+              </a:rPr>
+              <a:t>August’s rate was true on the 31st and known on the 4th</a:t>
+            </a:r>
+          </a:p>
+          <a:p>
+            <a:pPr>
+              <a:lnSpc>
+                <a:spcPct val="125000"/>
+              </a:lnSpc>
+              <a:spcBef>
+                <a:spcPts val="0"/>
+              </a:spcBef>
+              <a:spcAft>
+                <a:spcPts val="1000"/>
+              </a:spcAft>
+            </a:pPr>
+            <a:r>
+              <a:rPr sz="1100" b="0" i="0">
+                <a:solidFill>
+                  <a:srgbClr val="1C1C1E"/>
+                </a:solidFill>
+                <a:latin typeface="Calibri"/>
+              </a:rPr>
+              <a:t>A model trained on the 1st of September using August’s figure is using a number that did not exist yet. It back-tests beautifully and disappoints in production, and no metric says why.</a:t>
+            </a:r>
+          </a:p>
+          <a:p>
+            <a:pPr>
+              <a:lnSpc>
+                <a:spcPct val="125000"/>
+              </a:lnSpc>
+              <a:spcBef>
+                <a:spcPts val="0"/>
+              </a:spcBef>
+              <a:spcAft>
+                <a:spcPts val="1000"/>
+              </a:spcAft>
+            </a:pPr>
+            <a:r>
+              <a:rPr sz="1100" b="0" i="0">
+                <a:solidFill>
+                  <a:srgbClr val="4A4F57"/>
+                </a:solidFill>
+                <a:latin typeface="Calibri"/>
+              </a:rPr>
+              <a:t>That is not a hypothetical about leakage. It is the ordinary shape of every macroeconomic series a bank uses — published late, revised afterwards — and it is why every row here carries two stamps rather than one.</a:t>
+            </a:r>
+          </a:p>
+          <a:p>
+            <a:pPr>
+              <a:lnSpc>
+                <a:spcPct val="125000"/>
+              </a:lnSpc>
+              <a:spcBef>
+                <a:spcPts val="0"/>
+              </a:spcBef>
+              <a:spcAft>
+                <a:spcPts val="0"/>
+              </a:spcAft>
+            </a:pPr>
+            <a:r>
+              <a:rPr sz="1100" b="1" i="0">
+                <a:solidFill>
+                  <a:srgbClr val="A51C30"/>
+                </a:solidFill>
+                <a:latin typeface="Calibri"/>
+              </a:rPr>
+              <a:t>Both are scalars, shape []. </a:t>
+            </a:r>
+            <a:r>
+              <a:rPr sz="1100" b="0" i="0">
+                <a:solidFill>
+                  <a:srgbClr val="4A4F57"/>
+                </a:solidFill>
+                <a:latin typeface="Calibri"/>
+              </a:rPr>
+              <a:t>The curve earlier was a vector; these are not. The shape is declared either way, because a shape nobody states is a shape somebody assumes.</a:t>
+            </a:r>
+          </a:p>
+        </p:txBody>
+      </p:sp>
+      <p:sp>
+        <p:nvSpPr>
           <p:cNvPr id="15" name="Rectangle 14"/>
           <p:cNvSpPr/>
           <p:nvPr/>
         </p:nvSpPr>
         <p:spPr>
           <a:xfrm>
-            <a:off x="6521336" y="3466109"/>
-            <a:ext cx="4893118" cy="1133856"/>
+            <a:off x="6095847" y="4261104"/>
+            <a:ext cx="5318607" cy="841248"/>
           </a:xfrm>
           <a:prstGeom prst="rect">
             <a:avLst/>
@@ -26025,8 +24725,8 @@
         </p:nvSpPr>
         <p:spPr>
           <a:xfrm>
-            <a:off x="6521336" y="3466109"/>
-            <a:ext cx="41148" cy="1133856"/>
+            <a:off x="6095847" y="4261104"/>
+            <a:ext cx="41148" cy="841248"/>
           </a:xfrm>
           <a:prstGeom prst="rect">
             <a:avLst/>
@@ -26069,8 +24769,8 @@
         </p:nvSpPr>
         <p:spPr>
           <a:xfrm>
-            <a:off x="6759080" y="3584981"/>
-            <a:ext cx="4435918" cy="914400"/>
+            <a:off x="6333591" y="4379976"/>
+            <a:ext cx="4861407" cy="621792"/>
           </a:xfrm>
           <a:prstGeom prst="rect">
             <a:avLst/>
@@ -26101,7 +24801,7 @@
                 </a:solidFill>
                 <a:latin typeface="Calibri"/>
               </a:rPr>
-              <a:t>The carried value keeps the clock it was published on. </a:t>
+              <a:t>The numbers on these slides were not invented. </a:t>
             </a:r>
             <a:r>
               <a:rPr sz="1050" b="0" i="0">
@@ -26110,7 +24810,7 @@
                 </a:solidFill>
                 <a:latin typeface="Calibri"/>
               </a:rPr>
-              <a:t>Rows on the 1st to the 3rd hold July’s 4.1, stamped 7 August. On the 4th, August’s 4.0 arrives and is stamped that day — </a:t>
+              <a:t>Both files were pulled from FRED on 4 September 2026 and ship beside the deck in docs/data/ — </a:t>
             </a:r>
             <a:r>
               <a:rPr sz="1050" b="1" i="0">
@@ -26119,7 +24819,1795 @@
                 </a:solidFill>
                 <a:latin typeface="Calibri"/>
               </a:rPr>
-              <a:t>so a point-in-time read as of the 2nd cannot see it, by the ordinary rule and without anybody remembering a flag.</a:t>
+              <a:t>every figure that follows was computed from them.</a:t>
+            </a:r>
+          </a:p>
+        </p:txBody>
+      </p:sp>
+    </p:spTree>
+  </p:cSld>
+  <p:clrMapOvr>
+    <a:masterClrMapping/>
+  </p:clrMapOvr>
+</p:sld>
+</file>
+
+<file path=ppt/slides/slide29.xml><?xml version="1.0" encoding="utf-8"?>
+<p:sld xmlns:a="http://schemas.openxmlformats.org/drawingml/2006/main" xmlns:p="http://schemas.openxmlformats.org/presentationml/2006/main" xmlns:r="http://schemas.openxmlformats.org/officeDocument/2006/relationships">
+  <p:cSld>
+    <p:spTree>
+      <p:nvGrpSpPr>
+        <p:cNvPr id="1" name=""/>
+        <p:cNvGrpSpPr/>
+        <p:nvPr/>
+      </p:nvGrpSpPr>
+      <p:grpSpPr/>
+      <p:sp>
+        <p:nvSpPr>
+          <p:cNvPr id="2" name="Rectangle 1"/>
+          <p:cNvSpPr/>
+          <p:nvPr/>
+        </p:nvSpPr>
+        <p:spPr>
+          <a:xfrm>
+            <a:off x="0" y="0"/>
+            <a:ext cx="12191695" cy="6858000"/>
+          </a:xfrm>
+          <a:prstGeom prst="rect">
+            <a:avLst/>
+          </a:prstGeom>
+          <a:solidFill>
+            <a:srgbClr val="FFFFFF"/>
+          </a:solidFill>
+          <a:ln>
+            <a:noFill/>
+          </a:ln>
+          <a:effectLst/>
+        </p:spPr>
+        <p:style>
+          <a:lnRef idx="1">
+            <a:schemeClr val="accent1"/>
+          </a:lnRef>
+          <a:fillRef idx="3">
+            <a:schemeClr val="accent1"/>
+          </a:fillRef>
+          <a:effectRef idx="2">
+            <a:schemeClr val="accent1"/>
+          </a:effectRef>
+          <a:fontRef idx="minor">
+            <a:schemeClr val="lt1"/>
+          </a:fontRef>
+        </p:style>
+        <p:txBody>
+          <a:bodyPr rtlCol="0" anchor="ctr" wrap="square" lIns="109728" rIns="109728" tIns="64008" bIns="64008"/>
+          <a:lstStyle/>
+          <a:p>
+            <a:pPr algn="ctr"/>
+          </a:p>
+        </p:txBody>
+      </p:sp>
+      <p:sp>
+        <p:nvSpPr>
+          <p:cNvPr id="3" name="Rectangle 2"/>
+          <p:cNvSpPr/>
+          <p:nvPr/>
+        </p:nvSpPr>
+        <p:spPr>
+          <a:xfrm>
+            <a:off x="0" y="566928"/>
+            <a:ext cx="274320" cy="50292"/>
+          </a:xfrm>
+          <a:prstGeom prst="rect">
+            <a:avLst/>
+          </a:prstGeom>
+          <a:solidFill>
+            <a:srgbClr val="A51C30"/>
+          </a:solidFill>
+          <a:ln>
+            <a:noFill/>
+          </a:ln>
+          <a:effectLst/>
+        </p:spPr>
+        <p:style>
+          <a:lnRef idx="1">
+            <a:schemeClr val="accent1"/>
+          </a:lnRef>
+          <a:fillRef idx="3">
+            <a:schemeClr val="accent1"/>
+          </a:fillRef>
+          <a:effectRef idx="2">
+            <a:schemeClr val="accent1"/>
+          </a:effectRef>
+          <a:fontRef idx="minor">
+            <a:schemeClr val="lt1"/>
+          </a:fontRef>
+        </p:style>
+        <p:txBody>
+          <a:bodyPr rtlCol="0" anchor="ctr" wrap="square" lIns="109728" rIns="109728" tIns="64008" bIns="64008"/>
+          <a:lstStyle/>
+          <a:p>
+            <a:pPr algn="ctr"/>
+          </a:p>
+        </p:txBody>
+      </p:sp>
+      <p:sp>
+        <p:nvSpPr>
+          <p:cNvPr id="4" name="TextBox 3"/>
+          <p:cNvSpPr txBox="1"/>
+          <p:nvPr/>
+        </p:nvSpPr>
+        <p:spPr>
+          <a:xfrm>
+            <a:off x="777240" y="475488"/>
+            <a:ext cx="10637215" cy="219456"/>
+          </a:xfrm>
+          <a:prstGeom prst="rect">
+            <a:avLst/>
+          </a:prstGeom>
+          <a:noFill/>
+        </p:spPr>
+        <p:txBody>
+          <a:bodyPr wrap="square" lIns="0" rIns="0" tIns="0" bIns="0" anchor="t">
+            <a:spAutoFit/>
+          </a:bodyPr>
+          <a:lstStyle/>
+          <a:p>
+            <a:pPr algn="l">
+              <a:spcBef>
+                <a:spcPts val="0"/>
+              </a:spcBef>
+              <a:spcAft>
+                <a:spcPts val="0"/>
+              </a:spcAft>
+            </a:pPr>
+            <a:r>
+              <a:rPr sz="1050" b="1" i="0">
+                <a:solidFill>
+                  <a:srgbClr val="A51C30"/>
+                </a:solidFill>
+                <a:latin typeface="Calibri"/>
+              </a:rPr>
+              <a:t>A WORKED EXAMPLE</a:t>
+            </a:r>
+          </a:p>
+        </p:txBody>
+      </p:sp>
+      <p:sp>
+        <p:nvSpPr>
+          <p:cNvPr id="5" name="TextBox 4"/>
+          <p:cNvSpPr txBox="1"/>
+          <p:nvPr/>
+        </p:nvSpPr>
+        <p:spPr>
+          <a:xfrm>
+            <a:off x="777240" y="749808"/>
+            <a:ext cx="10637215" cy="484631"/>
+          </a:xfrm>
+          <a:prstGeom prst="rect">
+            <a:avLst/>
+          </a:prstGeom>
+          <a:noFill/>
+        </p:spPr>
+        <p:txBody>
+          <a:bodyPr wrap="square" lIns="0" rIns="0" tIns="0" bIns="0" anchor="t">
+            <a:spAutoFit/>
+          </a:bodyPr>
+          <a:lstStyle/>
+          <a:p>
+            <a:pPr algn="l">
+              <a:lnSpc>
+                <a:spcPct val="120000"/>
+              </a:lnSpc>
+              <a:spcBef>
+                <a:spcPts val="0"/>
+              </a:spcBef>
+              <a:spcAft>
+                <a:spcPts val="0"/>
+              </a:spcAft>
+            </a:pPr>
+            <a:r>
+              <a:rPr sz="2700" b="0" i="0">
+                <a:solidFill>
+                  <a:srgbClr val="1C1C1E"/>
+                </a:solidFill>
+                <a:latin typeface="Georgia"/>
+              </a:rPr>
+              <a:t>The gap in October is really there</a:t>
+            </a:r>
+          </a:p>
+        </p:txBody>
+      </p:sp>
+      <p:sp>
+        <p:nvSpPr>
+          <p:cNvPr id="6" name="Rectangle 5"/>
+          <p:cNvSpPr/>
+          <p:nvPr/>
+        </p:nvSpPr>
+        <p:spPr>
+          <a:xfrm>
+            <a:off x="777240" y="1207008"/>
+            <a:ext cx="10637215" cy="10972"/>
+          </a:xfrm>
+          <a:prstGeom prst="rect">
+            <a:avLst/>
+          </a:prstGeom>
+          <a:solidFill>
+            <a:srgbClr val="D8D4CF"/>
+          </a:solidFill>
+          <a:ln>
+            <a:noFill/>
+          </a:ln>
+          <a:effectLst/>
+        </p:spPr>
+        <p:style>
+          <a:lnRef idx="1">
+            <a:schemeClr val="accent1"/>
+          </a:lnRef>
+          <a:fillRef idx="3">
+            <a:schemeClr val="accent1"/>
+          </a:fillRef>
+          <a:effectRef idx="2">
+            <a:schemeClr val="accent1"/>
+          </a:effectRef>
+          <a:fontRef idx="minor">
+            <a:schemeClr val="lt1"/>
+          </a:fontRef>
+        </p:style>
+        <p:txBody>
+          <a:bodyPr rtlCol="0" anchor="ctr" wrap="square" lIns="109728" rIns="109728" tIns="64008" bIns="64008"/>
+          <a:lstStyle/>
+          <a:p>
+            <a:pPr algn="ctr"/>
+          </a:p>
+        </p:txBody>
+      </p:sp>
+      <p:sp>
+        <p:nvSpPr>
+          <p:cNvPr id="7" name="Rectangle 6"/>
+          <p:cNvSpPr/>
+          <p:nvPr/>
+        </p:nvSpPr>
+        <p:spPr>
+          <a:xfrm>
+            <a:off x="777240" y="6355080"/>
+            <a:ext cx="10637215" cy="7315"/>
+          </a:xfrm>
+          <a:prstGeom prst="rect">
+            <a:avLst/>
+          </a:prstGeom>
+          <a:solidFill>
+            <a:srgbClr val="D8D4CF"/>
+          </a:solidFill>
+          <a:ln>
+            <a:noFill/>
+          </a:ln>
+          <a:effectLst/>
+        </p:spPr>
+        <p:style>
+          <a:lnRef idx="1">
+            <a:schemeClr val="accent1"/>
+          </a:lnRef>
+          <a:fillRef idx="3">
+            <a:schemeClr val="accent1"/>
+          </a:fillRef>
+          <a:effectRef idx="2">
+            <a:schemeClr val="accent1"/>
+          </a:effectRef>
+          <a:fontRef idx="minor">
+            <a:schemeClr val="lt1"/>
+          </a:fontRef>
+        </p:style>
+        <p:txBody>
+          <a:bodyPr rtlCol="0" anchor="ctr" wrap="square" lIns="109728" rIns="109728" tIns="64008" bIns="64008"/>
+          <a:lstStyle/>
+          <a:p>
+            <a:pPr algn="ctr"/>
+          </a:p>
+        </p:txBody>
+      </p:sp>
+      <p:sp>
+        <p:nvSpPr>
+          <p:cNvPr id="8" name="TextBox 7"/>
+          <p:cNvSpPr txBox="1"/>
+          <p:nvPr/>
+        </p:nvSpPr>
+        <p:spPr>
+          <a:xfrm>
+            <a:off x="777240" y="6437376"/>
+            <a:ext cx="7446050" cy="219456"/>
+          </a:xfrm>
+          <a:prstGeom prst="rect">
+            <a:avLst/>
+          </a:prstGeom>
+          <a:noFill/>
+        </p:spPr>
+        <p:txBody>
+          <a:bodyPr wrap="square" lIns="0" rIns="0" tIns="0" bIns="0" anchor="t">
+            <a:spAutoFit/>
+          </a:bodyPr>
+          <a:lstStyle/>
+          <a:p>
+            <a:pPr algn="l">
+              <a:spcBef>
+                <a:spcPts val="0"/>
+              </a:spcBef>
+              <a:spcAft>
+                <a:spcPts val="0"/>
+              </a:spcAft>
+            </a:pPr>
+            <a:r>
+              <a:rPr sz="850" b="0" i="0">
+                <a:solidFill>
+                  <a:srgbClr val="7A7F87"/>
+                </a:solidFill>
+                <a:latin typeface="Calibri"/>
+              </a:rPr>
+              <a:t>6 · A Worked Example</a:t>
+            </a:r>
+          </a:p>
+        </p:txBody>
+      </p:sp>
+      <p:sp>
+        <p:nvSpPr>
+          <p:cNvPr id="9" name="TextBox 8"/>
+          <p:cNvSpPr txBox="1"/>
+          <p:nvPr/>
+        </p:nvSpPr>
+        <p:spPr>
+          <a:xfrm>
+            <a:off x="8223290" y="6437376"/>
+            <a:ext cx="3191164" cy="219456"/>
+          </a:xfrm>
+          <a:prstGeom prst="rect">
+            <a:avLst/>
+          </a:prstGeom>
+          <a:noFill/>
+        </p:spPr>
+        <p:txBody>
+          <a:bodyPr wrap="square" lIns="0" rIns="0" tIns="0" bIns="0" anchor="t">
+            <a:spAutoFit/>
+          </a:bodyPr>
+          <a:lstStyle/>
+          <a:p>
+            <a:pPr algn="r">
+              <a:spcBef>
+                <a:spcPts val="0"/>
+              </a:spcBef>
+              <a:spcAft>
+                <a:spcPts val="0"/>
+              </a:spcAft>
+            </a:pPr>
+            <a:r>
+              <a:rPr sz="850" b="1" i="0">
+                <a:solidFill>
+                  <a:srgbClr val="7A7F87"/>
+                </a:solidFill>
+                <a:latin typeface="Calibri"/>
+              </a:rPr>
+              <a:t>28</a:t>
+            </a:r>
+          </a:p>
+        </p:txBody>
+      </p:sp>
+      <p:graphicFrame>
+        <p:nvGraphicFramePr>
+          <p:cNvPr id="10" name="Table 9"/>
+          <p:cNvGraphicFramePr>
+            <a:graphicFrameLocks noGrp="1"/>
+          </p:cNvGraphicFramePr>
+          <p:nvPr/>
+        </p:nvGraphicFramePr>
+        <p:xfrm>
+          <a:off x="777240" y="1353312"/>
+          <a:ext cx="6382327" cy="2427042"/>
+        </p:xfrm>
+        <a:graphic>
+          <a:graphicData uri="http://schemas.openxmlformats.org/drawingml/2006/table">
+            <a:tbl>
+              <a:tblPr firstRow="1">
+                <a:tableStyleId>{5C22544A-7EE6-4342-B048-85BDC9FD1C3A}</a:tableStyleId>
+              </a:tblPr>
+              <a:tblGrid>
+                <a:gridCol w="1005811"/>
+                <a:gridCol w="1417279"/>
+                <a:gridCol w="1051529"/>
+                <a:gridCol w="1462998"/>
+                <a:gridCol w="1444710"/>
+              </a:tblGrid>
+              <a:tr h="329184">
+                <a:tc>
+                  <a:txBody>
+                    <a:bodyPr wrap="square"/>
+                    <a:lstStyle/>
+                    <a:p>
+                      <a:pPr algn="l"/>
+                      <a:r>
+                        <a:rPr sz="900" b="1">
+                          <a:solidFill>
+                            <a:srgbClr val="FFFFFF"/>
+                          </a:solidFill>
+                          <a:latin typeface="Calibri"/>
+                        </a:rPr>
+                        <a:t>month</a:t>
+                      </a:r>
+                    </a:p>
+                  </a:txBody>
+                  <a:tcPr marL="82296" marR="64008" marT="32004" marB="32004" anchor="ctr">
+                    <a:solidFill>
+                      <a:srgbClr val="A51C30"/>
+                    </a:solidFill>
+                  </a:tcPr>
+                </a:tc>
+                <a:tc>
+                  <a:txBody>
+                    <a:bodyPr wrap="square"/>
+                    <a:lstStyle/>
+                    <a:p>
+                      <a:pPr algn="l"/>
+                      <a:r>
+                        <a:rPr sz="900" b="1">
+                          <a:solidFill>
+                            <a:srgbClr val="FFFFFF"/>
+                          </a:solidFill>
+                          <a:latin typeface="Calibri"/>
+                        </a:rPr>
+                        <a:t>S&amp;P 500 close</a:t>
+                      </a:r>
+                    </a:p>
+                  </a:txBody>
+                  <a:tcPr marL="82296" marR="64008" marT="32004" marB="32004" anchor="ctr">
+                    <a:solidFill>
+                      <a:srgbClr val="A51C30"/>
+                    </a:solidFill>
+                  </a:tcPr>
+                </a:tc>
+                <a:tc>
+                  <a:txBody>
+                    <a:bodyPr wrap="square"/>
+                    <a:lstStyle/>
+                    <a:p>
+                      <a:pPr algn="l"/>
+                      <a:r>
+                        <a:rPr sz="900" b="1">
+                          <a:solidFill>
+                            <a:srgbClr val="FFFFFF"/>
+                          </a:solidFill>
+                          <a:latin typeface="Calibri"/>
+                        </a:rPr>
+                        <a:t>return %</a:t>
+                      </a:r>
+                    </a:p>
+                  </a:txBody>
+                  <a:tcPr marL="82296" marR="64008" marT="32004" marB="32004" anchor="ctr">
+                    <a:solidFill>
+                      <a:srgbClr val="A51C30"/>
+                    </a:solidFill>
+                  </a:tcPr>
+                </a:tc>
+                <a:tc>
+                  <a:txBody>
+                    <a:bodyPr wrap="square"/>
+                    <a:lstStyle/>
+                    <a:p>
+                      <a:pPr algn="l"/>
+                      <a:r>
+                        <a:rPr sz="900" b="1">
+                          <a:solidFill>
+                            <a:srgbClr val="FFFFFF"/>
+                          </a:solidFill>
+                          <a:latin typeface="Calibri"/>
+                        </a:rPr>
+                        <a:t>u3 rate</a:t>
+                      </a:r>
+                    </a:p>
+                  </a:txBody>
+                  <a:tcPr marL="82296" marR="64008" marT="32004" marB="32004" anchor="ctr">
+                    <a:solidFill>
+                      <a:srgbClr val="A51C30"/>
+                    </a:solidFill>
+                  </a:tcPr>
+                </a:tc>
+                <a:tc>
+                  <a:txBody>
+                    <a:bodyPr wrap="square"/>
+                    <a:lstStyle/>
+                    <a:p>
+                      <a:pPr algn="l"/>
+                      <a:r>
+                        <a:rPr sz="900" b="1">
+                          <a:solidFill>
+                            <a:srgbClr val="FFFFFF"/>
+                          </a:solidFill>
+                          <a:latin typeface="Calibri"/>
+                        </a:rPr>
+                        <a:t>as the set reads it</a:t>
+                      </a:r>
+                    </a:p>
+                  </a:txBody>
+                  <a:tcPr marL="82296" marR="64008" marT="32004" marB="32004" anchor="ctr">
+                    <a:solidFill>
+                      <a:srgbClr val="A51C30"/>
+                    </a:solidFill>
+                  </a:tcPr>
+                </a:tc>
+              </a:tr>
+              <a:tr h="299694">
+                <a:tc>
+                  <a:txBody>
+                    <a:bodyPr wrap="square"/>
+                    <a:lstStyle/>
+                    <a:p>
+                      <a:pPr algn="l"/>
+                      <a:r>
+                        <a:rPr sz="900" b="1">
+                          <a:solidFill>
+                            <a:srgbClr val="A51C30"/>
+                          </a:solidFill>
+                          <a:latin typeface="Calibri"/>
+                        </a:rPr>
+                        <a:t>2025-09</a:t>
+                      </a:r>
+                    </a:p>
+                  </a:txBody>
+                  <a:tcPr marL="82296" marR="64008" marT="32004" marB="32004" anchor="ctr">
+                    <a:solidFill>
+                      <a:srgbClr val="FFFFFF"/>
+                    </a:solidFill>
+                  </a:tcPr>
+                </a:tc>
+                <a:tc>
+                  <a:txBody>
+                    <a:bodyPr wrap="square"/>
+                    <a:lstStyle/>
+                    <a:p>
+                      <a:pPr algn="l"/>
+                      <a:r>
+                        <a:rPr sz="900" b="0">
+                          <a:solidFill>
+                            <a:srgbClr val="1C1C1E"/>
+                          </a:solidFill>
+                          <a:latin typeface="Calibri"/>
+                        </a:rPr>
+                        <a:t>6688.46</a:t>
+                      </a:r>
+                    </a:p>
+                  </a:txBody>
+                  <a:tcPr marL="82296" marR="64008" marT="32004" marB="32004" anchor="ctr">
+                    <a:solidFill>
+                      <a:srgbClr val="FFFFFF"/>
+                    </a:solidFill>
+                  </a:tcPr>
+                </a:tc>
+                <a:tc>
+                  <a:txBody>
+                    <a:bodyPr wrap="square"/>
+                    <a:lstStyle/>
+                    <a:p>
+                      <a:pPr algn="l"/>
+                      <a:r>
+                        <a:rPr sz="900" b="0">
+                          <a:solidFill>
+                            <a:srgbClr val="1C1C1E"/>
+                          </a:solidFill>
+                          <a:latin typeface="Calibri"/>
+                        </a:rPr>
+                        <a:t>+3.53</a:t>
+                      </a:r>
+                    </a:p>
+                  </a:txBody>
+                  <a:tcPr marL="82296" marR="64008" marT="32004" marB="32004" anchor="ctr">
+                    <a:solidFill>
+                      <a:srgbClr val="FFFFFF"/>
+                    </a:solidFill>
+                  </a:tcPr>
+                </a:tc>
+                <a:tc>
+                  <a:txBody>
+                    <a:bodyPr wrap="square"/>
+                    <a:lstStyle/>
+                    <a:p>
+                      <a:pPr algn="l"/>
+                      <a:r>
+                        <a:rPr sz="900" b="0">
+                          <a:solidFill>
+                            <a:srgbClr val="1C1C1E"/>
+                          </a:solidFill>
+                          <a:latin typeface="Calibri"/>
+                        </a:rPr>
+                        <a:t>4.4</a:t>
+                      </a:r>
+                    </a:p>
+                  </a:txBody>
+                  <a:tcPr marL="82296" marR="64008" marT="32004" marB="32004" anchor="ctr">
+                    <a:solidFill>
+                      <a:srgbClr val="FFFFFF"/>
+                    </a:solidFill>
+                  </a:tcPr>
+                </a:tc>
+                <a:tc>
+                  <a:txBody>
+                    <a:bodyPr wrap="square"/>
+                    <a:lstStyle/>
+                    <a:p>
+                      <a:pPr algn="l"/>
+                      <a:r>
+                        <a:rPr sz="900" b="0">
+                          <a:solidFill>
+                            <a:srgbClr val="1C1C1E"/>
+                          </a:solidFill>
+                          <a:latin typeface="Calibri"/>
+                        </a:rPr>
+                        <a:t>4.4</a:t>
+                      </a:r>
+                    </a:p>
+                  </a:txBody>
+                  <a:tcPr marL="82296" marR="64008" marT="32004" marB="32004" anchor="ctr">
+                    <a:solidFill>
+                      <a:srgbClr val="FFFFFF"/>
+                    </a:solidFill>
+                  </a:tcPr>
+                </a:tc>
+              </a:tr>
+              <a:tr h="299694">
+                <a:tc>
+                  <a:txBody>
+                    <a:bodyPr wrap="square"/>
+                    <a:lstStyle/>
+                    <a:p>
+                      <a:pPr algn="l"/>
+                      <a:r>
+                        <a:rPr sz="900" b="1">
+                          <a:solidFill>
+                            <a:srgbClr val="A51C30"/>
+                          </a:solidFill>
+                          <a:latin typeface="Calibri"/>
+                        </a:rPr>
+                        <a:t>2025-10</a:t>
+                      </a:r>
+                    </a:p>
+                  </a:txBody>
+                  <a:tcPr marL="82296" marR="64008" marT="32004" marB="32004" anchor="ctr">
+                    <a:solidFill>
+                      <a:srgbClr val="F6F3EF"/>
+                    </a:solidFill>
+                  </a:tcPr>
+                </a:tc>
+                <a:tc>
+                  <a:txBody>
+                    <a:bodyPr wrap="square"/>
+                    <a:lstStyle/>
+                    <a:p>
+                      <a:pPr algn="l"/>
+                      <a:r>
+                        <a:rPr sz="900" b="0">
+                          <a:solidFill>
+                            <a:srgbClr val="1C1C1E"/>
+                          </a:solidFill>
+                          <a:latin typeface="Calibri"/>
+                        </a:rPr>
+                        <a:t>6840.20</a:t>
+                      </a:r>
+                    </a:p>
+                  </a:txBody>
+                  <a:tcPr marL="82296" marR="64008" marT="32004" marB="32004" anchor="ctr">
+                    <a:solidFill>
+                      <a:srgbClr val="F6F3EF"/>
+                    </a:solidFill>
+                  </a:tcPr>
+                </a:tc>
+                <a:tc>
+                  <a:txBody>
+                    <a:bodyPr wrap="square"/>
+                    <a:lstStyle/>
+                    <a:p>
+                      <a:pPr algn="l"/>
+                      <a:r>
+                        <a:rPr sz="900" b="0">
+                          <a:solidFill>
+                            <a:srgbClr val="1C1C1E"/>
+                          </a:solidFill>
+                          <a:latin typeface="Calibri"/>
+                        </a:rPr>
+                        <a:t>+2.27</a:t>
+                      </a:r>
+                    </a:p>
+                  </a:txBody>
+                  <a:tcPr marL="82296" marR="64008" marT="32004" marB="32004" anchor="ctr">
+                    <a:solidFill>
+                      <a:srgbClr val="F6F3EF"/>
+                    </a:solidFill>
+                  </a:tcPr>
+                </a:tc>
+                <a:tc>
+                  <a:txBody>
+                    <a:bodyPr wrap="square"/>
+                    <a:lstStyle/>
+                    <a:p>
+                      <a:pPr algn="l"/>
+                      <a:r>
+                        <a:rPr sz="900" b="0">
+                          <a:solidFill>
+                            <a:srgbClr val="1C1C1E"/>
+                          </a:solidFill>
+                          <a:latin typeface="Calibri"/>
+                        </a:rPr>
+                        <a:t>—  not published</a:t>
+                      </a:r>
+                    </a:p>
+                  </a:txBody>
+                  <a:tcPr marL="82296" marR="64008" marT="32004" marB="32004" anchor="ctr">
+                    <a:solidFill>
+                      <a:srgbClr val="F6F3EF"/>
+                    </a:solidFill>
+                  </a:tcPr>
+                </a:tc>
+                <a:tc>
+                  <a:txBody>
+                    <a:bodyPr wrap="square"/>
+                    <a:lstStyle/>
+                    <a:p>
+                      <a:pPr algn="l"/>
+                      <a:r>
+                        <a:rPr sz="900" b="0">
+                          <a:solidFill>
+                            <a:srgbClr val="1C1C1E"/>
+                          </a:solidFill>
+                          <a:latin typeface="Calibri"/>
+                        </a:rPr>
+                        <a:t>4.4   carried forward</a:t>
+                      </a:r>
+                    </a:p>
+                  </a:txBody>
+                  <a:tcPr marL="82296" marR="64008" marT="32004" marB="32004" anchor="ctr">
+                    <a:solidFill>
+                      <a:srgbClr val="F6F3EF"/>
+                    </a:solidFill>
+                  </a:tcPr>
+                </a:tc>
+              </a:tr>
+              <a:tr h="299694">
+                <a:tc>
+                  <a:txBody>
+                    <a:bodyPr wrap="square"/>
+                    <a:lstStyle/>
+                    <a:p>
+                      <a:pPr algn="l"/>
+                      <a:r>
+                        <a:rPr sz="900" b="1">
+                          <a:solidFill>
+                            <a:srgbClr val="A51C30"/>
+                          </a:solidFill>
+                          <a:latin typeface="Calibri"/>
+                        </a:rPr>
+                        <a:t>2025-11</a:t>
+                      </a:r>
+                    </a:p>
+                  </a:txBody>
+                  <a:tcPr marL="82296" marR="64008" marT="32004" marB="32004" anchor="ctr">
+                    <a:solidFill>
+                      <a:srgbClr val="FFFFFF"/>
+                    </a:solidFill>
+                  </a:tcPr>
+                </a:tc>
+                <a:tc>
+                  <a:txBody>
+                    <a:bodyPr wrap="square"/>
+                    <a:lstStyle/>
+                    <a:p>
+                      <a:pPr algn="l"/>
+                      <a:r>
+                        <a:rPr sz="900" b="0">
+                          <a:solidFill>
+                            <a:srgbClr val="1C1C1E"/>
+                          </a:solidFill>
+                          <a:latin typeface="Calibri"/>
+                        </a:rPr>
+                        <a:t>6849.09</a:t>
+                      </a:r>
+                    </a:p>
+                  </a:txBody>
+                  <a:tcPr marL="82296" marR="64008" marT="32004" marB="32004" anchor="ctr">
+                    <a:solidFill>
+                      <a:srgbClr val="FFFFFF"/>
+                    </a:solidFill>
+                  </a:tcPr>
+                </a:tc>
+                <a:tc>
+                  <a:txBody>
+                    <a:bodyPr wrap="square"/>
+                    <a:lstStyle/>
+                    <a:p>
+                      <a:pPr algn="l"/>
+                      <a:r>
+                        <a:rPr sz="900" b="0">
+                          <a:solidFill>
+                            <a:srgbClr val="1C1C1E"/>
+                          </a:solidFill>
+                          <a:latin typeface="Calibri"/>
+                        </a:rPr>
+                        <a:t>+0.13</a:t>
+                      </a:r>
+                    </a:p>
+                  </a:txBody>
+                  <a:tcPr marL="82296" marR="64008" marT="32004" marB="32004" anchor="ctr">
+                    <a:solidFill>
+                      <a:srgbClr val="FFFFFF"/>
+                    </a:solidFill>
+                  </a:tcPr>
+                </a:tc>
+                <a:tc>
+                  <a:txBody>
+                    <a:bodyPr wrap="square"/>
+                    <a:lstStyle/>
+                    <a:p>
+                      <a:pPr algn="l"/>
+                      <a:r>
+                        <a:rPr sz="900" b="0">
+                          <a:solidFill>
+                            <a:srgbClr val="1C1C1E"/>
+                          </a:solidFill>
+                          <a:latin typeface="Calibri"/>
+                        </a:rPr>
+                        <a:t>4.5</a:t>
+                      </a:r>
+                    </a:p>
+                  </a:txBody>
+                  <a:tcPr marL="82296" marR="64008" marT="32004" marB="32004" anchor="ctr">
+                    <a:solidFill>
+                      <a:srgbClr val="FFFFFF"/>
+                    </a:solidFill>
+                  </a:tcPr>
+                </a:tc>
+                <a:tc>
+                  <a:txBody>
+                    <a:bodyPr wrap="square"/>
+                    <a:lstStyle/>
+                    <a:p>
+                      <a:pPr algn="l"/>
+                      <a:r>
+                        <a:rPr sz="900" b="0">
+                          <a:solidFill>
+                            <a:srgbClr val="1C1C1E"/>
+                          </a:solidFill>
+                          <a:latin typeface="Calibri"/>
+                        </a:rPr>
+                        <a:t>4.5</a:t>
+                      </a:r>
+                    </a:p>
+                  </a:txBody>
+                  <a:tcPr marL="82296" marR="64008" marT="32004" marB="32004" anchor="ctr">
+                    <a:solidFill>
+                      <a:srgbClr val="FFFFFF"/>
+                    </a:solidFill>
+                  </a:tcPr>
+                </a:tc>
+              </a:tr>
+              <a:tr h="299694">
+                <a:tc>
+                  <a:txBody>
+                    <a:bodyPr wrap="square"/>
+                    <a:lstStyle/>
+                    <a:p>
+                      <a:pPr algn="l"/>
+                      <a:r>
+                        <a:rPr sz="900" b="1">
+                          <a:solidFill>
+                            <a:srgbClr val="A51C30"/>
+                          </a:solidFill>
+                          <a:latin typeface="Calibri"/>
+                        </a:rPr>
+                        <a:t>2025-12</a:t>
+                      </a:r>
+                    </a:p>
+                  </a:txBody>
+                  <a:tcPr marL="82296" marR="64008" marT="32004" marB="32004" anchor="ctr">
+                    <a:solidFill>
+                      <a:srgbClr val="F6F3EF"/>
+                    </a:solidFill>
+                  </a:tcPr>
+                </a:tc>
+                <a:tc>
+                  <a:txBody>
+                    <a:bodyPr wrap="square"/>
+                    <a:lstStyle/>
+                    <a:p>
+                      <a:pPr algn="l"/>
+                      <a:r>
+                        <a:rPr sz="900" b="0">
+                          <a:solidFill>
+                            <a:srgbClr val="1C1C1E"/>
+                          </a:solidFill>
+                          <a:latin typeface="Calibri"/>
+                        </a:rPr>
+                        <a:t>6845.50</a:t>
+                      </a:r>
+                    </a:p>
+                  </a:txBody>
+                  <a:tcPr marL="82296" marR="64008" marT="32004" marB="32004" anchor="ctr">
+                    <a:solidFill>
+                      <a:srgbClr val="F6F3EF"/>
+                    </a:solidFill>
+                  </a:tcPr>
+                </a:tc>
+                <a:tc>
+                  <a:txBody>
+                    <a:bodyPr wrap="square"/>
+                    <a:lstStyle/>
+                    <a:p>
+                      <a:pPr algn="l"/>
+                      <a:r>
+                        <a:rPr sz="900" b="0">
+                          <a:solidFill>
+                            <a:srgbClr val="1C1C1E"/>
+                          </a:solidFill>
+                          <a:latin typeface="Calibri"/>
+                        </a:rPr>
+                        <a:t>−0.05</a:t>
+                      </a:r>
+                    </a:p>
+                  </a:txBody>
+                  <a:tcPr marL="82296" marR="64008" marT="32004" marB="32004" anchor="ctr">
+                    <a:solidFill>
+                      <a:srgbClr val="F6F3EF"/>
+                    </a:solidFill>
+                  </a:tcPr>
+                </a:tc>
+                <a:tc>
+                  <a:txBody>
+                    <a:bodyPr wrap="square"/>
+                    <a:lstStyle/>
+                    <a:p>
+                      <a:pPr algn="l"/>
+                      <a:r>
+                        <a:rPr sz="900" b="0">
+                          <a:solidFill>
+                            <a:srgbClr val="1C1C1E"/>
+                          </a:solidFill>
+                          <a:latin typeface="Calibri"/>
+                        </a:rPr>
+                        <a:t>4.4</a:t>
+                      </a:r>
+                    </a:p>
+                  </a:txBody>
+                  <a:tcPr marL="82296" marR="64008" marT="32004" marB="32004" anchor="ctr">
+                    <a:solidFill>
+                      <a:srgbClr val="F6F3EF"/>
+                    </a:solidFill>
+                  </a:tcPr>
+                </a:tc>
+                <a:tc>
+                  <a:txBody>
+                    <a:bodyPr wrap="square"/>
+                    <a:lstStyle/>
+                    <a:p>
+                      <a:pPr algn="l"/>
+                      <a:r>
+                        <a:rPr sz="900" b="0">
+                          <a:solidFill>
+                            <a:srgbClr val="1C1C1E"/>
+                          </a:solidFill>
+                          <a:latin typeface="Calibri"/>
+                        </a:rPr>
+                        <a:t>4.4</a:t>
+                      </a:r>
+                    </a:p>
+                  </a:txBody>
+                  <a:tcPr marL="82296" marR="64008" marT="32004" marB="32004" anchor="ctr">
+                    <a:solidFill>
+                      <a:srgbClr val="F6F3EF"/>
+                    </a:solidFill>
+                  </a:tcPr>
+                </a:tc>
+              </a:tr>
+              <a:tr h="299694">
+                <a:tc>
+                  <a:txBody>
+                    <a:bodyPr wrap="square"/>
+                    <a:lstStyle/>
+                    <a:p>
+                      <a:pPr algn="l"/>
+                      <a:r>
+                        <a:rPr sz="900" b="1">
+                          <a:solidFill>
+                            <a:srgbClr val="A51C30"/>
+                          </a:solidFill>
+                          <a:latin typeface="Calibri"/>
+                        </a:rPr>
+                        <a:t>2026-03</a:t>
+                      </a:r>
+                    </a:p>
+                  </a:txBody>
+                  <a:tcPr marL="82296" marR="64008" marT="32004" marB="32004" anchor="ctr">
+                    <a:solidFill>
+                      <a:srgbClr val="FFFFFF"/>
+                    </a:solidFill>
+                  </a:tcPr>
+                </a:tc>
+                <a:tc>
+                  <a:txBody>
+                    <a:bodyPr wrap="square"/>
+                    <a:lstStyle/>
+                    <a:p>
+                      <a:pPr algn="l"/>
+                      <a:r>
+                        <a:rPr sz="900" b="0">
+                          <a:solidFill>
+                            <a:srgbClr val="1C1C1E"/>
+                          </a:solidFill>
+                          <a:latin typeface="Calibri"/>
+                        </a:rPr>
+                        <a:t>6528.52</a:t>
+                      </a:r>
+                    </a:p>
+                  </a:txBody>
+                  <a:tcPr marL="82296" marR="64008" marT="32004" marB="32004" anchor="ctr">
+                    <a:solidFill>
+                      <a:srgbClr val="FFFFFF"/>
+                    </a:solidFill>
+                  </a:tcPr>
+                </a:tc>
+                <a:tc>
+                  <a:txBody>
+                    <a:bodyPr wrap="square"/>
+                    <a:lstStyle/>
+                    <a:p>
+                      <a:pPr algn="l"/>
+                      <a:r>
+                        <a:rPr sz="900" b="0">
+                          <a:solidFill>
+                            <a:srgbClr val="1C1C1E"/>
+                          </a:solidFill>
+                          <a:latin typeface="Calibri"/>
+                        </a:rPr>
+                        <a:t>−5.09</a:t>
+                      </a:r>
+                    </a:p>
+                  </a:txBody>
+                  <a:tcPr marL="82296" marR="64008" marT="32004" marB="32004" anchor="ctr">
+                    <a:solidFill>
+                      <a:srgbClr val="FFFFFF"/>
+                    </a:solidFill>
+                  </a:tcPr>
+                </a:tc>
+                <a:tc>
+                  <a:txBody>
+                    <a:bodyPr wrap="square"/>
+                    <a:lstStyle/>
+                    <a:p>
+                      <a:pPr algn="l"/>
+                      <a:r>
+                        <a:rPr sz="900" b="0">
+                          <a:solidFill>
+                            <a:srgbClr val="1C1C1E"/>
+                          </a:solidFill>
+                          <a:latin typeface="Calibri"/>
+                        </a:rPr>
+                        <a:t>4.3</a:t>
+                      </a:r>
+                    </a:p>
+                  </a:txBody>
+                  <a:tcPr marL="82296" marR="64008" marT="32004" marB="32004" anchor="ctr">
+                    <a:solidFill>
+                      <a:srgbClr val="FFFFFF"/>
+                    </a:solidFill>
+                  </a:tcPr>
+                </a:tc>
+                <a:tc>
+                  <a:txBody>
+                    <a:bodyPr wrap="square"/>
+                    <a:lstStyle/>
+                    <a:p>
+                      <a:pPr algn="l"/>
+                      <a:r>
+                        <a:rPr sz="900" b="0">
+                          <a:solidFill>
+                            <a:srgbClr val="1C1C1E"/>
+                          </a:solidFill>
+                          <a:latin typeface="Calibri"/>
+                        </a:rPr>
+                        <a:t>4.3</a:t>
+                      </a:r>
+                    </a:p>
+                  </a:txBody>
+                  <a:tcPr marL="82296" marR="64008" marT="32004" marB="32004" anchor="ctr">
+                    <a:solidFill>
+                      <a:srgbClr val="FFFFFF"/>
+                    </a:solidFill>
+                  </a:tcPr>
+                </a:tc>
+              </a:tr>
+              <a:tr h="299694">
+                <a:tc>
+                  <a:txBody>
+                    <a:bodyPr wrap="square"/>
+                    <a:lstStyle/>
+                    <a:p>
+                      <a:pPr algn="l"/>
+                      <a:r>
+                        <a:rPr sz="900" b="1">
+                          <a:solidFill>
+                            <a:srgbClr val="A51C30"/>
+                          </a:solidFill>
+                          <a:latin typeface="Calibri"/>
+                        </a:rPr>
+                        <a:t>2026-04</a:t>
+                      </a:r>
+                    </a:p>
+                  </a:txBody>
+                  <a:tcPr marL="82296" marR="64008" marT="32004" marB="32004" anchor="ctr">
+                    <a:solidFill>
+                      <a:srgbClr val="F6F3EF"/>
+                    </a:solidFill>
+                  </a:tcPr>
+                </a:tc>
+                <a:tc>
+                  <a:txBody>
+                    <a:bodyPr wrap="square"/>
+                    <a:lstStyle/>
+                    <a:p>
+                      <a:pPr algn="l"/>
+                      <a:r>
+                        <a:rPr sz="900" b="0">
+                          <a:solidFill>
+                            <a:srgbClr val="1C1C1E"/>
+                          </a:solidFill>
+                          <a:latin typeface="Calibri"/>
+                        </a:rPr>
+                        <a:t>7209.01</a:t>
+                      </a:r>
+                    </a:p>
+                  </a:txBody>
+                  <a:tcPr marL="82296" marR="64008" marT="32004" marB="32004" anchor="ctr">
+                    <a:solidFill>
+                      <a:srgbClr val="F6F3EF"/>
+                    </a:solidFill>
+                  </a:tcPr>
+                </a:tc>
+                <a:tc>
+                  <a:txBody>
+                    <a:bodyPr wrap="square"/>
+                    <a:lstStyle/>
+                    <a:p>
+                      <a:pPr algn="l"/>
+                      <a:r>
+                        <a:rPr sz="900" b="0">
+                          <a:solidFill>
+                            <a:srgbClr val="1C1C1E"/>
+                          </a:solidFill>
+                          <a:latin typeface="Calibri"/>
+                        </a:rPr>
+                        <a:t>+10.42</a:t>
+                      </a:r>
+                    </a:p>
+                  </a:txBody>
+                  <a:tcPr marL="82296" marR="64008" marT="32004" marB="32004" anchor="ctr">
+                    <a:solidFill>
+                      <a:srgbClr val="F6F3EF"/>
+                    </a:solidFill>
+                  </a:tcPr>
+                </a:tc>
+                <a:tc>
+                  <a:txBody>
+                    <a:bodyPr wrap="square"/>
+                    <a:lstStyle/>
+                    <a:p>
+                      <a:pPr algn="l"/>
+                      <a:r>
+                        <a:rPr sz="900" b="0">
+                          <a:solidFill>
+                            <a:srgbClr val="1C1C1E"/>
+                          </a:solidFill>
+                          <a:latin typeface="Calibri"/>
+                        </a:rPr>
+                        <a:t>4.3</a:t>
+                      </a:r>
+                    </a:p>
+                  </a:txBody>
+                  <a:tcPr marL="82296" marR="64008" marT="32004" marB="32004" anchor="ctr">
+                    <a:solidFill>
+                      <a:srgbClr val="F6F3EF"/>
+                    </a:solidFill>
+                  </a:tcPr>
+                </a:tc>
+                <a:tc>
+                  <a:txBody>
+                    <a:bodyPr wrap="square"/>
+                    <a:lstStyle/>
+                    <a:p>
+                      <a:pPr algn="l"/>
+                      <a:r>
+                        <a:rPr sz="900" b="0">
+                          <a:solidFill>
+                            <a:srgbClr val="1C1C1E"/>
+                          </a:solidFill>
+                          <a:latin typeface="Calibri"/>
+                        </a:rPr>
+                        <a:t>4.3</a:t>
+                      </a:r>
+                    </a:p>
+                  </a:txBody>
+                  <a:tcPr marL="82296" marR="64008" marT="32004" marB="32004" anchor="ctr">
+                    <a:solidFill>
+                      <a:srgbClr val="F6F3EF"/>
+                    </a:solidFill>
+                  </a:tcPr>
+                </a:tc>
+              </a:tr>
+              <a:tr h="299694">
+                <a:tc>
+                  <a:txBody>
+                    <a:bodyPr wrap="square"/>
+                    <a:lstStyle/>
+                    <a:p>
+                      <a:pPr algn="l"/>
+                      <a:r>
+                        <a:rPr sz="900" b="1">
+                          <a:solidFill>
+                            <a:srgbClr val="A51C30"/>
+                          </a:solidFill>
+                          <a:latin typeface="Calibri"/>
+                        </a:rPr>
+                        <a:t>2026-08</a:t>
+                      </a:r>
+                    </a:p>
+                  </a:txBody>
+                  <a:tcPr marL="82296" marR="64008" marT="32004" marB="32004" anchor="ctr">
+                    <a:solidFill>
+                      <a:srgbClr val="FFFFFF"/>
+                    </a:solidFill>
+                  </a:tcPr>
+                </a:tc>
+                <a:tc>
+                  <a:txBody>
+                    <a:bodyPr wrap="square"/>
+                    <a:lstStyle/>
+                    <a:p>
+                      <a:pPr algn="l"/>
+                      <a:r>
+                        <a:rPr sz="900" b="0">
+                          <a:solidFill>
+                            <a:srgbClr val="1C1C1E"/>
+                          </a:solidFill>
+                          <a:latin typeface="Calibri"/>
+                        </a:rPr>
+                        <a:t>7686.14</a:t>
+                      </a:r>
+                    </a:p>
+                  </a:txBody>
+                  <a:tcPr marL="82296" marR="64008" marT="32004" marB="32004" anchor="ctr">
+                    <a:solidFill>
+                      <a:srgbClr val="FFFFFF"/>
+                    </a:solidFill>
+                  </a:tcPr>
+                </a:tc>
+                <a:tc>
+                  <a:txBody>
+                    <a:bodyPr wrap="square"/>
+                    <a:lstStyle/>
+                    <a:p>
+                      <a:pPr algn="l"/>
+                      <a:r>
+                        <a:rPr sz="900" b="0">
+                          <a:solidFill>
+                            <a:srgbClr val="1C1C1E"/>
+                          </a:solidFill>
+                          <a:latin typeface="Calibri"/>
+                        </a:rPr>
+                        <a:t>+2.62</a:t>
+                      </a:r>
+                    </a:p>
+                  </a:txBody>
+                  <a:tcPr marL="82296" marR="64008" marT="32004" marB="32004" anchor="ctr">
+                    <a:solidFill>
+                      <a:srgbClr val="FFFFFF"/>
+                    </a:solidFill>
+                  </a:tcPr>
+                </a:tc>
+                <a:tc>
+                  <a:txBody>
+                    <a:bodyPr wrap="square"/>
+                    <a:lstStyle/>
+                    <a:p>
+                      <a:pPr algn="l"/>
+                      <a:r>
+                        <a:rPr sz="900" b="0">
+                          <a:solidFill>
+                            <a:srgbClr val="1C1C1E"/>
+                          </a:solidFill>
+                          <a:latin typeface="Calibri"/>
+                        </a:rPr>
+                        <a:t>4.1</a:t>
+                      </a:r>
+                    </a:p>
+                  </a:txBody>
+                  <a:tcPr marL="82296" marR="64008" marT="32004" marB="32004" anchor="ctr">
+                    <a:solidFill>
+                      <a:srgbClr val="FFFFFF"/>
+                    </a:solidFill>
+                  </a:tcPr>
+                </a:tc>
+                <a:tc>
+                  <a:txBody>
+                    <a:bodyPr wrap="square"/>
+                    <a:lstStyle/>
+                    <a:p>
+                      <a:pPr algn="l"/>
+                      <a:r>
+                        <a:rPr sz="900" b="0">
+                          <a:solidFill>
+                            <a:srgbClr val="1C1C1E"/>
+                          </a:solidFill>
+                          <a:latin typeface="Calibri"/>
+                        </a:rPr>
+                        <a:t>4.1</a:t>
+                      </a:r>
+                    </a:p>
+                  </a:txBody>
+                  <a:tcPr marL="82296" marR="64008" marT="32004" marB="32004" anchor="ctr">
+                    <a:solidFill>
+                      <a:srgbClr val="FFFFFF"/>
+                    </a:solidFill>
+                  </a:tcPr>
+                </a:tc>
+              </a:tr>
+            </a:tbl>
+          </a:graphicData>
+        </a:graphic>
+      </p:graphicFrame>
+      <p:sp>
+        <p:nvSpPr>
+          <p:cNvPr id="11" name="TextBox 10"/>
+          <p:cNvSpPr txBox="1"/>
+          <p:nvPr/>
+        </p:nvSpPr>
+        <p:spPr>
+          <a:xfrm>
+            <a:off x="777240" y="3944950"/>
+            <a:ext cx="6382329" cy="548640"/>
+          </a:xfrm>
+          <a:prstGeom prst="rect">
+            <a:avLst/>
+          </a:prstGeom>
+          <a:noFill/>
+        </p:spPr>
+        <p:txBody>
+          <a:bodyPr wrap="square" lIns="0" rIns="0" tIns="0" bIns="0" anchor="t">
+            <a:spAutoFit/>
+          </a:bodyPr>
+          <a:lstStyle/>
+          <a:p>
+            <a:pPr algn="l">
+              <a:lnSpc>
+                <a:spcPct val="122000"/>
+              </a:lnSpc>
+              <a:spcBef>
+                <a:spcPts val="0"/>
+              </a:spcBef>
+              <a:spcAft>
+                <a:spcPts val="0"/>
+              </a:spcAft>
+            </a:pPr>
+            <a:r>
+              <a:rPr sz="1000" b="1" i="0">
+                <a:solidFill>
+                  <a:srgbClr val="A51C30"/>
+                </a:solidFill>
+                <a:latin typeface="Calibri"/>
+              </a:rPr>
+              <a:t>Twelve months, one of them missing. </a:t>
+            </a:r>
+            <a:r>
+              <a:rPr sz="1000" b="0" i="0">
+                <a:solidFill>
+                  <a:srgbClr val="4A4F57"/>
+                </a:solidFill>
+                <a:latin typeface="Calibri"/>
+              </a:rPr>
+              <a:t>FRED publishes no unemployment rate for October 2025. Nothing was constructed to make this slide interesting — the hole is in the series.</a:t>
+            </a:r>
+          </a:p>
+        </p:txBody>
+      </p:sp>
+      <p:sp>
+        <p:nvSpPr>
+          <p:cNvPr id="12" name="Rectangle 11"/>
+          <p:cNvSpPr/>
+          <p:nvPr/>
+        </p:nvSpPr>
+        <p:spPr>
+          <a:xfrm>
+            <a:off x="7585057" y="1353312"/>
+            <a:ext cx="3829397" cy="1732422"/>
+          </a:xfrm>
+          <a:prstGeom prst="rect">
+            <a:avLst/>
+          </a:prstGeom>
+          <a:solidFill>
+            <a:srgbClr val="F4F2EF"/>
+          </a:solidFill>
+          <a:ln>
+            <a:noFill/>
+          </a:ln>
+          <a:effectLst/>
+        </p:spPr>
+        <p:style>
+          <a:lnRef idx="1">
+            <a:schemeClr val="accent1"/>
+          </a:lnRef>
+          <a:fillRef idx="3">
+            <a:schemeClr val="accent1"/>
+          </a:fillRef>
+          <a:effectRef idx="2">
+            <a:schemeClr val="accent1"/>
+          </a:effectRef>
+          <a:fontRef idx="minor">
+            <a:schemeClr val="lt1"/>
+          </a:fontRef>
+        </p:style>
+        <p:txBody>
+          <a:bodyPr rtlCol="0" anchor="ctr" wrap="square" lIns="109728" rIns="109728" tIns="64008" bIns="64008"/>
+          <a:lstStyle/>
+          <a:p>
+            <a:pPr algn="ctr"/>
+          </a:p>
+        </p:txBody>
+      </p:sp>
+      <p:sp>
+        <p:nvSpPr>
+          <p:cNvPr id="13" name="Rectangle 12"/>
+          <p:cNvSpPr/>
+          <p:nvPr/>
+        </p:nvSpPr>
+        <p:spPr>
+          <a:xfrm>
+            <a:off x="7585057" y="1353312"/>
+            <a:ext cx="41148" cy="1732422"/>
+          </a:xfrm>
+          <a:prstGeom prst="rect">
+            <a:avLst/>
+          </a:prstGeom>
+          <a:solidFill>
+            <a:srgbClr val="4A4F57"/>
+          </a:solidFill>
+          <a:ln>
+            <a:noFill/>
+          </a:ln>
+          <a:effectLst/>
+        </p:spPr>
+        <p:style>
+          <a:lnRef idx="1">
+            <a:schemeClr val="accent1"/>
+          </a:lnRef>
+          <a:fillRef idx="3">
+            <a:schemeClr val="accent1"/>
+          </a:fillRef>
+          <a:effectRef idx="2">
+            <a:schemeClr val="accent1"/>
+          </a:effectRef>
+          <a:fontRef idx="minor">
+            <a:schemeClr val="lt1"/>
+          </a:fontRef>
+        </p:style>
+        <p:txBody>
+          <a:bodyPr rtlCol="0" anchor="ctr" wrap="square" lIns="109728" rIns="109728" tIns="64008" bIns="64008"/>
+          <a:lstStyle/>
+          <a:p>
+            <a:pPr algn="ctr"/>
+          </a:p>
+        </p:txBody>
+      </p:sp>
+      <p:sp>
+        <p:nvSpPr>
+          <p:cNvPr id="14" name="TextBox 13"/>
+          <p:cNvSpPr txBox="1"/>
+          <p:nvPr/>
+        </p:nvSpPr>
+        <p:spPr>
+          <a:xfrm>
+            <a:off x="7786225" y="1453896"/>
+            <a:ext cx="3463637" cy="1549542"/>
+          </a:xfrm>
+          <a:prstGeom prst="rect">
+            <a:avLst/>
+          </a:prstGeom>
+          <a:noFill/>
+        </p:spPr>
+        <p:txBody>
+          <a:bodyPr wrap="square" lIns="0" rIns="0" tIns="0" bIns="0" anchor="t">
+            <a:spAutoFit/>
+          </a:bodyPr>
+          <a:lstStyle/>
+          <a:p>
+            <a:pPr algn="l">
+              <a:lnSpc>
+                <a:spcPct val="134000"/>
+              </a:lnSpc>
+              <a:spcBef>
+                <a:spcPts val="0"/>
+              </a:spcBef>
+              <a:spcAft>
+                <a:spcPts val="0"/>
+              </a:spcAft>
+            </a:pPr>
+            <a:r>
+              <a:rPr sz="850" b="0" i="0">
+                <a:solidFill>
+                  <a:srgbClr val="1C1C1E"/>
+                </a:solidFill>
+                <a:latin typeface="Consolas"/>
+              </a:rPr>
+              <a:t>defaults:</a:t>
+            </a:r>
+          </a:p>
+          <a:p>
+            <a:pPr>
+              <a:lnSpc>
+                <a:spcPct val="134000"/>
+              </a:lnSpc>
+              <a:spcBef>
+                <a:spcPts val="0"/>
+              </a:spcBef>
+              <a:spcAft>
+                <a:spcPts val="0"/>
+              </a:spcAft>
+            </a:pPr>
+            <a:r>
+              <a:rPr sz="850" b="0" i="0">
+                <a:solidFill>
+                  <a:srgbClr val="1C1C1E"/>
+                </a:solidFill>
+                <a:latin typeface="Consolas"/>
+              </a:rPr>
+              <a:t>  align: {axis: event_ts,</a:t>
+            </a:r>
+          </a:p>
+          <a:p>
+            <a:pPr>
+              <a:lnSpc>
+                <a:spcPct val="134000"/>
+              </a:lnSpc>
+              <a:spcBef>
+                <a:spcPts val="0"/>
+              </a:spcBef>
+              <a:spcAft>
+                <a:spcPts val="0"/>
+              </a:spcAft>
+            </a:pPr>
+            <a:r>
+              <a:rPr sz="850" b="0" i="0">
+                <a:solidFill>
+                  <a:srgbClr val="1C1C1E"/>
+                </a:solidFill>
+                <a:latin typeface="Consolas"/>
+              </a:rPr>
+              <a:t>          rule:  flat_forward}</a:t>
+            </a:r>
+          </a:p>
+          <a:p>
+            <a:pPr>
+              <a:lnSpc>
+                <a:spcPct val="134000"/>
+              </a:lnSpc>
+              <a:spcBef>
+                <a:spcPts val="0"/>
+              </a:spcBef>
+              <a:spcAft>
+                <a:spcPts val="0"/>
+              </a:spcAft>
+            </a:pPr>
+            <a:r>
+              <a:rPr sz="850" b="0" i="0">
+                <a:solidFill>
+                  <a:srgbClr val="1C1C1E"/>
+                </a:solidFill>
+                <a:latin typeface="Consolas"/>
+              </a:rPr>
+              <a:t>  fill:  {u3_rate: keep}</a:t>
+            </a:r>
+          </a:p>
+          <a:p>
+            <a:pPr>
+              <a:lnSpc>
+                <a:spcPct val="134000"/>
+              </a:lnSpc>
+              <a:spcBef>
+                <a:spcPts val="0"/>
+              </a:spcBef>
+              <a:spcAft>
+                <a:spcPts val="0"/>
+              </a:spcAft>
+            </a:pPr>
+            <a:r>
+              <a:rPr sz="850" b="0" i="0">
+                <a:solidFill>
+                  <a:srgbClr val="1C1C1E"/>
+                </a:solidFill>
+                <a:latin typeface="Consolas"/>
+              </a:rPr>
+              <a:t> </a:t>
+            </a:r>
+          </a:p>
+          <a:p>
+            <a:pPr>
+              <a:lnSpc>
+                <a:spcPct val="134000"/>
+              </a:lnSpc>
+              <a:spcBef>
+                <a:spcPts val="0"/>
+              </a:spcBef>
+              <a:spcAft>
+                <a:spcPts val="0"/>
+              </a:spcAft>
+            </a:pPr>
+            <a:r>
+              <a:rPr sz="850" b="0" i="0">
+                <a:solidFill>
+                  <a:srgbClr val="7A7F87"/>
+                </a:solidFill>
+                <a:latin typeface="Consolas"/>
+              </a:rPr>
+              <a:t># filled: 1 of 12 (8.3%)</a:t>
+            </a:r>
+          </a:p>
+          <a:p>
+            <a:pPr>
+              <a:lnSpc>
+                <a:spcPct val="134000"/>
+              </a:lnSpc>
+              <a:spcBef>
+                <a:spcPts val="0"/>
+              </a:spcBef>
+              <a:spcAft>
+                <a:spcPts val="0"/>
+              </a:spcAft>
+            </a:pPr>
+            <a:r>
+              <a:rPr sz="850" b="0" i="0">
+                <a:solidFill>
+                  <a:srgbClr val="7A7F87"/>
+                </a:solidFill>
+                <a:latin typeface="Consolas"/>
+              </a:rPr>
+              <a:t># carried from 2025-09,</a:t>
+            </a:r>
+          </a:p>
+          <a:p>
+            <a:pPr>
+              <a:lnSpc>
+                <a:spcPct val="134000"/>
+              </a:lnSpc>
+              <a:spcBef>
+                <a:spcPts val="0"/>
+              </a:spcBef>
+              <a:spcAft>
+                <a:spcPts val="0"/>
+              </a:spcAft>
+            </a:pPr>
+            <a:r>
+              <a:rPr sz="850" b="0" i="0">
+                <a:solidFill>
+                  <a:srgbClr val="7A7F87"/>
+                </a:solidFill>
+                <a:latin typeface="Consolas"/>
+              </a:rPr>
+              <a:t>#   ingest_ts 2025-10-03</a:t>
+            </a:r>
+          </a:p>
+        </p:txBody>
+      </p:sp>
+      <p:sp>
+        <p:nvSpPr>
+          <p:cNvPr id="15" name="TextBox 14"/>
+          <p:cNvSpPr txBox="1"/>
+          <p:nvPr/>
+        </p:nvSpPr>
+        <p:spPr>
+          <a:xfrm>
+            <a:off x="7585057" y="3286902"/>
+            <a:ext cx="3829397" cy="2194560"/>
+          </a:xfrm>
+          <a:prstGeom prst="rect">
+            <a:avLst/>
+          </a:prstGeom>
+          <a:noFill/>
+        </p:spPr>
+        <p:txBody>
+          <a:bodyPr wrap="square" lIns="0" rIns="0" tIns="0" bIns="0" anchor="t">
+            <a:spAutoFit/>
+          </a:bodyPr>
+          <a:lstStyle/>
+          <a:p>
+            <a:pPr algn="l">
+              <a:spcBef>
+                <a:spcPts val="0"/>
+              </a:spcBef>
+              <a:spcAft>
+                <a:spcPts val="700"/>
+              </a:spcAft>
+            </a:pPr>
+            <a:r>
+              <a:rPr sz="1200" b="1" i="0">
+                <a:solidFill>
+                  <a:srgbClr val="A51C30"/>
+                </a:solidFill>
+                <a:latin typeface="Georgia"/>
+              </a:rPr>
+              <a:t>Forward, and only forward</a:t>
+            </a:r>
+          </a:p>
+          <a:p>
+            <a:pPr>
+              <a:lnSpc>
+                <a:spcPct val="122000"/>
+              </a:lnSpc>
+              <a:spcBef>
+                <a:spcPts val="0"/>
+              </a:spcBef>
+              <a:spcAft>
+                <a:spcPts val="800"/>
+              </a:spcAft>
+            </a:pPr>
+            <a:r>
+              <a:rPr sz="1000" b="0" i="0">
+                <a:solidFill>
+                  <a:srgbClr val="1C1C1E"/>
+                </a:solidFill>
+                <a:latin typeface="Calibri"/>
+              </a:rPr>
+              <a:t>Interpolating October between September and November would use November’s 4.5 — published on the 5th of December — to fill a row dated the 31st of October.</a:t>
+            </a:r>
+          </a:p>
+          <a:p>
+            <a:pPr>
+              <a:lnSpc>
+                <a:spcPct val="122000"/>
+              </a:lnSpc>
+              <a:spcBef>
+                <a:spcPts val="0"/>
+              </a:spcBef>
+              <a:spcAft>
+                <a:spcPts val="800"/>
+              </a:spcAft>
+            </a:pPr>
+            <a:r>
+              <a:rPr sz="1000" b="0" i="0">
+                <a:solidFill>
+                  <a:srgbClr val="4A4F57"/>
+                </a:solidFill>
+                <a:latin typeface="Calibri"/>
+              </a:rPr>
+              <a:t>The platform allows that and stamps it honestly: the filled value would carry December’s ingest clock, so a point-in-time read in October excludes it. The leakage is not forbidden, it is made impossible to hide.</a:t>
+            </a:r>
+          </a:p>
+          <a:p>
+            <a:pPr>
+              <a:lnSpc>
+                <a:spcPct val="122000"/>
+              </a:lnSpc>
+              <a:spcBef>
+                <a:spcPts val="0"/>
+              </a:spcBef>
+              <a:spcAft>
+                <a:spcPts val="0"/>
+              </a:spcAft>
+            </a:pPr>
+            <a:r>
+              <a:rPr sz="1000" b="1" i="0">
+                <a:solidFill>
+                  <a:srgbClr val="A51C30"/>
+                </a:solidFill>
+                <a:latin typeface="Calibri"/>
+              </a:rPr>
+              <a:t>And the fill rate is part of the answer. </a:t>
+            </a:r>
+            <a:r>
+              <a:rPr sz="1000" b="0" i="0">
+                <a:solidFill>
+                  <a:srgbClr val="4A4F57"/>
+                </a:solidFill>
+                <a:latin typeface="Calibri"/>
+              </a:rPr>
+              <a:t>One month in twelve is 8%, which is fine. Past a fifth, the report says so loudly.</a:t>
             </a:r>
           </a:p>
         </p:txBody>
@@ -28186,7 +28674,7 @@
         <p:spPr>
           <a:xfrm>
             <a:off x="777240" y="749808"/>
-            <a:ext cx="10637215" cy="484631"/>
+            <a:ext cx="10637215" cy="896111"/>
           </a:xfrm>
           <a:prstGeom prst="rect">
             <a:avLst/>
@@ -28217,7 +28705,7 @@
                 </a:solidFill>
                 <a:latin typeface="Georgia"/>
               </a:rPr>
-              <a:t>Two models, one featureset</a:t>
+              <a:t>Two models, one featureset, both fitted to these twelve months</a:t>
             </a:r>
           </a:p>
         </p:txBody>
@@ -28230,7 +28718,7 @@
         </p:nvSpPr>
         <p:spPr>
           <a:xfrm>
-            <a:off x="777240" y="1207008"/>
+            <a:off x="777240" y="1618488"/>
             <a:ext cx="10637215" cy="10972"/>
           </a:xfrm>
           <a:prstGeom prst="rect">
@@ -28402,8 +28890,8 @@
         </p:nvSpPr>
         <p:spPr>
           <a:xfrm>
-            <a:off x="777240" y="1353312"/>
-            <a:ext cx="5135727" cy="2204161"/>
+            <a:off x="777240" y="1764792"/>
+            <a:ext cx="5135727" cy="2011177"/>
           </a:xfrm>
           <a:prstGeom prst="rect">
             <a:avLst/>
@@ -28446,8 +28934,8 @@
         </p:nvSpPr>
         <p:spPr>
           <a:xfrm>
-            <a:off x="777240" y="1353312"/>
-            <a:ext cx="41148" cy="2204161"/>
+            <a:off x="777240" y="1764792"/>
+            <a:ext cx="41148" cy="2011177"/>
           </a:xfrm>
           <a:prstGeom prst="rect">
             <a:avLst/>
@@ -28490,8 +28978,8 @@
         </p:nvSpPr>
         <p:spPr>
           <a:xfrm>
-            <a:off x="978408" y="1453896"/>
-            <a:ext cx="4769967" cy="2021281"/>
+            <a:off x="978408" y="1865376"/>
+            <a:ext cx="4769967" cy="1828297"/>
           </a:xfrm>
           <a:prstGeom prst="rect">
             <a:avLst/>
@@ -28522,7 +29010,7 @@
                 </a:solidFill>
                 <a:latin typeface="Consolas"/>
               </a:rPr>
-              <a:t>multiple linear regression</a:t>
+              <a:t>multiple linear regression   —  fitted, n = 10</a:t>
             </a:r>
           </a:p>
           <a:p>
@@ -28566,7 +29054,7 @@
                 </a:solidFill>
                 <a:latin typeface="Consolas"/>
               </a:rPr>
-              <a:t>next_return  =  18.080</a:t>
+              <a:t>next_return  =   43.314</a:t>
             </a:r>
           </a:p>
           <a:p>
@@ -28588,7 +29076,7 @@
                 </a:solidFill>
                 <a:latin typeface="Consolas"/>
               </a:rPr>
-              <a:t>             − 4.247 × u3_rate</a:t>
+              <a:t>               −  9.708 × u3_rate</a:t>
             </a:r>
           </a:p>
           <a:p>
@@ -28610,7 +29098,7 @@
                 </a:solidFill>
                 <a:latin typeface="Consolas"/>
               </a:rPr>
-              <a:t>             − 0.096 × prev_return</a:t>
+              <a:t>               −  0.105 × prev_return</a:t>
             </a:r>
           </a:p>
           <a:p>
@@ -28654,7 +29142,7 @@
                 </a:solidFill>
                 <a:latin typeface="Consolas"/>
               </a:rPr>
-              <a:t>kind   estimated_coefficients   → T2</a:t>
+              <a:t>kind   estimated_coefficients   →  T2</a:t>
             </a:r>
           </a:p>
           <a:p>
@@ -28676,7 +29164,7 @@
                 </a:solidFill>
                 <a:latin typeface="Consolas"/>
               </a:rPr>
-              <a:t>P      3 numbers</a:t>
+              <a:t>D(Y)   point_estimate</a:t>
             </a:r>
           </a:p>
           <a:p>
@@ -28698,29 +29186,7 @@
                 </a:solidFill>
                 <a:latin typeface="Consolas"/>
               </a:rPr>
-              <a:t>D(Y)   point_estimate</a:t>
-            </a:r>
-          </a:p>
-          <a:p>
-            <a:pPr>
-              <a:lnSpc>
-                <a:spcPct val="134000"/>
-              </a:lnSpc>
-              <a:spcBef>
-                <a:spcPts val="0"/>
-              </a:spcBef>
-              <a:spcAft>
-                <a:spcPts val="0"/>
-              </a:spcAft>
-            </a:pPr>
-            <a:r>
-              <a:rPr sz="900" b="0" i="0">
-                <a:solidFill>
-                  <a:srgbClr val="1C1C1E"/>
-                </a:solidFill>
-                <a:latin typeface="Consolas"/>
-              </a:rPr>
-              <a:t>fit    n = 10   R² = 0.179   resid sd = 1.114</a:t>
+              <a:t>R² = 0.082      residual sd = 4.53 %</a:t>
             </a:r>
           </a:p>
         </p:txBody>
@@ -28733,8 +29199,8 @@
         </p:nvSpPr>
         <p:spPr>
           <a:xfrm>
-            <a:off x="777240" y="3758641"/>
-            <a:ext cx="5135727" cy="822960"/>
+            <a:off x="777240" y="3977137"/>
+            <a:ext cx="5135727" cy="1051560"/>
           </a:xfrm>
           <a:prstGeom prst="rect">
             <a:avLst/>
@@ -28765,7 +29231,7 @@
                 </a:solidFill>
                 <a:latin typeface="Calibri"/>
               </a:rPr>
-              <a:t>It predicts the level. </a:t>
+              <a:t>An R² of 0.08 is a bad model. </a:t>
             </a:r>
             <a:r>
               <a:rPr sz="1000" b="0" i="0">
@@ -28774,7 +29240,7 @@
                 </a:solidFill>
                 <a:latin typeface="Calibri"/>
               </a:rPr>
-              <a:t>An R² of 0.18 on ten points is not a good model; it is an honest one, and the register stores the diagnostics beside the coefficients so a reviewer sees both.</a:t>
+              <a:t>Ten monthly observations cannot support three parameters, and the register stores that verdict beside the coefficients rather than leaving it in a notebook. A platform that only recorded the coefficients would make this look like a result.</a:t>
             </a:r>
           </a:p>
         </p:txBody>
@@ -28787,8 +29253,8 @@
         </p:nvSpPr>
         <p:spPr>
           <a:xfrm>
-            <a:off x="6278727" y="1353312"/>
-            <a:ext cx="5135727" cy="2204161"/>
+            <a:off x="6278727" y="1764792"/>
+            <a:ext cx="5135727" cy="2011177"/>
           </a:xfrm>
           <a:prstGeom prst="rect">
             <a:avLst/>
@@ -28831,8 +29297,8 @@
         </p:nvSpPr>
         <p:spPr>
           <a:xfrm>
-            <a:off x="6278727" y="1353312"/>
-            <a:ext cx="41148" cy="2204161"/>
+            <a:off x="6278727" y="1764792"/>
+            <a:ext cx="41148" cy="2011177"/>
           </a:xfrm>
           <a:prstGeom prst="rect">
             <a:avLst/>
@@ -28875,8 +29341,8 @@
         </p:nvSpPr>
         <p:spPr>
           <a:xfrm>
-            <a:off x="6479895" y="1453896"/>
-            <a:ext cx="4769967" cy="2021281"/>
+            <a:off x="6479895" y="1865376"/>
+            <a:ext cx="4769967" cy="1828297"/>
           </a:xfrm>
           <a:prstGeom prst="rect">
             <a:avLst/>
@@ -28907,7 +29373,7 @@
                 </a:solidFill>
                 <a:latin typeface="Consolas"/>
               </a:rPr>
-              <a:t>GARCH(1,1) on the same returns</a:t>
+              <a:t>GARCH(1,1)   —  maximum likelihood, same returns</a:t>
             </a:r>
           </a:p>
           <a:p>
@@ -28951,7 +29417,7 @@
                 </a:solidFill>
                 <a:latin typeface="Consolas"/>
               </a:rPr>
-              <a:t>σ²ₜ  =  0.1050</a:t>
+              <a:t>σ²ₜ  =  3.7684</a:t>
             </a:r>
           </a:p>
           <a:p>
@@ -28973,7 +29439,7 @@
                 </a:solidFill>
                 <a:latin typeface="Consolas"/>
               </a:rPr>
-              <a:t>      + 0.110 × ε²ₜ₋₁</a:t>
+              <a:t>      + 0.320 × ε²ₜ₋₁</a:t>
             </a:r>
           </a:p>
           <a:p>
@@ -28995,7 +29461,7 @@
                 </a:solidFill>
                 <a:latin typeface="Consolas"/>
               </a:rPr>
-              <a:t>      + 0.790 × σ²ₜ₋₁</a:t>
+              <a:t>      + 0.400 × σ²ₜ₋₁</a:t>
             </a:r>
           </a:p>
           <a:p>
@@ -29039,7 +29505,7 @@
                 </a:solidFill>
                 <a:latin typeface="Consolas"/>
               </a:rPr>
-              <a:t>kind   estimated_coefficients   → T2</a:t>
+              <a:t>kind   estimated_coefficients   →  T2</a:t>
             </a:r>
           </a:p>
           <a:p>
@@ -29061,7 +29527,7 @@
                 </a:solidFill>
                 <a:latin typeface="Consolas"/>
               </a:rPr>
-              <a:t>P      3 numbers  (ω, α, β)</a:t>
+              <a:t>D(Y)   predictive_distribution</a:t>
             </a:r>
           </a:p>
           <a:p>
@@ -29083,29 +29549,7 @@
                 </a:solidFill>
                 <a:latin typeface="Consolas"/>
               </a:rPr>
-              <a:t>D(Y)   predictive_distribution</a:t>
-            </a:r>
-          </a:p>
-          <a:p>
-            <a:pPr>
-              <a:lnSpc>
-                <a:spcPct val="134000"/>
-              </a:lnSpc>
-              <a:spcBef>
-                <a:spcPts val="0"/>
-              </a:spcBef>
-              <a:spcAft>
-                <a:spcPts val="0"/>
-              </a:spcAft>
-            </a:pPr>
-            <a:r>
-              <a:rPr sz="900" b="0" i="0">
-                <a:solidFill>
-                  <a:srgbClr val="1C1C1E"/>
-                </a:solidFill>
-                <a:latin typeface="Consolas"/>
-              </a:rPr>
-              <a:t>fit    long-run sd 1.025, matching the sample</a:t>
+              <a:t>log-likelihood −31.90   long-run sd = 3.67 %</a:t>
             </a:r>
           </a:p>
         </p:txBody>
@@ -29118,8 +29562,8 @@
         </p:nvSpPr>
         <p:spPr>
           <a:xfrm>
-            <a:off x="6278727" y="3758641"/>
-            <a:ext cx="5135727" cy="822960"/>
+            <a:off x="6278727" y="3977137"/>
+            <a:ext cx="5135727" cy="1051560"/>
           </a:xfrm>
           <a:prstGeom prst="rect">
             <a:avLst/>
@@ -29150,7 +29594,7 @@
                 </a:solidFill>
                 <a:latin typeface="Calibri"/>
               </a:rPr>
-              <a:t>It predicts the spread. </a:t>
+              <a:t>Persistence α+β = 0.72. </a:t>
             </a:r>
             <a:r>
               <a:rPr sz="1000" b="0" i="0">
@@ -29159,7 +29603,7 @@
                 </a:solidFill>
                 <a:latin typeface="Calibri"/>
               </a:rPr>
-              <a:t>Same features, same entity, same grain — a different kernel, a different P, and an output that is a distribution rather than a number.</a:t>
+              <a:t>Low for a monthly series, which is what twelve observations buy you. Same features, same entity, same grain — a different kernel, a different P, and an output that is a distribution rather than a number.</a:t>
             </a:r>
           </a:p>
         </p:txBody>
@@ -29172,8 +29616,8 @@
         </p:nvSpPr>
         <p:spPr>
           <a:xfrm>
-            <a:off x="777240" y="4673041"/>
-            <a:ext cx="10637215" cy="1060704"/>
+            <a:off x="777240" y="5129281"/>
+            <a:ext cx="10637215" cy="1005840"/>
           </a:xfrm>
           <a:prstGeom prst="rect">
             <a:avLst/>
@@ -29216,8 +29660,8 @@
         </p:nvSpPr>
         <p:spPr>
           <a:xfrm>
-            <a:off x="777240" y="4673041"/>
-            <a:ext cx="41148" cy="1060704"/>
+            <a:off x="777240" y="5129281"/>
+            <a:ext cx="41148" cy="1005840"/>
           </a:xfrm>
           <a:prstGeom prst="rect">
             <a:avLst/>
@@ -29260,8 +29704,8 @@
         </p:nvSpPr>
         <p:spPr>
           <a:xfrm>
-            <a:off x="1014983" y="4791913"/>
-            <a:ext cx="10180015" cy="841247"/>
+            <a:off x="1014983" y="5248153"/>
+            <a:ext cx="10180015" cy="786384"/>
           </a:xfrm>
           <a:prstGeom prst="rect">
             <a:avLst/>
@@ -29301,7 +29745,7 @@
                 </a:solidFill>
                 <a:latin typeface="Calibri"/>
               </a:rPr>
-              <a:t>Each fit warrant names macro_core@v1 and its own model version; each returns a parameter set that records which featureset version produced it. Nothing about the data was duplicated to serve two models, and nothing about either model had to know the other existed — </a:t>
+              <a:t>Each fit warrant names macro_core@v1 and its own model version; each returns a parameter set recording which featureset version produced it. Nothing about the data was duplicated to serve two models, and neither model had to know the other existed — </a:t>
             </a:r>
             <a:r>
               <a:rPr sz="1050" b="1" i="0">
@@ -29689,7 +30133,7 @@
         <p:spPr>
           <a:xfrm>
             <a:off x="777240" y="1353312"/>
-            <a:ext cx="5105863" cy="1432224"/>
+            <a:ext cx="4999491" cy="1432224"/>
           </a:xfrm>
           <a:prstGeom prst="rect">
             <a:avLst/>
@@ -29777,7 +30221,7 @@
         <p:spPr>
           <a:xfrm>
             <a:off x="978408" y="1453896"/>
-            <a:ext cx="4740103" cy="1249344"/>
+            <a:ext cx="4633731" cy="1249344"/>
           </a:xfrm>
           <a:prstGeom prst="rect">
             <a:avLst/>
@@ -29931,8 +30375,150 @@
         </p:nvSpPr>
         <p:spPr>
           <a:xfrm>
-            <a:off x="777240" y="2986704"/>
-            <a:ext cx="5105863" cy="1371600"/>
+            <a:off x="777240" y="2968416"/>
+            <a:ext cx="4999491" cy="1280160"/>
+          </a:xfrm>
+          <a:prstGeom prst="rect">
+            <a:avLst/>
+          </a:prstGeom>
+          <a:noFill/>
+        </p:spPr>
+        <p:txBody>
+          <a:bodyPr wrap="square" lIns="0" rIns="0" tIns="0" bIns="0" anchor="t">
+            <a:spAutoFit/>
+          </a:bodyPr>
+          <a:lstStyle/>
+          <a:p>
+            <a:pPr algn="l">
+              <a:lnSpc>
+                <a:spcPct val="122000"/>
+              </a:lnSpc>
+              <a:spcBef>
+                <a:spcPts val="0"/>
+              </a:spcBef>
+              <a:spcAft>
+                <a:spcPts val="0"/>
+              </a:spcAft>
+            </a:pPr>
+            <a:r>
+              <a:rPr sz="1000" b="1" i="0">
+                <a:solidFill>
+                  <a:srgbClr val="A51C30"/>
+                </a:solidFill>
+                <a:latin typeface="Calibri"/>
+              </a:rPr>
+              <a:t>Not a new version of macro_core. </a:t>
+            </a:r>
+            <a:r>
+              <a:rPr sz="1000" b="0" i="0">
+                <a:solidFill>
+                  <a:srgbClr val="4A4F57"/>
+                </a:solidFill>
+                <a:latin typeface="Calibri"/>
+              </a:rPr>
+              <a:t>Adding a slot changes the schema, and the schema is what a kernel is defined over — so it is a new featureset composed from the old, and macro_core@v1 is untouched for whoever is already using it.</a:t>
+            </a:r>
+          </a:p>
+        </p:txBody>
+      </p:sp>
+      <p:sp>
+        <p:nvSpPr>
+          <p:cNvPr id="14" name="Rectangle 13"/>
+          <p:cNvSpPr/>
+          <p:nvPr/>
+        </p:nvSpPr>
+        <p:spPr>
+          <a:xfrm>
+            <a:off x="777240" y="4303440"/>
+            <a:ext cx="4999491" cy="1170432"/>
+          </a:xfrm>
+          <a:prstGeom prst="rect">
+            <a:avLst/>
+          </a:prstGeom>
+          <a:solidFill>
+            <a:srgbClr val="F6F3EF"/>
+          </a:solidFill>
+          <a:ln>
+            <a:noFill/>
+          </a:ln>
+          <a:effectLst/>
+        </p:spPr>
+        <p:style>
+          <a:lnRef idx="1">
+            <a:schemeClr val="accent1"/>
+          </a:lnRef>
+          <a:fillRef idx="3">
+            <a:schemeClr val="accent1"/>
+          </a:fillRef>
+          <a:effectRef idx="2">
+            <a:schemeClr val="accent1"/>
+          </a:effectRef>
+          <a:fontRef idx="minor">
+            <a:schemeClr val="lt1"/>
+          </a:fontRef>
+        </p:style>
+        <p:txBody>
+          <a:bodyPr rtlCol="0" anchor="ctr" wrap="square" lIns="109728" rIns="109728" tIns="64008" bIns="64008"/>
+          <a:lstStyle/>
+          <a:p>
+            <a:pPr algn="ctr"/>
+          </a:p>
+        </p:txBody>
+      </p:sp>
+      <p:sp>
+        <p:nvSpPr>
+          <p:cNvPr id="15" name="Rectangle 14"/>
+          <p:cNvSpPr/>
+          <p:nvPr/>
+        </p:nvSpPr>
+        <p:spPr>
+          <a:xfrm>
+            <a:off x="777240" y="4303440"/>
+            <a:ext cx="41148" cy="1170432"/>
+          </a:xfrm>
+          <a:prstGeom prst="rect">
+            <a:avLst/>
+          </a:prstGeom>
+          <a:solidFill>
+            <a:srgbClr val="A51C30"/>
+          </a:solidFill>
+          <a:ln>
+            <a:noFill/>
+          </a:ln>
+          <a:effectLst/>
+        </p:spPr>
+        <p:style>
+          <a:lnRef idx="1">
+            <a:schemeClr val="accent1"/>
+          </a:lnRef>
+          <a:fillRef idx="3">
+            <a:schemeClr val="accent1"/>
+          </a:fillRef>
+          <a:effectRef idx="2">
+            <a:schemeClr val="accent1"/>
+          </a:effectRef>
+          <a:fontRef idx="minor">
+            <a:schemeClr val="lt1"/>
+          </a:fontRef>
+        </p:style>
+        <p:txBody>
+          <a:bodyPr rtlCol="0" anchor="ctr" wrap="square" lIns="109728" rIns="109728" tIns="64008" bIns="64008"/>
+          <a:lstStyle/>
+          <a:p>
+            <a:pPr algn="ctr"/>
+          </a:p>
+        </p:txBody>
+      </p:sp>
+      <p:sp>
+        <p:nvSpPr>
+          <p:cNvPr id="16" name="TextBox 15"/>
+          <p:cNvSpPr txBox="1"/>
+          <p:nvPr/>
+        </p:nvSpPr>
+        <p:spPr>
+          <a:xfrm>
+            <a:off x="1014983" y="4422312"/>
+            <a:ext cx="4542291" cy="950976"/>
           </a:xfrm>
           <a:prstGeom prst="rect">
             <a:avLst/>
@@ -29963,72 +30549,39 @@
                 </a:solidFill>
                 <a:latin typeface="Calibri"/>
               </a:rPr>
-              <a:t>Not a new version of macro_core. </a:t>
+              <a:t>The refusal is the feature. </a:t>
             </a:r>
             <a:r>
               <a:rPr sz="1050" b="0" i="0">
                 <a:solidFill>
-                  <a:srgbClr val="4A4F57"/>
+                  <a:srgbClr val="1C1C1E"/>
                 </a:solidFill>
                 <a:latin typeface="Calibri"/>
               </a:rPr>
-              <a:t>Adding a slot changes the schema, and the schema is what a kernel is defined over — so it is a new featureset composed from the old one, and macro_core@v1 is untouched for whoever is already using it.</a:t>
-            </a:r>
-          </a:p>
-        </p:txBody>
-      </p:sp>
-      <p:sp>
-        <p:nvSpPr>
-          <p:cNvPr id="14" name="TextBox 13"/>
-          <p:cNvSpPr txBox="1"/>
-          <p:nvPr/>
-        </p:nvSpPr>
-        <p:spPr>
-          <a:xfrm>
-            <a:off x="6308591" y="1353312"/>
-            <a:ext cx="5105863" cy="274320"/>
-          </a:xfrm>
-          <a:prstGeom prst="rect">
-            <a:avLst/>
-          </a:prstGeom>
-          <a:noFill/>
-        </p:spPr>
-        <p:txBody>
-          <a:bodyPr wrap="square" lIns="0" rIns="0" tIns="0" bIns="0" anchor="t">
-            <a:spAutoFit/>
-          </a:bodyPr>
-          <a:lstStyle/>
-          <a:p>
-            <a:pPr algn="l">
-              <a:spcBef>
-                <a:spcPts val="0"/>
-              </a:spcBef>
-              <a:spcAft>
-                <a:spcPts val="0"/>
-              </a:spcAft>
-            </a:pPr>
-            <a:r>
-              <a:rPr sz="1250" b="1" i="0">
-                <a:solidFill>
-                  <a:srgbClr val="A51C30"/>
-                </a:solidFill>
-                <a:latin typeface="Georgia"/>
-              </a:rPr>
-              <a:t>And the old model cannot simply read it</a:t>
-            </a:r>
-          </a:p>
-        </p:txBody>
-      </p:sp>
-      <p:sp>
-        <p:nvSpPr>
-          <p:cNvPr id="15" name="Rectangle 14"/>
+              <a:t>Widening a featureset under a model never defined over it is the failure all of this exists to make visible, and it lands at the warrant — </a:t>
+            </a:r>
+            <a:r>
+              <a:rPr sz="1050" b="1" i="0">
+                <a:solidFill>
+                  <a:srgbClr val="1C1C1E"/>
+                </a:solidFill>
+                <a:latin typeface="Calibri"/>
+              </a:rPr>
+              <a:t>before anything is fitted, rather than when somebody notices a coefficient vector has four entries.</a:t>
+            </a:r>
+          </a:p>
+        </p:txBody>
+      </p:sp>
+      <p:sp>
+        <p:nvSpPr>
+          <p:cNvPr id="17" name="Rectangle 16"/>
           <p:cNvSpPr/>
           <p:nvPr/>
         </p:nvSpPr>
         <p:spPr>
           <a:xfrm>
-            <a:off x="6308591" y="1700784"/>
-            <a:ext cx="5105863" cy="1732422"/>
+            <a:off x="6202219" y="1353312"/>
+            <a:ext cx="5212235" cy="2096947"/>
           </a:xfrm>
           <a:prstGeom prst="rect">
             <a:avLst/>
@@ -30065,14 +30618,14 @@
       </p:sp>
       <p:sp>
         <p:nvSpPr>
-          <p:cNvPr id="16" name="Rectangle 15"/>
+          <p:cNvPr id="18" name="Rectangle 17"/>
           <p:cNvSpPr/>
           <p:nvPr/>
         </p:nvSpPr>
         <p:spPr>
           <a:xfrm>
-            <a:off x="6308591" y="1700784"/>
-            <a:ext cx="41148" cy="1732422"/>
+            <a:off x="6202219" y="1353312"/>
+            <a:ext cx="41148" cy="2096947"/>
           </a:xfrm>
           <a:prstGeom prst="rect">
             <a:avLst/>
@@ -30109,14 +30662,14 @@
       </p:sp>
       <p:sp>
         <p:nvSpPr>
-          <p:cNvPr id="17" name="TextBox 16"/>
+          <p:cNvPr id="19" name="TextBox 18"/>
           <p:cNvSpPr txBox="1"/>
           <p:nvPr/>
         </p:nvSpPr>
         <p:spPr>
           <a:xfrm>
-            <a:off x="6509759" y="1801368"/>
-            <a:ext cx="4740103" cy="1549542"/>
+            <a:off x="6403387" y="1453896"/>
+            <a:ext cx="4846475" cy="1914067"/>
           </a:xfrm>
           <a:prstGeom prst="rect">
             <a:avLst/>
@@ -30279,7 +30832,7 @@
                 </a:solidFill>
                 <a:latin typeface="Consolas"/>
               </a:rPr>
-              <a:t>    Adding a regressor is a MODEL change, not a</a:t>
+              <a:t>    Bind a featureset whose schema covers the</a:t>
             </a:r>
           </a:p>
           <a:p>
@@ -30301,21 +30854,65 @@
                 </a:solidFill>
                 <a:latin typeface="Consolas"/>
               </a:rPr>
-              <a:t>    data change.</a:t>
-            </a:r>
-          </a:p>
-        </p:txBody>
-      </p:sp>
-      <p:sp>
-        <p:nvSpPr>
-          <p:cNvPr id="18" name="TextBox 17"/>
+              <a:t>    kernel's inputs, or create a model version</a:t>
+            </a:r>
+          </a:p>
+          <a:p>
+            <a:pPr>
+              <a:lnSpc>
+                <a:spcPct val="134000"/>
+              </a:lnSpc>
+              <a:spcBef>
+                <a:spcPts val="0"/>
+              </a:spcBef>
+              <a:spcAft>
+                <a:spcPts val="0"/>
+              </a:spcAft>
+            </a:pPr>
+            <a:r>
+              <a:rPr sz="850" b="0" i="0">
+                <a:solidFill>
+                  <a:srgbClr val="1C1C1E"/>
+                </a:solidFill>
+                <a:latin typeface="Consolas"/>
+              </a:rPr>
+              <a:t>    whose input schema matches this set — adding</a:t>
+            </a:r>
+          </a:p>
+          <a:p>
+            <a:pPr>
+              <a:lnSpc>
+                <a:spcPct val="134000"/>
+              </a:lnSpc>
+              <a:spcBef>
+                <a:spcPts val="0"/>
+              </a:spcBef>
+              <a:spcAft>
+                <a:spcPts val="0"/>
+              </a:spcAft>
+            </a:pPr>
+            <a:r>
+              <a:rPr sz="850" b="0" i="0">
+                <a:solidFill>
+                  <a:srgbClr val="1C1C1E"/>
+                </a:solidFill>
+                <a:latin typeface="Consolas"/>
+              </a:rPr>
+              <a:t>    a regressor is a MODEL change, not a data one.</a:t>
+            </a:r>
+          </a:p>
+        </p:txBody>
+      </p:sp>
+      <p:sp>
+        <p:nvSpPr>
+          <p:cNvPr id="20" name="TextBox 19"/>
           <p:cNvSpPr txBox="1"/>
           <p:nvPr/>
         </p:nvSpPr>
         <p:spPr>
           <a:xfrm>
-            <a:off x="6308591" y="3616086"/>
-            <a:ext cx="5105863" cy="914400"/>
+            <a:off x="6202219" y="3633139"/>
+            <a:ext cx="5212235" cy="384048"/>
           </a:xfrm>
           <a:prstGeom prst="rect">
             <a:avLst/>
@@ -30329,39 +30926,36 @@
           <a:lstStyle/>
           <a:p>
             <a:pPr algn="l">
-              <a:lnSpc>
-                <a:spcPct val="124000"/>
-              </a:lnSpc>
-              <a:spcBef>
-                <a:spcPts val="0"/>
-              </a:spcBef>
-              <a:spcAft>
-                <a:spcPts val="600"/>
-              </a:spcAft>
-            </a:pPr>
-            <a:r>
-              <a:rPr sz="1050" b="0" i="0">
+              <a:spcBef>
+                <a:spcPts val="0"/>
+              </a:spcBef>
+              <a:spcAft>
+                <a:spcPts val="0"/>
+              </a:spcAft>
+            </a:pPr>
+            <a:r>
+              <a:rPr sz="1050" b="1" i="0">
                 <a:solidFill>
                   <a:srgbClr val="1C1C1E"/>
                 </a:solidFill>
                 <a:latin typeface="Calibri"/>
               </a:rPr>
-              <a:t>So a third model is registered over the wider X — a gradient-boosted classifier for ‘drawdown next month’:</a:t>
+              <a:t>So a third model goes over the wider X:</a:t>
             </a:r>
           </a:p>
         </p:txBody>
       </p:sp>
       <p:graphicFrame>
         <p:nvGraphicFramePr>
-          <p:cNvPr id="19" name="Table 18"/>
+          <p:cNvPr id="21" name="Table 20"/>
           <p:cNvGraphicFramePr>
             <a:graphicFrameLocks noGrp="1"/>
           </p:cNvGraphicFramePr>
           <p:nvPr/>
         </p:nvGraphicFramePr>
         <p:xfrm>
-          <a:off x="6308591" y="4530486"/>
-          <a:ext cx="5105862" cy="1498470"/>
+          <a:off x="6202219" y="4053763"/>
+          <a:ext cx="5212234" cy="1798164"/>
         </p:xfrm>
         <a:graphic>
           <a:graphicData uri="http://schemas.openxmlformats.org/drawingml/2006/table">
@@ -30370,8 +30964,8 @@
                 <a:tableStyleId>{5C22544A-7EE6-4342-B048-85BDC9FD1C3A}</a:tableStyleId>
               </a:tblPr>
               <a:tblGrid>
-                <a:gridCol w="919975"/>
-                <a:gridCol w="4185887"/>
+                <a:gridCol w="868705"/>
+                <a:gridCol w="4343529"/>
               </a:tblGrid>
               <a:tr h="299694">
                 <a:tc>
@@ -30435,7 +31029,7 @@
                           </a:solidFill>
                           <a:latin typeface="Calibri"/>
                         </a:rPr>
-                        <a:t>kind</a:t>
+                        <a:t>what</a:t>
                       </a:r>
                     </a:p>
                   </a:txBody>
@@ -30458,7 +31052,7 @@
                           </a:solidFill>
                           <a:latin typeface="Calibri"/>
                         </a:rPr>
-                        <a:t>learned_weights  → T3, not T2</a:t>
+                        <a:t>gradient-boosted classifier: drawdown next month</a:t>
                       </a:r>
                     </a:p>
                   </a:txBody>
@@ -30483,7 +31077,7 @@
                           </a:solidFill>
                           <a:latin typeface="Calibri"/>
                         </a:rPr>
-                        <a:t>fit</a:t>
+                        <a:t>kind</a:t>
                       </a:r>
                     </a:p>
                   </a:txBody>
@@ -30506,7 +31100,7 @@
                           </a:solidFill>
                           <a:latin typeface="Calibri"/>
                         </a:rPr>
-                        <a:t>train, not estimate</a:t>
+                        <a:t>learned_weights  —  T3, not T2</a:t>
                       </a:r>
                     </a:p>
                   </a:txBody>
@@ -30531,7 +31125,7 @@
                           </a:solidFill>
                           <a:latin typeface="Calibri"/>
                         </a:rPr>
-                        <a:t>D(Y)</a:t>
+                        <a:t>fit</a:t>
                       </a:r>
                     </a:p>
                   </a:txBody>
@@ -30554,7 +31148,7 @@
                           </a:solidFill>
                           <a:latin typeface="Calibri"/>
                         </a:rPr>
-                        <a:t>class_probabilities</a:t>
+                        <a:t>train, not estimate</a:t>
                       </a:r>
                     </a:p>
                   </a:txBody>
@@ -30579,7 +31173,7 @@
                           </a:solidFill>
                           <a:latin typeface="Calibri"/>
                         </a:rPr>
-                        <a:t>reads</a:t>
+                        <a:t>D(Y)</a:t>
                       </a:r>
                     </a:p>
                   </a:txBody>
@@ -30602,7 +31196,7 @@
                           </a:solidFill>
                           <a:latin typeface="Calibri"/>
                         </a:rPr>
-                        <a:t>macro_plus@v1, all four slots</a:t>
+                        <a:t>class_probabilities, not a point estimate</a:t>
                       </a:r>
                     </a:p>
                   </a:txBody>
@@ -30613,161 +31207,58 @@
                   </a:tcPr>
                 </a:tc>
               </a:tr>
+              <a:tr h="299694">
+                <a:tc>
+                  <a:txBody>
+                    <a:bodyPr wrap="square"/>
+                    <a:lstStyle/>
+                    <a:p>
+                      <a:pPr algn="l"/>
+                      <a:r>
+                        <a:rPr sz="900" b="1">
+                          <a:solidFill>
+                            <a:srgbClr val="A51C30"/>
+                          </a:solidFill>
+                          <a:latin typeface="Calibri"/>
+                        </a:rPr>
+                        <a:t>reads</a:t>
+                      </a:r>
+                    </a:p>
+                  </a:txBody>
+                  <a:tcPr marL="82296" marR="64008" marT="32004" marB="32004" anchor="ctr">
+                    <a:solidFill>
+                      <a:srgbClr val="FFFFFF"/>
+                    </a:solidFill>
+                  </a:tcPr>
+                </a:tc>
+                <a:tc>
+                  <a:txBody>
+                    <a:bodyPr wrap="square"/>
+                    <a:lstStyle/>
+                    <a:p>
+                      <a:pPr algn="l"/>
+                      <a:r>
+                        <a:rPr sz="900" b="0">
+                          <a:solidFill>
+                            <a:srgbClr val="1C1C1E"/>
+                          </a:solidFill>
+                          <a:latin typeface="Calibri"/>
+                        </a:rPr>
+                        <a:t>macro_plus@v1, all four slots</a:t>
+                      </a:r>
+                    </a:p>
+                  </a:txBody>
+                  <a:tcPr marL="82296" marR="64008" marT="32004" marB="32004" anchor="ctr">
+                    <a:solidFill>
+                      <a:srgbClr val="FFFFFF"/>
+                    </a:solidFill>
+                  </a:tcPr>
+                </a:tc>
+              </a:tr>
             </a:tbl>
           </a:graphicData>
         </a:graphic>
       </p:graphicFrame>
-      <p:sp>
-        <p:nvSpPr>
-          <p:cNvPr id="20" name="Rectangle 19"/>
-          <p:cNvSpPr/>
-          <p:nvPr/>
-        </p:nvSpPr>
-        <p:spPr>
-          <a:xfrm>
-            <a:off x="777240" y="4486320"/>
-            <a:ext cx="5105863" cy="1207008"/>
-          </a:xfrm>
-          <a:prstGeom prst="rect">
-            <a:avLst/>
-          </a:prstGeom>
-          <a:solidFill>
-            <a:srgbClr val="F6F3EF"/>
-          </a:solidFill>
-          <a:ln>
-            <a:noFill/>
-          </a:ln>
-          <a:effectLst/>
-        </p:spPr>
-        <p:style>
-          <a:lnRef idx="1">
-            <a:schemeClr val="accent1"/>
-          </a:lnRef>
-          <a:fillRef idx="3">
-            <a:schemeClr val="accent1"/>
-          </a:fillRef>
-          <a:effectRef idx="2">
-            <a:schemeClr val="accent1"/>
-          </a:effectRef>
-          <a:fontRef idx="minor">
-            <a:schemeClr val="lt1"/>
-          </a:fontRef>
-        </p:style>
-        <p:txBody>
-          <a:bodyPr rtlCol="0" anchor="ctr" wrap="square" lIns="109728" rIns="109728" tIns="64008" bIns="64008"/>
-          <a:lstStyle/>
-          <a:p>
-            <a:pPr algn="ctr"/>
-          </a:p>
-        </p:txBody>
-      </p:sp>
-      <p:sp>
-        <p:nvSpPr>
-          <p:cNvPr id="21" name="Rectangle 20"/>
-          <p:cNvSpPr/>
-          <p:nvPr/>
-        </p:nvSpPr>
-        <p:spPr>
-          <a:xfrm>
-            <a:off x="777240" y="4486320"/>
-            <a:ext cx="41148" cy="1207008"/>
-          </a:xfrm>
-          <a:prstGeom prst="rect">
-            <a:avLst/>
-          </a:prstGeom>
-          <a:solidFill>
-            <a:srgbClr val="A51C30"/>
-          </a:solidFill>
-          <a:ln>
-            <a:noFill/>
-          </a:ln>
-          <a:effectLst/>
-        </p:spPr>
-        <p:style>
-          <a:lnRef idx="1">
-            <a:schemeClr val="accent1"/>
-          </a:lnRef>
-          <a:fillRef idx="3">
-            <a:schemeClr val="accent1"/>
-          </a:fillRef>
-          <a:effectRef idx="2">
-            <a:schemeClr val="accent1"/>
-          </a:effectRef>
-          <a:fontRef idx="minor">
-            <a:schemeClr val="lt1"/>
-          </a:fontRef>
-        </p:style>
-        <p:txBody>
-          <a:bodyPr rtlCol="0" anchor="ctr" wrap="square" lIns="109728" rIns="109728" tIns="64008" bIns="64008"/>
-          <a:lstStyle/>
-          <a:p>
-            <a:pPr algn="ctr"/>
-          </a:p>
-        </p:txBody>
-      </p:sp>
-      <p:sp>
-        <p:nvSpPr>
-          <p:cNvPr id="22" name="TextBox 21"/>
-          <p:cNvSpPr txBox="1"/>
-          <p:nvPr/>
-        </p:nvSpPr>
-        <p:spPr>
-          <a:xfrm>
-            <a:off x="1014983" y="4605192"/>
-            <a:ext cx="4648663" cy="987552"/>
-          </a:xfrm>
-          <a:prstGeom prst="rect">
-            <a:avLst/>
-          </a:prstGeom>
-          <a:noFill/>
-        </p:spPr>
-        <p:txBody>
-          <a:bodyPr wrap="square" lIns="0" rIns="0" tIns="0" bIns="0" anchor="t">
-            <a:spAutoFit/>
-          </a:bodyPr>
-          <a:lstStyle/>
-          <a:p>
-            <a:pPr algn="l">
-              <a:lnSpc>
-                <a:spcPct val="124000"/>
-              </a:lnSpc>
-              <a:spcBef>
-                <a:spcPts val="0"/>
-              </a:spcBef>
-              <a:spcAft>
-                <a:spcPts val="0"/>
-              </a:spcAft>
-            </a:pPr>
-            <a:r>
-              <a:rPr sz="1050" b="1" i="0">
-                <a:solidFill>
-                  <a:srgbClr val="A51C30"/>
-                </a:solidFill>
-                <a:latin typeface="Calibri"/>
-              </a:rPr>
-              <a:t>The refusal is the feature. </a:t>
-            </a:r>
-            <a:r>
-              <a:rPr sz="1050" b="0" i="0">
-                <a:solidFill>
-                  <a:srgbClr val="1C1C1E"/>
-                </a:solidFill>
-                <a:latin typeface="Calibri"/>
-              </a:rPr>
-              <a:t>Widening a featureset under a model that was never defined over it is the failure all of this exists to make visible — and it is caught at the warrant, </a:t>
-            </a:r>
-            <a:r>
-              <a:rPr sz="1050" b="1" i="0">
-                <a:solidFill>
-                  <a:srgbClr val="1C1C1E"/>
-                </a:solidFill>
-                <a:latin typeface="Calibri"/>
-              </a:rPr>
-              <a:t>before anything is fitted, rather than by somebody noticing later that a coefficient vector had four entries.</a:t>
-            </a:r>
-          </a:p>
-        </p:txBody>
-      </p:sp>
     </p:spTree>
   </p:cSld>
   <p:clrMapOvr>
@@ -30777,6 +31268,1069 @@
 </file>
 
 <file path=ppt/slides/slide32.xml><?xml version="1.0" encoding="utf-8"?>
+<p:sld xmlns:a="http://schemas.openxmlformats.org/drawingml/2006/main" xmlns:p="http://schemas.openxmlformats.org/presentationml/2006/main" xmlns:r="http://schemas.openxmlformats.org/officeDocument/2006/relationships">
+  <p:cSld>
+    <p:spTree>
+      <p:nvGrpSpPr>
+        <p:cNvPr id="1" name=""/>
+        <p:cNvGrpSpPr/>
+        <p:nvPr/>
+      </p:nvGrpSpPr>
+      <p:grpSpPr/>
+      <p:sp>
+        <p:nvSpPr>
+          <p:cNvPr id="2" name="Rectangle 1"/>
+          <p:cNvSpPr/>
+          <p:nvPr/>
+        </p:nvSpPr>
+        <p:spPr>
+          <a:xfrm>
+            <a:off x="0" y="0"/>
+            <a:ext cx="12191695" cy="6858000"/>
+          </a:xfrm>
+          <a:prstGeom prst="rect">
+            <a:avLst/>
+          </a:prstGeom>
+          <a:solidFill>
+            <a:srgbClr val="FFFFFF"/>
+          </a:solidFill>
+          <a:ln>
+            <a:noFill/>
+          </a:ln>
+          <a:effectLst/>
+        </p:spPr>
+        <p:style>
+          <a:lnRef idx="1">
+            <a:schemeClr val="accent1"/>
+          </a:lnRef>
+          <a:fillRef idx="3">
+            <a:schemeClr val="accent1"/>
+          </a:fillRef>
+          <a:effectRef idx="2">
+            <a:schemeClr val="accent1"/>
+          </a:effectRef>
+          <a:fontRef idx="minor">
+            <a:schemeClr val="lt1"/>
+          </a:fontRef>
+        </p:style>
+        <p:txBody>
+          <a:bodyPr rtlCol="0" anchor="ctr" wrap="square" lIns="109728" rIns="109728" tIns="64008" bIns="64008"/>
+          <a:lstStyle/>
+          <a:p>
+            <a:pPr algn="ctr"/>
+          </a:p>
+        </p:txBody>
+      </p:sp>
+      <p:sp>
+        <p:nvSpPr>
+          <p:cNvPr id="3" name="Rectangle 2"/>
+          <p:cNvSpPr/>
+          <p:nvPr/>
+        </p:nvSpPr>
+        <p:spPr>
+          <a:xfrm>
+            <a:off x="0" y="566928"/>
+            <a:ext cx="274320" cy="50292"/>
+          </a:xfrm>
+          <a:prstGeom prst="rect">
+            <a:avLst/>
+          </a:prstGeom>
+          <a:solidFill>
+            <a:srgbClr val="A51C30"/>
+          </a:solidFill>
+          <a:ln>
+            <a:noFill/>
+          </a:ln>
+          <a:effectLst/>
+        </p:spPr>
+        <p:style>
+          <a:lnRef idx="1">
+            <a:schemeClr val="accent1"/>
+          </a:lnRef>
+          <a:fillRef idx="3">
+            <a:schemeClr val="accent1"/>
+          </a:fillRef>
+          <a:effectRef idx="2">
+            <a:schemeClr val="accent1"/>
+          </a:effectRef>
+          <a:fontRef idx="minor">
+            <a:schemeClr val="lt1"/>
+          </a:fontRef>
+        </p:style>
+        <p:txBody>
+          <a:bodyPr rtlCol="0" anchor="ctr" wrap="square" lIns="109728" rIns="109728" tIns="64008" bIns="64008"/>
+          <a:lstStyle/>
+          <a:p>
+            <a:pPr algn="ctr"/>
+          </a:p>
+        </p:txBody>
+      </p:sp>
+      <p:sp>
+        <p:nvSpPr>
+          <p:cNvPr id="4" name="TextBox 3"/>
+          <p:cNvSpPr txBox="1"/>
+          <p:nvPr/>
+        </p:nvSpPr>
+        <p:spPr>
+          <a:xfrm>
+            <a:off x="777240" y="475488"/>
+            <a:ext cx="10637215" cy="219456"/>
+          </a:xfrm>
+          <a:prstGeom prst="rect">
+            <a:avLst/>
+          </a:prstGeom>
+          <a:noFill/>
+        </p:spPr>
+        <p:txBody>
+          <a:bodyPr wrap="square" lIns="0" rIns="0" tIns="0" bIns="0" anchor="t">
+            <a:spAutoFit/>
+          </a:bodyPr>
+          <a:lstStyle/>
+          <a:p>
+            <a:pPr algn="l">
+              <a:spcBef>
+                <a:spcPts val="0"/>
+              </a:spcBef>
+              <a:spcAft>
+                <a:spcPts val="0"/>
+              </a:spcAft>
+            </a:pPr>
+            <a:r>
+              <a:rPr sz="1050" b="1" i="0">
+                <a:solidFill>
+                  <a:srgbClr val="A51C30"/>
+                </a:solidFill>
+                <a:latin typeface="Calibri"/>
+              </a:rPr>
+              <a:t>A WORKED EXAMPLE</a:t>
+            </a:r>
+          </a:p>
+        </p:txBody>
+      </p:sp>
+      <p:sp>
+        <p:nvSpPr>
+          <p:cNvPr id="5" name="TextBox 4"/>
+          <p:cNvSpPr txBox="1"/>
+          <p:nvPr/>
+        </p:nvSpPr>
+        <p:spPr>
+          <a:xfrm>
+            <a:off x="777240" y="749808"/>
+            <a:ext cx="10637215" cy="484631"/>
+          </a:xfrm>
+          <a:prstGeom prst="rect">
+            <a:avLst/>
+          </a:prstGeom>
+          <a:noFill/>
+        </p:spPr>
+        <p:txBody>
+          <a:bodyPr wrap="square" lIns="0" rIns="0" tIns="0" bIns="0" anchor="t">
+            <a:spAutoFit/>
+          </a:bodyPr>
+          <a:lstStyle/>
+          <a:p>
+            <a:pPr algn="l">
+              <a:lnSpc>
+                <a:spcPct val="120000"/>
+              </a:lnSpc>
+              <a:spcBef>
+                <a:spcPts val="0"/>
+              </a:spcBef>
+              <a:spcAft>
+                <a:spcPts val="0"/>
+              </a:spcAft>
+            </a:pPr>
+            <a:r>
+              <a:rPr sz="2700" b="0" i="0">
+                <a:solidFill>
+                  <a:srgbClr val="1C1C1E"/>
+                </a:solidFill>
+                <a:latin typeface="Georgia"/>
+              </a:rPr>
+              <a:t>The data itself</a:t>
+            </a:r>
+          </a:p>
+        </p:txBody>
+      </p:sp>
+      <p:sp>
+        <p:nvSpPr>
+          <p:cNvPr id="6" name="Rectangle 5"/>
+          <p:cNvSpPr/>
+          <p:nvPr/>
+        </p:nvSpPr>
+        <p:spPr>
+          <a:xfrm>
+            <a:off x="777240" y="1207008"/>
+            <a:ext cx="10637215" cy="10972"/>
+          </a:xfrm>
+          <a:prstGeom prst="rect">
+            <a:avLst/>
+          </a:prstGeom>
+          <a:solidFill>
+            <a:srgbClr val="D8D4CF"/>
+          </a:solidFill>
+          <a:ln>
+            <a:noFill/>
+          </a:ln>
+          <a:effectLst/>
+        </p:spPr>
+        <p:style>
+          <a:lnRef idx="1">
+            <a:schemeClr val="accent1"/>
+          </a:lnRef>
+          <a:fillRef idx="3">
+            <a:schemeClr val="accent1"/>
+          </a:fillRef>
+          <a:effectRef idx="2">
+            <a:schemeClr val="accent1"/>
+          </a:effectRef>
+          <a:fontRef idx="minor">
+            <a:schemeClr val="lt1"/>
+          </a:fontRef>
+        </p:style>
+        <p:txBody>
+          <a:bodyPr rtlCol="0" anchor="ctr" wrap="square" lIns="109728" rIns="109728" tIns="64008" bIns="64008"/>
+          <a:lstStyle/>
+          <a:p>
+            <a:pPr algn="ctr"/>
+          </a:p>
+        </p:txBody>
+      </p:sp>
+      <p:sp>
+        <p:nvSpPr>
+          <p:cNvPr id="7" name="Rectangle 6"/>
+          <p:cNvSpPr/>
+          <p:nvPr/>
+        </p:nvSpPr>
+        <p:spPr>
+          <a:xfrm>
+            <a:off x="777240" y="6355080"/>
+            <a:ext cx="10637215" cy="7315"/>
+          </a:xfrm>
+          <a:prstGeom prst="rect">
+            <a:avLst/>
+          </a:prstGeom>
+          <a:solidFill>
+            <a:srgbClr val="D8D4CF"/>
+          </a:solidFill>
+          <a:ln>
+            <a:noFill/>
+          </a:ln>
+          <a:effectLst/>
+        </p:spPr>
+        <p:style>
+          <a:lnRef idx="1">
+            <a:schemeClr val="accent1"/>
+          </a:lnRef>
+          <a:fillRef idx="3">
+            <a:schemeClr val="accent1"/>
+          </a:fillRef>
+          <a:effectRef idx="2">
+            <a:schemeClr val="accent1"/>
+          </a:effectRef>
+          <a:fontRef idx="minor">
+            <a:schemeClr val="lt1"/>
+          </a:fontRef>
+        </p:style>
+        <p:txBody>
+          <a:bodyPr rtlCol="0" anchor="ctr" wrap="square" lIns="109728" rIns="109728" tIns="64008" bIns="64008"/>
+          <a:lstStyle/>
+          <a:p>
+            <a:pPr algn="ctr"/>
+          </a:p>
+        </p:txBody>
+      </p:sp>
+      <p:sp>
+        <p:nvSpPr>
+          <p:cNvPr id="8" name="TextBox 7"/>
+          <p:cNvSpPr txBox="1"/>
+          <p:nvPr/>
+        </p:nvSpPr>
+        <p:spPr>
+          <a:xfrm>
+            <a:off x="777240" y="6437376"/>
+            <a:ext cx="7446050" cy="219456"/>
+          </a:xfrm>
+          <a:prstGeom prst="rect">
+            <a:avLst/>
+          </a:prstGeom>
+          <a:noFill/>
+        </p:spPr>
+        <p:txBody>
+          <a:bodyPr wrap="square" lIns="0" rIns="0" tIns="0" bIns="0" anchor="t">
+            <a:spAutoFit/>
+          </a:bodyPr>
+          <a:lstStyle/>
+          <a:p>
+            <a:pPr algn="l">
+              <a:spcBef>
+                <a:spcPts val="0"/>
+              </a:spcBef>
+              <a:spcAft>
+                <a:spcPts val="0"/>
+              </a:spcAft>
+            </a:pPr>
+            <a:r>
+              <a:rPr sz="850" b="0" i="0">
+                <a:solidFill>
+                  <a:srgbClr val="7A7F87"/>
+                </a:solidFill>
+                <a:latin typeface="Calibri"/>
+              </a:rPr>
+              <a:t>6 · A Worked Example</a:t>
+            </a:r>
+          </a:p>
+        </p:txBody>
+      </p:sp>
+      <p:sp>
+        <p:nvSpPr>
+          <p:cNvPr id="9" name="TextBox 8"/>
+          <p:cNvSpPr txBox="1"/>
+          <p:nvPr/>
+        </p:nvSpPr>
+        <p:spPr>
+          <a:xfrm>
+            <a:off x="8223290" y="6437376"/>
+            <a:ext cx="3191164" cy="219456"/>
+          </a:xfrm>
+          <a:prstGeom prst="rect">
+            <a:avLst/>
+          </a:prstGeom>
+          <a:noFill/>
+        </p:spPr>
+        <p:txBody>
+          <a:bodyPr wrap="square" lIns="0" rIns="0" tIns="0" bIns="0" anchor="t">
+            <a:spAutoFit/>
+          </a:bodyPr>
+          <a:lstStyle/>
+          <a:p>
+            <a:pPr algn="r">
+              <a:spcBef>
+                <a:spcPts val="0"/>
+              </a:spcBef>
+              <a:spcAft>
+                <a:spcPts val="0"/>
+              </a:spcAft>
+            </a:pPr>
+            <a:r>
+              <a:rPr sz="850" b="1" i="0">
+                <a:solidFill>
+                  <a:srgbClr val="7A7F87"/>
+                </a:solidFill>
+                <a:latin typeface="Calibri"/>
+              </a:rPr>
+              <a:t>31</a:t>
+            </a:r>
+          </a:p>
+        </p:txBody>
+      </p:sp>
+      <p:sp>
+        <p:nvSpPr>
+          <p:cNvPr id="10" name="TextBox 9"/>
+          <p:cNvSpPr txBox="1"/>
+          <p:nvPr/>
+        </p:nvSpPr>
+        <p:spPr>
+          <a:xfrm>
+            <a:off x="777240" y="1353312"/>
+            <a:ext cx="5531351" cy="2377440"/>
+          </a:xfrm>
+          <a:prstGeom prst="rect">
+            <a:avLst/>
+          </a:prstGeom>
+          <a:noFill/>
+        </p:spPr>
+        <p:txBody>
+          <a:bodyPr wrap="square" lIns="0" rIns="0" tIns="0" bIns="0" anchor="t">
+            <a:spAutoFit/>
+          </a:bodyPr>
+          <a:lstStyle/>
+          <a:p>
+            <a:pPr algn="l">
+              <a:spcBef>
+                <a:spcPts val="0"/>
+              </a:spcBef>
+              <a:spcAft>
+                <a:spcPts val="900"/>
+              </a:spcAft>
+            </a:pPr>
+            <a:r>
+              <a:rPr sz="1300" b="1" i="0">
+                <a:solidFill>
+                  <a:srgbClr val="A51C30"/>
+                </a:solidFill>
+                <a:latin typeface="Georgia"/>
+              </a:rPr>
+              <a:t>Both files are inside this deck.</a:t>
+            </a:r>
+          </a:p>
+          <a:p>
+            <a:pPr>
+              <a:lnSpc>
+                <a:spcPct val="125000"/>
+              </a:lnSpc>
+              <a:spcBef>
+                <a:spcPts val="0"/>
+              </a:spcBef>
+              <a:spcAft>
+                <a:spcPts val="1000"/>
+              </a:spcAft>
+            </a:pPr>
+            <a:r>
+              <a:rPr sz="1100" b="0" i="0">
+                <a:solidFill>
+                  <a:srgbClr val="1C1C1E"/>
+                </a:solidFill>
+                <a:latin typeface="Calibri"/>
+              </a:rPr>
+              <a:t>Double-click either icon to open it. They are the files every number in this chapter was computed from, carrying their own provenance in the header — which series, from where, retrieved when, and which column means what.</a:t>
+            </a:r>
+          </a:p>
+          <a:p>
+            <a:pPr>
+              <a:lnSpc>
+                <a:spcPct val="125000"/>
+              </a:lnSpc>
+              <a:spcBef>
+                <a:spcPts val="0"/>
+              </a:spcBef>
+              <a:spcAft>
+                <a:spcPts val="1000"/>
+              </a:spcAft>
+            </a:pPr>
+            <a:r>
+              <a:rPr sz="1100" b="1" i="0">
+                <a:solidFill>
+                  <a:srgbClr val="A51C30"/>
+                </a:solidFill>
+                <a:latin typeface="Calibri"/>
+              </a:rPr>
+              <a:t>Including what is not certain. </a:t>
+            </a:r>
+            <a:r>
+              <a:rPr sz="1100" b="0" i="0">
+                <a:solidFill>
+                  <a:srgbClr val="4A4F57"/>
+                </a:solidFill>
+                <a:latin typeface="Calibri"/>
+              </a:rPr>
+              <a:t>The unemployment file says plainly that its ingest_ts is the BLS release CONVENTION computed from the calendar, not a fetched vintage date. The lag is real and material; the exact day may be a day or two out, and a file that did not say so would be inviting somebody to rely on it.</a:t>
+            </a:r>
+          </a:p>
+          <a:p>
+            <a:pPr>
+              <a:lnSpc>
+                <a:spcPct val="125000"/>
+              </a:lnSpc>
+              <a:spcBef>
+                <a:spcPts val="0"/>
+              </a:spcBef>
+              <a:spcAft>
+                <a:spcPts val="0"/>
+              </a:spcAft>
+            </a:pPr>
+            <a:r>
+              <a:rPr sz="1100" b="1" i="0">
+                <a:solidFill>
+                  <a:srgbClr val="1C1C1E"/>
+                </a:solidFill>
+                <a:latin typeface="Calibri"/>
+              </a:rPr>
+              <a:t>A deck that quotes figures nobody can check is a deck that has to be believed. These can be checked.</a:t>
+            </a:r>
+          </a:p>
+        </p:txBody>
+      </p:sp>
+      <p:sp>
+        <p:nvSpPr>
+          <p:cNvPr id="11" name="Rectangle 10"/>
+          <p:cNvSpPr/>
+          <p:nvPr/>
+        </p:nvSpPr>
+        <p:spPr>
+          <a:xfrm>
+            <a:off x="6734080" y="1408176"/>
+            <a:ext cx="4680374" cy="1225296"/>
+          </a:xfrm>
+          <a:prstGeom prst="rect">
+            <a:avLst/>
+          </a:prstGeom>
+          <a:solidFill>
+            <a:srgbClr val="F6F3EF"/>
+          </a:solidFill>
+          <a:ln w="12700">
+            <a:solidFill>
+              <a:srgbClr val="D8D4CF"/>
+            </a:solidFill>
+          </a:ln>
+          <a:effectLst/>
+        </p:spPr>
+        <p:style>
+          <a:lnRef idx="1">
+            <a:schemeClr val="accent1"/>
+          </a:lnRef>
+          <a:fillRef idx="3">
+            <a:schemeClr val="accent1"/>
+          </a:fillRef>
+          <a:effectRef idx="2">
+            <a:schemeClr val="accent1"/>
+          </a:effectRef>
+          <a:fontRef idx="minor">
+            <a:schemeClr val="lt1"/>
+          </a:fontRef>
+        </p:style>
+        <p:txBody>
+          <a:bodyPr rtlCol="0" anchor="ctr" wrap="square" lIns="109728" rIns="109728" tIns="64008" bIns="64008"/>
+          <a:lstStyle/>
+          <a:p>
+            <a:pPr algn="ctr"/>
+          </a:p>
+        </p:txBody>
+      </p:sp>
+      <p:sp>
+        <p:nvSpPr>
+          <p:cNvPr id="12" name="Rectangle 11"/>
+          <p:cNvSpPr/>
+          <p:nvPr/>
+        </p:nvSpPr>
+        <p:spPr>
+          <a:xfrm>
+            <a:off x="6734080" y="1408176"/>
+            <a:ext cx="4680374" cy="45720"/>
+          </a:xfrm>
+          <a:prstGeom prst="rect">
+            <a:avLst/>
+          </a:prstGeom>
+          <a:solidFill>
+            <a:srgbClr val="A51C30"/>
+          </a:solidFill>
+          <a:ln>
+            <a:noFill/>
+          </a:ln>
+          <a:effectLst/>
+        </p:spPr>
+        <p:style>
+          <a:lnRef idx="1">
+            <a:schemeClr val="accent1"/>
+          </a:lnRef>
+          <a:fillRef idx="3">
+            <a:schemeClr val="accent1"/>
+          </a:fillRef>
+          <a:effectRef idx="2">
+            <a:schemeClr val="accent1"/>
+          </a:effectRef>
+          <a:fontRef idx="minor">
+            <a:schemeClr val="lt1"/>
+          </a:fontRef>
+        </p:style>
+        <p:txBody>
+          <a:bodyPr rtlCol="0" anchor="ctr" wrap="square" lIns="109728" rIns="109728" tIns="64008" bIns="64008"/>
+          <a:lstStyle/>
+          <a:p>
+            <a:pPr algn="ctr"/>
+          </a:p>
+        </p:txBody>
+      </p:sp>
+      <p:graphicFrame>
+        <p:nvGraphicFramePr>
+          <p:cNvPr id="13" name="Object 12"/>
+          <p:cNvGraphicFramePr>
+            <a:graphicFrameLocks noGrp="1"/>
+          </p:cNvGraphicFramePr>
+          <p:nvPr/>
+        </p:nvGraphicFramePr>
+        <p:xfrm>
+          <a:off x="6935248" y="1682496"/>
+          <a:ext cx="475488" cy="475488"/>
+        </p:xfrm>
+        <a:graphic>
+          <a:graphicData uri="http://schemas.openxmlformats.org/presentationml/2006/ole">
+            <p:oleObj showAsIcon="1" r:id="rId2" imgW="475488" imgH="475488" progId="Package">
+              <p:embed/>
+              <p:pic>
+                <p:nvPicPr>
+                  <p:cNvPr id="0" name=""/>
+                  <p:cNvPicPr/>
+                  <p:nvPr/>
+                </p:nvPicPr>
+                <p:blipFill>
+                  <a:blip r:embed="rId3"/>
+                  <a:stretch>
+                    <a:fillRect/>
+                  </a:stretch>
+                </p:blipFill>
+                <p:spPr>
+                  <a:xfrm>
+                    <a:off x="6935248" y="1682496"/>
+                    <a:ext cx="475488" cy="475488"/>
+                  </a:xfrm>
+                  <a:prstGeom prst="rect">
+                    <a:avLst/>
+                  </a:prstGeom>
+                </p:spPr>
+              </p:pic>
+            </p:oleObj>
+          </a:graphicData>
+        </a:graphic>
+      </p:graphicFrame>
+      <p:sp>
+        <p:nvSpPr>
+          <p:cNvPr id="14" name="TextBox 13"/>
+          <p:cNvSpPr txBox="1"/>
+          <p:nvPr/>
+        </p:nvSpPr>
+        <p:spPr>
+          <a:xfrm>
+            <a:off x="7575328" y="1627632"/>
+            <a:ext cx="3637958" cy="822960"/>
+          </a:xfrm>
+          <a:prstGeom prst="rect">
+            <a:avLst/>
+          </a:prstGeom>
+          <a:noFill/>
+        </p:spPr>
+        <p:txBody>
+          <a:bodyPr wrap="square" lIns="0" rIns="0" tIns="0" bIns="0" anchor="t">
+            <a:spAutoFit/>
+          </a:bodyPr>
+          <a:lstStyle/>
+          <a:p>
+            <a:pPr algn="l">
+              <a:spcBef>
+                <a:spcPts val="0"/>
+              </a:spcBef>
+              <a:spcAft>
+                <a:spcPts val="300"/>
+              </a:spcAft>
+            </a:pPr>
+            <a:r>
+              <a:rPr sz="1150" b="1" i="0">
+                <a:solidFill>
+                  <a:srgbClr val="1C1C1E"/>
+                </a:solidFill>
+                <a:latin typeface="Georgia"/>
+              </a:rPr>
+              <a:t>S&amp;P 500, daily close</a:t>
+            </a:r>
+          </a:p>
+          <a:p>
+            <a:pPr>
+              <a:lnSpc>
+                <a:spcPct val="118000"/>
+              </a:lnSpc>
+              <a:spcBef>
+                <a:spcPts val="0"/>
+              </a:spcBef>
+              <a:spcAft>
+                <a:spcPts val="300"/>
+              </a:spcAft>
+            </a:pPr>
+            <a:r>
+              <a:rPr sz="900" b="0" i="0">
+                <a:solidFill>
+                  <a:srgbClr val="4A4F57"/>
+                </a:solidFill>
+                <a:latin typeface="Calibri"/>
+              </a:rPr>
+              <a:t>FRED series SP500  ·  258 rows  ·  Sep 2025 – Sep 2026</a:t>
+            </a:r>
+          </a:p>
+          <a:p>
+            <a:pPr>
+              <a:spcBef>
+                <a:spcPts val="0"/>
+              </a:spcBef>
+              <a:spcAft>
+                <a:spcPts val="0"/>
+              </a:spcAft>
+            </a:pPr>
+            <a:r>
+              <a:rPr sz="850" b="0" i="0">
+                <a:solidFill>
+                  <a:srgbClr val="A51C30"/>
+                </a:solidFill>
+                <a:latin typeface="Calibri"/>
+              </a:rPr>
+              <a:t>sp500_daily.csv</a:t>
+            </a:r>
+          </a:p>
+        </p:txBody>
+      </p:sp>
+      <p:sp>
+        <p:nvSpPr>
+          <p:cNvPr id="15" name="Rectangle 14"/>
+          <p:cNvSpPr/>
+          <p:nvPr/>
+        </p:nvSpPr>
+        <p:spPr>
+          <a:xfrm>
+            <a:off x="6734080" y="2798064"/>
+            <a:ext cx="4680374" cy="1225296"/>
+          </a:xfrm>
+          <a:prstGeom prst="rect">
+            <a:avLst/>
+          </a:prstGeom>
+          <a:solidFill>
+            <a:srgbClr val="F6F3EF"/>
+          </a:solidFill>
+          <a:ln w="12700">
+            <a:solidFill>
+              <a:srgbClr val="D8D4CF"/>
+            </a:solidFill>
+          </a:ln>
+          <a:effectLst/>
+        </p:spPr>
+        <p:style>
+          <a:lnRef idx="1">
+            <a:schemeClr val="accent1"/>
+          </a:lnRef>
+          <a:fillRef idx="3">
+            <a:schemeClr val="accent1"/>
+          </a:fillRef>
+          <a:effectRef idx="2">
+            <a:schemeClr val="accent1"/>
+          </a:effectRef>
+          <a:fontRef idx="minor">
+            <a:schemeClr val="lt1"/>
+          </a:fontRef>
+        </p:style>
+        <p:txBody>
+          <a:bodyPr rtlCol="0" anchor="ctr" wrap="square" lIns="109728" rIns="109728" tIns="64008" bIns="64008"/>
+          <a:lstStyle/>
+          <a:p>
+            <a:pPr algn="ctr"/>
+          </a:p>
+        </p:txBody>
+      </p:sp>
+      <p:sp>
+        <p:nvSpPr>
+          <p:cNvPr id="16" name="Rectangle 15"/>
+          <p:cNvSpPr/>
+          <p:nvPr/>
+        </p:nvSpPr>
+        <p:spPr>
+          <a:xfrm>
+            <a:off x="6734080" y="2798064"/>
+            <a:ext cx="4680374" cy="45720"/>
+          </a:xfrm>
+          <a:prstGeom prst="rect">
+            <a:avLst/>
+          </a:prstGeom>
+          <a:solidFill>
+            <a:srgbClr val="A51C30"/>
+          </a:solidFill>
+          <a:ln>
+            <a:noFill/>
+          </a:ln>
+          <a:effectLst/>
+        </p:spPr>
+        <p:style>
+          <a:lnRef idx="1">
+            <a:schemeClr val="accent1"/>
+          </a:lnRef>
+          <a:fillRef idx="3">
+            <a:schemeClr val="accent1"/>
+          </a:fillRef>
+          <a:effectRef idx="2">
+            <a:schemeClr val="accent1"/>
+          </a:effectRef>
+          <a:fontRef idx="minor">
+            <a:schemeClr val="lt1"/>
+          </a:fontRef>
+        </p:style>
+        <p:txBody>
+          <a:bodyPr rtlCol="0" anchor="ctr" wrap="square" lIns="109728" rIns="109728" tIns="64008" bIns="64008"/>
+          <a:lstStyle/>
+          <a:p>
+            <a:pPr algn="ctr"/>
+          </a:p>
+        </p:txBody>
+      </p:sp>
+      <p:graphicFrame>
+        <p:nvGraphicFramePr>
+          <p:cNvPr id="17" name="Object 16"/>
+          <p:cNvGraphicFramePr>
+            <a:graphicFrameLocks noGrp="1"/>
+          </p:cNvGraphicFramePr>
+          <p:nvPr/>
+        </p:nvGraphicFramePr>
+        <p:xfrm>
+          <a:off x="6935248" y="3072384"/>
+          <a:ext cx="475488" cy="475488"/>
+        </p:xfrm>
+        <a:graphic>
+          <a:graphicData uri="http://schemas.openxmlformats.org/presentationml/2006/ole">
+            <p:oleObj showAsIcon="1" r:id="rId4" imgW="475488" imgH="475488" progId="Package">
+              <p:embed/>
+              <p:pic>
+                <p:nvPicPr>
+                  <p:cNvPr id="0" name=""/>
+                  <p:cNvPicPr/>
+                  <p:nvPr/>
+                </p:nvPicPr>
+                <p:blipFill>
+                  <a:blip r:embed="rId3"/>
+                  <a:stretch>
+                    <a:fillRect/>
+                  </a:stretch>
+                </p:blipFill>
+                <p:spPr>
+                  <a:xfrm>
+                    <a:off x="6935248" y="3072384"/>
+                    <a:ext cx="475488" cy="475488"/>
+                  </a:xfrm>
+                  <a:prstGeom prst="rect">
+                    <a:avLst/>
+                  </a:prstGeom>
+                </p:spPr>
+              </p:pic>
+            </p:oleObj>
+          </a:graphicData>
+        </a:graphic>
+      </p:graphicFrame>
+      <p:sp>
+        <p:nvSpPr>
+          <p:cNvPr id="18" name="TextBox 17"/>
+          <p:cNvSpPr txBox="1"/>
+          <p:nvPr/>
+        </p:nvSpPr>
+        <p:spPr>
+          <a:xfrm>
+            <a:off x="7575328" y="3017520"/>
+            <a:ext cx="3637958" cy="822960"/>
+          </a:xfrm>
+          <a:prstGeom prst="rect">
+            <a:avLst/>
+          </a:prstGeom>
+          <a:noFill/>
+        </p:spPr>
+        <p:txBody>
+          <a:bodyPr wrap="square" lIns="0" rIns="0" tIns="0" bIns="0" anchor="t">
+            <a:spAutoFit/>
+          </a:bodyPr>
+          <a:lstStyle/>
+          <a:p>
+            <a:pPr algn="l">
+              <a:spcBef>
+                <a:spcPts val="0"/>
+              </a:spcBef>
+              <a:spcAft>
+                <a:spcPts val="300"/>
+              </a:spcAft>
+            </a:pPr>
+            <a:r>
+              <a:rPr sz="1150" b="1" i="0">
+                <a:solidFill>
+                  <a:srgbClr val="1C1C1E"/>
+                </a:solidFill>
+                <a:latin typeface="Georgia"/>
+              </a:rPr>
+              <a:t>US unemployment rate (U-3)</a:t>
+            </a:r>
+          </a:p>
+          <a:p>
+            <a:pPr>
+              <a:lnSpc>
+                <a:spcPct val="118000"/>
+              </a:lnSpc>
+              <a:spcBef>
+                <a:spcPts val="0"/>
+              </a:spcBef>
+              <a:spcAft>
+                <a:spcPts val="300"/>
+              </a:spcAft>
+            </a:pPr>
+            <a:r>
+              <a:rPr sz="900" b="0" i="0">
+                <a:solidFill>
+                  <a:srgbClr val="4A4F57"/>
+                </a:solidFill>
+                <a:latin typeface="Calibri"/>
+              </a:rPr>
+              <a:t>FRED series UNRATE  ·  12 months  ·  one of them empty</a:t>
+            </a:r>
+          </a:p>
+          <a:p>
+            <a:pPr>
+              <a:spcBef>
+                <a:spcPts val="0"/>
+              </a:spcBef>
+              <a:spcAft>
+                <a:spcPts val="0"/>
+              </a:spcAft>
+            </a:pPr>
+            <a:r>
+              <a:rPr sz="850" b="0" i="0">
+                <a:solidFill>
+                  <a:srgbClr val="A51C30"/>
+                </a:solidFill>
+                <a:latin typeface="Calibri"/>
+              </a:rPr>
+              <a:t>us_unemployment_monthly.csv</a:t>
+            </a:r>
+          </a:p>
+        </p:txBody>
+      </p:sp>
+      <p:sp>
+        <p:nvSpPr>
+          <p:cNvPr id="19" name="Rectangle 18"/>
+          <p:cNvSpPr/>
+          <p:nvPr/>
+        </p:nvSpPr>
+        <p:spPr>
+          <a:xfrm>
+            <a:off x="777240" y="4297680"/>
+            <a:ext cx="10637215" cy="786384"/>
+          </a:xfrm>
+          <a:prstGeom prst="rect">
+            <a:avLst/>
+          </a:prstGeom>
+          <a:solidFill>
+            <a:srgbClr val="F6F3EF"/>
+          </a:solidFill>
+          <a:ln>
+            <a:noFill/>
+          </a:ln>
+          <a:effectLst/>
+        </p:spPr>
+        <p:style>
+          <a:lnRef idx="1">
+            <a:schemeClr val="accent1"/>
+          </a:lnRef>
+          <a:fillRef idx="3">
+            <a:schemeClr val="accent1"/>
+          </a:fillRef>
+          <a:effectRef idx="2">
+            <a:schemeClr val="accent1"/>
+          </a:effectRef>
+          <a:fontRef idx="minor">
+            <a:schemeClr val="lt1"/>
+          </a:fontRef>
+        </p:style>
+        <p:txBody>
+          <a:bodyPr rtlCol="0" anchor="ctr" wrap="square" lIns="109728" rIns="109728" tIns="64008" bIns="64008"/>
+          <a:lstStyle/>
+          <a:p>
+            <a:pPr algn="ctr"/>
+          </a:p>
+        </p:txBody>
+      </p:sp>
+      <p:sp>
+        <p:nvSpPr>
+          <p:cNvPr id="20" name="Rectangle 19"/>
+          <p:cNvSpPr/>
+          <p:nvPr/>
+        </p:nvSpPr>
+        <p:spPr>
+          <a:xfrm>
+            <a:off x="777240" y="4297680"/>
+            <a:ext cx="41148" cy="786384"/>
+          </a:xfrm>
+          <a:prstGeom prst="rect">
+            <a:avLst/>
+          </a:prstGeom>
+          <a:solidFill>
+            <a:srgbClr val="A51C30"/>
+          </a:solidFill>
+          <a:ln>
+            <a:noFill/>
+          </a:ln>
+          <a:effectLst/>
+        </p:spPr>
+        <p:style>
+          <a:lnRef idx="1">
+            <a:schemeClr val="accent1"/>
+          </a:lnRef>
+          <a:fillRef idx="3">
+            <a:schemeClr val="accent1"/>
+          </a:fillRef>
+          <a:effectRef idx="2">
+            <a:schemeClr val="accent1"/>
+          </a:effectRef>
+          <a:fontRef idx="minor">
+            <a:schemeClr val="lt1"/>
+          </a:fontRef>
+        </p:style>
+        <p:txBody>
+          <a:bodyPr rtlCol="0" anchor="ctr" wrap="square" lIns="109728" rIns="109728" tIns="64008" bIns="64008"/>
+          <a:lstStyle/>
+          <a:p>
+            <a:pPr algn="ctr"/>
+          </a:p>
+        </p:txBody>
+      </p:sp>
+      <p:sp>
+        <p:nvSpPr>
+          <p:cNvPr id="21" name="TextBox 20"/>
+          <p:cNvSpPr txBox="1"/>
+          <p:nvPr/>
+        </p:nvSpPr>
+        <p:spPr>
+          <a:xfrm>
+            <a:off x="1014983" y="4416552"/>
+            <a:ext cx="10180015" cy="566928"/>
+          </a:xfrm>
+          <a:prstGeom prst="rect">
+            <a:avLst/>
+          </a:prstGeom>
+          <a:noFill/>
+        </p:spPr>
+        <p:txBody>
+          <a:bodyPr wrap="square" lIns="0" rIns="0" tIns="0" bIns="0" anchor="t">
+            <a:spAutoFit/>
+          </a:bodyPr>
+          <a:lstStyle/>
+          <a:p>
+            <a:pPr algn="l">
+              <a:lnSpc>
+                <a:spcPct val="124000"/>
+              </a:lnSpc>
+              <a:spcBef>
+                <a:spcPts val="0"/>
+              </a:spcBef>
+              <a:spcAft>
+                <a:spcPts val="0"/>
+              </a:spcAft>
+            </a:pPr>
+            <a:r>
+              <a:rPr sz="1050" b="1" i="0">
+                <a:solidFill>
+                  <a:srgbClr val="A51C30"/>
+                </a:solidFill>
+                <a:latin typeface="Calibri"/>
+              </a:rPr>
+              <a:t>They also ship in the repository, at docs/data/. </a:t>
+            </a:r>
+            <a:r>
+              <a:rPr sz="1050" b="0" i="0">
+                <a:solidFill>
+                  <a:srgbClr val="1C1C1E"/>
+                </a:solidFill>
+                <a:latin typeface="Calibri"/>
+              </a:rPr>
+              <a:t>The deck is regenerated from source rather than edited as a binary, so the figures and the files cannot drift apart — </a:t>
+            </a:r>
+            <a:r>
+              <a:rPr sz="1050" b="1" i="0">
+                <a:solidFill>
+                  <a:srgbClr val="1C1C1E"/>
+                </a:solidFill>
+                <a:latin typeface="Calibri"/>
+              </a:rPr>
+              <a:t>the generator reads these same two CSVs.</a:t>
+            </a:r>
+          </a:p>
+        </p:txBody>
+      </p:sp>
+    </p:spTree>
+  </p:cSld>
+  <p:clrMapOvr>
+    <a:masterClrMapping/>
+  </p:clrMapOvr>
+</p:sld>
+</file>
+
+<file path=ppt/slides/slide33.xml><?xml version="1.0" encoding="utf-8"?>
 <p:sld xmlns:a="http://schemas.openxmlformats.org/drawingml/2006/main" xmlns:p="http://schemas.openxmlformats.org/presentationml/2006/main" xmlns:r="http://schemas.openxmlformats.org/officeDocument/2006/relationships">
   <p:cSld>
     <p:spTree>

--- a/docs/MAYA-Model-and-Feature-Engineering.pptx
+++ b/docs/MAYA-Model-and-Feature-Engineering.pptx
@@ -31683,7 +31683,7 @@
                 </a:solidFill>
                 <a:latin typeface="Calibri"/>
               </a:rPr>
-              <a:t>Double-click either icon to open it. They are the files every number in this chapter was computed from, carrying their own provenance in the header — which series, from where, retrieved when, and which column means what.</a:t>
+              <a:t>Double-click either icon and it opens in Excel. They are the data every number in this chapter was computed from, carrying their own provenance in the header — which series, from where, retrieved when, and which column means what.</a:t>
             </a:r>
           </a:p>
           <a:p>
@@ -31840,12 +31840,12 @@
           <p:nvPr/>
         </p:nvGraphicFramePr>
         <p:xfrm>
-          <a:off x="6935248" y="1682496"/>
-          <a:ext cx="475488" cy="475488"/>
+          <a:off x="6916960" y="1645920"/>
+          <a:ext cx="566928" cy="566928"/>
         </p:xfrm>
         <a:graphic>
           <a:graphicData uri="http://schemas.openxmlformats.org/presentationml/2006/ole">
-            <p:oleObj showAsIcon="1" r:id="rId2" imgW="475488" imgH="475488" progId="Package">
+            <p:oleObj showAsIcon="1" r:id="rId2" imgW="965200" imgH="609600" progId="Excel.Sheet.12">
               <p:embed/>
               <p:pic>
                 <p:nvPicPr>
@@ -31861,8 +31861,8 @@
                 </p:blipFill>
                 <p:spPr>
                   <a:xfrm>
-                    <a:off x="6935248" y="1682496"/>
-                    <a:ext cx="475488" cy="475488"/>
+                    <a:off x="6916960" y="1645920"/>
+                    <a:ext cx="566928" cy="566928"/>
                   </a:xfrm>
                   <a:prstGeom prst="rect">
                     <a:avLst/>
@@ -31881,8 +31881,8 @@
         </p:nvSpPr>
         <p:spPr>
           <a:xfrm>
-            <a:off x="7575328" y="1627632"/>
-            <a:ext cx="3637958" cy="822960"/>
+            <a:off x="7611904" y="1609344"/>
+            <a:ext cx="3601382" cy="859536"/>
           </a:xfrm>
           <a:prstGeom prst="rect">
             <a:avLst/>
@@ -31951,7 +31951,7 @@
                 </a:solidFill>
                 <a:latin typeface="Calibri"/>
               </a:rPr>
-              <a:t>sp500_daily.csv</a:t>
+              <a:t>sp500_daily.xlsx</a:t>
             </a:r>
           </a:p>
         </p:txBody>
@@ -32055,12 +32055,12 @@
           <p:nvPr/>
         </p:nvGraphicFramePr>
         <p:xfrm>
-          <a:off x="6935248" y="3072384"/>
-          <a:ext cx="475488" cy="475488"/>
+          <a:off x="6916960" y="3035808"/>
+          <a:ext cx="566928" cy="566928"/>
         </p:xfrm>
         <a:graphic>
           <a:graphicData uri="http://schemas.openxmlformats.org/presentationml/2006/ole">
-            <p:oleObj showAsIcon="1" r:id="rId4" imgW="475488" imgH="475488" progId="Package">
+            <p:oleObj showAsIcon="1" r:id="rId4" imgW="965200" imgH="609600" progId="Excel.Sheet.12">
               <p:embed/>
               <p:pic>
                 <p:nvPicPr>
@@ -32076,8 +32076,8 @@
                 </p:blipFill>
                 <p:spPr>
                   <a:xfrm>
-                    <a:off x="6935248" y="3072384"/>
-                    <a:ext cx="475488" cy="475488"/>
+                    <a:off x="6916960" y="3035808"/>
+                    <a:ext cx="566928" cy="566928"/>
                   </a:xfrm>
                   <a:prstGeom prst="rect">
                     <a:avLst/>
@@ -32096,8 +32096,8 @@
         </p:nvSpPr>
         <p:spPr>
           <a:xfrm>
-            <a:off x="7575328" y="3017520"/>
-            <a:ext cx="3637958" cy="822960"/>
+            <a:off x="7611904" y="2999232"/>
+            <a:ext cx="3601382" cy="859536"/>
           </a:xfrm>
           <a:prstGeom prst="rect">
             <a:avLst/>
@@ -32166,7 +32166,7 @@
                 </a:solidFill>
                 <a:latin typeface="Calibri"/>
               </a:rPr>
-              <a:t>us_unemployment_monthly.csv</a:t>
+              <a:t>us_unemployment_monthly.xlsx</a:t>
             </a:r>
           </a:p>
         </p:txBody>
@@ -32299,7 +32299,7 @@
                 </a:solidFill>
                 <a:latin typeface="Calibri"/>
               </a:rPr>
-              <a:t>They also ship in the repository, at docs/data/. </a:t>
+              <a:t>They also ship in the repository, at docs/data/, as CSV. </a:t>
             </a:r>
             <a:r>
               <a:rPr sz="1050" b="0" i="0">

--- a/docs/MAYA-Model-and-Feature-Engineering.pptx
+++ b/docs/MAYA-Model-and-Feature-Engineering.pptx
@@ -24810,7 +24810,7 @@
                 </a:solidFill>
                 <a:latin typeface="Calibri"/>
               </a:rPr>
-              <a:t>Both files were pulled from FRED on 4 September 2026 and ship beside the deck in docs/data/ — </a:t>
+              <a:t>Both files were pulled from FRED on 4 September 2026 and ship beside the deck in docs/examples/ — </a:t>
             </a:r>
             <a:r>
               <a:rPr sz="1050" b="1" i="0">
@@ -32299,7 +32299,7 @@
                 </a:solidFill>
                 <a:latin typeface="Calibri"/>
               </a:rPr>
-              <a:t>They also ship in the repository, at docs/data/, as CSV. </a:t>
+              <a:t>They also ship in the repository, at docs/examples/, as CSV. </a:t>
             </a:r>
             <a:r>
               <a:rPr sz="1050" b="0" i="0">

--- a/docs/MAYA-Model-and-Feature-Engineering.pptx
+++ b/docs/MAYA-Model-and-Feature-Engineering.pptx
@@ -7390,7 +7390,7 @@
         </p:nvSpPr>
         <p:spPr>
           <a:xfrm>
-            <a:off x="7159569" y="3474720"/>
+            <a:off x="7159569" y="3732961"/>
             <a:ext cx="4254886" cy="1188720"/>
           </a:xfrm>
           <a:prstGeom prst="rect">
@@ -7434,7 +7434,7 @@
         </p:nvSpPr>
         <p:spPr>
           <a:xfrm>
-            <a:off x="7159569" y="3474720"/>
+            <a:off x="7159569" y="3732961"/>
             <a:ext cx="41148" cy="1188720"/>
           </a:xfrm>
           <a:prstGeom prst="rect">
@@ -7478,7 +7478,7 @@
         </p:nvSpPr>
         <p:spPr>
           <a:xfrm>
-            <a:off x="7397313" y="3593591"/>
+            <a:off x="7397313" y="3851833"/>
             <a:ext cx="3797686" cy="969264"/>
           </a:xfrm>
           <a:prstGeom prst="rect">
@@ -18086,7 +18086,7 @@
         </p:nvSpPr>
         <p:spPr>
           <a:xfrm>
-            <a:off x="6946824" y="3566160"/>
+            <a:off x="6946824" y="4036390"/>
             <a:ext cx="4467630" cy="1005840"/>
           </a:xfrm>
           <a:prstGeom prst="rect">
